--- a/Thesis/AStar, DStarLite.pptx
+++ b/Thesis/AStar, DStarLite.pptx
@@ -5,7 +5,7 @@
     <p:sldMasterId id="2147483672" r:id="rId1"/>
   </p:sldMasterIdLst>
   <p:notesMasterIdLst>
-    <p:notesMasterId r:id="rId19"/>
+    <p:notesMasterId r:id="rId20"/>
   </p:notesMasterIdLst>
   <p:sldIdLst>
     <p:sldId id="267" r:id="rId2"/>
@@ -25,6 +25,7 @@
     <p:sldId id="264" r:id="rId16"/>
     <p:sldId id="257" r:id="rId17"/>
     <p:sldId id="266" r:id="rId18"/>
+    <p:sldId id="280" r:id="rId19"/>
   </p:sldIdLst>
   <p:sldSz cx="12192000" cy="6858000"/>
   <p:notesSz cx="6858000" cy="9144000"/>
@@ -213,7 +214,7 @@
           <a:p>
             <a:fld id="{2B17B53A-5F02-46AC-A602-E11F15763443}" type="datetimeFigureOut">
               <a:rPr lang="el-GR" smtClean="0"/>
-              <a:t>20/2/2026</a:t>
+              <a:t>13/3/2026</a:t>
             </a:fld>
             <a:endParaRPr lang="el-GR"/>
           </a:p>
@@ -1511,7 +1512,7 @@
           <a:p>
             <a:fld id="{846CE7D5-CF57-46EF-B807-FDD0502418D4}" type="datetimeFigureOut">
               <a:rPr lang="en-US" smtClean="0"/>
-              <a:t>2/20/2026</a:t>
+              <a:t>3/13/2026</a:t>
             </a:fld>
             <a:endParaRPr lang="en-US"/>
           </a:p>
@@ -1681,7 +1682,7 @@
           <a:p>
             <a:fld id="{846CE7D5-CF57-46EF-B807-FDD0502418D4}" type="datetimeFigureOut">
               <a:rPr lang="en-US" smtClean="0"/>
-              <a:t>2/20/2026</a:t>
+              <a:t>3/13/2026</a:t>
             </a:fld>
             <a:endParaRPr lang="en-US"/>
           </a:p>
@@ -1861,7 +1862,7 @@
           <a:p>
             <a:fld id="{846CE7D5-CF57-46EF-B807-FDD0502418D4}" type="datetimeFigureOut">
               <a:rPr lang="en-US" smtClean="0"/>
-              <a:t>2/20/2026</a:t>
+              <a:t>3/13/2026</a:t>
             </a:fld>
             <a:endParaRPr lang="en-US"/>
           </a:p>
@@ -2031,7 +2032,7 @@
           <a:p>
             <a:fld id="{846CE7D5-CF57-46EF-B807-FDD0502418D4}" type="datetimeFigureOut">
               <a:rPr lang="en-US" smtClean="0"/>
-              <a:t>2/20/2026</a:t>
+              <a:t>3/13/2026</a:t>
             </a:fld>
             <a:endParaRPr lang="en-US"/>
           </a:p>
@@ -2277,7 +2278,7 @@
           <a:p>
             <a:fld id="{846CE7D5-CF57-46EF-B807-FDD0502418D4}" type="datetimeFigureOut">
               <a:rPr lang="en-US" smtClean="0"/>
-              <a:t>2/20/2026</a:t>
+              <a:t>3/13/2026</a:t>
             </a:fld>
             <a:endParaRPr lang="en-US"/>
           </a:p>
@@ -2509,7 +2510,7 @@
           <a:p>
             <a:fld id="{846CE7D5-CF57-46EF-B807-FDD0502418D4}" type="datetimeFigureOut">
               <a:rPr lang="en-US" smtClean="0"/>
-              <a:t>2/20/2026</a:t>
+              <a:t>3/13/2026</a:t>
             </a:fld>
             <a:endParaRPr lang="en-US"/>
           </a:p>
@@ -2876,7 +2877,7 @@
           <a:p>
             <a:fld id="{846CE7D5-CF57-46EF-B807-FDD0502418D4}" type="datetimeFigureOut">
               <a:rPr lang="en-US" smtClean="0"/>
-              <a:t>2/20/2026</a:t>
+              <a:t>3/13/2026</a:t>
             </a:fld>
             <a:endParaRPr lang="en-US"/>
           </a:p>
@@ -2994,7 +2995,7 @@
           <a:p>
             <a:fld id="{846CE7D5-CF57-46EF-B807-FDD0502418D4}" type="datetimeFigureOut">
               <a:rPr lang="en-US" smtClean="0"/>
-              <a:t>2/20/2026</a:t>
+              <a:t>3/13/2026</a:t>
             </a:fld>
             <a:endParaRPr lang="en-US"/>
           </a:p>
@@ -3089,7 +3090,7 @@
           <a:p>
             <a:fld id="{846CE7D5-CF57-46EF-B807-FDD0502418D4}" type="datetimeFigureOut">
               <a:rPr lang="en-US" smtClean="0"/>
-              <a:t>2/20/2026</a:t>
+              <a:t>3/13/2026</a:t>
             </a:fld>
             <a:endParaRPr lang="en-US"/>
           </a:p>
@@ -3366,7 +3367,7 @@
           <a:p>
             <a:fld id="{846CE7D5-CF57-46EF-B807-FDD0502418D4}" type="datetimeFigureOut">
               <a:rPr lang="en-US" smtClean="0"/>
-              <a:t>2/20/2026</a:t>
+              <a:t>3/13/2026</a:t>
             </a:fld>
             <a:endParaRPr lang="en-US"/>
           </a:p>
@@ -3623,7 +3624,7 @@
           <a:p>
             <a:fld id="{846CE7D5-CF57-46EF-B807-FDD0502418D4}" type="datetimeFigureOut">
               <a:rPr lang="en-US" smtClean="0"/>
-              <a:t>2/20/2026</a:t>
+              <a:t>3/13/2026</a:t>
             </a:fld>
             <a:endParaRPr lang="en-US"/>
           </a:p>
@@ -3836,7 +3837,7 @@
           <a:p>
             <a:fld id="{846CE7D5-CF57-46EF-B807-FDD0502418D4}" type="datetimeFigureOut">
               <a:rPr lang="en-US" smtClean="0"/>
-              <a:t>2/20/2026</a:t>
+              <a:t>3/13/2026</a:t>
             </a:fld>
             <a:endParaRPr lang="en-US"/>
           </a:p>
@@ -4298,7 +4299,7 @@
           <p:nvPr/>
         </p:nvPicPr>
         <p:blipFill>
-          <a:blip r:embed="rId2">
+          <a:blip r:embed="rId4">
             <a:extLst>
               <a:ext uri="{28A0092B-C50C-407E-A947-70E740481C1C}">
                 <a14:useLocalDpi xmlns:a14="http://schemas.microsoft.com/office/drawing/2010/main" val="0"/>
@@ -4312,7 +4313,7 @@
         </p:blipFill>
         <p:spPr bwMode="auto">
           <a:xfrm>
-            <a:off x="24003" y="3050381"/>
+            <a:off x="838200" y="2753597"/>
             <a:ext cx="1466850" cy="1000125"/>
           </a:xfrm>
           <a:prstGeom prst="rect">
@@ -4332,104 +4333,10 @@
       </p:pic>
       <p:pic>
         <p:nvPicPr>
-          <p:cNvPr id="1025" name="Picture 1">
+          <p:cNvPr id="6" name="Picture 1">
             <a:extLst>
               <a:ext uri="{FF2B5EF4-FFF2-40B4-BE49-F238E27FC236}">
-                <a16:creationId xmlns:a16="http://schemas.microsoft.com/office/drawing/2014/main" id="{2928D72D-6323-72B1-5A47-F904EE981FD9}"/>
-              </a:ext>
-            </a:extLst>
-          </p:cNvPr>
-          <p:cNvPicPr>
-            <a:picLocks noChangeAspect="1" noChangeArrowheads="1"/>
-          </p:cNvPicPr>
-          <p:nvPr/>
-        </p:nvPicPr>
-        <p:blipFill>
-          <a:blip r:embed="rId3">
-            <a:extLst>
-              <a:ext uri="{28A0092B-C50C-407E-A947-70E740481C1C}">
-                <a14:useLocalDpi xmlns:a14="http://schemas.microsoft.com/office/drawing/2010/main" val="0"/>
-              </a:ext>
-            </a:extLst>
-          </a:blip>
-          <a:srcRect/>
-          <a:stretch>
-            <a:fillRect/>
-          </a:stretch>
-        </p:blipFill>
-        <p:spPr bwMode="auto">
-          <a:xfrm>
-            <a:off x="1709297" y="2040731"/>
-            <a:ext cx="1466850" cy="1009650"/>
-          </a:xfrm>
-          <a:prstGeom prst="rect">
-            <a:avLst/>
-          </a:prstGeom>
-          <a:noFill/>
-          <a:extLst>
-            <a:ext uri="{909E8E84-426E-40DD-AFC4-6F175D3DCCD1}">
-              <a14:hiddenFill xmlns:a14="http://schemas.microsoft.com/office/drawing/2010/main">
-                <a:solidFill>
-                  <a:srgbClr val="FFFFFF"/>
-                </a:solidFill>
-              </a14:hiddenFill>
-            </a:ext>
-          </a:extLst>
-        </p:spPr>
-      </p:pic>
-      <p:pic>
-        <p:nvPicPr>
-          <p:cNvPr id="1026" name="Picture 2">
-            <a:extLst>
-              <a:ext uri="{FF2B5EF4-FFF2-40B4-BE49-F238E27FC236}">
-                <a16:creationId xmlns:a16="http://schemas.microsoft.com/office/drawing/2014/main" id="{AE57550F-E39E-DB70-9C29-0FE906284573}"/>
-              </a:ext>
-            </a:extLst>
-          </p:cNvPr>
-          <p:cNvPicPr>
-            <a:picLocks noChangeAspect="1" noChangeArrowheads="1"/>
-          </p:cNvPicPr>
-          <p:nvPr/>
-        </p:nvPicPr>
-        <p:blipFill>
-          <a:blip r:embed="rId4">
-            <a:extLst>
-              <a:ext uri="{28A0092B-C50C-407E-A947-70E740481C1C}">
-                <a14:useLocalDpi xmlns:a14="http://schemas.microsoft.com/office/drawing/2010/main" val="0"/>
-              </a:ext>
-            </a:extLst>
-          </a:blip>
-          <a:srcRect/>
-          <a:stretch>
-            <a:fillRect/>
-          </a:stretch>
-        </p:blipFill>
-        <p:spPr bwMode="auto">
-          <a:xfrm>
-            <a:off x="1709297" y="4050506"/>
-            <a:ext cx="1466850" cy="1000125"/>
-          </a:xfrm>
-          <a:prstGeom prst="rect">
-            <a:avLst/>
-          </a:prstGeom>
-          <a:noFill/>
-          <a:extLst>
-            <a:ext uri="{909E8E84-426E-40DD-AFC4-6F175D3DCCD1}">
-              <a14:hiddenFill xmlns:a14="http://schemas.microsoft.com/office/drawing/2010/main">
-                <a:solidFill>
-                  <a:srgbClr val="FFFFFF"/>
-                </a:solidFill>
-              </a14:hiddenFill>
-            </a:ext>
-          </a:extLst>
-        </p:spPr>
-      </p:pic>
-      <p:pic>
-        <p:nvPicPr>
-          <p:cNvPr id="3" name="Picture 3">
-            <a:extLst>
-              <a:ext uri="{FF2B5EF4-FFF2-40B4-BE49-F238E27FC236}">
-                <a16:creationId xmlns:a16="http://schemas.microsoft.com/office/drawing/2014/main" id="{213C22DB-4B12-7622-8D21-142653F92374}"/>
+                <a16:creationId xmlns:a16="http://schemas.microsoft.com/office/drawing/2014/main" id="{305B070F-7335-2336-A437-594B86DED329}"/>
               </a:ext>
             </a:extLst>
           </p:cNvPr>
@@ -4453,8 +4360,8 @@
         </p:blipFill>
         <p:spPr bwMode="auto">
           <a:xfrm>
-            <a:off x="3624577" y="2040731"/>
-            <a:ext cx="1466850" cy="1009650"/>
+            <a:off x="2613500" y="2744072"/>
+            <a:ext cx="1457325" cy="1009650"/>
           </a:xfrm>
           <a:prstGeom prst="rect">
             <a:avLst/>
@@ -4473,10 +4380,10 @@
       </p:pic>
       <p:pic>
         <p:nvPicPr>
-          <p:cNvPr id="5" name="Picture 4">
+          <p:cNvPr id="7" name="Picture 2">
             <a:extLst>
               <a:ext uri="{FF2B5EF4-FFF2-40B4-BE49-F238E27FC236}">
-                <a16:creationId xmlns:a16="http://schemas.microsoft.com/office/drawing/2014/main" id="{0044497D-50DF-87B0-22D8-52E46C790DAB}"/>
+                <a16:creationId xmlns:a16="http://schemas.microsoft.com/office/drawing/2014/main" id="{A21EB7BE-164A-96BE-2FBA-187F6221E7FD}"/>
               </a:ext>
             </a:extLst>
           </p:cNvPr>
@@ -4500,149 +4407,8 @@
         </p:blipFill>
         <p:spPr bwMode="auto">
           <a:xfrm>
-            <a:off x="3624577" y="4050505"/>
-            <a:ext cx="1466850" cy="1000125"/>
-          </a:xfrm>
-          <a:prstGeom prst="rect">
-            <a:avLst/>
-          </a:prstGeom>
-          <a:noFill/>
-          <a:extLst>
-            <a:ext uri="{909E8E84-426E-40DD-AFC4-6F175D3DCCD1}">
-              <a14:hiddenFill xmlns:a14="http://schemas.microsoft.com/office/drawing/2010/main">
-                <a:solidFill>
-                  <a:srgbClr val="FFFFFF"/>
-                </a:solidFill>
-              </a14:hiddenFill>
-            </a:ext>
-          </a:extLst>
-        </p:spPr>
-      </p:pic>
-      <p:pic>
-        <p:nvPicPr>
-          <p:cNvPr id="6" name="Picture 5">
-            <a:extLst>
-              <a:ext uri="{FF2B5EF4-FFF2-40B4-BE49-F238E27FC236}">
-                <a16:creationId xmlns:a16="http://schemas.microsoft.com/office/drawing/2014/main" id="{BE788267-F28E-B9A6-FCF1-606ADAB00FF1}"/>
-              </a:ext>
-            </a:extLst>
-          </p:cNvPr>
-          <p:cNvPicPr>
-            <a:picLocks noChangeAspect="1" noChangeArrowheads="1"/>
-          </p:cNvPicPr>
-          <p:nvPr/>
-        </p:nvPicPr>
-        <p:blipFill>
-          <a:blip r:embed="rId7">
-            <a:extLst>
-              <a:ext uri="{28A0092B-C50C-407E-A947-70E740481C1C}">
-                <a14:useLocalDpi xmlns:a14="http://schemas.microsoft.com/office/drawing/2010/main" val="0"/>
-              </a:ext>
-            </a:extLst>
-          </a:blip>
-          <a:srcRect/>
-          <a:stretch>
-            <a:fillRect/>
-          </a:stretch>
-        </p:blipFill>
-        <p:spPr bwMode="auto">
-          <a:xfrm>
-            <a:off x="5309872" y="3040856"/>
-            <a:ext cx="2362200" cy="1009650"/>
-          </a:xfrm>
-          <a:prstGeom prst="rect">
-            <a:avLst/>
-          </a:prstGeom>
-          <a:noFill/>
-          <a:extLst>
-            <a:ext uri="{909E8E84-426E-40DD-AFC4-6F175D3DCCD1}">
-              <a14:hiddenFill xmlns:a14="http://schemas.microsoft.com/office/drawing/2010/main">
-                <a:solidFill>
-                  <a:srgbClr val="FFFFFF"/>
-                </a:solidFill>
-              </a14:hiddenFill>
-            </a:ext>
-          </a:extLst>
-        </p:spPr>
-      </p:pic>
-      <p:pic>
-        <p:nvPicPr>
-          <p:cNvPr id="7" name="Picture 6">
-            <a:extLst>
-              <a:ext uri="{FF2B5EF4-FFF2-40B4-BE49-F238E27FC236}">
-                <a16:creationId xmlns:a16="http://schemas.microsoft.com/office/drawing/2014/main" id="{AA55EE62-217C-C89A-71DC-E4BEBB6648C8}"/>
-              </a:ext>
-            </a:extLst>
-          </p:cNvPr>
-          <p:cNvPicPr>
-            <a:picLocks noChangeAspect="1" noChangeArrowheads="1"/>
-          </p:cNvPicPr>
-          <p:nvPr/>
-        </p:nvPicPr>
-        <p:blipFill>
-          <a:blip r:embed="rId8">
-            <a:extLst>
-              <a:ext uri="{28A0092B-C50C-407E-A947-70E740481C1C}">
-                <a14:useLocalDpi xmlns:a14="http://schemas.microsoft.com/office/drawing/2010/main" val="0"/>
-              </a:ext>
-            </a:extLst>
-          </a:blip>
-          <a:srcRect/>
-          <a:stretch>
-            <a:fillRect/>
-          </a:stretch>
-        </p:blipFill>
-        <p:spPr bwMode="auto">
-          <a:xfrm>
-            <a:off x="8005509" y="3050381"/>
+            <a:off x="4379275" y="2744072"/>
             <a:ext cx="1466850" cy="1009650"/>
-          </a:xfrm>
-          <a:prstGeom prst="rect">
-            <a:avLst/>
-          </a:prstGeom>
-          <a:noFill/>
-          <a:extLst>
-            <a:ext uri="{909E8E84-426E-40DD-AFC4-6F175D3DCCD1}">
-              <a14:hiddenFill xmlns:a14="http://schemas.microsoft.com/office/drawing/2010/main">
-                <a:solidFill>
-                  <a:srgbClr val="FFFFFF"/>
-                </a:solidFill>
-              </a14:hiddenFill>
-            </a:ext>
-          </a:extLst>
-        </p:spPr>
-      </p:pic>
-      <p:pic>
-        <p:nvPicPr>
-          <p:cNvPr id="10" name="Picture 7">
-            <a:extLst>
-              <a:ext uri="{FF2B5EF4-FFF2-40B4-BE49-F238E27FC236}">
-                <a16:creationId xmlns:a16="http://schemas.microsoft.com/office/drawing/2014/main" id="{28680F96-48A5-64D9-7B1B-ACE4831810E4}"/>
-              </a:ext>
-            </a:extLst>
-          </p:cNvPr>
-          <p:cNvPicPr>
-            <a:picLocks noChangeAspect="1" noChangeArrowheads="1"/>
-          </p:cNvPicPr>
-          <p:nvPr/>
-        </p:nvPicPr>
-        <p:blipFill>
-          <a:blip r:embed="rId9">
-            <a:extLst>
-              <a:ext uri="{28A0092B-C50C-407E-A947-70E740481C1C}">
-                <a14:useLocalDpi xmlns:a14="http://schemas.microsoft.com/office/drawing/2010/main" val="0"/>
-              </a:ext>
-            </a:extLst>
-          </a:blip>
-          <a:srcRect/>
-          <a:stretch>
-            <a:fillRect/>
-          </a:stretch>
-        </p:blipFill>
-        <p:spPr bwMode="auto">
-          <a:xfrm>
-            <a:off x="9805797" y="3040856"/>
-            <a:ext cx="2362200" cy="1009650"/>
           </a:xfrm>
           <a:prstGeom prst="rect">
             <a:avLst/>
@@ -4661,191 +4427,23 @@
       </p:pic>
       <p:cxnSp>
         <p:nvCxnSpPr>
-          <p:cNvPr id="12" name="Γραμμή σύνδεσης: Γωνιώδης 11">
+          <p:cNvPr id="9" name="Ευθύγραμμο βέλος σύνδεσης 8">
             <a:extLst>
               <a:ext uri="{FF2B5EF4-FFF2-40B4-BE49-F238E27FC236}">
-                <a16:creationId xmlns:a16="http://schemas.microsoft.com/office/drawing/2014/main" id="{64455EB8-A91B-73AA-EE53-5EEFD6D50D97}"/>
+                <a16:creationId xmlns:a16="http://schemas.microsoft.com/office/drawing/2014/main" id="{61136C36-1B27-8B4D-034F-942F83E4DC72}"/>
               </a:ext>
             </a:extLst>
           </p:cNvPr>
           <p:cNvCxnSpPr>
             <a:stCxn id="1027" idx="3"/>
-            <a:endCxn id="1025" idx="1"/>
-          </p:cNvCxnSpPr>
-          <p:nvPr/>
-        </p:nvCxnSpPr>
-        <p:spPr>
-          <a:xfrm flipV="1">
-            <a:off x="1490853" y="2545556"/>
-            <a:ext cx="218444" cy="1004888"/>
-          </a:xfrm>
-          <a:prstGeom prst="bentConnector3">
-            <a:avLst/>
-          </a:prstGeom>
-          <a:ln>
-            <a:tailEnd type="triangle"/>
-          </a:ln>
-        </p:spPr>
-        <p:style>
-          <a:lnRef idx="2">
-            <a:schemeClr val="dk1"/>
-          </a:lnRef>
-          <a:fillRef idx="0">
-            <a:schemeClr val="dk1"/>
-          </a:fillRef>
-          <a:effectRef idx="1">
-            <a:schemeClr val="dk1"/>
-          </a:effectRef>
-          <a:fontRef idx="minor">
-            <a:schemeClr val="tx1"/>
-          </a:fontRef>
-        </p:style>
-      </p:cxnSp>
-      <p:cxnSp>
-        <p:nvCxnSpPr>
-          <p:cNvPr id="15" name="Γραμμή σύνδεσης: Γωνιώδης 14">
-            <a:extLst>
-              <a:ext uri="{FF2B5EF4-FFF2-40B4-BE49-F238E27FC236}">
-                <a16:creationId xmlns:a16="http://schemas.microsoft.com/office/drawing/2014/main" id="{E5E3B61A-A453-EAB0-EB38-72C2A443B69F}"/>
-              </a:ext>
-            </a:extLst>
-          </p:cNvPr>
-          <p:cNvCxnSpPr>
-            <a:stCxn id="1027" idx="3"/>
-            <a:endCxn id="1026" idx="1"/>
-          </p:cNvCxnSpPr>
-          <p:nvPr/>
-        </p:nvCxnSpPr>
-        <p:spPr>
-          <a:xfrm>
-            <a:off x="1490853" y="3550444"/>
-            <a:ext cx="218444" cy="1000125"/>
-          </a:xfrm>
-          <a:prstGeom prst="bentConnector3">
-            <a:avLst/>
-          </a:prstGeom>
-          <a:ln>
-            <a:tailEnd type="triangle"/>
-          </a:ln>
-        </p:spPr>
-        <p:style>
-          <a:lnRef idx="2">
-            <a:schemeClr val="dk1"/>
-          </a:lnRef>
-          <a:fillRef idx="0">
-            <a:schemeClr val="dk1"/>
-          </a:fillRef>
-          <a:effectRef idx="1">
-            <a:schemeClr val="dk1"/>
-          </a:effectRef>
-          <a:fontRef idx="minor">
-            <a:schemeClr val="tx1"/>
-          </a:fontRef>
-        </p:style>
-      </p:cxnSp>
-      <p:cxnSp>
-        <p:nvCxnSpPr>
-          <p:cNvPr id="18" name="Γραμμή σύνδεσης: Γωνιώδης 17">
-            <a:extLst>
-              <a:ext uri="{FF2B5EF4-FFF2-40B4-BE49-F238E27FC236}">
-                <a16:creationId xmlns:a16="http://schemas.microsoft.com/office/drawing/2014/main" id="{1DE3E488-18FF-375D-94A1-D86EE4B6BA0E}"/>
-              </a:ext>
-            </a:extLst>
-          </p:cNvPr>
-          <p:cNvCxnSpPr>
-            <a:stCxn id="3" idx="3"/>
-            <a:endCxn id="6" idx="1"/>
-          </p:cNvCxnSpPr>
-          <p:nvPr/>
-        </p:nvCxnSpPr>
-        <p:spPr>
-          <a:xfrm>
-            <a:off x="5091427" y="2545556"/>
-            <a:ext cx="218445" cy="1000125"/>
-          </a:xfrm>
-          <a:prstGeom prst="bentConnector3">
-            <a:avLst/>
-          </a:prstGeom>
-          <a:ln>
-            <a:tailEnd type="triangle"/>
-          </a:ln>
-        </p:spPr>
-        <p:style>
-          <a:lnRef idx="2">
-            <a:schemeClr val="dk1"/>
-          </a:lnRef>
-          <a:fillRef idx="0">
-            <a:schemeClr val="dk1"/>
-          </a:fillRef>
-          <a:effectRef idx="1">
-            <a:schemeClr val="dk1"/>
-          </a:effectRef>
-          <a:fontRef idx="minor">
-            <a:schemeClr val="tx1"/>
-          </a:fontRef>
-        </p:style>
-      </p:cxnSp>
-      <p:cxnSp>
-        <p:nvCxnSpPr>
-          <p:cNvPr id="22" name="Γραμμή σύνδεσης: Γωνιώδης 21">
-            <a:extLst>
-              <a:ext uri="{FF2B5EF4-FFF2-40B4-BE49-F238E27FC236}">
-                <a16:creationId xmlns:a16="http://schemas.microsoft.com/office/drawing/2014/main" id="{5991BB37-101D-AFD6-8465-0991835867C6}"/>
-              </a:ext>
-            </a:extLst>
-          </p:cNvPr>
-          <p:cNvCxnSpPr>
-            <a:stCxn id="5" idx="3"/>
             <a:endCxn id="6" idx="1"/>
           </p:cNvCxnSpPr>
           <p:nvPr/>
         </p:nvCxnSpPr>
         <p:spPr>
           <a:xfrm flipV="1">
-            <a:off x="5091427" y="3545681"/>
-            <a:ext cx="218445" cy="1004887"/>
-          </a:xfrm>
-          <a:prstGeom prst="bentConnector3">
-            <a:avLst/>
-          </a:prstGeom>
-          <a:ln>
-            <a:tailEnd type="triangle"/>
-          </a:ln>
-        </p:spPr>
-        <p:style>
-          <a:lnRef idx="2">
-            <a:schemeClr val="dk1"/>
-          </a:lnRef>
-          <a:fillRef idx="0">
-            <a:schemeClr val="dk1"/>
-          </a:fillRef>
-          <a:effectRef idx="1">
-            <a:schemeClr val="dk1"/>
-          </a:effectRef>
-          <a:fontRef idx="minor">
-            <a:schemeClr val="tx1"/>
-          </a:fontRef>
-        </p:style>
-      </p:cxnSp>
-      <p:cxnSp>
-        <p:nvCxnSpPr>
-          <p:cNvPr id="26" name="Ευθύγραμμο βέλος σύνδεσης 25">
-            <a:extLst>
-              <a:ext uri="{FF2B5EF4-FFF2-40B4-BE49-F238E27FC236}">
-                <a16:creationId xmlns:a16="http://schemas.microsoft.com/office/drawing/2014/main" id="{F8232B70-8CCC-5572-C66D-D7228D3E36F6}"/>
-              </a:ext>
-            </a:extLst>
-          </p:cNvPr>
-          <p:cNvCxnSpPr>
-            <a:stCxn id="1025" idx="3"/>
-            <a:endCxn id="3" idx="1"/>
-          </p:cNvCxnSpPr>
-          <p:nvPr/>
-        </p:nvCxnSpPr>
-        <p:spPr>
-          <a:xfrm>
-            <a:off x="3176147" y="2545556"/>
-            <a:ext cx="448430" cy="0"/>
+            <a:off x="2305050" y="3248897"/>
+            <a:ext cx="308450" cy="4763"/>
           </a:xfrm>
           <a:prstGeom prst="straightConnector1">
             <a:avLst/>
@@ -4871,23 +4469,23 @@
       </p:cxnSp>
       <p:cxnSp>
         <p:nvCxnSpPr>
-          <p:cNvPr id="29" name="Ευθύγραμμο βέλος σύνδεσης 28">
+          <p:cNvPr id="11" name="Ευθύγραμμο βέλος σύνδεσης 10">
             <a:extLst>
               <a:ext uri="{FF2B5EF4-FFF2-40B4-BE49-F238E27FC236}">
-                <a16:creationId xmlns:a16="http://schemas.microsoft.com/office/drawing/2014/main" id="{BB8F6945-1A7F-74AE-0FE1-96F323B95536}"/>
+                <a16:creationId xmlns:a16="http://schemas.microsoft.com/office/drawing/2014/main" id="{73C832A5-59F1-02C0-EC04-836C2FBCD4C1}"/>
               </a:ext>
             </a:extLst>
           </p:cNvPr>
           <p:cNvCxnSpPr>
-            <a:stCxn id="1026" idx="3"/>
-            <a:endCxn id="5" idx="1"/>
+            <a:stCxn id="6" idx="3"/>
+            <a:endCxn id="7" idx="1"/>
           </p:cNvCxnSpPr>
           <p:nvPr/>
         </p:nvCxnSpPr>
         <p:spPr>
-          <a:xfrm flipV="1">
-            <a:off x="3176147" y="4550568"/>
-            <a:ext cx="448430" cy="1"/>
+          <a:xfrm>
+            <a:off x="4070825" y="3248897"/>
+            <a:ext cx="308450" cy="0"/>
           </a:xfrm>
           <a:prstGeom prst="straightConnector1">
             <a:avLst/>
@@ -4911,25 +4509,72 @@
           </a:fontRef>
         </p:style>
       </p:cxnSp>
+      <p:pic>
+        <p:nvPicPr>
+          <p:cNvPr id="13" name="Picture 5">
+            <a:extLst>
+              <a:ext uri="{FF2B5EF4-FFF2-40B4-BE49-F238E27FC236}">
+                <a16:creationId xmlns:a16="http://schemas.microsoft.com/office/drawing/2014/main" id="{E53F5E9E-0479-B9A2-F193-B53516C55937}"/>
+              </a:ext>
+            </a:extLst>
+          </p:cNvPr>
+          <p:cNvPicPr>
+            <a:picLocks noChangeAspect="1" noChangeArrowheads="1"/>
+          </p:cNvPicPr>
+          <p:nvPr/>
+        </p:nvPicPr>
+        <p:blipFill>
+          <a:blip r:embed="rId7">
+            <a:extLst>
+              <a:ext uri="{28A0092B-C50C-407E-A947-70E740481C1C}">
+                <a14:useLocalDpi xmlns:a14="http://schemas.microsoft.com/office/drawing/2010/main" val="0"/>
+              </a:ext>
+            </a:extLst>
+          </a:blip>
+          <a:srcRect/>
+          <a:stretch>
+            <a:fillRect/>
+          </a:stretch>
+        </p:blipFill>
+        <p:spPr bwMode="auto">
+          <a:xfrm>
+            <a:off x="6154575" y="2744072"/>
+            <a:ext cx="2362200" cy="1009650"/>
+          </a:xfrm>
+          <a:prstGeom prst="rect">
+            <a:avLst/>
+          </a:prstGeom>
+          <a:noFill/>
+          <a:extLst>
+            <a:ext uri="{909E8E84-426E-40DD-AFC4-6F175D3DCCD1}">
+              <a14:hiddenFill xmlns:a14="http://schemas.microsoft.com/office/drawing/2010/main">
+                <a:solidFill>
+                  <a:srgbClr val="FFFFFF"/>
+                </a:solidFill>
+              </a14:hiddenFill>
+            </a:ext>
+          </a:extLst>
+        </p:spPr>
+      </p:pic>
       <p:cxnSp>
         <p:nvCxnSpPr>
-          <p:cNvPr id="31" name="Ευθύγραμμο βέλος σύνδεσης 30">
+          <p:cNvPr id="16" name="Ευθύγραμμο βέλος σύνδεσης 15">
             <a:extLst>
               <a:ext uri="{FF2B5EF4-FFF2-40B4-BE49-F238E27FC236}">
-                <a16:creationId xmlns:a16="http://schemas.microsoft.com/office/drawing/2014/main" id="{F41FD40E-2772-A4F4-6B69-99F7D12789D3}"/>
+                <a16:creationId xmlns:a16="http://schemas.microsoft.com/office/drawing/2014/main" id="{7C434BCB-3B0D-6043-9267-89776270B706}"/>
               </a:ext>
             </a:extLst>
           </p:cNvPr>
           <p:cNvCxnSpPr>
-            <a:stCxn id="6" idx="3"/>
-            <a:endCxn id="7" idx="1"/>
+            <a:stCxn id="7" idx="3"/>
+            <a:endCxn id="13" idx="1"/>
           </p:cNvCxnSpPr>
           <p:nvPr/>
         </p:nvCxnSpPr>
         <p:spPr>
           <a:xfrm>
-            <a:off x="7672072" y="3545681"/>
-            <a:ext cx="333437" cy="9525"/>
+            <a:off x="5846125" y="3248897"/>
+            <a:ext cx="308450" cy="0"/>
           </a:xfrm>
           <a:prstGeom prst="straightConnector1">
             <a:avLst/>
@@ -4953,25 +4598,236 @@
           </a:fontRef>
         </p:style>
       </p:cxnSp>
+      <p:sp>
+        <p:nvSpPr>
+          <p:cNvPr id="20" name="TextBox 19">
+            <a:extLst>
+              <a:ext uri="{FF2B5EF4-FFF2-40B4-BE49-F238E27FC236}">
+                <a16:creationId xmlns:a16="http://schemas.microsoft.com/office/drawing/2014/main" id="{613E3778-DCE4-9A56-C251-0E9B2D10C7F6}"/>
+              </a:ext>
+            </a:extLst>
+          </p:cNvPr>
+          <p:cNvSpPr txBox="1"/>
+          <p:nvPr/>
+        </p:nvSpPr>
+        <p:spPr>
+          <a:xfrm>
+            <a:off x="5995556" y="3760072"/>
+            <a:ext cx="2680238" cy="1477328"/>
+          </a:xfrm>
+          <a:prstGeom prst="rect">
+            <a:avLst/>
+          </a:prstGeom>
+        </p:spPr>
+        <p:style>
+          <a:lnRef idx="2">
+            <a:schemeClr val="dk1"/>
+          </a:lnRef>
+          <a:fillRef idx="1">
+            <a:schemeClr val="lt1"/>
+          </a:fillRef>
+          <a:effectRef idx="0">
+            <a:schemeClr val="dk1"/>
+          </a:effectRef>
+          <a:fontRef idx="minor">
+            <a:schemeClr val="dk1"/>
+          </a:fontRef>
+        </p:style>
+        <p:txBody>
+          <a:bodyPr wrap="square" rtlCol="0">
+            <a:spAutoFit/>
+          </a:bodyPr>
+          <a:lstStyle/>
+          <a:p>
+            <a:r>
+              <a:rPr lang="en-US" dirty="0">
+                <a:latin typeface="Times New Roman" panose="02020603050405020304" pitchFamily="18" charset="0"/>
+                <a:cs typeface="Times New Roman" panose="02020603050405020304" pitchFamily="18" charset="0"/>
+              </a:rPr>
+              <a:t>f  = 	g + h</a:t>
+            </a:r>
+          </a:p>
+          <a:p>
+            <a:r>
+              <a:rPr lang="en-US" dirty="0">
+                <a:latin typeface="Times New Roman" panose="02020603050405020304" pitchFamily="18" charset="0"/>
+                <a:cs typeface="Times New Roman" panose="02020603050405020304" pitchFamily="18" charset="0"/>
+              </a:rPr>
+              <a:t>g = 	cost until current 	node</a:t>
+            </a:r>
+          </a:p>
+          <a:p>
+            <a:r>
+              <a:rPr lang="en-US" dirty="0">
+                <a:latin typeface="Times New Roman" panose="02020603050405020304" pitchFamily="18" charset="0"/>
+                <a:cs typeface="Times New Roman" panose="02020603050405020304" pitchFamily="18" charset="0"/>
+              </a:rPr>
+              <a:t>h = 	heuristic cost until the 	End node</a:t>
+            </a:r>
+            <a:endParaRPr lang="el-GR" dirty="0">
+              <a:latin typeface="Times New Roman" panose="02020603050405020304" pitchFamily="18" charset="0"/>
+              <a:cs typeface="Times New Roman" panose="02020603050405020304" pitchFamily="18" charset="0"/>
+            </a:endParaRPr>
+          </a:p>
+        </p:txBody>
+      </p:sp>
       <p:cxnSp>
         <p:nvCxnSpPr>
-          <p:cNvPr id="1041" name="Ευθύγραμμο βέλος σύνδεσης 1040">
+          <p:cNvPr id="22" name="Γραμμή σύνδεσης: Γωνιώδης 21">
             <a:extLst>
               <a:ext uri="{FF2B5EF4-FFF2-40B4-BE49-F238E27FC236}">
-                <a16:creationId xmlns:a16="http://schemas.microsoft.com/office/drawing/2014/main" id="{534EE1C5-F329-9D02-0ABB-421095D96F1B}"/>
+                <a16:creationId xmlns:a16="http://schemas.microsoft.com/office/drawing/2014/main" id="{DBF5CB10-B988-8305-CAFE-C231C303BE1F}"/>
               </a:ext>
             </a:extLst>
           </p:cNvPr>
           <p:cNvCxnSpPr>
-            <a:stCxn id="7" idx="3"/>
-            <a:endCxn id="10" idx="1"/>
+            <a:stCxn id="13" idx="0"/>
+            <a:endCxn id="6" idx="0"/>
+          </p:cNvCxnSpPr>
+          <p:nvPr/>
+        </p:nvCxnSpPr>
+        <p:spPr>
+          <a:xfrm rot="16200000" flipV="1">
+            <a:off x="5338919" y="747316"/>
+            <a:ext cx="12700" cy="3993512"/>
+          </a:xfrm>
+          <a:prstGeom prst="bentConnector3">
+            <a:avLst>
+              <a:gd name="adj1" fmla="val 6754835"/>
+            </a:avLst>
+          </a:prstGeom>
+          <a:ln>
+            <a:tailEnd type="triangle"/>
+          </a:ln>
+        </p:spPr>
+        <p:style>
+          <a:lnRef idx="2">
+            <a:schemeClr val="dk1"/>
+          </a:lnRef>
+          <a:fillRef idx="0">
+            <a:schemeClr val="dk1"/>
+          </a:fillRef>
+          <a:effectRef idx="1">
+            <a:schemeClr val="dk1"/>
+          </a:effectRef>
+          <a:fontRef idx="minor">
+            <a:schemeClr val="tx1"/>
+          </a:fontRef>
+        </p:style>
+      </p:cxnSp>
+      <p:pic>
+        <p:nvPicPr>
+          <p:cNvPr id="24" name="Picture 3">
+            <a:extLst>
+              <a:ext uri="{FF2B5EF4-FFF2-40B4-BE49-F238E27FC236}">
+                <a16:creationId xmlns:a16="http://schemas.microsoft.com/office/drawing/2014/main" id="{456D1131-7B59-B6F9-5BF4-08BF4768D1AB}"/>
+              </a:ext>
+            </a:extLst>
+          </p:cNvPr>
+          <p:cNvPicPr>
+            <a:picLocks noChangeAspect="1" noChangeArrowheads="1"/>
+          </p:cNvPicPr>
+          <p:nvPr/>
+        </p:nvPicPr>
+        <p:blipFill>
+          <a:blip r:embed="rId8">
+            <a:extLst>
+              <a:ext uri="{28A0092B-C50C-407E-A947-70E740481C1C}">
+                <a14:useLocalDpi xmlns:a14="http://schemas.microsoft.com/office/drawing/2010/main" val="0"/>
+              </a:ext>
+            </a:extLst>
+          </a:blip>
+          <a:srcRect/>
+          <a:stretch>
+            <a:fillRect/>
+          </a:stretch>
+        </p:blipFill>
+        <p:spPr bwMode="auto">
+          <a:xfrm>
+            <a:off x="4611844" y="1405015"/>
+            <a:ext cx="1466850" cy="1000125"/>
+          </a:xfrm>
+          <a:prstGeom prst="rect">
+            <a:avLst/>
+          </a:prstGeom>
+          <a:noFill/>
+          <a:extLst>
+            <a:ext uri="{909E8E84-426E-40DD-AFC4-6F175D3DCCD1}">
+              <a14:hiddenFill xmlns:a14="http://schemas.microsoft.com/office/drawing/2010/main">
+                <a:solidFill>
+                  <a:srgbClr val="FFFFFF"/>
+                </a:solidFill>
+              </a14:hiddenFill>
+            </a:ext>
+          </a:extLst>
+        </p:spPr>
+      </p:pic>
+      <p:pic>
+        <p:nvPicPr>
+          <p:cNvPr id="25" name="Picture 7">
+            <a:extLst>
+              <a:ext uri="{FF2B5EF4-FFF2-40B4-BE49-F238E27FC236}">
+                <a16:creationId xmlns:a16="http://schemas.microsoft.com/office/drawing/2014/main" id="{A97915D2-FF55-67C2-69C0-48EF59816481}"/>
+              </a:ext>
+            </a:extLst>
+          </p:cNvPr>
+          <p:cNvPicPr>
+            <a:picLocks noChangeAspect="1" noChangeArrowheads="1"/>
+          </p:cNvPicPr>
+          <p:nvPr/>
+        </p:nvPicPr>
+        <p:blipFill>
+          <a:blip r:embed="rId9">
+            <a:extLst>
+              <a:ext uri="{28A0092B-C50C-407E-A947-70E740481C1C}">
+                <a14:useLocalDpi xmlns:a14="http://schemas.microsoft.com/office/drawing/2010/main" val="0"/>
+              </a:ext>
+            </a:extLst>
+          </a:blip>
+          <a:srcRect/>
+          <a:stretch>
+            <a:fillRect/>
+          </a:stretch>
+        </p:blipFill>
+        <p:spPr bwMode="auto">
+          <a:xfrm>
+            <a:off x="8825225" y="2737722"/>
+            <a:ext cx="2362200" cy="1009650"/>
+          </a:xfrm>
+          <a:prstGeom prst="rect">
+            <a:avLst/>
+          </a:prstGeom>
+          <a:noFill/>
+          <a:extLst>
+            <a:ext uri="{909E8E84-426E-40DD-AFC4-6F175D3DCCD1}">
+              <a14:hiddenFill xmlns:a14="http://schemas.microsoft.com/office/drawing/2010/main">
+                <a:solidFill>
+                  <a:srgbClr val="FFFFFF"/>
+                </a:solidFill>
+              </a14:hiddenFill>
+            </a:ext>
+          </a:extLst>
+        </p:spPr>
+      </p:pic>
+      <p:cxnSp>
+        <p:nvCxnSpPr>
+          <p:cNvPr id="28" name="Ευθύγραμμο βέλος σύνδεσης 27">
+            <a:extLst>
+              <a:ext uri="{FF2B5EF4-FFF2-40B4-BE49-F238E27FC236}">
+                <a16:creationId xmlns:a16="http://schemas.microsoft.com/office/drawing/2014/main" id="{C3E971AB-C4C2-560C-A7F2-46FA986C6A91}"/>
+              </a:ext>
+            </a:extLst>
+          </p:cNvPr>
+          <p:cNvCxnSpPr>
+            <a:stCxn id="13" idx="3"/>
+            <a:endCxn id="25" idx="1"/>
           </p:cNvCxnSpPr>
           <p:nvPr/>
         </p:nvCxnSpPr>
         <p:spPr>
           <a:xfrm flipV="1">
-            <a:off x="9472359" y="3545681"/>
-            <a:ext cx="333438" cy="9525"/>
+            <a:off x="8516775" y="3242547"/>
+            <a:ext cx="308450" cy="6350"/>
           </a:xfrm>
           <a:prstGeom prst="straightConnector1">
             <a:avLst/>
@@ -4995,6 +4851,115 @@
           </a:fontRef>
         </p:style>
       </p:cxnSp>
+      <p:pic>
+        <p:nvPicPr>
+          <p:cNvPr id="30" name="Εικόνα 29" descr="Εικόνα που περιέχει διάγραμμα, γραμμή, στιγμιότυπο οθόνης, γράφημα&#10;&#10;Το περιεχόμενο που δημιουργείται από AI ενδέχεται να είναι εσφαλμένο.">
+            <a:extLst>
+              <a:ext uri="{FF2B5EF4-FFF2-40B4-BE49-F238E27FC236}">
+                <a16:creationId xmlns:a16="http://schemas.microsoft.com/office/drawing/2014/main" id="{C0CBD18D-048D-E763-D4B4-116D76CC0861}"/>
+              </a:ext>
+            </a:extLst>
+          </p:cNvPr>
+          <p:cNvPicPr>
+            <a:picLocks noChangeAspect="1"/>
+          </p:cNvPicPr>
+          <p:nvPr/>
+        </p:nvPicPr>
+        <p:blipFill>
+          <a:blip r:embed="rId10" cstate="print">
+            <a:extLst>
+              <a:ext uri="{28A0092B-C50C-407E-A947-70E740481C1C}">
+                <a14:useLocalDpi xmlns:a14="http://schemas.microsoft.com/office/drawing/2010/main" val="0"/>
+              </a:ext>
+            </a:extLst>
+          </a:blip>
+          <a:stretch>
+            <a:fillRect/>
+          </a:stretch>
+        </p:blipFill>
+        <p:spPr>
+          <a:xfrm>
+            <a:off x="562707" y="3764835"/>
+            <a:ext cx="3104277" cy="3104277"/>
+          </a:xfrm>
+          <a:prstGeom prst="rect">
+            <a:avLst/>
+          </a:prstGeom>
+        </p:spPr>
+      </p:pic>
+      <p:pic>
+        <p:nvPicPr>
+          <p:cNvPr id="31" name="Εικόνα 30">
+            <a:extLst>
+              <a:ext uri="{FF2B5EF4-FFF2-40B4-BE49-F238E27FC236}">
+                <a16:creationId xmlns:a16="http://schemas.microsoft.com/office/drawing/2014/main" id="{05D05523-45B3-7D99-321A-0A473D760D54}"/>
+              </a:ext>
+            </a:extLst>
+          </p:cNvPr>
+          <p:cNvPicPr>
+            <a:picLocks noChangeAspect="1"/>
+          </p:cNvPicPr>
+          <p:nvPr/>
+        </p:nvPicPr>
+        <p:blipFill>
+          <a:blip r:embed="rId11" cstate="print">
+            <a:extLst>
+              <a:ext uri="{28A0092B-C50C-407E-A947-70E740481C1C}">
+                <a14:useLocalDpi xmlns:a14="http://schemas.microsoft.com/office/drawing/2010/main" val="0"/>
+              </a:ext>
+            </a:extLst>
+          </a:blip>
+          <a:srcRect/>
+          <a:stretch/>
+        </p:blipFill>
+        <p:spPr>
+          <a:xfrm>
+            <a:off x="4580432" y="3764834"/>
+            <a:ext cx="3104277" cy="3104277"/>
+          </a:xfrm>
+          <a:prstGeom prst="rect">
+            <a:avLst/>
+          </a:prstGeom>
+        </p:spPr>
+      </p:pic>
+      <p:pic>
+        <p:nvPicPr>
+          <p:cNvPr id="1024" name="astar_path_x3.5">
+            <a:hlinkClick r:id="" action="ppaction://media"/>
+            <a:extLst>
+              <a:ext uri="{FF2B5EF4-FFF2-40B4-BE49-F238E27FC236}">
+                <a16:creationId xmlns:a16="http://schemas.microsoft.com/office/drawing/2014/main" id="{699D7DD8-CF3A-D7E6-3EB2-026E9B431505}"/>
+              </a:ext>
+            </a:extLst>
+          </p:cNvPr>
+          <p:cNvPicPr>
+            <a:picLocks noChangeAspect="1"/>
+          </p:cNvPicPr>
+          <p:nvPr>
+            <a:videoFile r:link="rId2"/>
+            <p:extLst>
+              <p:ext uri="{DAA4B4D4-6D71-4841-9C94-3DE7FCFB9230}">
+                <p14:media xmlns:p14="http://schemas.microsoft.com/office/powerpoint/2010/main" r:embed="rId1"/>
+              </p:ext>
+            </p:extLst>
+          </p:nvPr>
+        </p:nvPicPr>
+        <p:blipFill>
+          <a:blip r:embed="rId12"/>
+          <a:stretch>
+            <a:fillRect/>
+          </a:stretch>
+        </p:blipFill>
+        <p:spPr>
+          <a:xfrm>
+            <a:off x="8598157" y="3764835"/>
+            <a:ext cx="3104277" cy="3104277"/>
+          </a:xfrm>
+          <a:prstGeom prst="rect">
+            <a:avLst/>
+          </a:prstGeom>
+        </p:spPr>
+      </p:pic>
     </p:spTree>
     <p:extLst>
       <p:ext uri="{BB962C8B-B14F-4D97-AF65-F5344CB8AC3E}">
@@ -5026,7 +4991,7 @@
                             </p:stCondLst>
                             <p:childTnLst>
                               <p:par>
-                                <p:cTn id="5" presetID="22" presetClass="entr" presetSubtype="4" fill="hold" nodeType="clickEffect">
+                                <p:cTn id="5" presetID="22" presetClass="entr" presetSubtype="8" fill="hold" nodeType="clickEffect">
                                   <p:stCondLst>
                                     <p:cond delay="0"/>
                                   </p:stCondLst>
@@ -5039,7 +5004,7 @@
                                           </p:stCondLst>
                                         </p:cTn>
                                         <p:tgtEl>
-                                          <p:spTgt spid="12"/>
+                                          <p:spTgt spid="9"/>
                                         </p:tgtEl>
                                         <p:attrNameLst>
                                           <p:attrName>style.visibility</p:attrName>
@@ -5049,46 +5014,11 @@
                                         <p:strVal val="visible"/>
                                       </p:to>
                                     </p:set>
-                                    <p:animEffect transition="in" filter="wipe(down)">
+                                    <p:animEffect transition="in" filter="wipe(left)">
                                       <p:cBhvr>
                                         <p:cTn id="7" dur="500"/>
                                         <p:tgtEl>
-                                          <p:spTgt spid="12"/>
-                                        </p:tgtEl>
-                                      </p:cBhvr>
-                                    </p:animEffect>
-                                  </p:childTnLst>
-                                </p:cTn>
-                              </p:par>
-                              <p:par>
-                                <p:cTn id="8" presetID="22" presetClass="entr" presetSubtype="1" fill="hold" nodeType="withEffect">
-                                  <p:stCondLst>
-                                    <p:cond delay="0"/>
-                                  </p:stCondLst>
-                                  <p:childTnLst>
-                                    <p:set>
-                                      <p:cBhvr>
-                                        <p:cTn id="9" dur="1" fill="hold">
-                                          <p:stCondLst>
-                                            <p:cond delay="0"/>
-                                          </p:stCondLst>
-                                        </p:cTn>
-                                        <p:tgtEl>
-                                          <p:spTgt spid="15"/>
-                                        </p:tgtEl>
-                                        <p:attrNameLst>
-                                          <p:attrName>style.visibility</p:attrName>
-                                        </p:attrNameLst>
-                                      </p:cBhvr>
-                                      <p:to>
-                                        <p:strVal val="visible"/>
-                                      </p:to>
-                                    </p:set>
-                                    <p:animEffect transition="in" filter="wipe(up)">
-                                      <p:cBhvr>
-                                        <p:cTn id="10" dur="500"/>
-                                        <p:tgtEl>
-                                          <p:spTgt spid="15"/>
+                                          <p:spTgt spid="9"/>
                                         </p:tgtEl>
                                       </p:cBhvr>
                                     </p:animEffect>
@@ -5099,26 +5029,26 @@
                           </p:cTn>
                         </p:par>
                         <p:par>
-                          <p:cTn id="11" fill="hold">
+                          <p:cTn id="8" fill="hold">
                             <p:stCondLst>
                               <p:cond delay="500"/>
                             </p:stCondLst>
                             <p:childTnLst>
                               <p:par>
-                                <p:cTn id="12" presetID="22" presetClass="entr" presetSubtype="8" fill="hold" nodeType="afterEffect">
+                                <p:cTn id="9" presetID="22" presetClass="entr" presetSubtype="8" fill="hold" nodeType="afterEffect">
                                   <p:stCondLst>
                                     <p:cond delay="0"/>
                                   </p:stCondLst>
                                   <p:childTnLst>
                                     <p:set>
                                       <p:cBhvr>
-                                        <p:cTn id="13" dur="1" fill="hold">
+                                        <p:cTn id="10" dur="1" fill="hold">
                                           <p:stCondLst>
                                             <p:cond delay="0"/>
                                           </p:stCondLst>
                                         </p:cTn>
                                         <p:tgtEl>
-                                          <p:spTgt spid="1025"/>
+                                          <p:spTgt spid="6"/>
                                         </p:tgtEl>
                                         <p:attrNameLst>
                                           <p:attrName>style.visibility</p:attrName>
@@ -5130,44 +5060,9 @@
                                     </p:set>
                                     <p:animEffect transition="in" filter="wipe(left)">
                                       <p:cBhvr>
-                                        <p:cTn id="14" dur="500"/>
-                                        <p:tgtEl>
-                                          <p:spTgt spid="1025"/>
-                                        </p:tgtEl>
-                                      </p:cBhvr>
-                                    </p:animEffect>
-                                  </p:childTnLst>
-                                </p:cTn>
-                              </p:par>
-                              <p:par>
-                                <p:cTn id="15" presetID="22" presetClass="entr" presetSubtype="8" fill="hold" nodeType="withEffect">
-                                  <p:stCondLst>
-                                    <p:cond delay="0"/>
-                                  </p:stCondLst>
-                                  <p:childTnLst>
-                                    <p:set>
-                                      <p:cBhvr>
-                                        <p:cTn id="16" dur="1" fill="hold">
-                                          <p:stCondLst>
-                                            <p:cond delay="0"/>
-                                          </p:stCondLst>
-                                        </p:cTn>
-                                        <p:tgtEl>
-                                          <p:spTgt spid="1026"/>
-                                        </p:tgtEl>
-                                        <p:attrNameLst>
-                                          <p:attrName>style.visibility</p:attrName>
-                                        </p:attrNameLst>
-                                      </p:cBhvr>
-                                      <p:to>
-                                        <p:strVal val="visible"/>
-                                      </p:to>
-                                    </p:set>
-                                    <p:animEffect transition="in" filter="wipe(left)">
-                                      <p:cBhvr>
-                                        <p:cTn id="17" dur="500"/>
-                                        <p:tgtEl>
-                                          <p:spTgt spid="1026"/>
+                                        <p:cTn id="11" dur="500"/>
+                                        <p:tgtEl>
+                                          <p:spTgt spid="6"/>
                                         </p:tgtEl>
                                       </p:cBhvr>
                                     </p:animEffect>
@@ -5181,32 +5076,32 @@
                     </p:cTn>
                   </p:par>
                   <p:par>
-                    <p:cTn id="18" fill="hold">
+                    <p:cTn id="12" fill="hold">
                       <p:stCondLst>
                         <p:cond delay="indefinite"/>
                       </p:stCondLst>
                       <p:childTnLst>
                         <p:par>
-                          <p:cTn id="19" fill="hold">
+                          <p:cTn id="13" fill="hold">
                             <p:stCondLst>
                               <p:cond delay="0"/>
                             </p:stCondLst>
                             <p:childTnLst>
                               <p:par>
-                                <p:cTn id="20" presetID="22" presetClass="entr" presetSubtype="8" fill="hold" nodeType="clickEffect">
+                                <p:cTn id="14" presetID="22" presetClass="entr" presetSubtype="8" fill="hold" nodeType="clickEffect">
                                   <p:stCondLst>
                                     <p:cond delay="0"/>
                                   </p:stCondLst>
                                   <p:childTnLst>
                                     <p:set>
                                       <p:cBhvr>
-                                        <p:cTn id="21" dur="1" fill="hold">
+                                        <p:cTn id="15" dur="1" fill="hold">
                                           <p:stCondLst>
                                             <p:cond delay="0"/>
                                           </p:stCondLst>
                                         </p:cTn>
                                         <p:tgtEl>
-                                          <p:spTgt spid="26"/>
+                                          <p:spTgt spid="11"/>
                                         </p:tgtEl>
                                         <p:attrNameLst>
                                           <p:attrName>style.visibility</p:attrName>
@@ -5218,9 +5113,9 @@
                                     </p:set>
                                     <p:animEffect transition="in" filter="wipe(left)">
                                       <p:cBhvr>
-                                        <p:cTn id="22" dur="500"/>
-                                        <p:tgtEl>
-                                          <p:spTgt spid="26"/>
+                                        <p:cTn id="16" dur="500"/>
+                                        <p:tgtEl>
+                                          <p:spTgt spid="11"/>
                                         </p:tgtEl>
                                       </p:cBhvr>
                                     </p:animEffect>
@@ -5231,26 +5126,26 @@
                           </p:cTn>
                         </p:par>
                         <p:par>
-                          <p:cTn id="23" fill="hold">
+                          <p:cTn id="17" fill="hold">
                             <p:stCondLst>
                               <p:cond delay="500"/>
                             </p:stCondLst>
                             <p:childTnLst>
                               <p:par>
-                                <p:cTn id="24" presetID="22" presetClass="entr" presetSubtype="8" fill="hold" nodeType="afterEffect">
+                                <p:cTn id="18" presetID="22" presetClass="entr" presetSubtype="8" fill="hold" nodeType="afterEffect">
                                   <p:stCondLst>
                                     <p:cond delay="0"/>
                                   </p:stCondLst>
                                   <p:childTnLst>
                                     <p:set>
                                       <p:cBhvr>
-                                        <p:cTn id="25" dur="1" fill="hold">
+                                        <p:cTn id="19" dur="1" fill="hold">
                                           <p:stCondLst>
                                             <p:cond delay="0"/>
                                           </p:stCondLst>
                                         </p:cTn>
                                         <p:tgtEl>
-                                          <p:spTgt spid="3"/>
+                                          <p:spTgt spid="7"/>
                                         </p:tgtEl>
                                         <p:attrNameLst>
                                           <p:attrName>style.visibility</p:attrName>
@@ -5262,9 +5157,9 @@
                                     </p:set>
                                     <p:animEffect transition="in" filter="wipe(left)">
                                       <p:cBhvr>
-                                        <p:cTn id="26" dur="500"/>
-                                        <p:tgtEl>
-                                          <p:spTgt spid="3"/>
+                                        <p:cTn id="20" dur="500"/>
+                                        <p:tgtEl>
+                                          <p:spTgt spid="7"/>
                                         </p:tgtEl>
                                       </p:cBhvr>
                                     </p:animEffect>
@@ -5278,32 +5173,131 @@
                     </p:cTn>
                   </p:par>
                   <p:par>
-                    <p:cTn id="27" fill="hold">
+                    <p:cTn id="21" fill="hold">
                       <p:stCondLst>
                         <p:cond delay="indefinite"/>
                       </p:stCondLst>
                       <p:childTnLst>
                         <p:par>
-                          <p:cTn id="28" fill="hold">
+                          <p:cTn id="22" fill="hold">
                             <p:stCondLst>
                               <p:cond delay="0"/>
                             </p:stCondLst>
                             <p:childTnLst>
                               <p:par>
-                                <p:cTn id="29" presetID="22" presetClass="entr" presetSubtype="8" fill="hold" nodeType="clickEffect">
+                                <p:cTn id="23" presetID="42" presetClass="entr" presetSubtype="0" fill="hold" nodeType="clickEffect">
                                   <p:stCondLst>
                                     <p:cond delay="0"/>
                                   </p:stCondLst>
                                   <p:childTnLst>
                                     <p:set>
                                       <p:cBhvr>
-                                        <p:cTn id="30" dur="1" fill="hold">
+                                        <p:cTn id="24" dur="1" fill="hold">
                                           <p:stCondLst>
                                             <p:cond delay="0"/>
                                           </p:stCondLst>
                                         </p:cTn>
                                         <p:tgtEl>
-                                          <p:spTgt spid="29"/>
+                                          <p:spTgt spid="30"/>
+                                        </p:tgtEl>
+                                        <p:attrNameLst>
+                                          <p:attrName>style.visibility</p:attrName>
+                                        </p:attrNameLst>
+                                      </p:cBhvr>
+                                      <p:to>
+                                        <p:strVal val="visible"/>
+                                      </p:to>
+                                    </p:set>
+                                    <p:animEffect transition="in" filter="fade">
+                                      <p:cBhvr>
+                                        <p:cTn id="25" dur="1000"/>
+                                        <p:tgtEl>
+                                          <p:spTgt spid="30"/>
+                                        </p:tgtEl>
+                                      </p:cBhvr>
+                                    </p:animEffect>
+                                    <p:anim calcmode="lin" valueType="num">
+                                      <p:cBhvr>
+                                        <p:cTn id="26" dur="1000" fill="hold"/>
+                                        <p:tgtEl>
+                                          <p:spTgt spid="30"/>
+                                        </p:tgtEl>
+                                        <p:attrNameLst>
+                                          <p:attrName>ppt_x</p:attrName>
+                                        </p:attrNameLst>
+                                      </p:cBhvr>
+                                      <p:tavLst>
+                                        <p:tav tm="0">
+                                          <p:val>
+                                            <p:strVal val="#ppt_x"/>
+                                          </p:val>
+                                        </p:tav>
+                                        <p:tav tm="100000">
+                                          <p:val>
+                                            <p:strVal val="#ppt_x"/>
+                                          </p:val>
+                                        </p:tav>
+                                      </p:tavLst>
+                                    </p:anim>
+                                    <p:anim calcmode="lin" valueType="num">
+                                      <p:cBhvr>
+                                        <p:cTn id="27" dur="1000" fill="hold"/>
+                                        <p:tgtEl>
+                                          <p:spTgt spid="30"/>
+                                        </p:tgtEl>
+                                        <p:attrNameLst>
+                                          <p:attrName>ppt_y</p:attrName>
+                                        </p:attrNameLst>
+                                      </p:cBhvr>
+                                      <p:tavLst>
+                                        <p:tav tm="0">
+                                          <p:val>
+                                            <p:strVal val="#ppt_y+.1"/>
+                                          </p:val>
+                                        </p:tav>
+                                        <p:tav tm="100000">
+                                          <p:val>
+                                            <p:strVal val="#ppt_y"/>
+                                          </p:val>
+                                        </p:tav>
+                                      </p:tavLst>
+                                    </p:anim>
+                                  </p:childTnLst>
+                                </p:cTn>
+                              </p:par>
+                            </p:childTnLst>
+                          </p:cTn>
+                        </p:par>
+                      </p:childTnLst>
+                    </p:cTn>
+                  </p:par>
+                  <p:par>
+                    <p:cTn id="28" fill="hold">
+                      <p:stCondLst>
+                        <p:cond delay="indefinite"/>
+                      </p:stCondLst>
+                      <p:childTnLst>
+                        <p:par>
+                          <p:cTn id="29" fill="hold">
+                            <p:stCondLst>
+                              <p:cond delay="0"/>
+                            </p:stCondLst>
+                            <p:childTnLst>
+                              <p:par>
+                                <p:cTn id="30" presetID="22" presetClass="entr" presetSubtype="8" fill="hold" nodeType="clickEffect">
+                                  <p:stCondLst>
+                                    <p:cond delay="0"/>
+                                  </p:stCondLst>
+                                  <p:childTnLst>
+                                    <p:set>
+                                      <p:cBhvr>
+                                        <p:cTn id="31" dur="1" fill="hold">
+                                          <p:stCondLst>
+                                            <p:cond delay="0"/>
+                                          </p:stCondLst>
+                                        </p:cTn>
+                                        <p:tgtEl>
+                                          <p:spTgt spid="16"/>
                                         </p:tgtEl>
                                         <p:attrNameLst>
                                           <p:attrName>style.visibility</p:attrName>
@@ -5315,9 +5309,9 @@
                                     </p:set>
                                     <p:animEffect transition="in" filter="wipe(left)">
                                       <p:cBhvr>
-                                        <p:cTn id="31" dur="500"/>
-                                        <p:tgtEl>
-                                          <p:spTgt spid="29"/>
+                                        <p:cTn id="32" dur="500"/>
+                                        <p:tgtEl>
+                                          <p:spTgt spid="16"/>
                                         </p:tgtEl>
                                       </p:cBhvr>
                                     </p:animEffect>
@@ -5328,26 +5322,26 @@
                           </p:cTn>
                         </p:par>
                         <p:par>
-                          <p:cTn id="32" fill="hold">
+                          <p:cTn id="33" fill="hold">
                             <p:stCondLst>
                               <p:cond delay="500"/>
                             </p:stCondLst>
                             <p:childTnLst>
                               <p:par>
-                                <p:cTn id="33" presetID="22" presetClass="entr" presetSubtype="8" fill="hold" nodeType="afterEffect">
+                                <p:cTn id="34" presetID="22" presetClass="entr" presetSubtype="8" fill="hold" nodeType="afterEffect">
                                   <p:stCondLst>
                                     <p:cond delay="0"/>
                                   </p:stCondLst>
                                   <p:childTnLst>
                                     <p:set>
                                       <p:cBhvr>
-                                        <p:cTn id="34" dur="1" fill="hold">
+                                        <p:cTn id="35" dur="1" fill="hold">
                                           <p:stCondLst>
                                             <p:cond delay="0"/>
                                           </p:stCondLst>
                                         </p:cTn>
                                         <p:tgtEl>
-                                          <p:spTgt spid="5"/>
+                                          <p:spTgt spid="13"/>
                                         </p:tgtEl>
                                         <p:attrNameLst>
                                           <p:attrName>style.visibility</p:attrName>
@@ -5359,9 +5353,9 @@
                                     </p:set>
                                     <p:animEffect transition="in" filter="wipe(left)">
                                       <p:cBhvr>
-                                        <p:cTn id="35" dur="500"/>
-                                        <p:tgtEl>
-                                          <p:spTgt spid="5"/>
+                                        <p:cTn id="36" dur="500"/>
+                                        <p:tgtEl>
+                                          <p:spTgt spid="13"/>
                                         </p:tgtEl>
                                       </p:cBhvr>
                                     </p:animEffect>
@@ -5375,32 +5369,32 @@
                     </p:cTn>
                   </p:par>
                   <p:par>
-                    <p:cTn id="36" fill="hold">
+                    <p:cTn id="37" fill="hold">
                       <p:stCondLst>
                         <p:cond delay="indefinite"/>
                       </p:stCondLst>
                       <p:childTnLst>
                         <p:par>
-                          <p:cTn id="37" fill="hold">
+                          <p:cTn id="38" fill="hold">
                             <p:stCondLst>
                               <p:cond delay="0"/>
                             </p:stCondLst>
                             <p:childTnLst>
                               <p:par>
-                                <p:cTn id="38" presetID="22" presetClass="entr" presetSubtype="1" fill="hold" nodeType="clickEffect">
+                                <p:cTn id="39" presetID="2" presetClass="entr" presetSubtype="4" fill="hold" grpId="0" nodeType="clickEffect">
                                   <p:stCondLst>
                                     <p:cond delay="0"/>
                                   </p:stCondLst>
                                   <p:childTnLst>
                                     <p:set>
                                       <p:cBhvr>
-                                        <p:cTn id="39" dur="1" fill="hold">
+                                        <p:cTn id="40" dur="1" fill="hold">
                                           <p:stCondLst>
                                             <p:cond delay="0"/>
                                           </p:stCondLst>
                                         </p:cTn>
                                         <p:tgtEl>
-                                          <p:spTgt spid="18"/>
+                                          <p:spTgt spid="20"/>
                                         </p:tgtEl>
                                         <p:attrNameLst>
                                           <p:attrName>style.visibility</p:attrName>
@@ -5410,76 +5404,179 @@
                                         <p:strVal val="visible"/>
                                       </p:to>
                                     </p:set>
-                                    <p:animEffect transition="in" filter="wipe(up)">
-                                      <p:cBhvr>
-                                        <p:cTn id="40" dur="500"/>
-                                        <p:tgtEl>
-                                          <p:spTgt spid="18"/>
-                                        </p:tgtEl>
-                                      </p:cBhvr>
-                                    </p:animEffect>
-                                  </p:childTnLst>
-                                </p:cTn>
-                              </p:par>
-                              <p:par>
-                                <p:cTn id="41" presetID="22" presetClass="entr" presetSubtype="4" fill="hold" nodeType="withEffect">
-                                  <p:stCondLst>
-                                    <p:cond delay="0"/>
-                                  </p:stCondLst>
-                                  <p:childTnLst>
-                                    <p:set>
-                                      <p:cBhvr>
-                                        <p:cTn id="42" dur="1" fill="hold">
-                                          <p:stCondLst>
-                                            <p:cond delay="0"/>
-                                          </p:stCondLst>
-                                        </p:cTn>
-                                        <p:tgtEl>
-                                          <p:spTgt spid="22"/>
+                                    <p:anim calcmode="lin" valueType="num">
+                                      <p:cBhvr additive="base">
+                                        <p:cTn id="41" dur="500" fill="hold"/>
+                                        <p:tgtEl>
+                                          <p:spTgt spid="20"/>
                                         </p:tgtEl>
                                         <p:attrNameLst>
-                                          <p:attrName>style.visibility</p:attrName>
+                                          <p:attrName>ppt_x</p:attrName>
                                         </p:attrNameLst>
                                       </p:cBhvr>
-                                      <p:to>
-                                        <p:strVal val="visible"/>
-                                      </p:to>
-                                    </p:set>
-                                    <p:animEffect transition="in" filter="wipe(down)">
-                                      <p:cBhvr>
-                                        <p:cTn id="43" dur="500"/>
-                                        <p:tgtEl>
-                                          <p:spTgt spid="22"/>
-                                        </p:tgtEl>
-                                      </p:cBhvr>
-                                    </p:animEffect>
+                                      <p:tavLst>
+                                        <p:tav tm="0">
+                                          <p:val>
+                                            <p:strVal val="#ppt_x"/>
+                                          </p:val>
+                                        </p:tav>
+                                        <p:tav tm="100000">
+                                          <p:val>
+                                            <p:strVal val="#ppt_x"/>
+                                          </p:val>
+                                        </p:tav>
+                                      </p:tavLst>
+                                    </p:anim>
+                                    <p:anim calcmode="lin" valueType="num">
+                                      <p:cBhvr additive="base">
+                                        <p:cTn id="42" dur="500" fill="hold"/>
+                                        <p:tgtEl>
+                                          <p:spTgt spid="20"/>
+                                        </p:tgtEl>
+                                        <p:attrNameLst>
+                                          <p:attrName>ppt_y</p:attrName>
+                                        </p:attrNameLst>
+                                      </p:cBhvr>
+                                      <p:tavLst>
+                                        <p:tav tm="0">
+                                          <p:val>
+                                            <p:strVal val="1+#ppt_h/2"/>
+                                          </p:val>
+                                        </p:tav>
+                                        <p:tav tm="100000">
+                                          <p:val>
+                                            <p:strVal val="#ppt_y"/>
+                                          </p:val>
+                                        </p:tav>
+                                      </p:tavLst>
+                                    </p:anim>
                                   </p:childTnLst>
                                 </p:cTn>
                               </p:par>
                             </p:childTnLst>
                           </p:cTn>
                         </p:par>
+                      </p:childTnLst>
+                    </p:cTn>
+                  </p:par>
+                  <p:par>
+                    <p:cTn id="43" fill="hold">
+                      <p:stCondLst>
+                        <p:cond delay="indefinite"/>
+                      </p:stCondLst>
+                      <p:childTnLst>
                         <p:par>
                           <p:cTn id="44" fill="hold">
                             <p:stCondLst>
-                              <p:cond delay="500"/>
+                              <p:cond delay="0"/>
                             </p:stCondLst>
                             <p:childTnLst>
                               <p:par>
-                                <p:cTn id="45" presetID="22" presetClass="entr" presetSubtype="8" fill="hold" nodeType="afterEffect">
+                                <p:cTn id="45" presetID="2" presetClass="exit" presetSubtype="4" fill="hold" grpId="1" nodeType="clickEffect">
+                                  <p:stCondLst>
+                                    <p:cond delay="0"/>
+                                  </p:stCondLst>
+                                  <p:childTnLst>
+                                    <p:anim calcmode="lin" valueType="num">
+                                      <p:cBhvr additive="base">
+                                        <p:cTn id="46" dur="500"/>
+                                        <p:tgtEl>
+                                          <p:spTgt spid="20"/>
+                                        </p:tgtEl>
+                                        <p:attrNameLst>
+                                          <p:attrName>ppt_x</p:attrName>
+                                        </p:attrNameLst>
+                                      </p:cBhvr>
+                                      <p:tavLst>
+                                        <p:tav tm="0">
+                                          <p:val>
+                                            <p:strVal val="ppt_x"/>
+                                          </p:val>
+                                        </p:tav>
+                                        <p:tav tm="100000">
+                                          <p:val>
+                                            <p:strVal val="ppt_x"/>
+                                          </p:val>
+                                        </p:tav>
+                                      </p:tavLst>
+                                    </p:anim>
+                                    <p:anim calcmode="lin" valueType="num">
+                                      <p:cBhvr additive="base">
+                                        <p:cTn id="47" dur="500"/>
+                                        <p:tgtEl>
+                                          <p:spTgt spid="20"/>
+                                        </p:tgtEl>
+                                        <p:attrNameLst>
+                                          <p:attrName>ppt_y</p:attrName>
+                                        </p:attrNameLst>
+                                      </p:cBhvr>
+                                      <p:tavLst>
+                                        <p:tav tm="0">
+                                          <p:val>
+                                            <p:strVal val="ppt_y"/>
+                                          </p:val>
+                                        </p:tav>
+                                        <p:tav tm="100000">
+                                          <p:val>
+                                            <p:strVal val="1+ppt_h/2"/>
+                                          </p:val>
+                                        </p:tav>
+                                      </p:tavLst>
+                                    </p:anim>
+                                    <p:set>
+                                      <p:cBhvr>
+                                        <p:cTn id="48" dur="1" fill="hold">
+                                          <p:stCondLst>
+                                            <p:cond delay="499"/>
+                                          </p:stCondLst>
+                                        </p:cTn>
+                                        <p:tgtEl>
+                                          <p:spTgt spid="20"/>
+                                        </p:tgtEl>
+                                        <p:attrNameLst>
+                                          <p:attrName>style.visibility</p:attrName>
+                                        </p:attrNameLst>
+                                      </p:cBhvr>
+                                      <p:to>
+                                        <p:strVal val="hidden"/>
+                                      </p:to>
+                                    </p:set>
+                                  </p:childTnLst>
+                                </p:cTn>
+                              </p:par>
+                            </p:childTnLst>
+                          </p:cTn>
+                        </p:par>
+                      </p:childTnLst>
+                    </p:cTn>
+                  </p:par>
+                  <p:par>
+                    <p:cTn id="49" fill="hold">
+                      <p:stCondLst>
+                        <p:cond delay="indefinite"/>
+                      </p:stCondLst>
+                      <p:childTnLst>
+                        <p:par>
+                          <p:cTn id="50" fill="hold">
+                            <p:stCondLst>
+                              <p:cond delay="0"/>
+                            </p:stCondLst>
+                            <p:childTnLst>
+                              <p:par>
+                                <p:cTn id="51" presetID="2" presetClass="entr" presetSubtype="4" fill="hold" nodeType="clickEffect">
                                   <p:stCondLst>
                                     <p:cond delay="0"/>
                                   </p:stCondLst>
                                   <p:childTnLst>
                                     <p:set>
                                       <p:cBhvr>
-                                        <p:cTn id="46" dur="1" fill="hold">
+                                        <p:cTn id="52" dur="1" fill="hold">
                                           <p:stCondLst>
                                             <p:cond delay="0"/>
                                           </p:stCondLst>
                                         </p:cTn>
                                         <p:tgtEl>
-                                          <p:spTgt spid="6"/>
+                                          <p:spTgt spid="31"/>
                                         </p:tgtEl>
                                         <p:attrNameLst>
                                           <p:attrName>style.visibility</p:attrName>
@@ -5489,11 +5586,137 @@
                                         <p:strVal val="visible"/>
                                       </p:to>
                                     </p:set>
-                                    <p:animEffect transition="in" filter="wipe(left)">
-                                      <p:cBhvr>
-                                        <p:cTn id="47" dur="500"/>
-                                        <p:tgtEl>
-                                          <p:spTgt spid="6"/>
+                                    <p:anim calcmode="lin" valueType="num">
+                                      <p:cBhvr additive="base">
+                                        <p:cTn id="53" dur="500" fill="hold"/>
+                                        <p:tgtEl>
+                                          <p:spTgt spid="31"/>
+                                        </p:tgtEl>
+                                        <p:attrNameLst>
+                                          <p:attrName>ppt_x</p:attrName>
+                                        </p:attrNameLst>
+                                      </p:cBhvr>
+                                      <p:tavLst>
+                                        <p:tav tm="0">
+                                          <p:val>
+                                            <p:strVal val="#ppt_x"/>
+                                          </p:val>
+                                        </p:tav>
+                                        <p:tav tm="100000">
+                                          <p:val>
+                                            <p:strVal val="#ppt_x"/>
+                                          </p:val>
+                                        </p:tav>
+                                      </p:tavLst>
+                                    </p:anim>
+                                    <p:anim calcmode="lin" valueType="num">
+                                      <p:cBhvr additive="base">
+                                        <p:cTn id="54" dur="500" fill="hold"/>
+                                        <p:tgtEl>
+                                          <p:spTgt spid="31"/>
+                                        </p:tgtEl>
+                                        <p:attrNameLst>
+                                          <p:attrName>ppt_y</p:attrName>
+                                        </p:attrNameLst>
+                                      </p:cBhvr>
+                                      <p:tavLst>
+                                        <p:tav tm="0">
+                                          <p:val>
+                                            <p:strVal val="1+#ppt_h/2"/>
+                                          </p:val>
+                                        </p:tav>
+                                        <p:tav tm="100000">
+                                          <p:val>
+                                            <p:strVal val="#ppt_y"/>
+                                          </p:val>
+                                        </p:tav>
+                                      </p:tavLst>
+                                    </p:anim>
+                                  </p:childTnLst>
+                                </p:cTn>
+                              </p:par>
+                            </p:childTnLst>
+                          </p:cTn>
+                        </p:par>
+                      </p:childTnLst>
+                    </p:cTn>
+                  </p:par>
+                  <p:par>
+                    <p:cTn id="55" fill="hold">
+                      <p:stCondLst>
+                        <p:cond delay="indefinite"/>
+                      </p:stCondLst>
+                      <p:childTnLst>
+                        <p:par>
+                          <p:cTn id="56" fill="hold">
+                            <p:stCondLst>
+                              <p:cond delay="0"/>
+                            </p:stCondLst>
+                            <p:childTnLst>
+                              <p:par>
+                                <p:cTn id="57" presetID="22" presetClass="entr" presetSubtype="2" fill="hold" nodeType="clickEffect">
+                                  <p:stCondLst>
+                                    <p:cond delay="0"/>
+                                  </p:stCondLst>
+                                  <p:childTnLst>
+                                    <p:set>
+                                      <p:cBhvr>
+                                        <p:cTn id="58" dur="1" fill="hold">
+                                          <p:stCondLst>
+                                            <p:cond delay="0"/>
+                                          </p:stCondLst>
+                                        </p:cTn>
+                                        <p:tgtEl>
+                                          <p:spTgt spid="22"/>
+                                        </p:tgtEl>
+                                        <p:attrNameLst>
+                                          <p:attrName>style.visibility</p:attrName>
+                                        </p:attrNameLst>
+                                      </p:cBhvr>
+                                      <p:to>
+                                        <p:strVal val="visible"/>
+                                      </p:to>
+                                    </p:set>
+                                    <p:animEffect transition="in" filter="wipe(right)">
+                                      <p:cBhvr>
+                                        <p:cTn id="59" dur="500"/>
+                                        <p:tgtEl>
+                                          <p:spTgt spid="22"/>
+                                        </p:tgtEl>
+                                      </p:cBhvr>
+                                    </p:animEffect>
+                                  </p:childTnLst>
+                                </p:cTn>
+                              </p:par>
+                              <p:par>
+                                <p:cTn id="60" presetID="22" presetClass="entr" presetSubtype="2" fill="hold" nodeType="withEffect">
+                                  <p:stCondLst>
+                                    <p:cond delay="0"/>
+                                  </p:stCondLst>
+                                  <p:childTnLst>
+                                    <p:set>
+                                      <p:cBhvr>
+                                        <p:cTn id="61" dur="1" fill="hold">
+                                          <p:stCondLst>
+                                            <p:cond delay="0"/>
+                                          </p:stCondLst>
+                                        </p:cTn>
+                                        <p:tgtEl>
+                                          <p:spTgt spid="24"/>
+                                        </p:tgtEl>
+                                        <p:attrNameLst>
+                                          <p:attrName>style.visibility</p:attrName>
+                                        </p:attrNameLst>
+                                      </p:cBhvr>
+                                      <p:to>
+                                        <p:strVal val="visible"/>
+                                      </p:to>
+                                    </p:set>
+                                    <p:animEffect transition="in" filter="wipe(right)">
+                                      <p:cBhvr>
+                                        <p:cTn id="62" dur="500"/>
+                                        <p:tgtEl>
+                                          <p:spTgt spid="24"/>
                                         </p:tgtEl>
                                       </p:cBhvr>
                                     </p:animEffect>
@@ -5507,32 +5730,32 @@
                     </p:cTn>
                   </p:par>
                   <p:par>
-                    <p:cTn id="48" fill="hold">
+                    <p:cTn id="63" fill="hold">
                       <p:stCondLst>
                         <p:cond delay="indefinite"/>
                       </p:stCondLst>
                       <p:childTnLst>
                         <p:par>
-                          <p:cTn id="49" fill="hold">
+                          <p:cTn id="64" fill="hold">
                             <p:stCondLst>
                               <p:cond delay="0"/>
                             </p:stCondLst>
                             <p:childTnLst>
                               <p:par>
-                                <p:cTn id="50" presetID="22" presetClass="entr" presetSubtype="8" fill="hold" nodeType="clickEffect">
+                                <p:cTn id="65" presetID="22" presetClass="entr" presetSubtype="8" fill="hold" nodeType="clickEffect">
                                   <p:stCondLst>
                                     <p:cond delay="0"/>
                                   </p:stCondLst>
                                   <p:childTnLst>
                                     <p:set>
                                       <p:cBhvr>
-                                        <p:cTn id="51" dur="1" fill="hold">
+                                        <p:cTn id="66" dur="1" fill="hold">
                                           <p:stCondLst>
                                             <p:cond delay="0"/>
                                           </p:stCondLst>
                                         </p:cTn>
                                         <p:tgtEl>
-                                          <p:spTgt spid="31"/>
+                                          <p:spTgt spid="28"/>
                                         </p:tgtEl>
                                         <p:attrNameLst>
                                           <p:attrName>style.visibility</p:attrName>
@@ -5544,9 +5767,9 @@
                                     </p:set>
                                     <p:animEffect transition="in" filter="wipe(left)">
                                       <p:cBhvr>
-                                        <p:cTn id="52" dur="500"/>
-                                        <p:tgtEl>
-                                          <p:spTgt spid="31"/>
+                                        <p:cTn id="67" dur="500"/>
+                                        <p:tgtEl>
+                                          <p:spTgt spid="28"/>
                                         </p:tgtEl>
                                       </p:cBhvr>
                                     </p:animEffect>
@@ -5557,26 +5780,26 @@
                           </p:cTn>
                         </p:par>
                         <p:par>
-                          <p:cTn id="53" fill="hold">
+                          <p:cTn id="68" fill="hold">
                             <p:stCondLst>
                               <p:cond delay="500"/>
                             </p:stCondLst>
                             <p:childTnLst>
                               <p:par>
-                                <p:cTn id="54" presetID="22" presetClass="entr" presetSubtype="8" fill="hold" nodeType="afterEffect">
+                                <p:cTn id="69" presetID="22" presetClass="entr" presetSubtype="8" fill="hold" nodeType="afterEffect">
                                   <p:stCondLst>
                                     <p:cond delay="0"/>
                                   </p:stCondLst>
                                   <p:childTnLst>
                                     <p:set>
                                       <p:cBhvr>
-                                        <p:cTn id="55" dur="1" fill="hold">
+                                        <p:cTn id="70" dur="1" fill="hold">
                                           <p:stCondLst>
                                             <p:cond delay="0"/>
                                           </p:stCondLst>
                                         </p:cTn>
                                         <p:tgtEl>
-                                          <p:spTgt spid="7"/>
+                                          <p:spTgt spid="25"/>
                                         </p:tgtEl>
                                         <p:attrNameLst>
                                           <p:attrName>style.visibility</p:attrName>
@@ -5588,9 +5811,9 @@
                                     </p:set>
                                     <p:animEffect transition="in" filter="wipe(left)">
                                       <p:cBhvr>
-                                        <p:cTn id="56" dur="500"/>
-                                        <p:tgtEl>
-                                          <p:spTgt spid="7"/>
+                                        <p:cTn id="71" dur="500"/>
+                                        <p:tgtEl>
+                                          <p:spTgt spid="25"/>
                                         </p:tgtEl>
                                       </p:cBhvr>
                                     </p:animEffect>
@@ -5604,32 +5827,32 @@
                     </p:cTn>
                   </p:par>
                   <p:par>
-                    <p:cTn id="57" fill="hold">
+                    <p:cTn id="72" fill="hold">
                       <p:stCondLst>
                         <p:cond delay="indefinite"/>
                       </p:stCondLst>
                       <p:childTnLst>
                         <p:par>
-                          <p:cTn id="58" fill="hold">
+                          <p:cTn id="73" fill="hold">
                             <p:stCondLst>
                               <p:cond delay="0"/>
                             </p:stCondLst>
                             <p:childTnLst>
                               <p:par>
-                                <p:cTn id="59" presetID="22" presetClass="entr" presetSubtype="8" fill="hold" nodeType="clickEffect">
+                                <p:cTn id="74" presetID="2" presetClass="entr" presetSubtype="2" fill="hold" nodeType="clickEffect">
                                   <p:stCondLst>
                                     <p:cond delay="0"/>
                                   </p:stCondLst>
                                   <p:childTnLst>
                                     <p:set>
                                       <p:cBhvr>
-                                        <p:cTn id="60" dur="1" fill="hold">
+                                        <p:cTn id="75" dur="1" fill="hold">
                                           <p:stCondLst>
                                             <p:cond delay="0"/>
                                           </p:stCondLst>
                                         </p:cTn>
                                         <p:tgtEl>
-                                          <p:spTgt spid="1041"/>
+                                          <p:spTgt spid="1024"/>
                                         </p:tgtEl>
                                         <p:attrNameLst>
                                           <p:attrName>style.visibility</p:attrName>
@@ -5639,58 +5862,87 @@
                                         <p:strVal val="visible"/>
                                       </p:to>
                                     </p:set>
-                                    <p:animEffect transition="in" filter="wipe(left)">
-                                      <p:cBhvr>
-                                        <p:cTn id="61" dur="500"/>
-                                        <p:tgtEl>
-                                          <p:spTgt spid="1041"/>
-                                        </p:tgtEl>
-                                      </p:cBhvr>
-                                    </p:animEffect>
+                                    <p:anim calcmode="lin" valueType="num">
+                                      <p:cBhvr additive="base">
+                                        <p:cTn id="76" dur="500" fill="hold"/>
+                                        <p:tgtEl>
+                                          <p:spTgt spid="1024"/>
+                                        </p:tgtEl>
+                                        <p:attrNameLst>
+                                          <p:attrName>ppt_x</p:attrName>
+                                        </p:attrNameLst>
+                                      </p:cBhvr>
+                                      <p:tavLst>
+                                        <p:tav tm="0">
+                                          <p:val>
+                                            <p:strVal val="1+#ppt_w/2"/>
+                                          </p:val>
+                                        </p:tav>
+                                        <p:tav tm="100000">
+                                          <p:val>
+                                            <p:strVal val="#ppt_x"/>
+                                          </p:val>
+                                        </p:tav>
+                                      </p:tavLst>
+                                    </p:anim>
+                                    <p:anim calcmode="lin" valueType="num">
+                                      <p:cBhvr additive="base">
+                                        <p:cTn id="77" dur="500" fill="hold"/>
+                                        <p:tgtEl>
+                                          <p:spTgt spid="1024"/>
+                                        </p:tgtEl>
+                                        <p:attrNameLst>
+                                          <p:attrName>ppt_y</p:attrName>
+                                        </p:attrNameLst>
+                                      </p:cBhvr>
+                                      <p:tavLst>
+                                        <p:tav tm="0">
+                                          <p:val>
+                                            <p:strVal val="#ppt_y"/>
+                                          </p:val>
+                                        </p:tav>
+                                        <p:tav tm="100000">
+                                          <p:val>
+                                            <p:strVal val="#ppt_y"/>
+                                          </p:val>
+                                        </p:tav>
+                                      </p:tavLst>
+                                    </p:anim>
                                   </p:childTnLst>
                                 </p:cTn>
                               </p:par>
                             </p:childTnLst>
                           </p:cTn>
                         </p:par>
+                      </p:childTnLst>
+                    </p:cTn>
+                  </p:par>
+                  <p:par>
+                    <p:cTn id="78" fill="hold">
+                      <p:stCondLst>
+                        <p:cond delay="indefinite"/>
+                      </p:stCondLst>
+                      <p:childTnLst>
                         <p:par>
-                          <p:cTn id="62" fill="hold">
+                          <p:cTn id="79" fill="hold">
                             <p:stCondLst>
-                              <p:cond delay="500"/>
+                              <p:cond delay="0"/>
                             </p:stCondLst>
                             <p:childTnLst>
                               <p:par>
-                                <p:cTn id="63" presetID="22" presetClass="entr" presetSubtype="8" fill="hold" nodeType="afterEffect">
+                                <p:cTn id="80" presetID="1" presetClass="mediacall" presetSubtype="0" fill="hold" nodeType="clickEffect">
                                   <p:stCondLst>
                                     <p:cond delay="0"/>
                                   </p:stCondLst>
                                   <p:childTnLst>
-                                    <p:set>
-                                      <p:cBhvr>
-                                        <p:cTn id="64" dur="1" fill="hold">
-                                          <p:stCondLst>
-                                            <p:cond delay="0"/>
-                                          </p:stCondLst>
-                                        </p:cTn>
-                                        <p:tgtEl>
-                                          <p:spTgt spid="10"/>
-                                        </p:tgtEl>
-                                        <p:attrNameLst>
-                                          <p:attrName>style.visibility</p:attrName>
-                                        </p:attrNameLst>
-                                      </p:cBhvr>
-                                      <p:to>
-                                        <p:strVal val="visible"/>
-                                      </p:to>
-                                    </p:set>
-                                    <p:animEffect transition="in" filter="wipe(left)">
-                                      <p:cBhvr>
-                                        <p:cTn id="65" dur="500"/>
-                                        <p:tgtEl>
-                                          <p:spTgt spid="10"/>
-                                        </p:tgtEl>
-                                      </p:cBhvr>
-                                    </p:animEffect>
+                                    <p:cmd type="call" cmd="playFrom(0.0)">
+                                      <p:cBhvr>
+                                        <p:cTn id="81" dur="18267" fill="hold"/>
+                                        <p:tgtEl>
+                                          <p:spTgt spid="1024"/>
+                                        </p:tgtEl>
+                                      </p:cBhvr>
+                                    </p:cmd>
                                   </p:childTnLst>
                                 </p:cTn>
                               </p:par>
@@ -5717,10 +5969,26 @@
                 </p:cond>
               </p:nextCondLst>
             </p:seq>
+            <p:video>
+              <p:cMediaNode vol="80000">
+                <p:cTn id="82" fill="hold" display="0">
+                  <p:stCondLst>
+                    <p:cond delay="indefinite"/>
+                  </p:stCondLst>
+                </p:cTn>
+                <p:tgtEl>
+                  <p:spTgt spid="1024"/>
+                </p:tgtEl>
+              </p:cMediaNode>
+            </p:video>
           </p:childTnLst>
         </p:cTn>
       </p:par>
     </p:tnLst>
+    <p:bldLst>
+      <p:bldP spid="20" grpId="0" animBg="1"/>
+      <p:bldP spid="20" grpId="1" animBg="1"/>
+    </p:bldLst>
   </p:timing>
 </p:sld>
 </file>
@@ -7385,13 +7653,13 @@
   <p:clrMapOvr>
     <a:overrideClrMapping bg1="lt1" tx1="dk1" bg2="lt2" tx2="dk2" accent1="accent1" accent2="accent2" accent3="accent3" accent4="accent4" accent5="accent5" accent6="accent6" hlink="hlink" folHlink="folHlink"/>
   </p:clrMapOvr>
-  <mc:AlternateContent xmlns:mc="http://schemas.openxmlformats.org/markup-compatibility/2006">
-    <mc:Choice xmlns:p159="http://schemas.microsoft.com/office/powerpoint/2015/09/main" Requires="p159">
+  <mc:AlternateContent xmlns:mc="http://schemas.openxmlformats.org/markup-compatibility/2006" xmlns:p159="http://schemas.microsoft.com/office/powerpoint/2015/09/main">
+    <mc:Choice Requires="p159">
       <p:transition xmlns:p14="http://schemas.microsoft.com/office/powerpoint/2010/main" spd="slow" p14:dur="2000">
         <p159:morph option="byObject"/>
       </p:transition>
     </mc:Choice>
-    <mc:Fallback>
+    <mc:Fallback xmlns="">
       <p:transition spd="slow">
         <p:fade/>
       </p:transition>
@@ -17030,6 +17298,1507 @@
 </p:sld>
 </file>
 
+<file path=ppt/slides/slide18.xml><?xml version="1.0" encoding="utf-8"?>
+<p:sld xmlns:a="http://schemas.openxmlformats.org/drawingml/2006/main" xmlns:r="http://schemas.openxmlformats.org/officeDocument/2006/relationships" xmlns:p="http://schemas.openxmlformats.org/presentationml/2006/main" show="0">
+  <p:cSld>
+    <p:spTree>
+      <p:nvGrpSpPr>
+        <p:cNvPr id="1" name="">
+          <a:extLst>
+            <a:ext uri="{FF2B5EF4-FFF2-40B4-BE49-F238E27FC236}">
+              <a16:creationId xmlns:a16="http://schemas.microsoft.com/office/drawing/2014/main" id="{9BDCF958-7156-09DA-B82F-D7BE9EAD08B4}"/>
+            </a:ext>
+          </a:extLst>
+        </p:cNvPr>
+        <p:cNvGrpSpPr/>
+        <p:nvPr/>
+      </p:nvGrpSpPr>
+      <p:grpSpPr>
+        <a:xfrm>
+          <a:off x="0" y="0"/>
+          <a:ext cx="0" cy="0"/>
+          <a:chOff x="0" y="0"/>
+          <a:chExt cx="0" cy="0"/>
+        </a:xfrm>
+      </p:grpSpPr>
+      <p:sp>
+        <p:nvSpPr>
+          <p:cNvPr id="4" name="Τίτλος 3">
+            <a:extLst>
+              <a:ext uri="{FF2B5EF4-FFF2-40B4-BE49-F238E27FC236}">
+                <a16:creationId xmlns:a16="http://schemas.microsoft.com/office/drawing/2014/main" id="{91DDCA54-39E8-2A94-AE3C-0F76C2DF86A5}"/>
+              </a:ext>
+            </a:extLst>
+          </p:cNvPr>
+          <p:cNvSpPr>
+            <a:spLocks noGrp="1"/>
+          </p:cNvSpPr>
+          <p:nvPr>
+            <p:ph type="title"/>
+          </p:nvPr>
+        </p:nvSpPr>
+        <p:spPr/>
+        <p:txBody>
+          <a:bodyPr/>
+          <a:lstStyle/>
+          <a:p>
+            <a:pPr algn="ctr"/>
+            <a:r>
+              <a:rPr lang="en-US" dirty="0">
+                <a:latin typeface="Times New Roman" panose="02020603050405020304" pitchFamily="18" charset="0"/>
+                <a:cs typeface="Times New Roman" panose="02020603050405020304" pitchFamily="18" charset="0"/>
+              </a:rPr>
+              <a:t>A*</a:t>
+            </a:r>
+            <a:endParaRPr lang="el-GR" dirty="0">
+              <a:latin typeface="Times New Roman" panose="02020603050405020304" pitchFamily="18" charset="0"/>
+              <a:cs typeface="Times New Roman" panose="02020603050405020304" pitchFamily="18" charset="0"/>
+            </a:endParaRPr>
+          </a:p>
+        </p:txBody>
+      </p:sp>
+      <p:pic>
+        <p:nvPicPr>
+          <p:cNvPr id="1027" name="Picture 3">
+            <a:extLst>
+              <a:ext uri="{FF2B5EF4-FFF2-40B4-BE49-F238E27FC236}">
+                <a16:creationId xmlns:a16="http://schemas.microsoft.com/office/drawing/2014/main" id="{4BD4F4AC-B729-DBCD-6BD3-07524F01298F}"/>
+              </a:ext>
+            </a:extLst>
+          </p:cNvPr>
+          <p:cNvPicPr>
+            <a:picLocks noChangeAspect="1" noChangeArrowheads="1"/>
+          </p:cNvPicPr>
+          <p:nvPr/>
+        </p:nvPicPr>
+        <p:blipFill>
+          <a:blip r:embed="rId2">
+            <a:extLst>
+              <a:ext uri="{28A0092B-C50C-407E-A947-70E740481C1C}">
+                <a14:useLocalDpi xmlns:a14="http://schemas.microsoft.com/office/drawing/2010/main" val="0"/>
+              </a:ext>
+            </a:extLst>
+          </a:blip>
+          <a:srcRect/>
+          <a:stretch>
+            <a:fillRect/>
+          </a:stretch>
+        </p:blipFill>
+        <p:spPr bwMode="auto">
+          <a:xfrm>
+            <a:off x="24003" y="3050381"/>
+            <a:ext cx="1466850" cy="1000125"/>
+          </a:xfrm>
+          <a:prstGeom prst="rect">
+            <a:avLst/>
+          </a:prstGeom>
+          <a:noFill/>
+          <a:extLst>
+            <a:ext uri="{909E8E84-426E-40DD-AFC4-6F175D3DCCD1}">
+              <a14:hiddenFill xmlns:a14="http://schemas.microsoft.com/office/drawing/2010/main">
+                <a:solidFill>
+                  <a:srgbClr val="FFFFFF"/>
+                </a:solidFill>
+              </a14:hiddenFill>
+            </a:ext>
+          </a:extLst>
+        </p:spPr>
+      </p:pic>
+      <p:pic>
+        <p:nvPicPr>
+          <p:cNvPr id="1025" name="Picture 1">
+            <a:extLst>
+              <a:ext uri="{FF2B5EF4-FFF2-40B4-BE49-F238E27FC236}">
+                <a16:creationId xmlns:a16="http://schemas.microsoft.com/office/drawing/2014/main" id="{66F95633-5BAF-A917-7D31-F07ED35918B0}"/>
+              </a:ext>
+            </a:extLst>
+          </p:cNvPr>
+          <p:cNvPicPr>
+            <a:picLocks noChangeAspect="1" noChangeArrowheads="1"/>
+          </p:cNvPicPr>
+          <p:nvPr/>
+        </p:nvPicPr>
+        <p:blipFill>
+          <a:blip r:embed="rId3">
+            <a:extLst>
+              <a:ext uri="{28A0092B-C50C-407E-A947-70E740481C1C}">
+                <a14:useLocalDpi xmlns:a14="http://schemas.microsoft.com/office/drawing/2010/main" val="0"/>
+              </a:ext>
+            </a:extLst>
+          </a:blip>
+          <a:srcRect/>
+          <a:stretch>
+            <a:fillRect/>
+          </a:stretch>
+        </p:blipFill>
+        <p:spPr bwMode="auto">
+          <a:xfrm>
+            <a:off x="1709297" y="2040731"/>
+            <a:ext cx="1466850" cy="1009650"/>
+          </a:xfrm>
+          <a:prstGeom prst="rect">
+            <a:avLst/>
+          </a:prstGeom>
+          <a:noFill/>
+          <a:extLst>
+            <a:ext uri="{909E8E84-426E-40DD-AFC4-6F175D3DCCD1}">
+              <a14:hiddenFill xmlns:a14="http://schemas.microsoft.com/office/drawing/2010/main">
+                <a:solidFill>
+                  <a:srgbClr val="FFFFFF"/>
+                </a:solidFill>
+              </a14:hiddenFill>
+            </a:ext>
+          </a:extLst>
+        </p:spPr>
+      </p:pic>
+      <p:pic>
+        <p:nvPicPr>
+          <p:cNvPr id="1026" name="Picture 2">
+            <a:extLst>
+              <a:ext uri="{FF2B5EF4-FFF2-40B4-BE49-F238E27FC236}">
+                <a16:creationId xmlns:a16="http://schemas.microsoft.com/office/drawing/2014/main" id="{E900D9B3-B554-E70F-F21A-16F8DE3011AF}"/>
+              </a:ext>
+            </a:extLst>
+          </p:cNvPr>
+          <p:cNvPicPr>
+            <a:picLocks noChangeAspect="1" noChangeArrowheads="1"/>
+          </p:cNvPicPr>
+          <p:nvPr/>
+        </p:nvPicPr>
+        <p:blipFill>
+          <a:blip r:embed="rId4">
+            <a:extLst>
+              <a:ext uri="{28A0092B-C50C-407E-A947-70E740481C1C}">
+                <a14:useLocalDpi xmlns:a14="http://schemas.microsoft.com/office/drawing/2010/main" val="0"/>
+              </a:ext>
+            </a:extLst>
+          </a:blip>
+          <a:srcRect/>
+          <a:stretch>
+            <a:fillRect/>
+          </a:stretch>
+        </p:blipFill>
+        <p:spPr bwMode="auto">
+          <a:xfrm>
+            <a:off x="1709297" y="4050506"/>
+            <a:ext cx="1466850" cy="1000125"/>
+          </a:xfrm>
+          <a:prstGeom prst="rect">
+            <a:avLst/>
+          </a:prstGeom>
+          <a:noFill/>
+          <a:extLst>
+            <a:ext uri="{909E8E84-426E-40DD-AFC4-6F175D3DCCD1}">
+              <a14:hiddenFill xmlns:a14="http://schemas.microsoft.com/office/drawing/2010/main">
+                <a:solidFill>
+                  <a:srgbClr val="FFFFFF"/>
+                </a:solidFill>
+              </a14:hiddenFill>
+            </a:ext>
+          </a:extLst>
+        </p:spPr>
+      </p:pic>
+      <p:pic>
+        <p:nvPicPr>
+          <p:cNvPr id="3" name="Picture 3">
+            <a:extLst>
+              <a:ext uri="{FF2B5EF4-FFF2-40B4-BE49-F238E27FC236}">
+                <a16:creationId xmlns:a16="http://schemas.microsoft.com/office/drawing/2014/main" id="{83ED3CC0-BEC1-B6AA-AF14-AA4210C7FD54}"/>
+              </a:ext>
+            </a:extLst>
+          </p:cNvPr>
+          <p:cNvPicPr>
+            <a:picLocks noChangeAspect="1" noChangeArrowheads="1"/>
+          </p:cNvPicPr>
+          <p:nvPr/>
+        </p:nvPicPr>
+        <p:blipFill>
+          <a:blip r:embed="rId5">
+            <a:extLst>
+              <a:ext uri="{28A0092B-C50C-407E-A947-70E740481C1C}">
+                <a14:useLocalDpi xmlns:a14="http://schemas.microsoft.com/office/drawing/2010/main" val="0"/>
+              </a:ext>
+            </a:extLst>
+          </a:blip>
+          <a:srcRect/>
+          <a:stretch>
+            <a:fillRect/>
+          </a:stretch>
+        </p:blipFill>
+        <p:spPr bwMode="auto">
+          <a:xfrm>
+            <a:off x="3624577" y="2040731"/>
+            <a:ext cx="1466850" cy="1009650"/>
+          </a:xfrm>
+          <a:prstGeom prst="rect">
+            <a:avLst/>
+          </a:prstGeom>
+          <a:noFill/>
+          <a:extLst>
+            <a:ext uri="{909E8E84-426E-40DD-AFC4-6F175D3DCCD1}">
+              <a14:hiddenFill xmlns:a14="http://schemas.microsoft.com/office/drawing/2010/main">
+                <a:solidFill>
+                  <a:srgbClr val="FFFFFF"/>
+                </a:solidFill>
+              </a14:hiddenFill>
+            </a:ext>
+          </a:extLst>
+        </p:spPr>
+      </p:pic>
+      <p:pic>
+        <p:nvPicPr>
+          <p:cNvPr id="5" name="Picture 4">
+            <a:extLst>
+              <a:ext uri="{FF2B5EF4-FFF2-40B4-BE49-F238E27FC236}">
+                <a16:creationId xmlns:a16="http://schemas.microsoft.com/office/drawing/2014/main" id="{28E8A93E-FBC6-8649-FF55-2E85962B5451}"/>
+              </a:ext>
+            </a:extLst>
+          </p:cNvPr>
+          <p:cNvPicPr>
+            <a:picLocks noChangeAspect="1" noChangeArrowheads="1"/>
+          </p:cNvPicPr>
+          <p:nvPr/>
+        </p:nvPicPr>
+        <p:blipFill>
+          <a:blip r:embed="rId6">
+            <a:extLst>
+              <a:ext uri="{28A0092B-C50C-407E-A947-70E740481C1C}">
+                <a14:useLocalDpi xmlns:a14="http://schemas.microsoft.com/office/drawing/2010/main" val="0"/>
+              </a:ext>
+            </a:extLst>
+          </a:blip>
+          <a:srcRect/>
+          <a:stretch>
+            <a:fillRect/>
+          </a:stretch>
+        </p:blipFill>
+        <p:spPr bwMode="auto">
+          <a:xfrm>
+            <a:off x="3624577" y="4050505"/>
+            <a:ext cx="1466850" cy="1000125"/>
+          </a:xfrm>
+          <a:prstGeom prst="rect">
+            <a:avLst/>
+          </a:prstGeom>
+          <a:noFill/>
+          <a:extLst>
+            <a:ext uri="{909E8E84-426E-40DD-AFC4-6F175D3DCCD1}">
+              <a14:hiddenFill xmlns:a14="http://schemas.microsoft.com/office/drawing/2010/main">
+                <a:solidFill>
+                  <a:srgbClr val="FFFFFF"/>
+                </a:solidFill>
+              </a14:hiddenFill>
+            </a:ext>
+          </a:extLst>
+        </p:spPr>
+      </p:pic>
+      <p:pic>
+        <p:nvPicPr>
+          <p:cNvPr id="6" name="Picture 5">
+            <a:extLst>
+              <a:ext uri="{FF2B5EF4-FFF2-40B4-BE49-F238E27FC236}">
+                <a16:creationId xmlns:a16="http://schemas.microsoft.com/office/drawing/2014/main" id="{7011663A-FCD1-1649-6BC9-E362E2256A1A}"/>
+              </a:ext>
+            </a:extLst>
+          </p:cNvPr>
+          <p:cNvPicPr>
+            <a:picLocks noChangeAspect="1" noChangeArrowheads="1"/>
+          </p:cNvPicPr>
+          <p:nvPr/>
+        </p:nvPicPr>
+        <p:blipFill>
+          <a:blip r:embed="rId7">
+            <a:extLst>
+              <a:ext uri="{28A0092B-C50C-407E-A947-70E740481C1C}">
+                <a14:useLocalDpi xmlns:a14="http://schemas.microsoft.com/office/drawing/2010/main" val="0"/>
+              </a:ext>
+            </a:extLst>
+          </a:blip>
+          <a:srcRect/>
+          <a:stretch>
+            <a:fillRect/>
+          </a:stretch>
+        </p:blipFill>
+        <p:spPr bwMode="auto">
+          <a:xfrm>
+            <a:off x="5309872" y="3040856"/>
+            <a:ext cx="2362200" cy="1009650"/>
+          </a:xfrm>
+          <a:prstGeom prst="rect">
+            <a:avLst/>
+          </a:prstGeom>
+          <a:noFill/>
+          <a:extLst>
+            <a:ext uri="{909E8E84-426E-40DD-AFC4-6F175D3DCCD1}">
+              <a14:hiddenFill xmlns:a14="http://schemas.microsoft.com/office/drawing/2010/main">
+                <a:solidFill>
+                  <a:srgbClr val="FFFFFF"/>
+                </a:solidFill>
+              </a14:hiddenFill>
+            </a:ext>
+          </a:extLst>
+        </p:spPr>
+      </p:pic>
+      <p:pic>
+        <p:nvPicPr>
+          <p:cNvPr id="7" name="Picture 6">
+            <a:extLst>
+              <a:ext uri="{FF2B5EF4-FFF2-40B4-BE49-F238E27FC236}">
+                <a16:creationId xmlns:a16="http://schemas.microsoft.com/office/drawing/2014/main" id="{89E74921-DFDD-68C7-AF13-FAEC07AE797C}"/>
+              </a:ext>
+            </a:extLst>
+          </p:cNvPr>
+          <p:cNvPicPr>
+            <a:picLocks noChangeAspect="1" noChangeArrowheads="1"/>
+          </p:cNvPicPr>
+          <p:nvPr/>
+        </p:nvPicPr>
+        <p:blipFill>
+          <a:blip r:embed="rId8">
+            <a:extLst>
+              <a:ext uri="{28A0092B-C50C-407E-A947-70E740481C1C}">
+                <a14:useLocalDpi xmlns:a14="http://schemas.microsoft.com/office/drawing/2010/main" val="0"/>
+              </a:ext>
+            </a:extLst>
+          </a:blip>
+          <a:srcRect/>
+          <a:stretch>
+            <a:fillRect/>
+          </a:stretch>
+        </p:blipFill>
+        <p:spPr bwMode="auto">
+          <a:xfrm>
+            <a:off x="8005509" y="3050381"/>
+            <a:ext cx="1466850" cy="1009650"/>
+          </a:xfrm>
+          <a:prstGeom prst="rect">
+            <a:avLst/>
+          </a:prstGeom>
+          <a:noFill/>
+          <a:extLst>
+            <a:ext uri="{909E8E84-426E-40DD-AFC4-6F175D3DCCD1}">
+              <a14:hiddenFill xmlns:a14="http://schemas.microsoft.com/office/drawing/2010/main">
+                <a:solidFill>
+                  <a:srgbClr val="FFFFFF"/>
+                </a:solidFill>
+              </a14:hiddenFill>
+            </a:ext>
+          </a:extLst>
+        </p:spPr>
+      </p:pic>
+      <p:pic>
+        <p:nvPicPr>
+          <p:cNvPr id="10" name="Picture 7">
+            <a:extLst>
+              <a:ext uri="{FF2B5EF4-FFF2-40B4-BE49-F238E27FC236}">
+                <a16:creationId xmlns:a16="http://schemas.microsoft.com/office/drawing/2014/main" id="{62D7796A-D75A-13A4-9576-C7752A3FF24E}"/>
+              </a:ext>
+            </a:extLst>
+          </p:cNvPr>
+          <p:cNvPicPr>
+            <a:picLocks noChangeAspect="1" noChangeArrowheads="1"/>
+          </p:cNvPicPr>
+          <p:nvPr/>
+        </p:nvPicPr>
+        <p:blipFill>
+          <a:blip r:embed="rId9">
+            <a:extLst>
+              <a:ext uri="{28A0092B-C50C-407E-A947-70E740481C1C}">
+                <a14:useLocalDpi xmlns:a14="http://schemas.microsoft.com/office/drawing/2010/main" val="0"/>
+              </a:ext>
+            </a:extLst>
+          </a:blip>
+          <a:srcRect/>
+          <a:stretch>
+            <a:fillRect/>
+          </a:stretch>
+        </p:blipFill>
+        <p:spPr bwMode="auto">
+          <a:xfrm>
+            <a:off x="9805797" y="3040856"/>
+            <a:ext cx="2362200" cy="1009650"/>
+          </a:xfrm>
+          <a:prstGeom prst="rect">
+            <a:avLst/>
+          </a:prstGeom>
+          <a:noFill/>
+          <a:extLst>
+            <a:ext uri="{909E8E84-426E-40DD-AFC4-6F175D3DCCD1}">
+              <a14:hiddenFill xmlns:a14="http://schemas.microsoft.com/office/drawing/2010/main">
+                <a:solidFill>
+                  <a:srgbClr val="FFFFFF"/>
+                </a:solidFill>
+              </a14:hiddenFill>
+            </a:ext>
+          </a:extLst>
+        </p:spPr>
+      </p:pic>
+      <p:cxnSp>
+        <p:nvCxnSpPr>
+          <p:cNvPr id="12" name="Γραμμή σύνδεσης: Γωνιώδης 11">
+            <a:extLst>
+              <a:ext uri="{FF2B5EF4-FFF2-40B4-BE49-F238E27FC236}">
+                <a16:creationId xmlns:a16="http://schemas.microsoft.com/office/drawing/2014/main" id="{BA43064F-87B2-7A77-A485-8076CEAD66F3}"/>
+              </a:ext>
+            </a:extLst>
+          </p:cNvPr>
+          <p:cNvCxnSpPr>
+            <a:stCxn id="1027" idx="3"/>
+            <a:endCxn id="1025" idx="1"/>
+          </p:cNvCxnSpPr>
+          <p:nvPr/>
+        </p:nvCxnSpPr>
+        <p:spPr>
+          <a:xfrm flipV="1">
+            <a:off x="1490853" y="2545556"/>
+            <a:ext cx="218444" cy="1004888"/>
+          </a:xfrm>
+          <a:prstGeom prst="bentConnector3">
+            <a:avLst/>
+          </a:prstGeom>
+          <a:ln>
+            <a:tailEnd type="triangle"/>
+          </a:ln>
+        </p:spPr>
+        <p:style>
+          <a:lnRef idx="2">
+            <a:schemeClr val="dk1"/>
+          </a:lnRef>
+          <a:fillRef idx="0">
+            <a:schemeClr val="dk1"/>
+          </a:fillRef>
+          <a:effectRef idx="1">
+            <a:schemeClr val="dk1"/>
+          </a:effectRef>
+          <a:fontRef idx="minor">
+            <a:schemeClr val="tx1"/>
+          </a:fontRef>
+        </p:style>
+      </p:cxnSp>
+      <p:cxnSp>
+        <p:nvCxnSpPr>
+          <p:cNvPr id="15" name="Γραμμή σύνδεσης: Γωνιώδης 14">
+            <a:extLst>
+              <a:ext uri="{FF2B5EF4-FFF2-40B4-BE49-F238E27FC236}">
+                <a16:creationId xmlns:a16="http://schemas.microsoft.com/office/drawing/2014/main" id="{83F0BDFD-68C6-00D8-0139-77A53269AC6F}"/>
+              </a:ext>
+            </a:extLst>
+          </p:cNvPr>
+          <p:cNvCxnSpPr>
+            <a:stCxn id="1027" idx="3"/>
+            <a:endCxn id="1026" idx="1"/>
+          </p:cNvCxnSpPr>
+          <p:nvPr/>
+        </p:nvCxnSpPr>
+        <p:spPr>
+          <a:xfrm>
+            <a:off x="1490853" y="3550444"/>
+            <a:ext cx="218444" cy="1000125"/>
+          </a:xfrm>
+          <a:prstGeom prst="bentConnector3">
+            <a:avLst/>
+          </a:prstGeom>
+          <a:ln>
+            <a:tailEnd type="triangle"/>
+          </a:ln>
+        </p:spPr>
+        <p:style>
+          <a:lnRef idx="2">
+            <a:schemeClr val="dk1"/>
+          </a:lnRef>
+          <a:fillRef idx="0">
+            <a:schemeClr val="dk1"/>
+          </a:fillRef>
+          <a:effectRef idx="1">
+            <a:schemeClr val="dk1"/>
+          </a:effectRef>
+          <a:fontRef idx="minor">
+            <a:schemeClr val="tx1"/>
+          </a:fontRef>
+        </p:style>
+      </p:cxnSp>
+      <p:cxnSp>
+        <p:nvCxnSpPr>
+          <p:cNvPr id="18" name="Γραμμή σύνδεσης: Γωνιώδης 17">
+            <a:extLst>
+              <a:ext uri="{FF2B5EF4-FFF2-40B4-BE49-F238E27FC236}">
+                <a16:creationId xmlns:a16="http://schemas.microsoft.com/office/drawing/2014/main" id="{CA5D0B44-6BD0-0037-F65A-EC0A2CFF4507}"/>
+              </a:ext>
+            </a:extLst>
+          </p:cNvPr>
+          <p:cNvCxnSpPr>
+            <a:stCxn id="3" idx="3"/>
+            <a:endCxn id="6" idx="1"/>
+          </p:cNvCxnSpPr>
+          <p:nvPr/>
+        </p:nvCxnSpPr>
+        <p:spPr>
+          <a:xfrm>
+            <a:off x="5091427" y="2545556"/>
+            <a:ext cx="218445" cy="1000125"/>
+          </a:xfrm>
+          <a:prstGeom prst="bentConnector3">
+            <a:avLst/>
+          </a:prstGeom>
+          <a:ln>
+            <a:tailEnd type="triangle"/>
+          </a:ln>
+        </p:spPr>
+        <p:style>
+          <a:lnRef idx="2">
+            <a:schemeClr val="dk1"/>
+          </a:lnRef>
+          <a:fillRef idx="0">
+            <a:schemeClr val="dk1"/>
+          </a:fillRef>
+          <a:effectRef idx="1">
+            <a:schemeClr val="dk1"/>
+          </a:effectRef>
+          <a:fontRef idx="minor">
+            <a:schemeClr val="tx1"/>
+          </a:fontRef>
+        </p:style>
+      </p:cxnSp>
+      <p:cxnSp>
+        <p:nvCxnSpPr>
+          <p:cNvPr id="22" name="Γραμμή σύνδεσης: Γωνιώδης 21">
+            <a:extLst>
+              <a:ext uri="{FF2B5EF4-FFF2-40B4-BE49-F238E27FC236}">
+                <a16:creationId xmlns:a16="http://schemas.microsoft.com/office/drawing/2014/main" id="{94D463EE-4560-0F8A-5AB8-2C0266B3F654}"/>
+              </a:ext>
+            </a:extLst>
+          </p:cNvPr>
+          <p:cNvCxnSpPr>
+            <a:stCxn id="5" idx="3"/>
+            <a:endCxn id="6" idx="1"/>
+          </p:cNvCxnSpPr>
+          <p:nvPr/>
+        </p:nvCxnSpPr>
+        <p:spPr>
+          <a:xfrm flipV="1">
+            <a:off x="5091427" y="3545681"/>
+            <a:ext cx="218445" cy="1004887"/>
+          </a:xfrm>
+          <a:prstGeom prst="bentConnector3">
+            <a:avLst/>
+          </a:prstGeom>
+          <a:ln>
+            <a:tailEnd type="triangle"/>
+          </a:ln>
+        </p:spPr>
+        <p:style>
+          <a:lnRef idx="2">
+            <a:schemeClr val="dk1"/>
+          </a:lnRef>
+          <a:fillRef idx="0">
+            <a:schemeClr val="dk1"/>
+          </a:fillRef>
+          <a:effectRef idx="1">
+            <a:schemeClr val="dk1"/>
+          </a:effectRef>
+          <a:fontRef idx="minor">
+            <a:schemeClr val="tx1"/>
+          </a:fontRef>
+        </p:style>
+      </p:cxnSp>
+      <p:cxnSp>
+        <p:nvCxnSpPr>
+          <p:cNvPr id="26" name="Ευθύγραμμο βέλος σύνδεσης 25">
+            <a:extLst>
+              <a:ext uri="{FF2B5EF4-FFF2-40B4-BE49-F238E27FC236}">
+                <a16:creationId xmlns:a16="http://schemas.microsoft.com/office/drawing/2014/main" id="{947194DB-5A9C-FFC2-F37B-81A68529D0B8}"/>
+              </a:ext>
+            </a:extLst>
+          </p:cNvPr>
+          <p:cNvCxnSpPr>
+            <a:stCxn id="1025" idx="3"/>
+            <a:endCxn id="3" idx="1"/>
+          </p:cNvCxnSpPr>
+          <p:nvPr/>
+        </p:nvCxnSpPr>
+        <p:spPr>
+          <a:xfrm>
+            <a:off x="3176147" y="2545556"/>
+            <a:ext cx="448430" cy="0"/>
+          </a:xfrm>
+          <a:prstGeom prst="straightConnector1">
+            <a:avLst/>
+          </a:prstGeom>
+          <a:ln>
+            <a:tailEnd type="triangle"/>
+          </a:ln>
+        </p:spPr>
+        <p:style>
+          <a:lnRef idx="2">
+            <a:schemeClr val="dk1"/>
+          </a:lnRef>
+          <a:fillRef idx="0">
+            <a:schemeClr val="dk1"/>
+          </a:fillRef>
+          <a:effectRef idx="1">
+            <a:schemeClr val="dk1"/>
+          </a:effectRef>
+          <a:fontRef idx="minor">
+            <a:schemeClr val="tx1"/>
+          </a:fontRef>
+        </p:style>
+      </p:cxnSp>
+      <p:cxnSp>
+        <p:nvCxnSpPr>
+          <p:cNvPr id="29" name="Ευθύγραμμο βέλος σύνδεσης 28">
+            <a:extLst>
+              <a:ext uri="{FF2B5EF4-FFF2-40B4-BE49-F238E27FC236}">
+                <a16:creationId xmlns:a16="http://schemas.microsoft.com/office/drawing/2014/main" id="{4278A02A-0FA5-D801-8F3A-5673FE2FE757}"/>
+              </a:ext>
+            </a:extLst>
+          </p:cNvPr>
+          <p:cNvCxnSpPr>
+            <a:stCxn id="1026" idx="3"/>
+            <a:endCxn id="5" idx="1"/>
+          </p:cNvCxnSpPr>
+          <p:nvPr/>
+        </p:nvCxnSpPr>
+        <p:spPr>
+          <a:xfrm flipV="1">
+            <a:off x="3176147" y="4550568"/>
+            <a:ext cx="448430" cy="1"/>
+          </a:xfrm>
+          <a:prstGeom prst="straightConnector1">
+            <a:avLst/>
+          </a:prstGeom>
+          <a:ln>
+            <a:tailEnd type="triangle"/>
+          </a:ln>
+        </p:spPr>
+        <p:style>
+          <a:lnRef idx="2">
+            <a:schemeClr val="dk1"/>
+          </a:lnRef>
+          <a:fillRef idx="0">
+            <a:schemeClr val="dk1"/>
+          </a:fillRef>
+          <a:effectRef idx="1">
+            <a:schemeClr val="dk1"/>
+          </a:effectRef>
+          <a:fontRef idx="minor">
+            <a:schemeClr val="tx1"/>
+          </a:fontRef>
+        </p:style>
+      </p:cxnSp>
+      <p:cxnSp>
+        <p:nvCxnSpPr>
+          <p:cNvPr id="31" name="Ευθύγραμμο βέλος σύνδεσης 30">
+            <a:extLst>
+              <a:ext uri="{FF2B5EF4-FFF2-40B4-BE49-F238E27FC236}">
+                <a16:creationId xmlns:a16="http://schemas.microsoft.com/office/drawing/2014/main" id="{986FF478-6E4A-97E6-4B68-F74F65B7A015}"/>
+              </a:ext>
+            </a:extLst>
+          </p:cNvPr>
+          <p:cNvCxnSpPr>
+            <a:stCxn id="6" idx="3"/>
+            <a:endCxn id="7" idx="1"/>
+          </p:cNvCxnSpPr>
+          <p:nvPr/>
+        </p:nvCxnSpPr>
+        <p:spPr>
+          <a:xfrm>
+            <a:off x="7672072" y="3545681"/>
+            <a:ext cx="333437" cy="9525"/>
+          </a:xfrm>
+          <a:prstGeom prst="straightConnector1">
+            <a:avLst/>
+          </a:prstGeom>
+          <a:ln>
+            <a:tailEnd type="triangle"/>
+          </a:ln>
+        </p:spPr>
+        <p:style>
+          <a:lnRef idx="2">
+            <a:schemeClr val="dk1"/>
+          </a:lnRef>
+          <a:fillRef idx="0">
+            <a:schemeClr val="dk1"/>
+          </a:fillRef>
+          <a:effectRef idx="1">
+            <a:schemeClr val="dk1"/>
+          </a:effectRef>
+          <a:fontRef idx="minor">
+            <a:schemeClr val="tx1"/>
+          </a:fontRef>
+        </p:style>
+      </p:cxnSp>
+      <p:cxnSp>
+        <p:nvCxnSpPr>
+          <p:cNvPr id="1041" name="Ευθύγραμμο βέλος σύνδεσης 1040">
+            <a:extLst>
+              <a:ext uri="{FF2B5EF4-FFF2-40B4-BE49-F238E27FC236}">
+                <a16:creationId xmlns:a16="http://schemas.microsoft.com/office/drawing/2014/main" id="{FB98FA7B-28B7-AB5D-7218-1F561388475E}"/>
+              </a:ext>
+            </a:extLst>
+          </p:cNvPr>
+          <p:cNvCxnSpPr>
+            <a:stCxn id="7" idx="3"/>
+            <a:endCxn id="10" idx="1"/>
+          </p:cNvCxnSpPr>
+          <p:nvPr/>
+        </p:nvCxnSpPr>
+        <p:spPr>
+          <a:xfrm flipV="1">
+            <a:off x="9472359" y="3545681"/>
+            <a:ext cx="333438" cy="9525"/>
+          </a:xfrm>
+          <a:prstGeom prst="straightConnector1">
+            <a:avLst/>
+          </a:prstGeom>
+          <a:ln>
+            <a:tailEnd type="triangle"/>
+          </a:ln>
+        </p:spPr>
+        <p:style>
+          <a:lnRef idx="2">
+            <a:schemeClr val="dk1"/>
+          </a:lnRef>
+          <a:fillRef idx="0">
+            <a:schemeClr val="dk1"/>
+          </a:fillRef>
+          <a:effectRef idx="1">
+            <a:schemeClr val="dk1"/>
+          </a:effectRef>
+          <a:fontRef idx="minor">
+            <a:schemeClr val="tx1"/>
+          </a:fontRef>
+        </p:style>
+      </p:cxnSp>
+    </p:spTree>
+    <p:extLst>
+      <p:ext uri="{BB962C8B-B14F-4D97-AF65-F5344CB8AC3E}">
+        <p14:creationId xmlns:p14="http://schemas.microsoft.com/office/powerpoint/2010/main" val="3245709918"/>
+      </p:ext>
+    </p:extLst>
+  </p:cSld>
+  <p:clrMapOvr>
+    <a:overrideClrMapping bg1="lt1" tx1="dk1" bg2="lt2" tx2="dk2" accent1="accent1" accent2="accent2" accent3="accent3" accent4="accent4" accent5="accent5" accent6="accent6" hlink="hlink" folHlink="folHlink"/>
+  </p:clrMapOvr>
+  <p:timing>
+    <p:tnLst>
+      <p:par>
+        <p:cTn id="1" dur="indefinite" restart="never" nodeType="tmRoot">
+          <p:childTnLst>
+            <p:seq concurrent="1" nextAc="seek">
+              <p:cTn id="2" dur="indefinite" nodeType="mainSeq">
+                <p:childTnLst>
+                  <p:par>
+                    <p:cTn id="3" fill="hold">
+                      <p:stCondLst>
+                        <p:cond delay="indefinite"/>
+                      </p:stCondLst>
+                      <p:childTnLst>
+                        <p:par>
+                          <p:cTn id="4" fill="hold">
+                            <p:stCondLst>
+                              <p:cond delay="0"/>
+                            </p:stCondLst>
+                            <p:childTnLst>
+                              <p:par>
+                                <p:cTn id="5" presetID="22" presetClass="entr" presetSubtype="4" fill="hold" nodeType="clickEffect">
+                                  <p:stCondLst>
+                                    <p:cond delay="0"/>
+                                  </p:stCondLst>
+                                  <p:childTnLst>
+                                    <p:set>
+                                      <p:cBhvr>
+                                        <p:cTn id="6" dur="1" fill="hold">
+                                          <p:stCondLst>
+                                            <p:cond delay="0"/>
+                                          </p:stCondLst>
+                                        </p:cTn>
+                                        <p:tgtEl>
+                                          <p:spTgt spid="12"/>
+                                        </p:tgtEl>
+                                        <p:attrNameLst>
+                                          <p:attrName>style.visibility</p:attrName>
+                                        </p:attrNameLst>
+                                      </p:cBhvr>
+                                      <p:to>
+                                        <p:strVal val="visible"/>
+                                      </p:to>
+                                    </p:set>
+                                    <p:animEffect transition="in" filter="wipe(down)">
+                                      <p:cBhvr>
+                                        <p:cTn id="7" dur="500"/>
+                                        <p:tgtEl>
+                                          <p:spTgt spid="12"/>
+                                        </p:tgtEl>
+                                      </p:cBhvr>
+                                    </p:animEffect>
+                                  </p:childTnLst>
+                                </p:cTn>
+                              </p:par>
+                              <p:par>
+                                <p:cTn id="8" presetID="22" presetClass="entr" presetSubtype="1" fill="hold" nodeType="withEffect">
+                                  <p:stCondLst>
+                                    <p:cond delay="0"/>
+                                  </p:stCondLst>
+                                  <p:childTnLst>
+                                    <p:set>
+                                      <p:cBhvr>
+                                        <p:cTn id="9" dur="1" fill="hold">
+                                          <p:stCondLst>
+                                            <p:cond delay="0"/>
+                                          </p:stCondLst>
+                                        </p:cTn>
+                                        <p:tgtEl>
+                                          <p:spTgt spid="15"/>
+                                        </p:tgtEl>
+                                        <p:attrNameLst>
+                                          <p:attrName>style.visibility</p:attrName>
+                                        </p:attrNameLst>
+                                      </p:cBhvr>
+                                      <p:to>
+                                        <p:strVal val="visible"/>
+                                      </p:to>
+                                    </p:set>
+                                    <p:animEffect transition="in" filter="wipe(up)">
+                                      <p:cBhvr>
+                                        <p:cTn id="10" dur="500"/>
+                                        <p:tgtEl>
+                                          <p:spTgt spid="15"/>
+                                        </p:tgtEl>
+                                      </p:cBhvr>
+                                    </p:animEffect>
+                                  </p:childTnLst>
+                                </p:cTn>
+                              </p:par>
+                            </p:childTnLst>
+                          </p:cTn>
+                        </p:par>
+                        <p:par>
+                          <p:cTn id="11" fill="hold">
+                            <p:stCondLst>
+                              <p:cond delay="500"/>
+                            </p:stCondLst>
+                            <p:childTnLst>
+                              <p:par>
+                                <p:cTn id="12" presetID="22" presetClass="entr" presetSubtype="8" fill="hold" nodeType="afterEffect">
+                                  <p:stCondLst>
+                                    <p:cond delay="0"/>
+                                  </p:stCondLst>
+                                  <p:childTnLst>
+                                    <p:set>
+                                      <p:cBhvr>
+                                        <p:cTn id="13" dur="1" fill="hold">
+                                          <p:stCondLst>
+                                            <p:cond delay="0"/>
+                                          </p:stCondLst>
+                                        </p:cTn>
+                                        <p:tgtEl>
+                                          <p:spTgt spid="1025"/>
+                                        </p:tgtEl>
+                                        <p:attrNameLst>
+                                          <p:attrName>style.visibility</p:attrName>
+                                        </p:attrNameLst>
+                                      </p:cBhvr>
+                                      <p:to>
+                                        <p:strVal val="visible"/>
+                                      </p:to>
+                                    </p:set>
+                                    <p:animEffect transition="in" filter="wipe(left)">
+                                      <p:cBhvr>
+                                        <p:cTn id="14" dur="500"/>
+                                        <p:tgtEl>
+                                          <p:spTgt spid="1025"/>
+                                        </p:tgtEl>
+                                      </p:cBhvr>
+                                    </p:animEffect>
+                                  </p:childTnLst>
+                                </p:cTn>
+                              </p:par>
+                              <p:par>
+                                <p:cTn id="15" presetID="22" presetClass="entr" presetSubtype="8" fill="hold" nodeType="withEffect">
+                                  <p:stCondLst>
+                                    <p:cond delay="0"/>
+                                  </p:stCondLst>
+                                  <p:childTnLst>
+                                    <p:set>
+                                      <p:cBhvr>
+                                        <p:cTn id="16" dur="1" fill="hold">
+                                          <p:stCondLst>
+                                            <p:cond delay="0"/>
+                                          </p:stCondLst>
+                                        </p:cTn>
+                                        <p:tgtEl>
+                                          <p:spTgt spid="1026"/>
+                                        </p:tgtEl>
+                                        <p:attrNameLst>
+                                          <p:attrName>style.visibility</p:attrName>
+                                        </p:attrNameLst>
+                                      </p:cBhvr>
+                                      <p:to>
+                                        <p:strVal val="visible"/>
+                                      </p:to>
+                                    </p:set>
+                                    <p:animEffect transition="in" filter="wipe(left)">
+                                      <p:cBhvr>
+                                        <p:cTn id="17" dur="500"/>
+                                        <p:tgtEl>
+                                          <p:spTgt spid="1026"/>
+                                        </p:tgtEl>
+                                      </p:cBhvr>
+                                    </p:animEffect>
+                                  </p:childTnLst>
+                                </p:cTn>
+                              </p:par>
+                            </p:childTnLst>
+                          </p:cTn>
+                        </p:par>
+                      </p:childTnLst>
+                    </p:cTn>
+                  </p:par>
+                  <p:par>
+                    <p:cTn id="18" fill="hold">
+                      <p:stCondLst>
+                        <p:cond delay="indefinite"/>
+                      </p:stCondLst>
+                      <p:childTnLst>
+                        <p:par>
+                          <p:cTn id="19" fill="hold">
+                            <p:stCondLst>
+                              <p:cond delay="0"/>
+                            </p:stCondLst>
+                            <p:childTnLst>
+                              <p:par>
+                                <p:cTn id="20" presetID="22" presetClass="entr" presetSubtype="8" fill="hold" nodeType="clickEffect">
+                                  <p:stCondLst>
+                                    <p:cond delay="0"/>
+                                  </p:stCondLst>
+                                  <p:childTnLst>
+                                    <p:set>
+                                      <p:cBhvr>
+                                        <p:cTn id="21" dur="1" fill="hold">
+                                          <p:stCondLst>
+                                            <p:cond delay="0"/>
+                                          </p:stCondLst>
+                                        </p:cTn>
+                                        <p:tgtEl>
+                                          <p:spTgt spid="26"/>
+                                        </p:tgtEl>
+                                        <p:attrNameLst>
+                                          <p:attrName>style.visibility</p:attrName>
+                                        </p:attrNameLst>
+                                      </p:cBhvr>
+                                      <p:to>
+                                        <p:strVal val="visible"/>
+                                      </p:to>
+                                    </p:set>
+                                    <p:animEffect transition="in" filter="wipe(left)">
+                                      <p:cBhvr>
+                                        <p:cTn id="22" dur="500"/>
+                                        <p:tgtEl>
+                                          <p:spTgt spid="26"/>
+                                        </p:tgtEl>
+                                      </p:cBhvr>
+                                    </p:animEffect>
+                                  </p:childTnLst>
+                                </p:cTn>
+                              </p:par>
+                            </p:childTnLst>
+                          </p:cTn>
+                        </p:par>
+                        <p:par>
+                          <p:cTn id="23" fill="hold">
+                            <p:stCondLst>
+                              <p:cond delay="500"/>
+                            </p:stCondLst>
+                            <p:childTnLst>
+                              <p:par>
+                                <p:cTn id="24" presetID="22" presetClass="entr" presetSubtype="8" fill="hold" nodeType="afterEffect">
+                                  <p:stCondLst>
+                                    <p:cond delay="0"/>
+                                  </p:stCondLst>
+                                  <p:childTnLst>
+                                    <p:set>
+                                      <p:cBhvr>
+                                        <p:cTn id="25" dur="1" fill="hold">
+                                          <p:stCondLst>
+                                            <p:cond delay="0"/>
+                                          </p:stCondLst>
+                                        </p:cTn>
+                                        <p:tgtEl>
+                                          <p:spTgt spid="3"/>
+                                        </p:tgtEl>
+                                        <p:attrNameLst>
+                                          <p:attrName>style.visibility</p:attrName>
+                                        </p:attrNameLst>
+                                      </p:cBhvr>
+                                      <p:to>
+                                        <p:strVal val="visible"/>
+                                      </p:to>
+                                    </p:set>
+                                    <p:animEffect transition="in" filter="wipe(left)">
+                                      <p:cBhvr>
+                                        <p:cTn id="26" dur="500"/>
+                                        <p:tgtEl>
+                                          <p:spTgt spid="3"/>
+                                        </p:tgtEl>
+                                      </p:cBhvr>
+                                    </p:animEffect>
+                                  </p:childTnLst>
+                                </p:cTn>
+                              </p:par>
+                            </p:childTnLst>
+                          </p:cTn>
+                        </p:par>
+                      </p:childTnLst>
+                    </p:cTn>
+                  </p:par>
+                  <p:par>
+                    <p:cTn id="27" fill="hold">
+                      <p:stCondLst>
+                        <p:cond delay="indefinite"/>
+                      </p:stCondLst>
+                      <p:childTnLst>
+                        <p:par>
+                          <p:cTn id="28" fill="hold">
+                            <p:stCondLst>
+                              <p:cond delay="0"/>
+                            </p:stCondLst>
+                            <p:childTnLst>
+                              <p:par>
+                                <p:cTn id="29" presetID="22" presetClass="entr" presetSubtype="8" fill="hold" nodeType="clickEffect">
+                                  <p:stCondLst>
+                                    <p:cond delay="0"/>
+                                  </p:stCondLst>
+                                  <p:childTnLst>
+                                    <p:set>
+                                      <p:cBhvr>
+                                        <p:cTn id="30" dur="1" fill="hold">
+                                          <p:stCondLst>
+                                            <p:cond delay="0"/>
+                                          </p:stCondLst>
+                                        </p:cTn>
+                                        <p:tgtEl>
+                                          <p:spTgt spid="29"/>
+                                        </p:tgtEl>
+                                        <p:attrNameLst>
+                                          <p:attrName>style.visibility</p:attrName>
+                                        </p:attrNameLst>
+                                      </p:cBhvr>
+                                      <p:to>
+                                        <p:strVal val="visible"/>
+                                      </p:to>
+                                    </p:set>
+                                    <p:animEffect transition="in" filter="wipe(left)">
+                                      <p:cBhvr>
+                                        <p:cTn id="31" dur="500"/>
+                                        <p:tgtEl>
+                                          <p:spTgt spid="29"/>
+                                        </p:tgtEl>
+                                      </p:cBhvr>
+                                    </p:animEffect>
+                                  </p:childTnLst>
+                                </p:cTn>
+                              </p:par>
+                            </p:childTnLst>
+                          </p:cTn>
+                        </p:par>
+                        <p:par>
+                          <p:cTn id="32" fill="hold">
+                            <p:stCondLst>
+                              <p:cond delay="500"/>
+                            </p:stCondLst>
+                            <p:childTnLst>
+                              <p:par>
+                                <p:cTn id="33" presetID="22" presetClass="entr" presetSubtype="8" fill="hold" nodeType="afterEffect">
+                                  <p:stCondLst>
+                                    <p:cond delay="0"/>
+                                  </p:stCondLst>
+                                  <p:childTnLst>
+                                    <p:set>
+                                      <p:cBhvr>
+                                        <p:cTn id="34" dur="1" fill="hold">
+                                          <p:stCondLst>
+                                            <p:cond delay="0"/>
+                                          </p:stCondLst>
+                                        </p:cTn>
+                                        <p:tgtEl>
+                                          <p:spTgt spid="5"/>
+                                        </p:tgtEl>
+                                        <p:attrNameLst>
+                                          <p:attrName>style.visibility</p:attrName>
+                                        </p:attrNameLst>
+                                      </p:cBhvr>
+                                      <p:to>
+                                        <p:strVal val="visible"/>
+                                      </p:to>
+                                    </p:set>
+                                    <p:animEffect transition="in" filter="wipe(left)">
+                                      <p:cBhvr>
+                                        <p:cTn id="35" dur="500"/>
+                                        <p:tgtEl>
+                                          <p:spTgt spid="5"/>
+                                        </p:tgtEl>
+                                      </p:cBhvr>
+                                    </p:animEffect>
+                                  </p:childTnLst>
+                                </p:cTn>
+                              </p:par>
+                            </p:childTnLst>
+                          </p:cTn>
+                        </p:par>
+                      </p:childTnLst>
+                    </p:cTn>
+                  </p:par>
+                  <p:par>
+                    <p:cTn id="36" fill="hold">
+                      <p:stCondLst>
+                        <p:cond delay="indefinite"/>
+                      </p:stCondLst>
+                      <p:childTnLst>
+                        <p:par>
+                          <p:cTn id="37" fill="hold">
+                            <p:stCondLst>
+                              <p:cond delay="0"/>
+                            </p:stCondLst>
+                            <p:childTnLst>
+                              <p:par>
+                                <p:cTn id="38" presetID="22" presetClass="entr" presetSubtype="1" fill="hold" nodeType="clickEffect">
+                                  <p:stCondLst>
+                                    <p:cond delay="0"/>
+                                  </p:stCondLst>
+                                  <p:childTnLst>
+                                    <p:set>
+                                      <p:cBhvr>
+                                        <p:cTn id="39" dur="1" fill="hold">
+                                          <p:stCondLst>
+                                            <p:cond delay="0"/>
+                                          </p:stCondLst>
+                                        </p:cTn>
+                                        <p:tgtEl>
+                                          <p:spTgt spid="18"/>
+                                        </p:tgtEl>
+                                        <p:attrNameLst>
+                                          <p:attrName>style.visibility</p:attrName>
+                                        </p:attrNameLst>
+                                      </p:cBhvr>
+                                      <p:to>
+                                        <p:strVal val="visible"/>
+                                      </p:to>
+                                    </p:set>
+                                    <p:animEffect transition="in" filter="wipe(up)">
+                                      <p:cBhvr>
+                                        <p:cTn id="40" dur="500"/>
+                                        <p:tgtEl>
+                                          <p:spTgt spid="18"/>
+                                        </p:tgtEl>
+                                      </p:cBhvr>
+                                    </p:animEffect>
+                                  </p:childTnLst>
+                                </p:cTn>
+                              </p:par>
+                              <p:par>
+                                <p:cTn id="41" presetID="22" presetClass="entr" presetSubtype="4" fill="hold" nodeType="withEffect">
+                                  <p:stCondLst>
+                                    <p:cond delay="0"/>
+                                  </p:stCondLst>
+                                  <p:childTnLst>
+                                    <p:set>
+                                      <p:cBhvr>
+                                        <p:cTn id="42" dur="1" fill="hold">
+                                          <p:stCondLst>
+                                            <p:cond delay="0"/>
+                                          </p:stCondLst>
+                                        </p:cTn>
+                                        <p:tgtEl>
+                                          <p:spTgt spid="22"/>
+                                        </p:tgtEl>
+                                        <p:attrNameLst>
+                                          <p:attrName>style.visibility</p:attrName>
+                                        </p:attrNameLst>
+                                      </p:cBhvr>
+                                      <p:to>
+                                        <p:strVal val="visible"/>
+                                      </p:to>
+                                    </p:set>
+                                    <p:animEffect transition="in" filter="wipe(down)">
+                                      <p:cBhvr>
+                                        <p:cTn id="43" dur="500"/>
+                                        <p:tgtEl>
+                                          <p:spTgt spid="22"/>
+                                        </p:tgtEl>
+                                      </p:cBhvr>
+                                    </p:animEffect>
+                                  </p:childTnLst>
+                                </p:cTn>
+                              </p:par>
+                            </p:childTnLst>
+                          </p:cTn>
+                        </p:par>
+                        <p:par>
+                          <p:cTn id="44" fill="hold">
+                            <p:stCondLst>
+                              <p:cond delay="500"/>
+                            </p:stCondLst>
+                            <p:childTnLst>
+                              <p:par>
+                                <p:cTn id="45" presetID="22" presetClass="entr" presetSubtype="8" fill="hold" nodeType="afterEffect">
+                                  <p:stCondLst>
+                                    <p:cond delay="0"/>
+                                  </p:stCondLst>
+                                  <p:childTnLst>
+                                    <p:set>
+                                      <p:cBhvr>
+                                        <p:cTn id="46" dur="1" fill="hold">
+                                          <p:stCondLst>
+                                            <p:cond delay="0"/>
+                                          </p:stCondLst>
+                                        </p:cTn>
+                                        <p:tgtEl>
+                                          <p:spTgt spid="6"/>
+                                        </p:tgtEl>
+                                        <p:attrNameLst>
+                                          <p:attrName>style.visibility</p:attrName>
+                                        </p:attrNameLst>
+                                      </p:cBhvr>
+                                      <p:to>
+                                        <p:strVal val="visible"/>
+                                      </p:to>
+                                    </p:set>
+                                    <p:animEffect transition="in" filter="wipe(left)">
+                                      <p:cBhvr>
+                                        <p:cTn id="47" dur="500"/>
+                                        <p:tgtEl>
+                                          <p:spTgt spid="6"/>
+                                        </p:tgtEl>
+                                      </p:cBhvr>
+                                    </p:animEffect>
+                                  </p:childTnLst>
+                                </p:cTn>
+                              </p:par>
+                            </p:childTnLst>
+                          </p:cTn>
+                        </p:par>
+                      </p:childTnLst>
+                    </p:cTn>
+                  </p:par>
+                  <p:par>
+                    <p:cTn id="48" fill="hold">
+                      <p:stCondLst>
+                        <p:cond delay="indefinite"/>
+                      </p:stCondLst>
+                      <p:childTnLst>
+                        <p:par>
+                          <p:cTn id="49" fill="hold">
+                            <p:stCondLst>
+                              <p:cond delay="0"/>
+                            </p:stCondLst>
+                            <p:childTnLst>
+                              <p:par>
+                                <p:cTn id="50" presetID="22" presetClass="entr" presetSubtype="8" fill="hold" nodeType="clickEffect">
+                                  <p:stCondLst>
+                                    <p:cond delay="0"/>
+                                  </p:stCondLst>
+                                  <p:childTnLst>
+                                    <p:set>
+                                      <p:cBhvr>
+                                        <p:cTn id="51" dur="1" fill="hold">
+                                          <p:stCondLst>
+                                            <p:cond delay="0"/>
+                                          </p:stCondLst>
+                                        </p:cTn>
+                                        <p:tgtEl>
+                                          <p:spTgt spid="31"/>
+                                        </p:tgtEl>
+                                        <p:attrNameLst>
+                                          <p:attrName>style.visibility</p:attrName>
+                                        </p:attrNameLst>
+                                      </p:cBhvr>
+                                      <p:to>
+                                        <p:strVal val="visible"/>
+                                      </p:to>
+                                    </p:set>
+                                    <p:animEffect transition="in" filter="wipe(left)">
+                                      <p:cBhvr>
+                                        <p:cTn id="52" dur="500"/>
+                                        <p:tgtEl>
+                                          <p:spTgt spid="31"/>
+                                        </p:tgtEl>
+                                      </p:cBhvr>
+                                    </p:animEffect>
+                                  </p:childTnLst>
+                                </p:cTn>
+                              </p:par>
+                            </p:childTnLst>
+                          </p:cTn>
+                        </p:par>
+                        <p:par>
+                          <p:cTn id="53" fill="hold">
+                            <p:stCondLst>
+                              <p:cond delay="500"/>
+                            </p:stCondLst>
+                            <p:childTnLst>
+                              <p:par>
+                                <p:cTn id="54" presetID="22" presetClass="entr" presetSubtype="8" fill="hold" nodeType="afterEffect">
+                                  <p:stCondLst>
+                                    <p:cond delay="0"/>
+                                  </p:stCondLst>
+                                  <p:childTnLst>
+                                    <p:set>
+                                      <p:cBhvr>
+                                        <p:cTn id="55" dur="1" fill="hold">
+                                          <p:stCondLst>
+                                            <p:cond delay="0"/>
+                                          </p:stCondLst>
+                                        </p:cTn>
+                                        <p:tgtEl>
+                                          <p:spTgt spid="7"/>
+                                        </p:tgtEl>
+                                        <p:attrNameLst>
+                                          <p:attrName>style.visibility</p:attrName>
+                                        </p:attrNameLst>
+                                      </p:cBhvr>
+                                      <p:to>
+                                        <p:strVal val="visible"/>
+                                      </p:to>
+                                    </p:set>
+                                    <p:animEffect transition="in" filter="wipe(left)">
+                                      <p:cBhvr>
+                                        <p:cTn id="56" dur="500"/>
+                                        <p:tgtEl>
+                                          <p:spTgt spid="7"/>
+                                        </p:tgtEl>
+                                      </p:cBhvr>
+                                    </p:animEffect>
+                                  </p:childTnLst>
+                                </p:cTn>
+                              </p:par>
+                            </p:childTnLst>
+                          </p:cTn>
+                        </p:par>
+                      </p:childTnLst>
+                    </p:cTn>
+                  </p:par>
+                  <p:par>
+                    <p:cTn id="57" fill="hold">
+                      <p:stCondLst>
+                        <p:cond delay="indefinite"/>
+                      </p:stCondLst>
+                      <p:childTnLst>
+                        <p:par>
+                          <p:cTn id="58" fill="hold">
+                            <p:stCondLst>
+                              <p:cond delay="0"/>
+                            </p:stCondLst>
+                            <p:childTnLst>
+                              <p:par>
+                                <p:cTn id="59" presetID="22" presetClass="entr" presetSubtype="8" fill="hold" nodeType="clickEffect">
+                                  <p:stCondLst>
+                                    <p:cond delay="0"/>
+                                  </p:stCondLst>
+                                  <p:childTnLst>
+                                    <p:set>
+                                      <p:cBhvr>
+                                        <p:cTn id="60" dur="1" fill="hold">
+                                          <p:stCondLst>
+                                            <p:cond delay="0"/>
+                                          </p:stCondLst>
+                                        </p:cTn>
+                                        <p:tgtEl>
+                                          <p:spTgt spid="1041"/>
+                                        </p:tgtEl>
+                                        <p:attrNameLst>
+                                          <p:attrName>style.visibility</p:attrName>
+                                        </p:attrNameLst>
+                                      </p:cBhvr>
+                                      <p:to>
+                                        <p:strVal val="visible"/>
+                                      </p:to>
+                                    </p:set>
+                                    <p:animEffect transition="in" filter="wipe(left)">
+                                      <p:cBhvr>
+                                        <p:cTn id="61" dur="500"/>
+                                        <p:tgtEl>
+                                          <p:spTgt spid="1041"/>
+                                        </p:tgtEl>
+                                      </p:cBhvr>
+                                    </p:animEffect>
+                                  </p:childTnLst>
+                                </p:cTn>
+                              </p:par>
+                            </p:childTnLst>
+                          </p:cTn>
+                        </p:par>
+                        <p:par>
+                          <p:cTn id="62" fill="hold">
+                            <p:stCondLst>
+                              <p:cond delay="500"/>
+                            </p:stCondLst>
+                            <p:childTnLst>
+                              <p:par>
+                                <p:cTn id="63" presetID="22" presetClass="entr" presetSubtype="8" fill="hold" nodeType="afterEffect">
+                                  <p:stCondLst>
+                                    <p:cond delay="0"/>
+                                  </p:stCondLst>
+                                  <p:childTnLst>
+                                    <p:set>
+                                      <p:cBhvr>
+                                        <p:cTn id="64" dur="1" fill="hold">
+                                          <p:stCondLst>
+                                            <p:cond delay="0"/>
+                                          </p:stCondLst>
+                                        </p:cTn>
+                                        <p:tgtEl>
+                                          <p:spTgt spid="10"/>
+                                        </p:tgtEl>
+                                        <p:attrNameLst>
+                                          <p:attrName>style.visibility</p:attrName>
+                                        </p:attrNameLst>
+                                      </p:cBhvr>
+                                      <p:to>
+                                        <p:strVal val="visible"/>
+                                      </p:to>
+                                    </p:set>
+                                    <p:animEffect transition="in" filter="wipe(left)">
+                                      <p:cBhvr>
+                                        <p:cTn id="65" dur="500"/>
+                                        <p:tgtEl>
+                                          <p:spTgt spid="10"/>
+                                        </p:tgtEl>
+                                      </p:cBhvr>
+                                    </p:animEffect>
+                                  </p:childTnLst>
+                                </p:cTn>
+                              </p:par>
+                            </p:childTnLst>
+                          </p:cTn>
+                        </p:par>
+                      </p:childTnLst>
+                    </p:cTn>
+                  </p:par>
+                </p:childTnLst>
+              </p:cTn>
+              <p:prevCondLst>
+                <p:cond evt="onPrev" delay="0">
+                  <p:tgtEl>
+                    <p:sldTgt/>
+                  </p:tgtEl>
+                </p:cond>
+              </p:prevCondLst>
+              <p:nextCondLst>
+                <p:cond evt="onNext" delay="0">
+                  <p:tgtEl>
+                    <p:sldTgt/>
+                  </p:tgtEl>
+                </p:cond>
+              </p:nextCondLst>
+            </p:seq>
+          </p:childTnLst>
+        </p:cTn>
+      </p:par>
+    </p:tnLst>
+  </p:timing>
+</p:sld>
+</file>
+
 <file path=ppt/slides/slide2.xml><?xml version="1.0" encoding="utf-8"?>
 <p:sld xmlns:a="http://schemas.openxmlformats.org/drawingml/2006/main" xmlns:r="http://schemas.openxmlformats.org/officeDocument/2006/relationships" xmlns:p="http://schemas.openxmlformats.org/presentationml/2006/main" show="0">
   <p:cSld>
@@ -19752,13 +21521,13 @@
   <p:clrMapOvr>
     <a:overrideClrMapping bg1="lt1" tx1="dk1" bg2="lt2" tx2="dk2" accent1="accent1" accent2="accent2" accent3="accent3" accent4="accent4" accent5="accent5" accent6="accent6" hlink="hlink" folHlink="folHlink"/>
   </p:clrMapOvr>
-  <mc:AlternateContent xmlns:mc="http://schemas.openxmlformats.org/markup-compatibility/2006">
-    <mc:Choice xmlns:p14="http://schemas.microsoft.com/office/powerpoint/2010/main" Requires="p14">
+  <mc:AlternateContent xmlns:mc="http://schemas.openxmlformats.org/markup-compatibility/2006" xmlns:p14="http://schemas.microsoft.com/office/powerpoint/2010/main">
+    <mc:Choice Requires="p14">
       <p:transition spd="med" p14:dur="700">
         <p:fade/>
       </p:transition>
     </mc:Choice>
-    <mc:Fallback>
+    <mc:Fallback xmlns="">
       <p:transition spd="med">
         <p:fade/>
       </p:transition>
@@ -23349,13 +25118,13 @@
   <p:clrMapOvr>
     <a:overrideClrMapping bg1="lt1" tx1="dk1" bg2="lt2" tx2="dk2" accent1="accent1" accent2="accent2" accent3="accent3" accent4="accent4" accent5="accent5" accent6="accent6" hlink="hlink" folHlink="folHlink"/>
   </p:clrMapOvr>
-  <mc:AlternateContent xmlns:mc="http://schemas.openxmlformats.org/markup-compatibility/2006">
-    <mc:Choice xmlns:p159="http://schemas.microsoft.com/office/powerpoint/2015/09/main" Requires="p159">
+  <mc:AlternateContent xmlns:mc="http://schemas.openxmlformats.org/markup-compatibility/2006" xmlns:p159="http://schemas.microsoft.com/office/powerpoint/2015/09/main">
+    <mc:Choice Requires="p159">
       <p:transition xmlns:p14="http://schemas.microsoft.com/office/powerpoint/2010/main" spd="slow" p14:dur="2000">
         <p159:morph option="byObject"/>
       </p:transition>
     </mc:Choice>
-    <mc:Fallback>
+    <mc:Fallback xmlns="">
       <p:transition spd="slow">
         <p:fade/>
       </p:transition>
@@ -23438,7 +25207,7 @@
           <p:nvPr/>
         </p:nvPicPr>
         <p:blipFill>
-          <a:blip r:embed="rId3">
+          <a:blip r:embed="rId5">
             <a:extLst>
               <a:ext uri="{28A0092B-C50C-407E-A947-70E740481C1C}">
                 <a14:useLocalDpi xmlns:a14="http://schemas.microsoft.com/office/drawing/2010/main" val="0"/>
@@ -23452,55 +25221,8 @@
         </p:blipFill>
         <p:spPr bwMode="auto">
           <a:xfrm>
-            <a:off x="-30290" y="3319272"/>
+            <a:off x="884300" y="2997095"/>
             <a:ext cx="1457325" cy="1009650"/>
-          </a:xfrm>
-          <a:prstGeom prst="rect">
-            <a:avLst/>
-          </a:prstGeom>
-          <a:noFill/>
-          <a:extLst>
-            <a:ext uri="{909E8E84-426E-40DD-AFC4-6F175D3DCCD1}">
-              <a14:hiddenFill xmlns:a14="http://schemas.microsoft.com/office/drawing/2010/main">
-                <a:solidFill>
-                  <a:srgbClr val="FFFFFF"/>
-                </a:solidFill>
-              </a14:hiddenFill>
-            </a:ext>
-          </a:extLst>
-        </p:spPr>
-      </p:pic>
-      <p:pic>
-        <p:nvPicPr>
-          <p:cNvPr id="2" name="Picture 2">
-            <a:extLst>
-              <a:ext uri="{FF2B5EF4-FFF2-40B4-BE49-F238E27FC236}">
-                <a16:creationId xmlns:a16="http://schemas.microsoft.com/office/drawing/2014/main" id="{56058894-B2C2-D6B4-1976-4C0EC0508122}"/>
-              </a:ext>
-            </a:extLst>
-          </p:cNvPr>
-          <p:cNvPicPr>
-            <a:picLocks noChangeAspect="1" noChangeArrowheads="1"/>
-          </p:cNvPicPr>
-          <p:nvPr/>
-        </p:nvPicPr>
-        <p:blipFill>
-          <a:blip r:embed="rId4">
-            <a:extLst>
-              <a:ext uri="{28A0092B-C50C-407E-A947-70E740481C1C}">
-                <a14:useLocalDpi xmlns:a14="http://schemas.microsoft.com/office/drawing/2010/main" val="0"/>
-              </a:ext>
-            </a:extLst>
-          </a:blip>
-          <a:srcRect/>
-          <a:stretch>
-            <a:fillRect/>
-          </a:stretch>
-        </p:blipFill>
-        <p:spPr bwMode="auto">
-          <a:xfrm>
-            <a:off x="1598011" y="3319272"/>
-            <a:ext cx="1466850" cy="1009650"/>
           </a:xfrm>
           <a:prstGeom prst="rect">
             <a:avLst/>
@@ -23532,7 +25254,7 @@
           <p:nvPr/>
         </p:nvPicPr>
         <p:blipFill>
-          <a:blip r:embed="rId5">
+          <a:blip r:embed="rId6">
             <a:extLst>
               <a:ext uri="{28A0092B-C50C-407E-A947-70E740481C1C}">
                 <a14:useLocalDpi xmlns:a14="http://schemas.microsoft.com/office/drawing/2010/main" val="0"/>
@@ -23546,7 +25268,7 @@
         </p:blipFill>
         <p:spPr bwMode="auto">
           <a:xfrm>
-            <a:off x="3229976" y="3319272"/>
+            <a:off x="4144566" y="2997095"/>
             <a:ext cx="1466850" cy="1009650"/>
           </a:xfrm>
           <a:prstGeom prst="rect">
@@ -23579,7 +25301,7 @@
           <p:nvPr/>
         </p:nvPicPr>
         <p:blipFill>
-          <a:blip r:embed="rId6">
+          <a:blip r:embed="rId7">
             <a:extLst>
               <a:ext uri="{28A0092B-C50C-407E-A947-70E740481C1C}">
                 <a14:useLocalDpi xmlns:a14="http://schemas.microsoft.com/office/drawing/2010/main" val="0"/>
@@ -23593,7 +25315,7 @@
         </p:blipFill>
         <p:spPr bwMode="auto">
           <a:xfrm>
-            <a:off x="4910709" y="3319272"/>
+            <a:off x="5825299" y="2997095"/>
             <a:ext cx="2676525" cy="1009650"/>
           </a:xfrm>
           <a:prstGeom prst="rect">
@@ -23626,53 +25348,6 @@
           <p:nvPr/>
         </p:nvPicPr>
         <p:blipFill>
-          <a:blip r:embed="rId7">
-            <a:extLst>
-              <a:ext uri="{28A0092B-C50C-407E-A947-70E740481C1C}">
-                <a14:useLocalDpi xmlns:a14="http://schemas.microsoft.com/office/drawing/2010/main" val="0"/>
-              </a:ext>
-            </a:extLst>
-          </a:blip>
-          <a:srcRect/>
-          <a:stretch>
-            <a:fillRect/>
-          </a:stretch>
-        </p:blipFill>
-        <p:spPr bwMode="auto">
-          <a:xfrm>
-            <a:off x="7752349" y="3319272"/>
-            <a:ext cx="2676525" cy="1009650"/>
-          </a:xfrm>
-          <a:prstGeom prst="rect">
-            <a:avLst/>
-          </a:prstGeom>
-          <a:noFill/>
-          <a:extLst>
-            <a:ext uri="{909E8E84-426E-40DD-AFC4-6F175D3DCCD1}">
-              <a14:hiddenFill xmlns:a14="http://schemas.microsoft.com/office/drawing/2010/main">
-                <a:solidFill>
-                  <a:srgbClr val="FFFFFF"/>
-                </a:solidFill>
-              </a14:hiddenFill>
-            </a:ext>
-          </a:extLst>
-        </p:spPr>
-      </p:pic>
-      <p:pic>
-        <p:nvPicPr>
-          <p:cNvPr id="2055" name="Picture 7">
-            <a:extLst>
-              <a:ext uri="{FF2B5EF4-FFF2-40B4-BE49-F238E27FC236}">
-                <a16:creationId xmlns:a16="http://schemas.microsoft.com/office/drawing/2014/main" id="{EE56410C-4D62-28B5-C239-55E3D885F4E0}"/>
-              </a:ext>
-            </a:extLst>
-          </p:cNvPr>
-          <p:cNvPicPr>
-            <a:picLocks noChangeAspect="1" noChangeArrowheads="1"/>
-          </p:cNvPicPr>
-          <p:nvPr/>
-        </p:nvPicPr>
-        <p:blipFill>
           <a:blip r:embed="rId8">
             <a:extLst>
               <a:ext uri="{28A0092B-C50C-407E-A947-70E740481C1C}">
@@ -23687,8 +25362,8 @@
         </p:blipFill>
         <p:spPr bwMode="auto">
           <a:xfrm>
-            <a:off x="10545176" y="3319272"/>
-            <a:ext cx="1704975" cy="1009650"/>
+            <a:off x="8666939" y="2997095"/>
+            <a:ext cx="2676525" cy="1009650"/>
           </a:xfrm>
           <a:prstGeom prst="rect">
             <a:avLst/>
@@ -23716,13 +25391,12 @@
           </p:cNvPr>
           <p:cNvCxnSpPr>
             <a:stCxn id="2049" idx="3"/>
-            <a:endCxn id="2" idx="1"/>
           </p:cNvCxnSpPr>
           <p:nvPr/>
         </p:nvCxnSpPr>
         <p:spPr>
           <a:xfrm>
-            <a:off x="1427035" y="3824097"/>
+            <a:off x="2341625" y="3501920"/>
             <a:ext cx="170976" cy="0"/>
           </a:xfrm>
           <a:prstGeom prst="straightConnector1">
@@ -23757,14 +25431,13 @@
             </a:extLst>
           </p:cNvPr>
           <p:cNvCxnSpPr>
-            <a:stCxn id="2" idx="3"/>
             <a:endCxn id="2051" idx="1"/>
           </p:cNvCxnSpPr>
           <p:nvPr/>
         </p:nvCxnSpPr>
         <p:spPr>
           <a:xfrm>
-            <a:off x="3064861" y="3824097"/>
+            <a:off x="3979451" y="3501920"/>
             <a:ext cx="165115" cy="0"/>
           </a:xfrm>
           <a:prstGeom prst="straightConnector1">
@@ -23806,7 +25479,7 @@
         </p:nvCxnSpPr>
         <p:spPr>
           <a:xfrm>
-            <a:off x="4696826" y="3824097"/>
+            <a:off x="5611416" y="3501920"/>
             <a:ext cx="213883" cy="0"/>
           </a:xfrm>
           <a:prstGeom prst="straightConnector1">
@@ -23848,7 +25521,7 @@
         </p:nvCxnSpPr>
         <p:spPr>
           <a:xfrm>
-            <a:off x="7587234" y="3824097"/>
+            <a:off x="8501824" y="3501920"/>
             <a:ext cx="165115" cy="0"/>
           </a:xfrm>
           <a:prstGeom prst="straightConnector1">
@@ -23873,27 +25546,291 @@
           </a:fontRef>
         </p:style>
       </p:cxnSp>
+      <p:pic>
+        <p:nvPicPr>
+          <p:cNvPr id="3" name="Picture 1">
+            <a:extLst>
+              <a:ext uri="{FF2B5EF4-FFF2-40B4-BE49-F238E27FC236}">
+                <a16:creationId xmlns:a16="http://schemas.microsoft.com/office/drawing/2014/main" id="{4120F3BF-43A5-CF22-6BAE-042B933F5E92}"/>
+              </a:ext>
+            </a:extLst>
+          </p:cNvPr>
+          <p:cNvPicPr>
+            <a:picLocks noChangeAspect="1" noChangeArrowheads="1"/>
+          </p:cNvPicPr>
+          <p:nvPr/>
+        </p:nvPicPr>
+        <p:blipFill>
+          <a:blip r:embed="rId9">
+            <a:extLst>
+              <a:ext uri="{28A0092B-C50C-407E-A947-70E740481C1C}">
+                <a14:useLocalDpi xmlns:a14="http://schemas.microsoft.com/office/drawing/2010/main" val="0"/>
+              </a:ext>
+            </a:extLst>
+          </a:blip>
+          <a:srcRect/>
+          <a:stretch>
+            <a:fillRect/>
+          </a:stretch>
+        </p:blipFill>
+        <p:spPr bwMode="auto">
+          <a:xfrm>
+            <a:off x="2506740" y="2997095"/>
+            <a:ext cx="1457325" cy="1009650"/>
+          </a:xfrm>
+          <a:prstGeom prst="rect">
+            <a:avLst/>
+          </a:prstGeom>
+          <a:noFill/>
+          <a:extLst>
+            <a:ext uri="{909E8E84-426E-40DD-AFC4-6F175D3DCCD1}">
+              <a14:hiddenFill xmlns:a14="http://schemas.microsoft.com/office/drawing/2010/main">
+                <a:solidFill>
+                  <a:srgbClr val="FFFFFF"/>
+                </a:solidFill>
+              </a14:hiddenFill>
+            </a:ext>
+          </a:extLst>
+        </p:spPr>
+      </p:pic>
+      <p:pic>
+        <p:nvPicPr>
+          <p:cNvPr id="1026" name="Picture 2">
+            <a:extLst>
+              <a:ext uri="{FF2B5EF4-FFF2-40B4-BE49-F238E27FC236}">
+                <a16:creationId xmlns:a16="http://schemas.microsoft.com/office/drawing/2014/main" id="{ADFE564F-4868-20BA-CA40-01695B97696D}"/>
+              </a:ext>
+            </a:extLst>
+          </p:cNvPr>
+          <p:cNvPicPr>
+            <a:picLocks noChangeAspect="1" noChangeArrowheads="1"/>
+          </p:cNvPicPr>
+          <p:nvPr/>
+        </p:nvPicPr>
+        <p:blipFill>
+          <a:blip r:embed="rId10">
+            <a:extLst>
+              <a:ext uri="{28A0092B-C50C-407E-A947-70E740481C1C}">
+                <a14:useLocalDpi xmlns:a14="http://schemas.microsoft.com/office/drawing/2010/main" val="0"/>
+              </a:ext>
+            </a:extLst>
+          </a:blip>
+          <a:srcRect/>
+          <a:stretch>
+            <a:fillRect/>
+          </a:stretch>
+        </p:blipFill>
+        <p:spPr bwMode="auto">
+          <a:xfrm>
+            <a:off x="6311073" y="1621332"/>
+            <a:ext cx="1704975" cy="1009650"/>
+          </a:xfrm>
+          <a:prstGeom prst="rect">
+            <a:avLst/>
+          </a:prstGeom>
+          <a:noFill/>
+          <a:extLst>
+            <a:ext uri="{909E8E84-426E-40DD-AFC4-6F175D3DCCD1}">
+              <a14:hiddenFill xmlns:a14="http://schemas.microsoft.com/office/drawing/2010/main">
+                <a:solidFill>
+                  <a:srgbClr val="FFFFFF"/>
+                </a:solidFill>
+              </a14:hiddenFill>
+            </a:ext>
+          </a:extLst>
+        </p:spPr>
+      </p:pic>
+      <p:pic>
+        <p:nvPicPr>
+          <p:cNvPr id="6" name="Εικόνα 5">
+            <a:extLst>
+              <a:ext uri="{FF2B5EF4-FFF2-40B4-BE49-F238E27FC236}">
+                <a16:creationId xmlns:a16="http://schemas.microsoft.com/office/drawing/2014/main" id="{2D83E985-701C-836E-0AF3-E669A2077464}"/>
+              </a:ext>
+            </a:extLst>
+          </p:cNvPr>
+          <p:cNvPicPr>
+            <a:picLocks noChangeAspect="1"/>
+          </p:cNvPicPr>
+          <p:nvPr/>
+        </p:nvPicPr>
+        <p:blipFill>
+          <a:blip r:embed="rId11"/>
+          <a:stretch>
+            <a:fillRect/>
+          </a:stretch>
+        </p:blipFill>
+        <p:spPr>
+          <a:xfrm>
+            <a:off x="0" y="4442214"/>
+            <a:ext cx="2676525" cy="1683560"/>
+          </a:xfrm>
+          <a:prstGeom prst="rect">
+            <a:avLst/>
+          </a:prstGeom>
+        </p:spPr>
+      </p:pic>
+      <p:pic>
+        <p:nvPicPr>
+          <p:cNvPr id="10" name="Εικόνα 9">
+            <a:extLst>
+              <a:ext uri="{FF2B5EF4-FFF2-40B4-BE49-F238E27FC236}">
+                <a16:creationId xmlns:a16="http://schemas.microsoft.com/office/drawing/2014/main" id="{D896033C-04D2-956E-5857-F09BEF8F78A7}"/>
+              </a:ext>
+            </a:extLst>
+          </p:cNvPr>
+          <p:cNvPicPr>
+            <a:picLocks noChangeAspect="1"/>
+          </p:cNvPicPr>
+          <p:nvPr/>
+        </p:nvPicPr>
+        <p:blipFill>
+          <a:blip r:embed="rId12"/>
+          <a:stretch>
+            <a:fillRect/>
+          </a:stretch>
+        </p:blipFill>
+        <p:spPr>
+          <a:xfrm>
+            <a:off x="3048001" y="4442214"/>
+            <a:ext cx="2676524" cy="1683560"/>
+          </a:xfrm>
+          <a:prstGeom prst="rect">
+            <a:avLst/>
+          </a:prstGeom>
+        </p:spPr>
+      </p:pic>
+      <p:pic>
+        <p:nvPicPr>
+          <p:cNvPr id="13" name="Εικόνα 12">
+            <a:extLst>
+              <a:ext uri="{FF2B5EF4-FFF2-40B4-BE49-F238E27FC236}">
+                <a16:creationId xmlns:a16="http://schemas.microsoft.com/office/drawing/2014/main" id="{9BDC7830-B6DE-7754-07F3-F5B8E8346D4C}"/>
+              </a:ext>
+            </a:extLst>
+          </p:cNvPr>
+          <p:cNvPicPr>
+            <a:picLocks noChangeAspect="1"/>
+          </p:cNvPicPr>
+          <p:nvPr/>
+        </p:nvPicPr>
+        <p:blipFill>
+          <a:blip r:embed="rId13"/>
+          <a:stretch>
+            <a:fillRect/>
+          </a:stretch>
+        </p:blipFill>
+        <p:spPr>
+          <a:xfrm>
+            <a:off x="6096000" y="4442214"/>
+            <a:ext cx="2676525" cy="1683560"/>
+          </a:xfrm>
+          <a:prstGeom prst="rect">
+            <a:avLst/>
+          </a:prstGeom>
+        </p:spPr>
+      </p:pic>
+      <p:pic>
+        <p:nvPicPr>
+          <p:cNvPr id="16" name="dstar_simulation (online-video-cutter.com) (online-video-cutter.com)">
+            <a:hlinkClick r:id="" action="ppaction://media"/>
+            <a:extLst>
+              <a:ext uri="{FF2B5EF4-FFF2-40B4-BE49-F238E27FC236}">
+                <a16:creationId xmlns:a16="http://schemas.microsoft.com/office/drawing/2014/main" id="{B7514E12-DD6B-BD1C-7FBC-EDAAD2FF0E2E}"/>
+              </a:ext>
+            </a:extLst>
+          </p:cNvPr>
+          <p:cNvPicPr>
+            <a:picLocks noChangeAspect="1"/>
+          </p:cNvPicPr>
+          <p:nvPr>
+            <a:videoFile r:link="rId2"/>
+            <p:extLst>
+              <p:ext uri="{DAA4B4D4-6D71-4841-9C94-3DE7FCFB9230}">
+                <p14:media xmlns:p14="http://schemas.microsoft.com/office/powerpoint/2010/main" r:embed="rId1"/>
+              </p:ext>
+            </p:extLst>
+          </p:nvPr>
+        </p:nvPicPr>
+        <p:blipFill>
+          <a:blip r:embed="rId14"/>
+          <a:stretch>
+            <a:fillRect/>
+          </a:stretch>
+        </p:blipFill>
+        <p:spPr>
+          <a:xfrm>
+            <a:off x="9144000" y="4442214"/>
+            <a:ext cx="2893646" cy="3706063"/>
+          </a:xfrm>
+          <a:prstGeom prst="rect">
+            <a:avLst/>
+          </a:prstGeom>
+        </p:spPr>
+      </p:pic>
       <p:cxnSp>
         <p:nvCxnSpPr>
-          <p:cNvPr id="14" name="Ευθύγραμμο βέλος σύνδεσης 13">
+          <p:cNvPr id="15" name="Γραμμή σύνδεσης: Γωνιώδης 14">
             <a:extLst>
               <a:ext uri="{FF2B5EF4-FFF2-40B4-BE49-F238E27FC236}">
-                <a16:creationId xmlns:a16="http://schemas.microsoft.com/office/drawing/2014/main" id="{A4973DEF-B499-60C5-2AB1-894C3B71F971}"/>
+                <a16:creationId xmlns:a16="http://schemas.microsoft.com/office/drawing/2014/main" id="{A8B78F70-E277-E8B8-C35A-E9685D247CBD}"/>
               </a:ext>
             </a:extLst>
           </p:cNvPr>
           <p:cNvCxnSpPr>
-            <a:stCxn id="2053" idx="3"/>
-            <a:endCxn id="2055" idx="1"/>
+            <a:stCxn id="2053" idx="0"/>
+            <a:endCxn id="1026" idx="3"/>
           </p:cNvCxnSpPr>
           <p:nvPr/>
         </p:nvCxnSpPr>
         <p:spPr>
-          <a:xfrm>
-            <a:off x="10428874" y="3824097"/>
-            <a:ext cx="116302" cy="0"/>
+          <a:xfrm rot="16200000" flipV="1">
+            <a:off x="8575156" y="1567049"/>
+            <a:ext cx="870938" cy="1989154"/>
           </a:xfrm>
-          <a:prstGeom prst="straightConnector1">
+          <a:prstGeom prst="bentConnector2">
+            <a:avLst/>
+          </a:prstGeom>
+          <a:ln>
+            <a:tailEnd type="triangle"/>
+          </a:ln>
+        </p:spPr>
+        <p:style>
+          <a:lnRef idx="2">
+            <a:schemeClr val="dk1"/>
+          </a:lnRef>
+          <a:fillRef idx="0">
+            <a:schemeClr val="dk1"/>
+          </a:fillRef>
+          <a:effectRef idx="1">
+            <a:schemeClr val="dk1"/>
+          </a:effectRef>
+          <a:fontRef idx="minor">
+            <a:schemeClr val="tx1"/>
+          </a:fontRef>
+        </p:style>
+      </p:cxnSp>
+      <p:cxnSp>
+        <p:nvCxnSpPr>
+          <p:cNvPr id="18" name="Γραμμή σύνδεσης: Γωνιώδης 17">
+            <a:extLst>
+              <a:ext uri="{FF2B5EF4-FFF2-40B4-BE49-F238E27FC236}">
+                <a16:creationId xmlns:a16="http://schemas.microsoft.com/office/drawing/2014/main" id="{B085DEBB-C4A6-8DB3-B179-403A74BF8DDB}"/>
+              </a:ext>
+            </a:extLst>
+          </p:cNvPr>
+          <p:cNvCxnSpPr>
+            <a:stCxn id="1026" idx="1"/>
+            <a:endCxn id="2051" idx="0"/>
+          </p:cNvCxnSpPr>
+          <p:nvPr/>
+        </p:nvCxnSpPr>
+        <p:spPr>
+          <a:xfrm rot="10800000" flipV="1">
+            <a:off x="4877991" y="2126157"/>
+            <a:ext cx="1433082" cy="870938"/>
+          </a:xfrm>
+          <a:prstGeom prst="bentConnector2">
             <a:avLst/>
           </a:prstGeom>
           <a:ln>
@@ -24015,7 +25952,7 @@
                                           </p:stCondLst>
                                         </p:cTn>
                                         <p:tgtEl>
-                                          <p:spTgt spid="2"/>
+                                          <p:spTgt spid="3"/>
                                         </p:tgtEl>
                                         <p:attrNameLst>
                                           <p:attrName>style.visibility</p:attrName>
@@ -24029,7 +25966,51 @@
                                       <p:cBhvr>
                                         <p:cTn id="11" dur="500"/>
                                         <p:tgtEl>
-                                          <p:spTgt spid="2"/>
+                                          <p:spTgt spid="3"/>
+                                        </p:tgtEl>
+                                      </p:cBhvr>
+                                    </p:animEffect>
+                                  </p:childTnLst>
+                                </p:cTn>
+                              </p:par>
+                            </p:childTnLst>
+                          </p:cTn>
+                        </p:par>
+                        <p:par>
+                          <p:cTn id="12" fill="hold">
+                            <p:stCondLst>
+                              <p:cond delay="1000"/>
+                            </p:stCondLst>
+                            <p:childTnLst>
+                              <p:par>
+                                <p:cTn id="13" presetID="10" presetClass="entr" presetSubtype="0" fill="hold" nodeType="afterEffect">
+                                  <p:stCondLst>
+                                    <p:cond delay="0"/>
+                                  </p:stCondLst>
+                                  <p:childTnLst>
+                                    <p:set>
+                                      <p:cBhvr>
+                                        <p:cTn id="14" dur="1" fill="hold">
+                                          <p:stCondLst>
+                                            <p:cond delay="0"/>
+                                          </p:stCondLst>
+                                        </p:cTn>
+                                        <p:tgtEl>
+                                          <p:spTgt spid="6"/>
+                                        </p:tgtEl>
+                                        <p:attrNameLst>
+                                          <p:attrName>style.visibility</p:attrName>
+                                        </p:attrNameLst>
+                                      </p:cBhvr>
+                                      <p:to>
+                                        <p:strVal val="visible"/>
+                                      </p:to>
+                                    </p:set>
+                                    <p:animEffect transition="in" filter="fade">
+                                      <p:cBhvr>
+                                        <p:cTn id="15" dur="500"/>
+                                        <p:tgtEl>
+                                          <p:spTgt spid="6"/>
                                         </p:tgtEl>
                                       </p:cBhvr>
                                     </p:animEffect>
@@ -24043,26 +26024,26 @@
                     </p:cTn>
                   </p:par>
                   <p:par>
-                    <p:cTn id="12" fill="hold">
+                    <p:cTn id="16" fill="hold">
                       <p:stCondLst>
                         <p:cond delay="indefinite"/>
                       </p:stCondLst>
                       <p:childTnLst>
                         <p:par>
-                          <p:cTn id="13" fill="hold">
+                          <p:cTn id="17" fill="hold">
                             <p:stCondLst>
                               <p:cond delay="0"/>
                             </p:stCondLst>
                             <p:childTnLst>
                               <p:par>
-                                <p:cTn id="14" presetID="22" presetClass="entr" presetSubtype="8" fill="hold" nodeType="clickEffect">
+                                <p:cTn id="18" presetID="22" presetClass="entr" presetSubtype="8" fill="hold" nodeType="clickEffect">
                                   <p:stCondLst>
                                     <p:cond delay="0"/>
                                   </p:stCondLst>
                                   <p:childTnLst>
                                     <p:set>
                                       <p:cBhvr>
-                                        <p:cTn id="15" dur="1" fill="hold">
+                                        <p:cTn id="19" dur="1" fill="hold">
                                           <p:stCondLst>
                                             <p:cond delay="0"/>
                                           </p:stCondLst>
@@ -24080,7 +26061,7 @@
                                     </p:set>
                                     <p:animEffect transition="in" filter="wipe(left)">
                                       <p:cBhvr>
-                                        <p:cTn id="16" dur="500"/>
+                                        <p:cTn id="20" dur="500"/>
                                         <p:tgtEl>
                                           <p:spTgt spid="7"/>
                                         </p:tgtEl>
@@ -24093,20 +26074,20 @@
                           </p:cTn>
                         </p:par>
                         <p:par>
-                          <p:cTn id="17" fill="hold">
+                          <p:cTn id="21" fill="hold">
                             <p:stCondLst>
                               <p:cond delay="500"/>
                             </p:stCondLst>
                             <p:childTnLst>
                               <p:par>
-                                <p:cTn id="18" presetID="22" presetClass="entr" presetSubtype="8" fill="hold" nodeType="afterEffect">
+                                <p:cTn id="22" presetID="22" presetClass="entr" presetSubtype="8" fill="hold" nodeType="afterEffect">
                                   <p:stCondLst>
                                     <p:cond delay="0"/>
                                   </p:stCondLst>
                                   <p:childTnLst>
                                     <p:set>
                                       <p:cBhvr>
-                                        <p:cTn id="19" dur="1" fill="hold">
+                                        <p:cTn id="23" dur="1" fill="hold">
                                           <p:stCondLst>
                                             <p:cond delay="0"/>
                                           </p:stCondLst>
@@ -24124,9 +26105,53 @@
                                     </p:set>
                                     <p:animEffect transition="in" filter="wipe(left)">
                                       <p:cBhvr>
-                                        <p:cTn id="20" dur="500"/>
+                                        <p:cTn id="24" dur="500"/>
                                         <p:tgtEl>
                                           <p:spTgt spid="2051"/>
+                                        </p:tgtEl>
+                                      </p:cBhvr>
+                                    </p:animEffect>
+                                  </p:childTnLst>
+                                </p:cTn>
+                              </p:par>
+                            </p:childTnLst>
+                          </p:cTn>
+                        </p:par>
+                        <p:par>
+                          <p:cTn id="25" fill="hold">
+                            <p:stCondLst>
+                              <p:cond delay="1000"/>
+                            </p:stCondLst>
+                            <p:childTnLst>
+                              <p:par>
+                                <p:cTn id="26" presetID="10" presetClass="entr" presetSubtype="0" fill="hold" nodeType="afterEffect">
+                                  <p:stCondLst>
+                                    <p:cond delay="0"/>
+                                  </p:stCondLst>
+                                  <p:childTnLst>
+                                    <p:set>
+                                      <p:cBhvr>
+                                        <p:cTn id="27" dur="1" fill="hold">
+                                          <p:stCondLst>
+                                            <p:cond delay="0"/>
+                                          </p:stCondLst>
+                                        </p:cTn>
+                                        <p:tgtEl>
+                                          <p:spTgt spid="10"/>
+                                        </p:tgtEl>
+                                        <p:attrNameLst>
+                                          <p:attrName>style.visibility</p:attrName>
+                                        </p:attrNameLst>
+                                      </p:cBhvr>
+                                      <p:to>
+                                        <p:strVal val="visible"/>
+                                      </p:to>
+                                    </p:set>
+                                    <p:animEffect transition="in" filter="fade">
+                                      <p:cBhvr>
+                                        <p:cTn id="28" dur="500"/>
+                                        <p:tgtEl>
+                                          <p:spTgt spid="10"/>
                                         </p:tgtEl>
                                       </p:cBhvr>
                                     </p:animEffect>
@@ -24140,26 +26165,26 @@
                     </p:cTn>
                   </p:par>
                   <p:par>
-                    <p:cTn id="21" fill="hold">
+                    <p:cTn id="29" fill="hold">
                       <p:stCondLst>
                         <p:cond delay="indefinite"/>
                       </p:stCondLst>
                       <p:childTnLst>
                         <p:par>
-                          <p:cTn id="22" fill="hold">
+                          <p:cTn id="30" fill="hold">
                             <p:stCondLst>
                               <p:cond delay="0"/>
                             </p:stCondLst>
                             <p:childTnLst>
                               <p:par>
-                                <p:cTn id="23" presetID="22" presetClass="entr" presetSubtype="8" fill="hold" nodeType="clickEffect">
+                                <p:cTn id="31" presetID="22" presetClass="entr" presetSubtype="8" fill="hold" nodeType="clickEffect">
                                   <p:stCondLst>
                                     <p:cond delay="0"/>
                                   </p:stCondLst>
                                   <p:childTnLst>
                                     <p:set>
                                       <p:cBhvr>
-                                        <p:cTn id="24" dur="1" fill="hold">
+                                        <p:cTn id="32" dur="1" fill="hold">
                                           <p:stCondLst>
                                             <p:cond delay="0"/>
                                           </p:stCondLst>
@@ -24177,7 +26202,7 @@
                                     </p:set>
                                     <p:animEffect transition="in" filter="wipe(left)">
                                       <p:cBhvr>
-                                        <p:cTn id="25" dur="500"/>
+                                        <p:cTn id="33" dur="500"/>
                                         <p:tgtEl>
                                           <p:spTgt spid="9"/>
                                         </p:tgtEl>
@@ -24190,20 +26215,20 @@
                           </p:cTn>
                         </p:par>
                         <p:par>
-                          <p:cTn id="26" fill="hold">
+                          <p:cTn id="34" fill="hold">
                             <p:stCondLst>
                               <p:cond delay="500"/>
                             </p:stCondLst>
                             <p:childTnLst>
                               <p:par>
-                                <p:cTn id="27" presetID="22" presetClass="entr" presetSubtype="8" fill="hold" nodeType="afterEffect">
+                                <p:cTn id="35" presetID="22" presetClass="entr" presetSubtype="8" fill="hold" nodeType="afterEffect">
                                   <p:stCondLst>
                                     <p:cond delay="0"/>
                                   </p:stCondLst>
                                   <p:childTnLst>
                                     <p:set>
                                       <p:cBhvr>
-                                        <p:cTn id="28" dur="1" fill="hold">
+                                        <p:cTn id="36" dur="1" fill="hold">
                                           <p:stCondLst>
                                             <p:cond delay="0"/>
                                           </p:stCondLst>
@@ -24221,7 +26246,7 @@
                                     </p:set>
                                     <p:animEffect transition="in" filter="wipe(left)">
                                       <p:cBhvr>
-                                        <p:cTn id="29" dur="500"/>
+                                        <p:cTn id="37" dur="500"/>
                                         <p:tgtEl>
                                           <p:spTgt spid="2052"/>
                                         </p:tgtEl>
@@ -24237,26 +26262,26 @@
                     </p:cTn>
                   </p:par>
                   <p:par>
-                    <p:cTn id="30" fill="hold">
+                    <p:cTn id="38" fill="hold">
                       <p:stCondLst>
                         <p:cond delay="indefinite"/>
                       </p:stCondLst>
                       <p:childTnLst>
                         <p:par>
-                          <p:cTn id="31" fill="hold">
+                          <p:cTn id="39" fill="hold">
                             <p:stCondLst>
                               <p:cond delay="0"/>
                             </p:stCondLst>
                             <p:childTnLst>
                               <p:par>
-                                <p:cTn id="32" presetID="22" presetClass="entr" presetSubtype="8" fill="hold" nodeType="clickEffect">
+                                <p:cTn id="40" presetID="22" presetClass="entr" presetSubtype="8" fill="hold" nodeType="clickEffect">
                                   <p:stCondLst>
                                     <p:cond delay="0"/>
                                   </p:stCondLst>
                                   <p:childTnLst>
                                     <p:set>
                                       <p:cBhvr>
-                                        <p:cTn id="33" dur="1" fill="hold">
+                                        <p:cTn id="41" dur="1" fill="hold">
                                           <p:stCondLst>
                                             <p:cond delay="0"/>
                                           </p:stCondLst>
@@ -24274,7 +26299,7 @@
                                     </p:set>
                                     <p:animEffect transition="in" filter="wipe(left)">
                                       <p:cBhvr>
-                                        <p:cTn id="34" dur="500"/>
+                                        <p:cTn id="42" dur="500"/>
                                         <p:tgtEl>
                                           <p:spTgt spid="12"/>
                                         </p:tgtEl>
@@ -24287,20 +26312,20 @@
                           </p:cTn>
                         </p:par>
                         <p:par>
-                          <p:cTn id="35" fill="hold">
+                          <p:cTn id="43" fill="hold">
                             <p:stCondLst>
                               <p:cond delay="500"/>
                             </p:stCondLst>
                             <p:childTnLst>
                               <p:par>
-                                <p:cTn id="36" presetID="22" presetClass="entr" presetSubtype="8" fill="hold" nodeType="afterEffect">
+                                <p:cTn id="44" presetID="22" presetClass="entr" presetSubtype="8" fill="hold" nodeType="afterEffect">
                                   <p:stCondLst>
                                     <p:cond delay="0"/>
                                   </p:stCondLst>
                                   <p:childTnLst>
                                     <p:set>
                                       <p:cBhvr>
-                                        <p:cTn id="37" dur="1" fill="hold">
+                                        <p:cTn id="45" dur="1" fill="hold">
                                           <p:stCondLst>
                                             <p:cond delay="0"/>
                                           </p:stCondLst>
@@ -24318,9 +26343,97 @@
                                     </p:set>
                                     <p:animEffect transition="in" filter="wipe(left)">
                                       <p:cBhvr>
-                                        <p:cTn id="38" dur="500"/>
+                                        <p:cTn id="46" dur="500"/>
                                         <p:tgtEl>
                                           <p:spTgt spid="2053"/>
+                                        </p:tgtEl>
+                                      </p:cBhvr>
+                                    </p:animEffect>
+                                  </p:childTnLst>
+                                </p:cTn>
+                              </p:par>
+                            </p:childTnLst>
+                          </p:cTn>
+                        </p:par>
+                        <p:par>
+                          <p:cTn id="47" fill="hold">
+                            <p:stCondLst>
+                              <p:cond delay="1000"/>
+                            </p:stCondLst>
+                            <p:childTnLst>
+                              <p:par>
+                                <p:cTn id="48" presetID="10" presetClass="entr" presetSubtype="0" fill="hold" nodeType="afterEffect">
+                                  <p:stCondLst>
+                                    <p:cond delay="0"/>
+                                  </p:stCondLst>
+                                  <p:childTnLst>
+                                    <p:set>
+                                      <p:cBhvr>
+                                        <p:cTn id="49" dur="1" fill="hold">
+                                          <p:stCondLst>
+                                            <p:cond delay="0"/>
+                                          </p:stCondLst>
+                                        </p:cTn>
+                                        <p:tgtEl>
+                                          <p:spTgt spid="13"/>
+                                        </p:tgtEl>
+                                        <p:attrNameLst>
+                                          <p:attrName>style.visibility</p:attrName>
+                                        </p:attrNameLst>
+                                      </p:cBhvr>
+                                      <p:to>
+                                        <p:strVal val="visible"/>
+                                      </p:to>
+                                    </p:set>
+                                    <p:animEffect transition="in" filter="fade">
+                                      <p:cBhvr>
+                                        <p:cTn id="50" dur="500"/>
+                                        <p:tgtEl>
+                                          <p:spTgt spid="13"/>
+                                        </p:tgtEl>
+                                      </p:cBhvr>
+                                    </p:animEffect>
+                                  </p:childTnLst>
+                                </p:cTn>
+                              </p:par>
+                            </p:childTnLst>
+                          </p:cTn>
+                        </p:par>
+                        <p:par>
+                          <p:cTn id="51" fill="hold">
+                            <p:stCondLst>
+                              <p:cond delay="1500"/>
+                            </p:stCondLst>
+                            <p:childTnLst>
+                              <p:par>
+                                <p:cTn id="52" presetID="22" presetClass="entr" presetSubtype="8" fill="hold" nodeType="afterEffect">
+                                  <p:stCondLst>
+                                    <p:cond delay="0"/>
+                                  </p:stCondLst>
+                                  <p:childTnLst>
+                                    <p:set>
+                                      <p:cBhvr>
+                                        <p:cTn id="53" dur="1" fill="hold">
+                                          <p:stCondLst>
+                                            <p:cond delay="0"/>
+                                          </p:stCondLst>
+                                        </p:cTn>
+                                        <p:tgtEl>
+                                          <p:spTgt spid="1026"/>
+                                        </p:tgtEl>
+                                        <p:attrNameLst>
+                                          <p:attrName>style.visibility</p:attrName>
+                                        </p:attrNameLst>
+                                      </p:cBhvr>
+                                      <p:to>
+                                        <p:strVal val="visible"/>
+                                      </p:to>
+                                    </p:set>
+                                    <p:animEffect transition="in" filter="wipe(left)">
+                                      <p:cBhvr>
+                                        <p:cTn id="54" dur="500"/>
+                                        <p:tgtEl>
+                                          <p:spTgt spid="1026"/>
                                         </p:tgtEl>
                                       </p:cBhvr>
                                     </p:animEffect>
@@ -24334,32 +26447,32 @@
                     </p:cTn>
                   </p:par>
                   <p:par>
-                    <p:cTn id="39" fill="hold">
+                    <p:cTn id="55" fill="hold">
                       <p:stCondLst>
                         <p:cond delay="indefinite"/>
                       </p:stCondLst>
                       <p:childTnLst>
                         <p:par>
-                          <p:cTn id="40" fill="hold">
+                          <p:cTn id="56" fill="hold">
                             <p:stCondLst>
                               <p:cond delay="0"/>
                             </p:stCondLst>
                             <p:childTnLst>
                               <p:par>
-                                <p:cTn id="41" presetID="22" presetClass="entr" presetSubtype="8" fill="hold" nodeType="clickEffect">
+                                <p:cTn id="57" presetID="10" presetClass="entr" presetSubtype="0" fill="hold" nodeType="clickEffect">
                                   <p:stCondLst>
                                     <p:cond delay="0"/>
                                   </p:stCondLst>
                                   <p:childTnLst>
                                     <p:set>
                                       <p:cBhvr>
-                                        <p:cTn id="42" dur="1" fill="hold">
+                                        <p:cTn id="58" dur="1" fill="hold">
                                           <p:stCondLst>
                                             <p:cond delay="0"/>
                                           </p:stCondLst>
                                         </p:cTn>
                                         <p:tgtEl>
-                                          <p:spTgt spid="14"/>
+                                          <p:spTgt spid="16"/>
                                         </p:tgtEl>
                                         <p:attrNameLst>
                                           <p:attrName>style.visibility</p:attrName>
@@ -24369,11 +26482,11 @@
                                         <p:strVal val="visible"/>
                                       </p:to>
                                     </p:set>
-                                    <p:animEffect transition="in" filter="wipe(left)">
-                                      <p:cBhvr>
-                                        <p:cTn id="43" dur="500"/>
-                                        <p:tgtEl>
-                                          <p:spTgt spid="14"/>
+                                    <p:animEffect transition="in" filter="fade">
+                                      <p:cBhvr>
+                                        <p:cTn id="59" dur="500"/>
+                                        <p:tgtEl>
+                                          <p:spTgt spid="16"/>
                                         </p:tgtEl>
                                       </p:cBhvr>
                                     </p:animEffect>
@@ -24383,44 +26496,35 @@
                             </p:childTnLst>
                           </p:cTn>
                         </p:par>
+                      </p:childTnLst>
+                    </p:cTn>
+                  </p:par>
+                  <p:par>
+                    <p:cTn id="60" fill="hold">
+                      <p:stCondLst>
+                        <p:cond delay="indefinite"/>
+                      </p:stCondLst>
+                      <p:childTnLst>
                         <p:par>
-                          <p:cTn id="44" fill="hold">
+                          <p:cTn id="61" fill="hold">
                             <p:stCondLst>
-                              <p:cond delay="500"/>
+                              <p:cond delay="0"/>
                             </p:stCondLst>
                             <p:childTnLst>
                               <p:par>
-                                <p:cTn id="45" presetID="22" presetClass="entr" presetSubtype="8" fill="hold" nodeType="afterEffect">
+                                <p:cTn id="62" presetID="1" presetClass="mediacall" presetSubtype="0" fill="hold" nodeType="clickEffect">
                                   <p:stCondLst>
                                     <p:cond delay="0"/>
                                   </p:stCondLst>
                                   <p:childTnLst>
-                                    <p:set>
-                                      <p:cBhvr>
-                                        <p:cTn id="46" dur="1" fill="hold">
-                                          <p:stCondLst>
-                                            <p:cond delay="0"/>
-                                          </p:stCondLst>
-                                        </p:cTn>
-                                        <p:tgtEl>
-                                          <p:spTgt spid="2055"/>
-                                        </p:tgtEl>
-                                        <p:attrNameLst>
-                                          <p:attrName>style.visibility</p:attrName>
-                                        </p:attrNameLst>
-                                      </p:cBhvr>
-                                      <p:to>
-                                        <p:strVal val="visible"/>
-                                      </p:to>
-                                    </p:set>
-                                    <p:animEffect transition="in" filter="wipe(left)">
-                                      <p:cBhvr>
-                                        <p:cTn id="47" dur="500"/>
-                                        <p:tgtEl>
-                                          <p:spTgt spid="2055"/>
-                                        </p:tgtEl>
-                                      </p:cBhvr>
-                                    </p:animEffect>
+                                    <p:cmd type="call" cmd="playFrom(0.0)">
+                                      <p:cBhvr>
+                                        <p:cTn id="63" dur="15534" fill="hold"/>
+                                        <p:tgtEl>
+                                          <p:spTgt spid="16"/>
+                                        </p:tgtEl>
+                                      </p:cBhvr>
+                                    </p:cmd>
                                   </p:childTnLst>
                                 </p:cTn>
                               </p:par>
@@ -24447,6 +26551,18 @@
                 </p:cond>
               </p:nextCondLst>
             </p:seq>
+            <p:video>
+              <p:cMediaNode vol="80000">
+                <p:cTn id="64" fill="hold" display="0">
+                  <p:stCondLst>
+                    <p:cond delay="indefinite"/>
+                  </p:stCondLst>
+                </p:cTn>
+                <p:tgtEl>
+                  <p:spTgt spid="16"/>
+                </p:tgtEl>
+              </p:cMediaNode>
+            </p:video>
           </p:childTnLst>
         </p:cTn>
       </p:par>
@@ -25184,13 +27300,13 @@
   <p:clrMapOvr>
     <a:overrideClrMapping bg1="lt1" tx1="dk1" bg2="lt2" tx2="dk2" accent1="accent1" accent2="accent2" accent3="accent3" accent4="accent4" accent5="accent5" accent6="accent6" hlink="hlink" folHlink="folHlink"/>
   </p:clrMapOvr>
-  <mc:AlternateContent xmlns:mc="http://schemas.openxmlformats.org/markup-compatibility/2006">
-    <mc:Choice xmlns:p159="http://schemas.microsoft.com/office/powerpoint/2015/09/main" Requires="p159">
+  <mc:AlternateContent xmlns:mc="http://schemas.openxmlformats.org/markup-compatibility/2006" xmlns:p159="http://schemas.microsoft.com/office/powerpoint/2015/09/main">
+    <mc:Choice Requires="p159">
       <p:transition xmlns:p14="http://schemas.microsoft.com/office/powerpoint/2010/main" spd="slow" p14:dur="2000">
         <p159:morph option="byObject"/>
       </p:transition>
     </mc:Choice>
-    <mc:Fallback>
+    <mc:Fallback xmlns="">
       <p:transition spd="slow">
         <p:fade/>
       </p:transition>
@@ -26029,13 +28145,13 @@
   <p:clrMapOvr>
     <a:overrideClrMapping bg1="lt1" tx1="dk1" bg2="lt2" tx2="dk2" accent1="accent1" accent2="accent2" accent3="accent3" accent4="accent4" accent5="accent5" accent6="accent6" hlink="hlink" folHlink="folHlink"/>
   </p:clrMapOvr>
-  <mc:AlternateContent xmlns:mc="http://schemas.openxmlformats.org/markup-compatibility/2006">
-    <mc:Choice xmlns:p159="http://schemas.microsoft.com/office/powerpoint/2015/09/main" Requires="p159">
+  <mc:AlternateContent xmlns:mc="http://schemas.openxmlformats.org/markup-compatibility/2006" xmlns:p159="http://schemas.microsoft.com/office/powerpoint/2015/09/main">
+    <mc:Choice Requires="p159">
       <p:transition xmlns:p14="http://schemas.microsoft.com/office/powerpoint/2010/main" spd="slow" p14:dur="2000">
         <p159:morph option="byObject"/>
       </p:transition>
     </mc:Choice>
-    <mc:Fallback>
+    <mc:Fallback xmlns="">
       <p:transition spd="slow">
         <p:fade/>
       </p:transition>
@@ -27249,13 +29365,13 @@
   <p:clrMapOvr>
     <a:overrideClrMapping bg1="lt1" tx1="dk1" bg2="lt2" tx2="dk2" accent1="accent1" accent2="accent2" accent3="accent3" accent4="accent4" accent5="accent5" accent6="accent6" hlink="hlink" folHlink="folHlink"/>
   </p:clrMapOvr>
-  <mc:AlternateContent xmlns:mc="http://schemas.openxmlformats.org/markup-compatibility/2006">
-    <mc:Choice xmlns:p159="http://schemas.microsoft.com/office/powerpoint/2015/09/main" Requires="p159">
+  <mc:AlternateContent xmlns:mc="http://schemas.openxmlformats.org/markup-compatibility/2006" xmlns:p159="http://schemas.microsoft.com/office/powerpoint/2015/09/main">
+    <mc:Choice Requires="p159">
       <p:transition xmlns:p14="http://schemas.microsoft.com/office/powerpoint/2010/main" spd="slow" p14:dur="2000">
         <p159:morph option="byObject"/>
       </p:transition>
     </mc:Choice>
-    <mc:Fallback>
+    <mc:Fallback xmlns="">
       <p:transition spd="slow">
         <p:fade/>
       </p:transition>

--- a/Thesis/AStar, DStarLite.pptx
+++ b/Thesis/AStar, DStarLite.pptx
@@ -5,27 +5,31 @@
     <p:sldMasterId id="2147483672" r:id="rId1"/>
   </p:sldMasterIdLst>
   <p:notesMasterIdLst>
-    <p:notesMasterId r:id="rId20"/>
+    <p:notesMasterId r:id="rId21"/>
   </p:notesMasterIdLst>
+  <p:handoutMasterIdLst>
+    <p:handoutMasterId r:id="rId22"/>
+  </p:handoutMasterIdLst>
   <p:sldIdLst>
     <p:sldId id="267" r:id="rId2"/>
-    <p:sldId id="277" r:id="rId3"/>
-    <p:sldId id="269" r:id="rId4"/>
-    <p:sldId id="270" r:id="rId5"/>
-    <p:sldId id="271" r:id="rId6"/>
-    <p:sldId id="273" r:id="rId7"/>
-    <p:sldId id="278" r:id="rId8"/>
-    <p:sldId id="274" r:id="rId9"/>
-    <p:sldId id="275" r:id="rId10"/>
-    <p:sldId id="276" r:id="rId11"/>
-    <p:sldId id="258" r:id="rId12"/>
-    <p:sldId id="261" r:id="rId13"/>
-    <p:sldId id="262" r:id="rId14"/>
-    <p:sldId id="263" r:id="rId15"/>
-    <p:sldId id="264" r:id="rId16"/>
-    <p:sldId id="257" r:id="rId17"/>
-    <p:sldId id="266" r:id="rId18"/>
-    <p:sldId id="280" r:id="rId19"/>
+    <p:sldId id="281" r:id="rId3"/>
+    <p:sldId id="277" r:id="rId4"/>
+    <p:sldId id="269" r:id="rId5"/>
+    <p:sldId id="270" r:id="rId6"/>
+    <p:sldId id="271" r:id="rId7"/>
+    <p:sldId id="273" r:id="rId8"/>
+    <p:sldId id="278" r:id="rId9"/>
+    <p:sldId id="274" r:id="rId10"/>
+    <p:sldId id="275" r:id="rId11"/>
+    <p:sldId id="276" r:id="rId12"/>
+    <p:sldId id="258" r:id="rId13"/>
+    <p:sldId id="261" r:id="rId14"/>
+    <p:sldId id="262" r:id="rId15"/>
+    <p:sldId id="263" r:id="rId16"/>
+    <p:sldId id="264" r:id="rId17"/>
+    <p:sldId id="257" r:id="rId18"/>
+    <p:sldId id="266" r:id="rId19"/>
+    <p:sldId id="280" r:id="rId20"/>
   </p:sldIdLst>
   <p:sldSz cx="12192000" cy="6858000"/>
   <p:notesSz cx="6858000" cy="9144000"/>
@@ -132,6 +136,196 @@
 </p:presentation>
 </file>
 
+<file path=ppt/handoutMasters/handoutMaster1.xml><?xml version="1.0" encoding="utf-8"?>
+<p:handoutMaster xmlns:a="http://schemas.openxmlformats.org/drawingml/2006/main" xmlns:r="http://schemas.openxmlformats.org/officeDocument/2006/relationships" xmlns:p="http://schemas.openxmlformats.org/presentationml/2006/main">
+  <p:cSld>
+    <p:bg>
+      <p:bgRef idx="1001">
+        <a:schemeClr val="bg1"/>
+      </p:bgRef>
+    </p:bg>
+    <p:spTree>
+      <p:nvGrpSpPr>
+        <p:cNvPr id="1" name=""/>
+        <p:cNvGrpSpPr/>
+        <p:nvPr/>
+      </p:nvGrpSpPr>
+      <p:grpSpPr>
+        <a:xfrm>
+          <a:off x="0" y="0"/>
+          <a:ext cx="0" cy="0"/>
+          <a:chOff x="0" y="0"/>
+          <a:chExt cx="0" cy="0"/>
+        </a:xfrm>
+      </p:grpSpPr>
+      <p:sp>
+        <p:nvSpPr>
+          <p:cNvPr id="2" name="Θέση κεφαλίδας 1">
+            <a:extLst>
+              <a:ext uri="{FF2B5EF4-FFF2-40B4-BE49-F238E27FC236}">
+                <a16:creationId xmlns:a16="http://schemas.microsoft.com/office/drawing/2014/main" id="{3AE0FEE7-3523-711D-84A3-1E12A20C0DCA}"/>
+              </a:ext>
+            </a:extLst>
+          </p:cNvPr>
+          <p:cNvSpPr>
+            <a:spLocks noGrp="1"/>
+          </p:cNvSpPr>
+          <p:nvPr>
+            <p:ph type="hdr" sz="quarter"/>
+          </p:nvPr>
+        </p:nvSpPr>
+        <p:spPr>
+          <a:xfrm>
+            <a:off x="0" y="0"/>
+            <a:ext cx="2971800" cy="458788"/>
+          </a:xfrm>
+          <a:prstGeom prst="rect">
+            <a:avLst/>
+          </a:prstGeom>
+        </p:spPr>
+        <p:txBody>
+          <a:bodyPr vert="horz" lIns="91440" tIns="45720" rIns="91440" bIns="45720" rtlCol="0"/>
+          <a:lstStyle>
+            <a:lvl1pPr algn="l">
+              <a:defRPr sz="1200"/>
+            </a:lvl1pPr>
+          </a:lstStyle>
+          <a:p>
+            <a:endParaRPr lang="el-GR"/>
+          </a:p>
+        </p:txBody>
+      </p:sp>
+      <p:sp>
+        <p:nvSpPr>
+          <p:cNvPr id="3" name="Θέση ημερομηνίας 2">
+            <a:extLst>
+              <a:ext uri="{FF2B5EF4-FFF2-40B4-BE49-F238E27FC236}">
+                <a16:creationId xmlns:a16="http://schemas.microsoft.com/office/drawing/2014/main" id="{CD1D10DD-78BB-9105-2B6A-2FB838EA5E44}"/>
+              </a:ext>
+            </a:extLst>
+          </p:cNvPr>
+          <p:cNvSpPr>
+            <a:spLocks noGrp="1"/>
+          </p:cNvSpPr>
+          <p:nvPr>
+            <p:ph type="dt" sz="quarter" idx="1"/>
+          </p:nvPr>
+        </p:nvSpPr>
+        <p:spPr>
+          <a:xfrm>
+            <a:off x="3884613" y="0"/>
+            <a:ext cx="2971800" cy="458788"/>
+          </a:xfrm>
+          <a:prstGeom prst="rect">
+            <a:avLst/>
+          </a:prstGeom>
+        </p:spPr>
+        <p:txBody>
+          <a:bodyPr vert="horz" lIns="91440" tIns="45720" rIns="91440" bIns="45720" rtlCol="0"/>
+          <a:lstStyle>
+            <a:lvl1pPr algn="r">
+              <a:defRPr sz="1200"/>
+            </a:lvl1pPr>
+          </a:lstStyle>
+          <a:p>
+            <a:fld id="{C551B517-3CE4-4CE7-9043-1AE91C128FB2}" type="datetimeFigureOut">
+              <a:rPr lang="el-GR" smtClean="0"/>
+              <a:t>16/4/2026</a:t>
+            </a:fld>
+            <a:endParaRPr lang="el-GR"/>
+          </a:p>
+        </p:txBody>
+      </p:sp>
+      <p:sp>
+        <p:nvSpPr>
+          <p:cNvPr id="4" name="Θέση υποσέλιδου 3">
+            <a:extLst>
+              <a:ext uri="{FF2B5EF4-FFF2-40B4-BE49-F238E27FC236}">
+                <a16:creationId xmlns:a16="http://schemas.microsoft.com/office/drawing/2014/main" id="{7EBEF9DF-733E-299C-3F5E-FB002B2265FB}"/>
+              </a:ext>
+            </a:extLst>
+          </p:cNvPr>
+          <p:cNvSpPr>
+            <a:spLocks noGrp="1"/>
+          </p:cNvSpPr>
+          <p:nvPr>
+            <p:ph type="ftr" sz="quarter" idx="2"/>
+          </p:nvPr>
+        </p:nvSpPr>
+        <p:spPr>
+          <a:xfrm>
+            <a:off x="0" y="8685213"/>
+            <a:ext cx="2971800" cy="458787"/>
+          </a:xfrm>
+          <a:prstGeom prst="rect">
+            <a:avLst/>
+          </a:prstGeom>
+        </p:spPr>
+        <p:txBody>
+          <a:bodyPr vert="horz" lIns="91440" tIns="45720" rIns="91440" bIns="45720" rtlCol="0" anchor="b"/>
+          <a:lstStyle>
+            <a:lvl1pPr algn="l">
+              <a:defRPr sz="1200"/>
+            </a:lvl1pPr>
+          </a:lstStyle>
+          <a:p>
+            <a:endParaRPr lang="el-GR"/>
+          </a:p>
+        </p:txBody>
+      </p:sp>
+      <p:sp>
+        <p:nvSpPr>
+          <p:cNvPr id="5" name="Θέση αριθμού διαφάνειας 4">
+            <a:extLst>
+              <a:ext uri="{FF2B5EF4-FFF2-40B4-BE49-F238E27FC236}">
+                <a16:creationId xmlns:a16="http://schemas.microsoft.com/office/drawing/2014/main" id="{8AA5B72B-980E-6C42-080F-0822FBDD4826}"/>
+              </a:ext>
+            </a:extLst>
+          </p:cNvPr>
+          <p:cNvSpPr>
+            <a:spLocks noGrp="1"/>
+          </p:cNvSpPr>
+          <p:nvPr>
+            <p:ph type="sldNum" sz="quarter" idx="3"/>
+          </p:nvPr>
+        </p:nvSpPr>
+        <p:spPr>
+          <a:xfrm>
+            <a:off x="3884613" y="8685213"/>
+            <a:ext cx="2971800" cy="458787"/>
+          </a:xfrm>
+          <a:prstGeom prst="rect">
+            <a:avLst/>
+          </a:prstGeom>
+        </p:spPr>
+        <p:txBody>
+          <a:bodyPr vert="horz" lIns="91440" tIns="45720" rIns="91440" bIns="45720" rtlCol="0" anchor="b"/>
+          <a:lstStyle>
+            <a:lvl1pPr algn="r">
+              <a:defRPr sz="1200"/>
+            </a:lvl1pPr>
+          </a:lstStyle>
+          <a:p>
+            <a:fld id="{BEEAFE41-401A-4D2F-BCD3-959B97745381}" type="slidenum">
+              <a:rPr lang="el-GR" smtClean="0"/>
+              <a:t>‹#›</a:t>
+            </a:fld>
+            <a:endParaRPr lang="el-GR"/>
+          </a:p>
+        </p:txBody>
+      </p:sp>
+    </p:spTree>
+    <p:extLst>
+      <p:ext uri="{BB962C8B-B14F-4D97-AF65-F5344CB8AC3E}">
+        <p14:creationId xmlns:p14="http://schemas.microsoft.com/office/powerpoint/2010/main" val="1230949508"/>
+      </p:ext>
+    </p:extLst>
+  </p:cSld>
+  <p:clrMap bg1="lt1" tx1="dk1" bg2="lt2" tx2="dk2" accent1="accent1" accent2="accent2" accent3="accent3" accent4="accent4" accent5="accent5" accent6="accent6" hlink="hlink" folHlink="folHlink"/>
+  <p:hf hdr="0" ftr="0" dt="0"/>
+</p:handoutMaster>
+</file>
+
 <file path=ppt/notesMasters/notesMaster1.xml><?xml version="1.0" encoding="utf-8"?>
 <p:notesMaster xmlns:a="http://schemas.openxmlformats.org/drawingml/2006/main" xmlns:r="http://schemas.openxmlformats.org/officeDocument/2006/relationships" xmlns:p="http://schemas.openxmlformats.org/presentationml/2006/main">
   <p:cSld>
@@ -214,7 +408,7 @@
           <a:p>
             <a:fld id="{2B17B53A-5F02-46AC-A602-E11F15763443}" type="datetimeFigureOut">
               <a:rPr lang="el-GR" smtClean="0"/>
-              <a:t>13/3/2026</a:t>
+              <a:t>16/4/2026</a:t>
             </a:fld>
             <a:endParaRPr lang="el-GR"/>
           </a:p>
@@ -386,6 +580,7 @@
     </p:extLst>
   </p:cSld>
   <p:clrMap bg1="lt1" tx1="dk1" bg2="lt2" tx2="dk2" accent1="accent1" accent2="accent2" accent3="accent3" accent4="accent4" accent5="accent5" accent6="accent6" hlink="hlink" folHlink="folHlink"/>
+  <p:hf hdr="0" ftr="0" dt="0"/>
   <p:notesStyle>
     <a:lvl1pPr marL="0" algn="l" defTabSz="914400" rtl="0" eaLnBrk="1" latinLnBrk="0" hangingPunct="1">
       <a:defRPr sz="1200" kern="1200">
@@ -570,7 +765,7 @@
           <a:p>
             <a:fld id="{F889EAB6-8F16-4223-B015-54B4C23A7B0E}" type="slidenum">
               <a:rPr lang="el-GR" smtClean="0"/>
-              <a:t>4</a:t>
+              <a:t>5</a:t>
             </a:fld>
             <a:endParaRPr lang="el-GR"/>
           </a:p>
@@ -702,7 +897,7 @@
           <a:p>
             <a:fld id="{F889EAB6-8F16-4223-B015-54B4C23A7B0E}" type="slidenum">
               <a:rPr lang="el-GR" smtClean="0"/>
-              <a:t>5</a:t>
+              <a:t>6</a:t>
             </a:fld>
             <a:endParaRPr lang="el-GR"/>
           </a:p>
@@ -834,7 +1029,7 @@
           <a:p>
             <a:fld id="{F889EAB6-8F16-4223-B015-54B4C23A7B0E}" type="slidenum">
               <a:rPr lang="el-GR" smtClean="0"/>
-              <a:t>6</a:t>
+              <a:t>7</a:t>
             </a:fld>
             <a:endParaRPr lang="el-GR"/>
           </a:p>
@@ -966,7 +1161,7 @@
           <a:p>
             <a:fld id="{F889EAB6-8F16-4223-B015-54B4C23A7B0E}" type="slidenum">
               <a:rPr lang="el-GR" smtClean="0"/>
-              <a:t>7</a:t>
+              <a:t>8</a:t>
             </a:fld>
             <a:endParaRPr lang="el-GR"/>
           </a:p>
@@ -1098,7 +1293,7 @@
           <a:p>
             <a:fld id="{F889EAB6-8F16-4223-B015-54B4C23A7B0E}" type="slidenum">
               <a:rPr lang="el-GR" smtClean="0"/>
-              <a:t>8</a:t>
+              <a:t>9</a:t>
             </a:fld>
             <a:endParaRPr lang="el-GR"/>
           </a:p>
@@ -1230,7 +1425,7 @@
           <a:p>
             <a:fld id="{F889EAB6-8F16-4223-B015-54B4C23A7B0E}" type="slidenum">
               <a:rPr lang="el-GR" smtClean="0"/>
-              <a:t>9</a:t>
+              <a:t>10</a:t>
             </a:fld>
             <a:endParaRPr lang="el-GR"/>
           </a:p>
@@ -1362,7 +1557,7 @@
           <a:p>
             <a:fld id="{F889EAB6-8F16-4223-B015-54B4C23A7B0E}" type="slidenum">
               <a:rPr lang="el-GR" smtClean="0"/>
-              <a:t>10</a:t>
+              <a:t>11</a:t>
             </a:fld>
             <a:endParaRPr lang="el-GR"/>
           </a:p>
@@ -1512,7 +1707,7 @@
           <a:p>
             <a:fld id="{846CE7D5-CF57-46EF-B807-FDD0502418D4}" type="datetimeFigureOut">
               <a:rPr lang="en-US" smtClean="0"/>
-              <a:t>3/13/2026</a:t>
+              <a:t>4/16/2026</a:t>
             </a:fld>
             <a:endParaRPr lang="en-US"/>
           </a:p>
@@ -1682,7 +1877,7 @@
           <a:p>
             <a:fld id="{846CE7D5-CF57-46EF-B807-FDD0502418D4}" type="datetimeFigureOut">
               <a:rPr lang="en-US" smtClean="0"/>
-              <a:t>3/13/2026</a:t>
+              <a:t>4/16/2026</a:t>
             </a:fld>
             <a:endParaRPr lang="en-US"/>
           </a:p>
@@ -1862,7 +2057,7 @@
           <a:p>
             <a:fld id="{846CE7D5-CF57-46EF-B807-FDD0502418D4}" type="datetimeFigureOut">
               <a:rPr lang="en-US" smtClean="0"/>
-              <a:t>3/13/2026</a:t>
+              <a:t>4/16/2026</a:t>
             </a:fld>
             <a:endParaRPr lang="en-US"/>
           </a:p>
@@ -2032,7 +2227,7 @@
           <a:p>
             <a:fld id="{846CE7D5-CF57-46EF-B807-FDD0502418D4}" type="datetimeFigureOut">
               <a:rPr lang="en-US" smtClean="0"/>
-              <a:t>3/13/2026</a:t>
+              <a:t>4/16/2026</a:t>
             </a:fld>
             <a:endParaRPr lang="en-US"/>
           </a:p>
@@ -2278,7 +2473,7 @@
           <a:p>
             <a:fld id="{846CE7D5-CF57-46EF-B807-FDD0502418D4}" type="datetimeFigureOut">
               <a:rPr lang="en-US" smtClean="0"/>
-              <a:t>3/13/2026</a:t>
+              <a:t>4/16/2026</a:t>
             </a:fld>
             <a:endParaRPr lang="en-US"/>
           </a:p>
@@ -2510,7 +2705,7 @@
           <a:p>
             <a:fld id="{846CE7D5-CF57-46EF-B807-FDD0502418D4}" type="datetimeFigureOut">
               <a:rPr lang="en-US" smtClean="0"/>
-              <a:t>3/13/2026</a:t>
+              <a:t>4/16/2026</a:t>
             </a:fld>
             <a:endParaRPr lang="en-US"/>
           </a:p>
@@ -2877,7 +3072,7 @@
           <a:p>
             <a:fld id="{846CE7D5-CF57-46EF-B807-FDD0502418D4}" type="datetimeFigureOut">
               <a:rPr lang="en-US" smtClean="0"/>
-              <a:t>3/13/2026</a:t>
+              <a:t>4/16/2026</a:t>
             </a:fld>
             <a:endParaRPr lang="en-US"/>
           </a:p>
@@ -2995,7 +3190,7 @@
           <a:p>
             <a:fld id="{846CE7D5-CF57-46EF-B807-FDD0502418D4}" type="datetimeFigureOut">
               <a:rPr lang="en-US" smtClean="0"/>
-              <a:t>3/13/2026</a:t>
+              <a:t>4/16/2026</a:t>
             </a:fld>
             <a:endParaRPr lang="en-US"/>
           </a:p>
@@ -3090,7 +3285,7 @@
           <a:p>
             <a:fld id="{846CE7D5-CF57-46EF-B807-FDD0502418D4}" type="datetimeFigureOut">
               <a:rPr lang="en-US" smtClean="0"/>
-              <a:t>3/13/2026</a:t>
+              <a:t>4/16/2026</a:t>
             </a:fld>
             <a:endParaRPr lang="en-US"/>
           </a:p>
@@ -3367,7 +3562,7 @@
           <a:p>
             <a:fld id="{846CE7D5-CF57-46EF-B807-FDD0502418D4}" type="datetimeFigureOut">
               <a:rPr lang="en-US" smtClean="0"/>
-              <a:t>3/13/2026</a:t>
+              <a:t>4/16/2026</a:t>
             </a:fld>
             <a:endParaRPr lang="en-US"/>
           </a:p>
@@ -3624,7 +3819,7 @@
           <a:p>
             <a:fld id="{846CE7D5-CF57-46EF-B807-FDD0502418D4}" type="datetimeFigureOut">
               <a:rPr lang="en-US" smtClean="0"/>
-              <a:t>3/13/2026</a:t>
+              <a:t>4/16/2026</a:t>
             </a:fld>
             <a:endParaRPr lang="en-US"/>
           </a:p>
@@ -3837,7 +4032,7 @@
           <a:p>
             <a:fld id="{846CE7D5-CF57-46EF-B807-FDD0502418D4}" type="datetimeFigureOut">
               <a:rPr lang="en-US" smtClean="0"/>
-              <a:t>3/13/2026</a:t>
+              <a:t>4/16/2026</a:t>
             </a:fld>
             <a:endParaRPr lang="en-US"/>
           </a:p>
@@ -4250,10 +4445,598 @@
       </p:grpSpPr>
       <p:sp>
         <p:nvSpPr>
+          <p:cNvPr id="10" name="Ορθογώνιο 9">
+            <a:extLst>
+              <a:ext uri="{FF2B5EF4-FFF2-40B4-BE49-F238E27FC236}">
+                <a16:creationId xmlns:a16="http://schemas.microsoft.com/office/drawing/2014/main" id="{BDF1E159-765D-001E-8ED7-2EF19008F402}"/>
+              </a:ext>
+            </a:extLst>
+          </p:cNvPr>
+          <p:cNvSpPr/>
+          <p:nvPr/>
+        </p:nvSpPr>
+        <p:spPr>
+          <a:xfrm>
+            <a:off x="1209368" y="365125"/>
+            <a:ext cx="10515600" cy="5841549"/>
+          </a:xfrm>
+          <a:prstGeom prst="rect">
+            <a:avLst/>
+          </a:prstGeom>
+          <a:effectLst>
+            <a:glow rad="63500">
+              <a:schemeClr val="accent3">
+                <a:satMod val="175000"/>
+                <a:alpha val="40000"/>
+              </a:schemeClr>
+            </a:glow>
+          </a:effectLst>
+        </p:spPr>
+        <p:style>
+          <a:lnRef idx="2">
+            <a:schemeClr val="accent6"/>
+          </a:lnRef>
+          <a:fillRef idx="1">
+            <a:schemeClr val="lt1"/>
+          </a:fillRef>
+          <a:effectRef idx="0">
+            <a:schemeClr val="accent6"/>
+          </a:effectRef>
+          <a:fontRef idx="minor">
+            <a:schemeClr val="dk1"/>
+          </a:fontRef>
+        </p:style>
+        <p:txBody>
+          <a:bodyPr rtlCol="0" anchor="ctr"/>
+          <a:lstStyle/>
+          <a:p>
+            <a:pPr algn="ctr"/>
+            <a:endParaRPr lang="el-GR"/>
+          </a:p>
+        </p:txBody>
+      </p:sp>
+      <p:sp>
+        <p:nvSpPr>
           <p:cNvPr id="4" name="Τίτλος 3">
             <a:extLst>
               <a:ext uri="{FF2B5EF4-FFF2-40B4-BE49-F238E27FC236}">
                 <a16:creationId xmlns:a16="http://schemas.microsoft.com/office/drawing/2014/main" id="{522D5670-9E86-1570-64BD-01D9360D63ED}"/>
+              </a:ext>
+            </a:extLst>
+          </p:cNvPr>
+          <p:cNvSpPr>
+            <a:spLocks noGrp="1"/>
+          </p:cNvSpPr>
+          <p:nvPr>
+            <p:ph type="title"/>
+          </p:nvPr>
+        </p:nvSpPr>
+        <p:spPr>
+          <a:xfrm>
+            <a:off x="1209368" y="374327"/>
+            <a:ext cx="10515600" cy="1325563"/>
+          </a:xfrm>
+        </p:spPr>
+        <p:txBody>
+          <a:bodyPr/>
+          <a:lstStyle/>
+          <a:p>
+            <a:pPr algn="ctr"/>
+            <a:r>
+              <a:rPr lang="el-GR" dirty="0">
+                <a:latin typeface="Times New Roman" panose="02020603050405020304" pitchFamily="18" charset="0"/>
+                <a:cs typeface="Times New Roman" panose="02020603050405020304" pitchFamily="18" charset="0"/>
+              </a:rPr>
+              <a:t>Δομή</a:t>
+            </a:r>
+          </a:p>
+        </p:txBody>
+      </p:sp>
+      <p:sp>
+        <p:nvSpPr>
+          <p:cNvPr id="2" name="TextBox 1">
+            <a:extLst>
+              <a:ext uri="{FF2B5EF4-FFF2-40B4-BE49-F238E27FC236}">
+                <a16:creationId xmlns:a16="http://schemas.microsoft.com/office/drawing/2014/main" id="{04A98A85-22B5-CEFE-B370-0B3CC763F7F5}"/>
+              </a:ext>
+            </a:extLst>
+          </p:cNvPr>
+          <p:cNvSpPr txBox="1"/>
+          <p:nvPr/>
+        </p:nvSpPr>
+        <p:spPr>
+          <a:xfrm>
+            <a:off x="1209368" y="1709092"/>
+            <a:ext cx="10515600" cy="3416320"/>
+          </a:xfrm>
+          <a:prstGeom prst="rect">
+            <a:avLst/>
+          </a:prstGeom>
+          <a:noFill/>
+        </p:spPr>
+        <p:txBody>
+          <a:bodyPr wrap="square" numCol="2" rtlCol="0">
+            <a:spAutoFit/>
+          </a:bodyPr>
+          <a:lstStyle/>
+          <a:p>
+            <a:pPr marL="457200" indent="-457200">
+              <a:buFont typeface="+mj-lt"/>
+              <a:buAutoNum type="arabicPeriod"/>
+            </a:pPr>
+            <a:r>
+              <a:rPr lang="el-GR" sz="2400" dirty="0">
+                <a:latin typeface="Times New Roman" panose="02020603050405020304" pitchFamily="18" charset="0"/>
+                <a:cs typeface="Times New Roman" panose="02020603050405020304" pitchFamily="18" charset="0"/>
+              </a:rPr>
+              <a:t>Προσομοίωση ανθρώπινης συμπεριφοράς</a:t>
+            </a:r>
+            <a:endParaRPr lang="en-US" sz="2400" dirty="0">
+              <a:latin typeface="Times New Roman" panose="02020603050405020304" pitchFamily="18" charset="0"/>
+              <a:cs typeface="Times New Roman" panose="02020603050405020304" pitchFamily="18" charset="0"/>
+            </a:endParaRPr>
+          </a:p>
+          <a:p>
+            <a:pPr marL="457200" indent="-457200">
+              <a:buFont typeface="+mj-lt"/>
+              <a:buAutoNum type="arabicPeriod"/>
+            </a:pPr>
+            <a:endParaRPr lang="el-GR" sz="2400" dirty="0">
+              <a:latin typeface="Times New Roman" panose="02020603050405020304" pitchFamily="18" charset="0"/>
+              <a:cs typeface="Times New Roman" panose="02020603050405020304" pitchFamily="18" charset="0"/>
+            </a:endParaRPr>
+          </a:p>
+          <a:p>
+            <a:pPr marL="457200" indent="-457200">
+              <a:buFont typeface="+mj-lt"/>
+              <a:buAutoNum type="arabicPeriod"/>
+            </a:pPr>
+            <a:r>
+              <a:rPr lang="el-GR" sz="2400" dirty="0">
+                <a:latin typeface="Times New Roman" panose="02020603050405020304" pitchFamily="18" charset="0"/>
+                <a:cs typeface="Times New Roman" panose="02020603050405020304" pitchFamily="18" charset="0"/>
+              </a:rPr>
+              <a:t>Είδη κινδύνων στις βιομηχανίες</a:t>
+            </a:r>
+            <a:endParaRPr lang="en-US" sz="2400" dirty="0">
+              <a:latin typeface="Times New Roman" panose="02020603050405020304" pitchFamily="18" charset="0"/>
+              <a:cs typeface="Times New Roman" panose="02020603050405020304" pitchFamily="18" charset="0"/>
+            </a:endParaRPr>
+          </a:p>
+          <a:p>
+            <a:pPr marL="457200" indent="-457200">
+              <a:buFont typeface="+mj-lt"/>
+              <a:buAutoNum type="arabicPeriod"/>
+            </a:pPr>
+            <a:endParaRPr lang="el-GR" sz="2400" dirty="0">
+              <a:latin typeface="Times New Roman" panose="02020603050405020304" pitchFamily="18" charset="0"/>
+              <a:cs typeface="Times New Roman" panose="02020603050405020304" pitchFamily="18" charset="0"/>
+            </a:endParaRPr>
+          </a:p>
+          <a:p>
+            <a:pPr marL="457200" indent="-457200">
+              <a:buFont typeface="+mj-lt"/>
+              <a:buAutoNum type="arabicPeriod"/>
+            </a:pPr>
+            <a:r>
+              <a:rPr lang="el-GR" sz="2400" dirty="0">
+                <a:latin typeface="Times New Roman" panose="02020603050405020304" pitchFamily="18" charset="0"/>
+                <a:cs typeface="Times New Roman" panose="02020603050405020304" pitchFamily="18" charset="0"/>
+              </a:rPr>
+              <a:t>Υδρόθειο</a:t>
+            </a:r>
+            <a:endParaRPr lang="en-US" sz="2400" dirty="0">
+              <a:latin typeface="Times New Roman" panose="02020603050405020304" pitchFamily="18" charset="0"/>
+              <a:cs typeface="Times New Roman" panose="02020603050405020304" pitchFamily="18" charset="0"/>
+            </a:endParaRPr>
+          </a:p>
+          <a:p>
+            <a:pPr marL="457200" indent="-457200">
+              <a:buFont typeface="+mj-lt"/>
+              <a:buAutoNum type="arabicPeriod"/>
+            </a:pPr>
+            <a:endParaRPr lang="el-GR" sz="2400" dirty="0">
+              <a:latin typeface="Times New Roman" panose="02020603050405020304" pitchFamily="18" charset="0"/>
+              <a:cs typeface="Times New Roman" panose="02020603050405020304" pitchFamily="18" charset="0"/>
+            </a:endParaRPr>
+          </a:p>
+          <a:p>
+            <a:pPr marL="457200" indent="-457200">
+              <a:buFont typeface="+mj-lt"/>
+              <a:buAutoNum type="arabicPeriod"/>
+            </a:pPr>
+            <a:r>
+              <a:rPr lang="el-GR" sz="2400" dirty="0">
+                <a:latin typeface="Times New Roman" panose="02020603050405020304" pitchFamily="18" charset="0"/>
+                <a:cs typeface="Times New Roman" panose="02020603050405020304" pitchFamily="18" charset="0"/>
+              </a:rPr>
+              <a:t>Εκτίμηση επιπτώσεων στην</a:t>
+            </a:r>
+            <a:br>
+              <a:rPr lang="en-US" sz="2400" dirty="0">
+                <a:latin typeface="Times New Roman" panose="02020603050405020304" pitchFamily="18" charset="0"/>
+                <a:cs typeface="Times New Roman" panose="02020603050405020304" pitchFamily="18" charset="0"/>
+              </a:rPr>
+            </a:br>
+            <a:r>
+              <a:rPr lang="el-GR" sz="2400" dirty="0">
+                <a:latin typeface="Times New Roman" panose="02020603050405020304" pitchFamily="18" charset="0"/>
+                <a:cs typeface="Times New Roman" panose="02020603050405020304" pitchFamily="18" charset="0"/>
+              </a:rPr>
+              <a:t>ανθρώπινη υγεία</a:t>
+            </a:r>
+          </a:p>
+          <a:p>
+            <a:pPr marL="457200" indent="-457200">
+              <a:buFont typeface="+mj-lt"/>
+              <a:buAutoNum type="arabicPeriod"/>
+            </a:pPr>
+            <a:r>
+              <a:rPr lang="el-GR" sz="2400" dirty="0">
+                <a:latin typeface="Times New Roman" panose="02020603050405020304" pitchFamily="18" charset="0"/>
+                <a:cs typeface="Times New Roman" panose="02020603050405020304" pitchFamily="18" charset="0"/>
+              </a:rPr>
+              <a:t>Κίνηση «πρακτόρων»</a:t>
+            </a:r>
+            <a:endParaRPr lang="en-US" sz="2400" dirty="0">
+              <a:latin typeface="Times New Roman" panose="02020603050405020304" pitchFamily="18" charset="0"/>
+              <a:cs typeface="Times New Roman" panose="02020603050405020304" pitchFamily="18" charset="0"/>
+            </a:endParaRPr>
+          </a:p>
+          <a:p>
+            <a:pPr marL="457200" indent="-457200">
+              <a:buFont typeface="+mj-lt"/>
+              <a:buAutoNum type="arabicPeriod"/>
+            </a:pPr>
+            <a:endParaRPr lang="en-US" sz="2400" dirty="0">
+              <a:latin typeface="Times New Roman" panose="02020603050405020304" pitchFamily="18" charset="0"/>
+              <a:cs typeface="Times New Roman" panose="02020603050405020304" pitchFamily="18" charset="0"/>
+            </a:endParaRPr>
+          </a:p>
+          <a:p>
+            <a:pPr marL="457200" indent="-457200">
+              <a:buFont typeface="+mj-lt"/>
+              <a:buAutoNum type="arabicPeriod"/>
+            </a:pPr>
+            <a:endParaRPr lang="el-GR" sz="2400" dirty="0">
+              <a:latin typeface="Times New Roman" panose="02020603050405020304" pitchFamily="18" charset="0"/>
+              <a:cs typeface="Times New Roman" panose="02020603050405020304" pitchFamily="18" charset="0"/>
+            </a:endParaRPr>
+          </a:p>
+          <a:p>
+            <a:pPr marL="457200" indent="-457200">
+              <a:buFont typeface="+mj-lt"/>
+              <a:buAutoNum type="arabicPeriod"/>
+            </a:pPr>
+            <a:r>
+              <a:rPr lang="en-US" sz="2400" dirty="0">
+                <a:latin typeface="Times New Roman" panose="02020603050405020304" pitchFamily="18" charset="0"/>
+                <a:cs typeface="Times New Roman" panose="02020603050405020304" pitchFamily="18" charset="0"/>
+              </a:rPr>
+              <a:t>Julia </a:t>
+            </a:r>
+            <a:r>
+              <a:rPr lang="el-GR" sz="2400" dirty="0">
+                <a:latin typeface="Times New Roman" panose="02020603050405020304" pitchFamily="18" charset="0"/>
+                <a:cs typeface="Times New Roman" panose="02020603050405020304" pitchFamily="18" charset="0"/>
+              </a:rPr>
+              <a:t>ως περιβάλλον προσομοίωσης</a:t>
+            </a:r>
+            <a:endParaRPr lang="en-US" sz="2400" dirty="0">
+              <a:latin typeface="Times New Roman" panose="02020603050405020304" pitchFamily="18" charset="0"/>
+              <a:cs typeface="Times New Roman" panose="02020603050405020304" pitchFamily="18" charset="0"/>
+            </a:endParaRPr>
+          </a:p>
+          <a:p>
+            <a:pPr marL="457200" indent="-457200">
+              <a:buFont typeface="+mj-lt"/>
+              <a:buAutoNum type="arabicPeriod"/>
+            </a:pPr>
+            <a:endParaRPr lang="el-GR" sz="2400" dirty="0">
+              <a:latin typeface="Times New Roman" panose="02020603050405020304" pitchFamily="18" charset="0"/>
+              <a:cs typeface="Times New Roman" panose="02020603050405020304" pitchFamily="18" charset="0"/>
+            </a:endParaRPr>
+          </a:p>
+          <a:p>
+            <a:pPr marL="457200" indent="-457200">
+              <a:buFont typeface="+mj-lt"/>
+              <a:buAutoNum type="arabicPeriod"/>
+            </a:pPr>
+            <a:r>
+              <a:rPr lang="el-GR" sz="2400" dirty="0">
+                <a:latin typeface="Times New Roman" panose="02020603050405020304" pitchFamily="18" charset="0"/>
+                <a:cs typeface="Times New Roman" panose="02020603050405020304" pitchFamily="18" charset="0"/>
+              </a:rPr>
+              <a:t>Περίπτωση μελέτης</a:t>
+            </a:r>
+            <a:endParaRPr lang="en-US" sz="2400" dirty="0">
+              <a:latin typeface="Times New Roman" panose="02020603050405020304" pitchFamily="18" charset="0"/>
+              <a:cs typeface="Times New Roman" panose="02020603050405020304" pitchFamily="18" charset="0"/>
+            </a:endParaRPr>
+          </a:p>
+          <a:p>
+            <a:pPr marL="457200" indent="-457200">
+              <a:buFont typeface="+mj-lt"/>
+              <a:buAutoNum type="arabicPeriod"/>
+            </a:pPr>
+            <a:endParaRPr lang="el-GR" sz="2400" dirty="0">
+              <a:latin typeface="Times New Roman" panose="02020603050405020304" pitchFamily="18" charset="0"/>
+              <a:cs typeface="Times New Roman" panose="02020603050405020304" pitchFamily="18" charset="0"/>
+            </a:endParaRPr>
+          </a:p>
+          <a:p>
+            <a:pPr marL="457200" indent="-457200">
+              <a:buFont typeface="+mj-lt"/>
+              <a:buAutoNum type="arabicPeriod"/>
+            </a:pPr>
+            <a:r>
+              <a:rPr lang="el-GR" sz="2400" dirty="0">
+                <a:latin typeface="Times New Roman" panose="02020603050405020304" pitchFamily="18" charset="0"/>
+                <a:cs typeface="Times New Roman" panose="02020603050405020304" pitchFamily="18" charset="0"/>
+              </a:rPr>
+              <a:t>Αποτελέσματα</a:t>
+            </a:r>
+          </a:p>
+          <a:p>
+            <a:endParaRPr lang="el-GR" dirty="0"/>
+          </a:p>
+        </p:txBody>
+      </p:sp>
+      <p:pic>
+        <p:nvPicPr>
+          <p:cNvPr id="5" name="Εικόνα 4">
+            <a:extLst>
+              <a:ext uri="{FF2B5EF4-FFF2-40B4-BE49-F238E27FC236}">
+                <a16:creationId xmlns:a16="http://schemas.microsoft.com/office/drawing/2014/main" id="{CEE96B57-A880-DF1E-C7E7-B900CC914DD9}"/>
+              </a:ext>
+            </a:extLst>
+          </p:cNvPr>
+          <p:cNvPicPr>
+            <a:picLocks noChangeAspect="1"/>
+          </p:cNvPicPr>
+          <p:nvPr/>
+        </p:nvPicPr>
+        <p:blipFill>
+          <a:blip r:embed="rId2" cstate="print">
+            <a:extLst>
+              <a:ext uri="{28A0092B-C50C-407E-A947-70E740481C1C}">
+                <a14:useLocalDpi xmlns:a14="http://schemas.microsoft.com/office/drawing/2010/main" val="0"/>
+              </a:ext>
+            </a:extLst>
+          </a:blip>
+          <a:stretch>
+            <a:fillRect/>
+          </a:stretch>
+        </p:blipFill>
+        <p:spPr>
+          <a:xfrm>
+            <a:off x="0" y="5532436"/>
+            <a:ext cx="1209368" cy="1325564"/>
+          </a:xfrm>
+          <a:prstGeom prst="rect">
+            <a:avLst/>
+          </a:prstGeom>
+        </p:spPr>
+      </p:pic>
+      <p:sp>
+        <p:nvSpPr>
+          <p:cNvPr id="12" name="TextBox 11">
+            <a:extLst>
+              <a:ext uri="{FF2B5EF4-FFF2-40B4-BE49-F238E27FC236}">
+                <a16:creationId xmlns:a16="http://schemas.microsoft.com/office/drawing/2014/main" id="{BC21725C-1746-3E5A-F96F-0AB0015BA378}"/>
+              </a:ext>
+            </a:extLst>
+          </p:cNvPr>
+          <p:cNvSpPr txBox="1"/>
+          <p:nvPr/>
+        </p:nvSpPr>
+        <p:spPr>
+          <a:xfrm>
+            <a:off x="8554064" y="6497869"/>
+            <a:ext cx="3637936" cy="369332"/>
+          </a:xfrm>
+          <a:prstGeom prst="rect">
+            <a:avLst/>
+          </a:prstGeom>
+          <a:noFill/>
+        </p:spPr>
+        <p:txBody>
+          <a:bodyPr wrap="square" rtlCol="0">
+            <a:spAutoFit/>
+          </a:bodyPr>
+          <a:lstStyle/>
+          <a:p>
+            <a:r>
+              <a:rPr lang="el-GR" dirty="0">
+                <a:latin typeface="Times New Roman" panose="02020603050405020304" pitchFamily="18" charset="0"/>
+                <a:cs typeface="Times New Roman" panose="02020603050405020304" pitchFamily="18" charset="0"/>
+              </a:rPr>
+              <a:t>Εργαστήριο Φαινομένων Μεταφοράς</a:t>
+            </a:r>
+          </a:p>
+        </p:txBody>
+      </p:sp>
+      <p:sp>
+        <p:nvSpPr>
+          <p:cNvPr id="14" name="TextBox 13">
+            <a:extLst>
+              <a:ext uri="{FF2B5EF4-FFF2-40B4-BE49-F238E27FC236}">
+                <a16:creationId xmlns:a16="http://schemas.microsoft.com/office/drawing/2014/main" id="{16794D8D-248A-BB4D-548F-EF5B449580BC}"/>
+              </a:ext>
+            </a:extLst>
+          </p:cNvPr>
+          <p:cNvSpPr txBox="1"/>
+          <p:nvPr/>
+        </p:nvSpPr>
+        <p:spPr>
+          <a:xfrm>
+            <a:off x="1209368" y="6220870"/>
+            <a:ext cx="7728155" cy="646331"/>
+          </a:xfrm>
+          <a:prstGeom prst="rect">
+            <a:avLst/>
+          </a:prstGeom>
+          <a:noFill/>
+        </p:spPr>
+        <p:txBody>
+          <a:bodyPr wrap="square" rtlCol="0">
+            <a:spAutoFit/>
+          </a:bodyPr>
+          <a:lstStyle/>
+          <a:p>
+            <a:r>
+              <a:rPr lang="el-GR" dirty="0">
+                <a:latin typeface="Times New Roman" panose="02020603050405020304" pitchFamily="18" charset="0"/>
+                <a:cs typeface="Times New Roman" panose="02020603050405020304" pitchFamily="18" charset="0"/>
+              </a:rPr>
+              <a:t>Εκκένωση με δυναμική δρομολόγηση υπό την επήρεια τοξικού φορτίου</a:t>
+            </a:r>
+            <a:br>
+              <a:rPr lang="el-GR" dirty="0">
+                <a:latin typeface="Times New Roman" panose="02020603050405020304" pitchFamily="18" charset="0"/>
+                <a:cs typeface="Times New Roman" panose="02020603050405020304" pitchFamily="18" charset="0"/>
+              </a:rPr>
+            </a:br>
+            <a:r>
+              <a:rPr lang="el-GR" dirty="0">
+                <a:latin typeface="Times New Roman" panose="02020603050405020304" pitchFamily="18" charset="0"/>
+                <a:cs typeface="Times New Roman" panose="02020603050405020304" pitchFamily="18" charset="0"/>
+              </a:rPr>
+              <a:t>Γεώργιος Πίτσος </a:t>
+            </a:r>
+          </a:p>
+        </p:txBody>
+      </p:sp>
+    </p:spTree>
+    <p:extLst>
+      <p:ext uri="{BB962C8B-B14F-4D97-AF65-F5344CB8AC3E}">
+        <p14:creationId xmlns:p14="http://schemas.microsoft.com/office/powerpoint/2010/main" val="1699144146"/>
+      </p:ext>
+    </p:extLst>
+  </p:cSld>
+  <p:clrMapOvr>
+    <a:overrideClrMapping bg1="lt1" tx1="dk1" bg2="lt2" tx2="dk2" accent1="accent1" accent2="accent2" accent3="accent3" accent4="accent4" accent5="accent5" accent6="accent6" hlink="hlink" folHlink="folHlink"/>
+  </p:clrMapOvr>
+</p:sld>
+</file>
+
+<file path=ppt/slides/slide10.xml><?xml version="1.0" encoding="utf-8"?>
+<p:sld xmlns:a="http://schemas.openxmlformats.org/drawingml/2006/main" xmlns:r="http://schemas.openxmlformats.org/officeDocument/2006/relationships" xmlns:p="http://schemas.openxmlformats.org/presentationml/2006/main" show="0">
+  <p:cSld>
+    <p:spTree>
+      <p:nvGrpSpPr>
+        <p:cNvPr id="1" name="">
+          <a:extLst>
+            <a:ext uri="{FF2B5EF4-FFF2-40B4-BE49-F238E27FC236}">
+              <a16:creationId xmlns:a16="http://schemas.microsoft.com/office/drawing/2014/main" id="{94D3E3FF-4F5B-67E4-846A-1EE4CDA1AE3C}"/>
+            </a:ext>
+          </a:extLst>
+        </p:cNvPr>
+        <p:cNvGrpSpPr/>
+        <p:nvPr/>
+      </p:nvGrpSpPr>
+      <p:grpSpPr>
+        <a:xfrm>
+          <a:off x="0" y="0"/>
+          <a:ext cx="0" cy="0"/>
+          <a:chOff x="0" y="0"/>
+          <a:chExt cx="0" cy="0"/>
+        </a:xfrm>
+      </p:grpSpPr>
+      <p:cxnSp>
+        <p:nvCxnSpPr>
+          <p:cNvPr id="2066" name="Γραμμή σύνδεσης: Γωνιώδης 2065">
+            <a:extLst>
+              <a:ext uri="{FF2B5EF4-FFF2-40B4-BE49-F238E27FC236}">
+                <a16:creationId xmlns:a16="http://schemas.microsoft.com/office/drawing/2014/main" id="{AE985968-5AC5-1153-E81E-47DC68316DE5}"/>
+              </a:ext>
+            </a:extLst>
+          </p:cNvPr>
+          <p:cNvCxnSpPr>
+            <a:stCxn id="2055" idx="2"/>
+            <a:endCxn id="1030" idx="2"/>
+          </p:cNvCxnSpPr>
+          <p:nvPr/>
+        </p:nvCxnSpPr>
+        <p:spPr>
+          <a:xfrm rot="5400000">
+            <a:off x="6293835" y="-569309"/>
+            <a:ext cx="12700" cy="10015919"/>
+          </a:xfrm>
+          <a:prstGeom prst="bentConnector3">
+            <a:avLst>
+              <a:gd name="adj1" fmla="val 15092307"/>
+            </a:avLst>
+          </a:prstGeom>
+          <a:ln>
+            <a:tailEnd type="triangle"/>
+          </a:ln>
+        </p:spPr>
+        <p:style>
+          <a:lnRef idx="2">
+            <a:schemeClr val="dk1"/>
+          </a:lnRef>
+          <a:fillRef idx="0">
+            <a:schemeClr val="dk1"/>
+          </a:fillRef>
+          <a:effectRef idx="1">
+            <a:schemeClr val="dk1"/>
+          </a:effectRef>
+          <a:fontRef idx="minor">
+            <a:schemeClr val="tx1"/>
+          </a:fontRef>
+        </p:style>
+      </p:cxnSp>
+      <p:cxnSp>
+        <p:nvCxnSpPr>
+          <p:cNvPr id="2063" name="Γραμμή σύνδεσης: Γωνιώδης 2062">
+            <a:extLst>
+              <a:ext uri="{FF2B5EF4-FFF2-40B4-BE49-F238E27FC236}">
+                <a16:creationId xmlns:a16="http://schemas.microsoft.com/office/drawing/2014/main" id="{D517F966-54BB-C43F-7307-86728F91438D}"/>
+              </a:ext>
+            </a:extLst>
+          </p:cNvPr>
+          <p:cNvCxnSpPr>
+            <a:stCxn id="2054" idx="2"/>
+            <a:endCxn id="1030" idx="2"/>
+          </p:cNvCxnSpPr>
+          <p:nvPr/>
+        </p:nvCxnSpPr>
+        <p:spPr>
+          <a:xfrm rot="5400000">
+            <a:off x="5606845" y="-1256300"/>
+            <a:ext cx="1373981" cy="10015919"/>
+          </a:xfrm>
+          <a:prstGeom prst="bentConnector3">
+            <a:avLst>
+              <a:gd name="adj1" fmla="val 238770"/>
+            </a:avLst>
+          </a:prstGeom>
+          <a:ln>
+            <a:tailEnd type="triangle"/>
+          </a:ln>
+        </p:spPr>
+        <p:style>
+          <a:lnRef idx="2">
+            <a:schemeClr val="dk1"/>
+          </a:lnRef>
+          <a:fillRef idx="0">
+            <a:schemeClr val="dk1"/>
+          </a:fillRef>
+          <a:effectRef idx="1">
+            <a:schemeClr val="dk1"/>
+          </a:effectRef>
+          <a:fontRef idx="minor">
+            <a:schemeClr val="tx1"/>
+          </a:fontRef>
+        </p:style>
+      </p:cxnSp>
+      <p:sp>
+        <p:nvSpPr>
+          <p:cNvPr id="4" name="Τίτλος 3">
+            <a:extLst>
+              <a:ext uri="{FF2B5EF4-FFF2-40B4-BE49-F238E27FC236}">
+                <a16:creationId xmlns:a16="http://schemas.microsoft.com/office/drawing/2014/main" id="{840866C9-761C-1482-9E2B-76DF37C30F22}"/>
               </a:ext>
             </a:extLst>
           </p:cNvPr>
@@ -4275,7 +5058,7 @@
                 <a:latin typeface="Times New Roman" panose="02020603050405020304" pitchFamily="18" charset="0"/>
                 <a:cs typeface="Times New Roman" panose="02020603050405020304" pitchFamily="18" charset="0"/>
               </a:rPr>
-              <a:t>A*</a:t>
+              <a:t>D*lite</a:t>
             </a:r>
             <a:endParaRPr lang="el-GR" dirty="0">
               <a:latin typeface="Times New Roman" panose="02020603050405020304" pitchFamily="18" charset="0"/>
@@ -4286,10 +5069,57 @@
       </p:sp>
       <p:pic>
         <p:nvPicPr>
-          <p:cNvPr id="1027" name="Picture 3">
+          <p:cNvPr id="1030" name="Picture 6">
             <a:extLst>
               <a:ext uri="{FF2B5EF4-FFF2-40B4-BE49-F238E27FC236}">
-                <a16:creationId xmlns:a16="http://schemas.microsoft.com/office/drawing/2014/main" id="{9BA57851-597C-8686-244D-362A24A74EAB}"/>
+                <a16:creationId xmlns:a16="http://schemas.microsoft.com/office/drawing/2014/main" id="{B54B8B7C-3A1E-1471-ED0C-1C599C04F210}"/>
+              </a:ext>
+            </a:extLst>
+          </p:cNvPr>
+          <p:cNvPicPr>
+            <a:picLocks noChangeAspect="1" noChangeArrowheads="1"/>
+          </p:cNvPicPr>
+          <p:nvPr/>
+        </p:nvPicPr>
+        <p:blipFill>
+          <a:blip r:embed="rId3">
+            <a:extLst>
+              <a:ext uri="{28A0092B-C50C-407E-A947-70E740481C1C}">
+                <a14:useLocalDpi xmlns:a14="http://schemas.microsoft.com/office/drawing/2010/main" val="0"/>
+              </a:ext>
+            </a:extLst>
+          </a:blip>
+          <a:srcRect/>
+          <a:stretch>
+            <a:fillRect/>
+          </a:stretch>
+        </p:blipFill>
+        <p:spPr bwMode="auto">
+          <a:xfrm>
+            <a:off x="0" y="3429000"/>
+            <a:ext cx="2571750" cy="1009650"/>
+          </a:xfrm>
+          <a:prstGeom prst="rect">
+            <a:avLst/>
+          </a:prstGeom>
+          <a:noFill/>
+          <a:extLst>
+            <a:ext uri="{909E8E84-426E-40DD-AFC4-6F175D3DCCD1}">
+              <a14:hiddenFill xmlns:a14="http://schemas.microsoft.com/office/drawing/2010/main">
+                <a:solidFill>
+                  <a:srgbClr val="FFFFFF"/>
+                </a:solidFill>
+              </a14:hiddenFill>
+            </a:ext>
+          </a:extLst>
+        </p:spPr>
+      </p:pic>
+      <p:pic>
+        <p:nvPicPr>
+          <p:cNvPr id="2049" name="Picture 1">
+            <a:extLst>
+              <a:ext uri="{FF2B5EF4-FFF2-40B4-BE49-F238E27FC236}">
+                <a16:creationId xmlns:a16="http://schemas.microsoft.com/office/drawing/2014/main" id="{45EED285-BCD6-1087-9865-DA756B1C1C69}"/>
               </a:ext>
             </a:extLst>
           </p:cNvPr>
@@ -4313,8 +5143,8 @@
         </p:blipFill>
         <p:spPr bwMode="auto">
           <a:xfrm>
-            <a:off x="838200" y="2753597"/>
-            <a:ext cx="1466850" cy="1000125"/>
+            <a:off x="2779014" y="2055019"/>
+            <a:ext cx="1838325" cy="1009650"/>
           </a:xfrm>
           <a:prstGeom prst="rect">
             <a:avLst/>
@@ -4333,10 +5163,10 @@
       </p:pic>
       <p:pic>
         <p:nvPicPr>
-          <p:cNvPr id="6" name="Picture 1">
+          <p:cNvPr id="2050" name="Picture 2">
             <a:extLst>
               <a:ext uri="{FF2B5EF4-FFF2-40B4-BE49-F238E27FC236}">
-                <a16:creationId xmlns:a16="http://schemas.microsoft.com/office/drawing/2014/main" id="{305B070F-7335-2336-A437-594B86DED329}"/>
+                <a16:creationId xmlns:a16="http://schemas.microsoft.com/office/drawing/2014/main" id="{E6CBFEAF-317D-0E43-ECEC-8270EC6C4675}"/>
               </a:ext>
             </a:extLst>
           </p:cNvPr>
@@ -4360,8 +5190,8 @@
         </p:blipFill>
         <p:spPr bwMode="auto">
           <a:xfrm>
-            <a:off x="2613500" y="2744072"/>
-            <a:ext cx="1457325" cy="1009650"/>
+            <a:off x="2779014" y="3429000"/>
+            <a:ext cx="1838325" cy="1009650"/>
           </a:xfrm>
           <a:prstGeom prst="rect">
             <a:avLst/>
@@ -4380,10 +5210,10 @@
       </p:pic>
       <p:pic>
         <p:nvPicPr>
-          <p:cNvPr id="7" name="Picture 2">
+          <p:cNvPr id="2051" name="Picture 3">
             <a:extLst>
               <a:ext uri="{FF2B5EF4-FFF2-40B4-BE49-F238E27FC236}">
-                <a16:creationId xmlns:a16="http://schemas.microsoft.com/office/drawing/2014/main" id="{A21EB7BE-164A-96BE-2FBA-187F6221E7FD}"/>
+                <a16:creationId xmlns:a16="http://schemas.microsoft.com/office/drawing/2014/main" id="{1F232C58-5233-F6A2-BFE9-F27223E09676}"/>
               </a:ext>
             </a:extLst>
           </p:cNvPr>
@@ -4407,8 +5237,243 @@
         </p:blipFill>
         <p:spPr bwMode="auto">
           <a:xfrm>
-            <a:off x="4379275" y="2744072"/>
-            <a:ext cx="1466850" cy="1009650"/>
+            <a:off x="2779014" y="4802981"/>
+            <a:ext cx="1838325" cy="1000125"/>
+          </a:xfrm>
+          <a:prstGeom prst="rect">
+            <a:avLst/>
+          </a:prstGeom>
+          <a:noFill/>
+          <a:extLst>
+            <a:ext uri="{909E8E84-426E-40DD-AFC4-6F175D3DCCD1}">
+              <a14:hiddenFill xmlns:a14="http://schemas.microsoft.com/office/drawing/2010/main">
+                <a:solidFill>
+                  <a:srgbClr val="FFFFFF"/>
+                </a:solidFill>
+              </a14:hiddenFill>
+            </a:ext>
+          </a:extLst>
+        </p:spPr>
+      </p:pic>
+      <p:pic>
+        <p:nvPicPr>
+          <p:cNvPr id="2052" name="Picture 4">
+            <a:extLst>
+              <a:ext uri="{FF2B5EF4-FFF2-40B4-BE49-F238E27FC236}">
+                <a16:creationId xmlns:a16="http://schemas.microsoft.com/office/drawing/2014/main" id="{59B9D7A2-3D0D-F024-2543-08E20D207916}"/>
+              </a:ext>
+            </a:extLst>
+          </p:cNvPr>
+          <p:cNvPicPr>
+            <a:picLocks noChangeAspect="1" noChangeArrowheads="1"/>
+          </p:cNvPicPr>
+          <p:nvPr/>
+        </p:nvPicPr>
+        <p:blipFill>
+          <a:blip r:embed="rId7">
+            <a:extLst>
+              <a:ext uri="{28A0092B-C50C-407E-A947-70E740481C1C}">
+                <a14:useLocalDpi xmlns:a14="http://schemas.microsoft.com/office/drawing/2010/main" val="0"/>
+              </a:ext>
+            </a:extLst>
+          </a:blip>
+          <a:srcRect/>
+          <a:stretch>
+            <a:fillRect/>
+          </a:stretch>
+        </p:blipFill>
+        <p:spPr bwMode="auto">
+          <a:xfrm>
+            <a:off x="4824603" y="3429000"/>
+            <a:ext cx="2571750" cy="1009650"/>
+          </a:xfrm>
+          <a:prstGeom prst="rect">
+            <a:avLst/>
+          </a:prstGeom>
+          <a:noFill/>
+          <a:extLst>
+            <a:ext uri="{909E8E84-426E-40DD-AFC4-6F175D3DCCD1}">
+              <a14:hiddenFill xmlns:a14="http://schemas.microsoft.com/office/drawing/2010/main">
+                <a:solidFill>
+                  <a:srgbClr val="FFFFFF"/>
+                </a:solidFill>
+              </a14:hiddenFill>
+            </a:ext>
+          </a:extLst>
+        </p:spPr>
+      </p:pic>
+      <p:pic>
+        <p:nvPicPr>
+          <p:cNvPr id="2053" name="Picture 5">
+            <a:extLst>
+              <a:ext uri="{FF2B5EF4-FFF2-40B4-BE49-F238E27FC236}">
+                <a16:creationId xmlns:a16="http://schemas.microsoft.com/office/drawing/2014/main" id="{16A15E44-1E77-3F0A-9C37-9EDC384A6A5F}"/>
+              </a:ext>
+            </a:extLst>
+          </p:cNvPr>
+          <p:cNvPicPr>
+            <a:picLocks noChangeAspect="1" noChangeArrowheads="1"/>
+          </p:cNvPicPr>
+          <p:nvPr/>
+        </p:nvPicPr>
+        <p:blipFill>
+          <a:blip r:embed="rId8">
+            <a:extLst>
+              <a:ext uri="{28A0092B-C50C-407E-A947-70E740481C1C}">
+                <a14:useLocalDpi xmlns:a14="http://schemas.microsoft.com/office/drawing/2010/main" val="0"/>
+              </a:ext>
+            </a:extLst>
+          </a:blip>
+          <a:srcRect/>
+          <a:stretch>
+            <a:fillRect/>
+          </a:stretch>
+        </p:blipFill>
+        <p:spPr bwMode="auto">
+          <a:xfrm>
+            <a:off x="7603617" y="3429000"/>
+            <a:ext cx="2571750" cy="1009650"/>
+          </a:xfrm>
+          <a:prstGeom prst="rect">
+            <a:avLst/>
+          </a:prstGeom>
+          <a:noFill/>
+          <a:extLst>
+            <a:ext uri="{909E8E84-426E-40DD-AFC4-6F175D3DCCD1}">
+              <a14:hiddenFill xmlns:a14="http://schemas.microsoft.com/office/drawing/2010/main">
+                <a:solidFill>
+                  <a:srgbClr val="FFFFFF"/>
+                </a:solidFill>
+              </a14:hiddenFill>
+            </a:ext>
+          </a:extLst>
+        </p:spPr>
+      </p:pic>
+      <p:pic>
+        <p:nvPicPr>
+          <p:cNvPr id="2054" name="Picture 6">
+            <a:extLst>
+              <a:ext uri="{FF2B5EF4-FFF2-40B4-BE49-F238E27FC236}">
+                <a16:creationId xmlns:a16="http://schemas.microsoft.com/office/drawing/2014/main" id="{F6D63CF7-FBEC-429F-7AD8-6755E133E1C3}"/>
+              </a:ext>
+            </a:extLst>
+          </p:cNvPr>
+          <p:cNvPicPr>
+            <a:picLocks noChangeAspect="1" noChangeArrowheads="1"/>
+          </p:cNvPicPr>
+          <p:nvPr/>
+        </p:nvPicPr>
+        <p:blipFill>
+          <a:blip r:embed="rId9">
+            <a:extLst>
+              <a:ext uri="{28A0092B-C50C-407E-A947-70E740481C1C}">
+                <a14:useLocalDpi xmlns:a14="http://schemas.microsoft.com/office/drawing/2010/main" val="0"/>
+              </a:ext>
+            </a:extLst>
+          </a:blip>
+          <a:srcRect/>
+          <a:stretch>
+            <a:fillRect/>
+          </a:stretch>
+        </p:blipFill>
+        <p:spPr bwMode="auto">
+          <a:xfrm>
+            <a:off x="10382631" y="2055019"/>
+            <a:ext cx="1838325" cy="1009650"/>
+          </a:xfrm>
+          <a:prstGeom prst="rect">
+            <a:avLst/>
+          </a:prstGeom>
+          <a:noFill/>
+          <a:extLst>
+            <a:ext uri="{909E8E84-426E-40DD-AFC4-6F175D3DCCD1}">
+              <a14:hiddenFill xmlns:a14="http://schemas.microsoft.com/office/drawing/2010/main">
+                <a:solidFill>
+                  <a:srgbClr val="FFFFFF"/>
+                </a:solidFill>
+              </a14:hiddenFill>
+            </a:ext>
+          </a:extLst>
+        </p:spPr>
+      </p:pic>
+      <p:pic>
+        <p:nvPicPr>
+          <p:cNvPr id="2055" name="Picture 7">
+            <a:extLst>
+              <a:ext uri="{FF2B5EF4-FFF2-40B4-BE49-F238E27FC236}">
+                <a16:creationId xmlns:a16="http://schemas.microsoft.com/office/drawing/2014/main" id="{D5CA14E5-007F-B525-A4EE-476E96A0AC51}"/>
+              </a:ext>
+            </a:extLst>
+          </p:cNvPr>
+          <p:cNvPicPr>
+            <a:picLocks noChangeAspect="1" noChangeArrowheads="1"/>
+          </p:cNvPicPr>
+          <p:nvPr/>
+        </p:nvPicPr>
+        <p:blipFill>
+          <a:blip r:embed="rId10">
+            <a:extLst>
+              <a:ext uri="{28A0092B-C50C-407E-A947-70E740481C1C}">
+                <a14:useLocalDpi xmlns:a14="http://schemas.microsoft.com/office/drawing/2010/main" val="0"/>
+              </a:ext>
+            </a:extLst>
+          </a:blip>
+          <a:srcRect/>
+          <a:stretch>
+            <a:fillRect/>
+          </a:stretch>
+        </p:blipFill>
+        <p:spPr bwMode="auto">
+          <a:xfrm>
+            <a:off x="10382631" y="3429000"/>
+            <a:ext cx="1838325" cy="1009650"/>
+          </a:xfrm>
+          <a:prstGeom prst="rect">
+            <a:avLst/>
+          </a:prstGeom>
+          <a:noFill/>
+          <a:extLst>
+            <a:ext uri="{909E8E84-426E-40DD-AFC4-6F175D3DCCD1}">
+              <a14:hiddenFill xmlns:a14="http://schemas.microsoft.com/office/drawing/2010/main">
+                <a:solidFill>
+                  <a:srgbClr val="FFFFFF"/>
+                </a:solidFill>
+              </a14:hiddenFill>
+            </a:ext>
+          </a:extLst>
+        </p:spPr>
+      </p:pic>
+      <p:pic>
+        <p:nvPicPr>
+          <p:cNvPr id="2056" name="Picture 8">
+            <a:extLst>
+              <a:ext uri="{FF2B5EF4-FFF2-40B4-BE49-F238E27FC236}">
+                <a16:creationId xmlns:a16="http://schemas.microsoft.com/office/drawing/2014/main" id="{31EDC4D7-532C-798D-062D-1E72DE8B7562}"/>
+              </a:ext>
+            </a:extLst>
+          </p:cNvPr>
+          <p:cNvPicPr>
+            <a:picLocks noChangeAspect="1" noChangeArrowheads="1"/>
+          </p:cNvPicPr>
+          <p:nvPr/>
+        </p:nvPicPr>
+        <p:blipFill>
+          <a:blip r:embed="rId11">
+            <a:extLst>
+              <a:ext uri="{28A0092B-C50C-407E-A947-70E740481C1C}">
+                <a14:useLocalDpi xmlns:a14="http://schemas.microsoft.com/office/drawing/2010/main" val="0"/>
+              </a:ext>
+            </a:extLst>
+          </a:blip>
+          <a:srcRect/>
+          <a:stretch>
+            <a:fillRect/>
+          </a:stretch>
+        </p:blipFill>
+        <p:spPr bwMode="auto">
+          <a:xfrm>
+            <a:off x="10382631" y="4802980"/>
+            <a:ext cx="1838325" cy="1000125"/>
           </a:xfrm>
           <a:prstGeom prst="rect">
             <a:avLst/>
@@ -4427,23 +5492,23 @@
       </p:pic>
       <p:cxnSp>
         <p:nvCxnSpPr>
-          <p:cNvPr id="9" name="Ευθύγραμμο βέλος σύνδεσης 8">
+          <p:cNvPr id="3" name="Ευθύγραμμο βέλος σύνδεσης 2">
             <a:extLst>
               <a:ext uri="{FF2B5EF4-FFF2-40B4-BE49-F238E27FC236}">
-                <a16:creationId xmlns:a16="http://schemas.microsoft.com/office/drawing/2014/main" id="{61136C36-1B27-8B4D-034F-942F83E4DC72}"/>
+                <a16:creationId xmlns:a16="http://schemas.microsoft.com/office/drawing/2014/main" id="{7021A8AF-1D8B-093E-C76C-910C481F9E4F}"/>
               </a:ext>
             </a:extLst>
           </p:cNvPr>
           <p:cNvCxnSpPr>
-            <a:stCxn id="1027" idx="3"/>
-            <a:endCxn id="6" idx="1"/>
+            <a:stCxn id="1030" idx="3"/>
+            <a:endCxn id="2050" idx="1"/>
           </p:cNvCxnSpPr>
           <p:nvPr/>
         </p:nvCxnSpPr>
         <p:spPr>
-          <a:xfrm flipV="1">
-            <a:off x="2305050" y="3248897"/>
-            <a:ext cx="308450" cy="4763"/>
+          <a:xfrm>
+            <a:off x="2571750" y="3933825"/>
+            <a:ext cx="207264" cy="0"/>
           </a:xfrm>
           <a:prstGeom prst="straightConnector1">
             <a:avLst/>
@@ -4469,23 +5534,23 @@
       </p:cxnSp>
       <p:cxnSp>
         <p:nvCxnSpPr>
-          <p:cNvPr id="11" name="Ευθύγραμμο βέλος σύνδεσης 10">
+          <p:cNvPr id="6" name="Ευθύγραμμο βέλος σύνδεσης 5">
             <a:extLst>
               <a:ext uri="{FF2B5EF4-FFF2-40B4-BE49-F238E27FC236}">
-                <a16:creationId xmlns:a16="http://schemas.microsoft.com/office/drawing/2014/main" id="{73C832A5-59F1-02C0-EC04-836C2FBCD4C1}"/>
+                <a16:creationId xmlns:a16="http://schemas.microsoft.com/office/drawing/2014/main" id="{CB93CD08-E73F-E540-183C-A245DA1D044B}"/>
               </a:ext>
             </a:extLst>
           </p:cNvPr>
           <p:cNvCxnSpPr>
-            <a:stCxn id="6" idx="3"/>
-            <a:endCxn id="7" idx="1"/>
+            <a:stCxn id="2050" idx="3"/>
+            <a:endCxn id="2052" idx="1"/>
           </p:cNvCxnSpPr>
           <p:nvPr/>
         </p:nvCxnSpPr>
         <p:spPr>
           <a:xfrm>
-            <a:off x="4070825" y="3248897"/>
-            <a:ext cx="308450" cy="0"/>
+            <a:off x="4617339" y="3933825"/>
+            <a:ext cx="207264" cy="0"/>
           </a:xfrm>
           <a:prstGeom prst="straightConnector1">
             <a:avLst/>
@@ -4509,72 +5574,277 @@
           </a:fontRef>
         </p:style>
       </p:cxnSp>
-      <p:pic>
-        <p:nvPicPr>
-          <p:cNvPr id="13" name="Picture 5">
+      <p:cxnSp>
+        <p:nvCxnSpPr>
+          <p:cNvPr id="8" name="Γραμμή σύνδεσης: Γωνιώδης 7">
             <a:extLst>
               <a:ext uri="{FF2B5EF4-FFF2-40B4-BE49-F238E27FC236}">
-                <a16:creationId xmlns:a16="http://schemas.microsoft.com/office/drawing/2014/main" id="{E53F5E9E-0479-B9A2-F193-B53516C55937}"/>
-              </a:ext>
-            </a:extLst>
-          </p:cNvPr>
-          <p:cNvPicPr>
-            <a:picLocks noChangeAspect="1" noChangeArrowheads="1"/>
-          </p:cNvPicPr>
-          <p:nvPr/>
-        </p:nvPicPr>
-        <p:blipFill>
-          <a:blip r:embed="rId7">
-            <a:extLst>
-              <a:ext uri="{28A0092B-C50C-407E-A947-70E740481C1C}">
-                <a14:useLocalDpi xmlns:a14="http://schemas.microsoft.com/office/drawing/2010/main" val="0"/>
-              </a:ext>
-            </a:extLst>
-          </a:blip>
-          <a:srcRect/>
-          <a:stretch>
-            <a:fillRect/>
-          </a:stretch>
-        </p:blipFill>
-        <p:spPr bwMode="auto">
-          <a:xfrm>
-            <a:off x="6154575" y="2744072"/>
-            <a:ext cx="2362200" cy="1009650"/>
-          </a:xfrm>
-          <a:prstGeom prst="rect">
-            <a:avLst/>
-          </a:prstGeom>
-          <a:noFill/>
-          <a:extLst>
-            <a:ext uri="{909E8E84-426E-40DD-AFC4-6F175D3DCCD1}">
-              <a14:hiddenFill xmlns:a14="http://schemas.microsoft.com/office/drawing/2010/main">
-                <a:solidFill>
-                  <a:srgbClr val="FFFFFF"/>
-                </a:solidFill>
-              </a14:hiddenFill>
-            </a:ext>
-          </a:extLst>
-        </p:spPr>
-      </p:pic>
-      <p:cxnSp>
-        <p:nvCxnSpPr>
-          <p:cNvPr id="16" name="Ευθύγραμμο βέλος σύνδεσης 15">
-            <a:extLst>
-              <a:ext uri="{FF2B5EF4-FFF2-40B4-BE49-F238E27FC236}">
-                <a16:creationId xmlns:a16="http://schemas.microsoft.com/office/drawing/2014/main" id="{7C434BCB-3B0D-6043-9267-89776270B706}"/>
+                <a16:creationId xmlns:a16="http://schemas.microsoft.com/office/drawing/2014/main" id="{66DD1AA3-8130-4AE6-7313-249FFAE6C6E4}"/>
               </a:ext>
             </a:extLst>
           </p:cNvPr>
           <p:cNvCxnSpPr>
-            <a:stCxn id="7" idx="3"/>
-            <a:endCxn id="13" idx="1"/>
+            <a:stCxn id="1030" idx="3"/>
+            <a:endCxn id="2049" idx="1"/>
+          </p:cNvCxnSpPr>
+          <p:nvPr/>
+        </p:nvCxnSpPr>
+        <p:spPr>
+          <a:xfrm flipV="1">
+            <a:off x="2571750" y="2559844"/>
+            <a:ext cx="207264" cy="1373981"/>
+          </a:xfrm>
+          <a:prstGeom prst="bentConnector3">
+            <a:avLst/>
+          </a:prstGeom>
+          <a:ln>
+            <a:tailEnd type="triangle"/>
+          </a:ln>
+        </p:spPr>
+        <p:style>
+          <a:lnRef idx="2">
+            <a:schemeClr val="dk1"/>
+          </a:lnRef>
+          <a:fillRef idx="0">
+            <a:schemeClr val="dk1"/>
+          </a:fillRef>
+          <a:effectRef idx="1">
+            <a:schemeClr val="dk1"/>
+          </a:effectRef>
+          <a:fontRef idx="minor">
+            <a:schemeClr val="tx1"/>
+          </a:fontRef>
+        </p:style>
+      </p:cxnSp>
+      <p:cxnSp>
+        <p:nvCxnSpPr>
+          <p:cNvPr id="10" name="Γραμμή σύνδεσης: Γωνιώδης 9">
+            <a:extLst>
+              <a:ext uri="{FF2B5EF4-FFF2-40B4-BE49-F238E27FC236}">
+                <a16:creationId xmlns:a16="http://schemas.microsoft.com/office/drawing/2014/main" id="{6FFBD32C-617E-3EE7-D461-75B67A809B3E}"/>
+              </a:ext>
+            </a:extLst>
+          </p:cNvPr>
+          <p:cNvCxnSpPr>
+            <a:stCxn id="1030" idx="3"/>
+            <a:endCxn id="2051" idx="1"/>
           </p:cNvCxnSpPr>
           <p:nvPr/>
         </p:nvCxnSpPr>
         <p:spPr>
           <a:xfrm>
-            <a:off x="5846125" y="3248897"/>
-            <a:ext cx="308450" cy="0"/>
+            <a:off x="2571750" y="3933825"/>
+            <a:ext cx="207264" cy="1369219"/>
+          </a:xfrm>
+          <a:prstGeom prst="bentConnector3">
+            <a:avLst/>
+          </a:prstGeom>
+          <a:ln>
+            <a:tailEnd type="triangle"/>
+          </a:ln>
+        </p:spPr>
+        <p:style>
+          <a:lnRef idx="2">
+            <a:schemeClr val="dk1"/>
+          </a:lnRef>
+          <a:fillRef idx="0">
+            <a:schemeClr val="dk1"/>
+          </a:fillRef>
+          <a:effectRef idx="1">
+            <a:schemeClr val="dk1"/>
+          </a:effectRef>
+          <a:fontRef idx="minor">
+            <a:schemeClr val="tx1"/>
+          </a:fontRef>
+        </p:style>
+      </p:cxnSp>
+      <p:cxnSp>
+        <p:nvCxnSpPr>
+          <p:cNvPr id="12" name="Γραμμή σύνδεσης: Γωνιώδης 11">
+            <a:extLst>
+              <a:ext uri="{FF2B5EF4-FFF2-40B4-BE49-F238E27FC236}">
+                <a16:creationId xmlns:a16="http://schemas.microsoft.com/office/drawing/2014/main" id="{1033292C-7B73-87C8-0AB4-7A7219E885D4}"/>
+              </a:ext>
+            </a:extLst>
+          </p:cNvPr>
+          <p:cNvCxnSpPr>
+            <a:stCxn id="2049" idx="3"/>
+            <a:endCxn id="2052" idx="1"/>
+          </p:cNvCxnSpPr>
+          <p:nvPr/>
+        </p:nvCxnSpPr>
+        <p:spPr>
+          <a:xfrm>
+            <a:off x="4617339" y="2559844"/>
+            <a:ext cx="207264" cy="1373981"/>
+          </a:xfrm>
+          <a:prstGeom prst="bentConnector3">
+            <a:avLst/>
+          </a:prstGeom>
+          <a:ln>
+            <a:tailEnd type="triangle"/>
+          </a:ln>
+        </p:spPr>
+        <p:style>
+          <a:lnRef idx="2">
+            <a:schemeClr val="dk1"/>
+          </a:lnRef>
+          <a:fillRef idx="0">
+            <a:schemeClr val="dk1"/>
+          </a:fillRef>
+          <a:effectRef idx="1">
+            <a:schemeClr val="dk1"/>
+          </a:effectRef>
+          <a:fontRef idx="minor">
+            <a:schemeClr val="tx1"/>
+          </a:fontRef>
+        </p:style>
+      </p:cxnSp>
+      <p:cxnSp>
+        <p:nvCxnSpPr>
+          <p:cNvPr id="14" name="Γραμμή σύνδεσης: Γωνιώδης 13">
+            <a:extLst>
+              <a:ext uri="{FF2B5EF4-FFF2-40B4-BE49-F238E27FC236}">
+                <a16:creationId xmlns:a16="http://schemas.microsoft.com/office/drawing/2014/main" id="{0424CA0A-C8E2-6B55-E764-BC2EE23F8A89}"/>
+              </a:ext>
+            </a:extLst>
+          </p:cNvPr>
+          <p:cNvCxnSpPr>
+            <a:stCxn id="2051" idx="3"/>
+            <a:endCxn id="2052" idx="1"/>
+          </p:cNvCxnSpPr>
+          <p:nvPr/>
+        </p:nvCxnSpPr>
+        <p:spPr>
+          <a:xfrm flipV="1">
+            <a:off x="4617339" y="3933825"/>
+            <a:ext cx="207264" cy="1369219"/>
+          </a:xfrm>
+          <a:prstGeom prst="bentConnector3">
+            <a:avLst/>
+          </a:prstGeom>
+          <a:ln>
+            <a:tailEnd type="triangle"/>
+          </a:ln>
+        </p:spPr>
+        <p:style>
+          <a:lnRef idx="2">
+            <a:schemeClr val="dk1"/>
+          </a:lnRef>
+          <a:fillRef idx="0">
+            <a:schemeClr val="dk1"/>
+          </a:fillRef>
+          <a:effectRef idx="1">
+            <a:schemeClr val="dk1"/>
+          </a:effectRef>
+          <a:fontRef idx="minor">
+            <a:schemeClr val="tx1"/>
+          </a:fontRef>
+        </p:style>
+      </p:cxnSp>
+      <p:cxnSp>
+        <p:nvCxnSpPr>
+          <p:cNvPr id="16" name="Γραμμή σύνδεσης: Γωνιώδης 15">
+            <a:extLst>
+              <a:ext uri="{FF2B5EF4-FFF2-40B4-BE49-F238E27FC236}">
+                <a16:creationId xmlns:a16="http://schemas.microsoft.com/office/drawing/2014/main" id="{3CCA2A54-BD6D-7C04-A5E7-97A958EB08A2}"/>
+              </a:ext>
+            </a:extLst>
+          </p:cNvPr>
+          <p:cNvCxnSpPr>
+            <a:stCxn id="2053" idx="3"/>
+            <a:endCxn id="2054" idx="1"/>
+          </p:cNvCxnSpPr>
+          <p:nvPr/>
+        </p:nvCxnSpPr>
+        <p:spPr>
+          <a:xfrm flipV="1">
+            <a:off x="10175367" y="2559844"/>
+            <a:ext cx="207264" cy="1373981"/>
+          </a:xfrm>
+          <a:prstGeom prst="bentConnector3">
+            <a:avLst/>
+          </a:prstGeom>
+          <a:ln>
+            <a:tailEnd type="triangle"/>
+          </a:ln>
+        </p:spPr>
+        <p:style>
+          <a:lnRef idx="2">
+            <a:schemeClr val="dk1"/>
+          </a:lnRef>
+          <a:fillRef idx="0">
+            <a:schemeClr val="dk1"/>
+          </a:fillRef>
+          <a:effectRef idx="1">
+            <a:schemeClr val="dk1"/>
+          </a:effectRef>
+          <a:fontRef idx="minor">
+            <a:schemeClr val="tx1"/>
+          </a:fontRef>
+        </p:style>
+      </p:cxnSp>
+      <p:cxnSp>
+        <p:nvCxnSpPr>
+          <p:cNvPr id="18" name="Γραμμή σύνδεσης: Γωνιώδης 17">
+            <a:extLst>
+              <a:ext uri="{FF2B5EF4-FFF2-40B4-BE49-F238E27FC236}">
+                <a16:creationId xmlns:a16="http://schemas.microsoft.com/office/drawing/2014/main" id="{47D998F1-6460-3EC9-4AA1-4033F488038A}"/>
+              </a:ext>
+            </a:extLst>
+          </p:cNvPr>
+          <p:cNvCxnSpPr>
+            <a:stCxn id="2053" idx="3"/>
+            <a:endCxn id="2056" idx="1"/>
+          </p:cNvCxnSpPr>
+          <p:nvPr/>
+        </p:nvCxnSpPr>
+        <p:spPr>
+          <a:xfrm>
+            <a:off x="10175367" y="3933825"/>
+            <a:ext cx="207264" cy="1369218"/>
+          </a:xfrm>
+          <a:prstGeom prst="bentConnector3">
+            <a:avLst/>
+          </a:prstGeom>
+          <a:ln>
+            <a:tailEnd type="triangle"/>
+          </a:ln>
+        </p:spPr>
+        <p:style>
+          <a:lnRef idx="2">
+            <a:schemeClr val="dk1"/>
+          </a:lnRef>
+          <a:fillRef idx="0">
+            <a:schemeClr val="dk1"/>
+          </a:fillRef>
+          <a:effectRef idx="1">
+            <a:schemeClr val="dk1"/>
+          </a:effectRef>
+          <a:fontRef idx="minor">
+            <a:schemeClr val="tx1"/>
+          </a:fontRef>
+        </p:style>
+      </p:cxnSp>
+      <p:cxnSp>
+        <p:nvCxnSpPr>
+          <p:cNvPr id="20" name="Ευθύγραμμο βέλος σύνδεσης 19">
+            <a:extLst>
+              <a:ext uri="{FF2B5EF4-FFF2-40B4-BE49-F238E27FC236}">
+                <a16:creationId xmlns:a16="http://schemas.microsoft.com/office/drawing/2014/main" id="{C6AB5AD4-6E52-5143-641A-6FB8F6DFEE66}"/>
+              </a:ext>
+            </a:extLst>
+          </p:cNvPr>
+          <p:cNvCxnSpPr>
+            <a:stCxn id="2052" idx="3"/>
+            <a:endCxn id="2053" idx="1"/>
+          </p:cNvCxnSpPr>
+          <p:nvPr/>
+        </p:nvCxnSpPr>
+        <p:spPr>
+          <a:xfrm>
+            <a:off x="7396353" y="3933825"/>
+            <a:ext cx="207264" cy="0"/>
           </a:xfrm>
           <a:prstGeom prst="straightConnector1">
             <a:avLst/>
@@ -4598,102 +5868,71 @@
           </a:fontRef>
         </p:style>
       </p:cxnSp>
-      <p:sp>
-        <p:nvSpPr>
-          <p:cNvPr id="20" name="TextBox 19">
+      <p:cxnSp>
+        <p:nvCxnSpPr>
+          <p:cNvPr id="22" name="Ευθύγραμμο βέλος σύνδεσης 21">
             <a:extLst>
               <a:ext uri="{FF2B5EF4-FFF2-40B4-BE49-F238E27FC236}">
-                <a16:creationId xmlns:a16="http://schemas.microsoft.com/office/drawing/2014/main" id="{613E3778-DCE4-9A56-C251-0E9B2D10C7F6}"/>
+                <a16:creationId xmlns:a16="http://schemas.microsoft.com/office/drawing/2014/main" id="{3C241CA0-D38B-981F-E04C-378C67AB0FEB}"/>
               </a:ext>
             </a:extLst>
           </p:cNvPr>
-          <p:cNvSpPr txBox="1"/>
+          <p:cNvCxnSpPr>
+            <a:stCxn id="2053" idx="3"/>
+            <a:endCxn id="2055" idx="1"/>
+          </p:cNvCxnSpPr>
           <p:nvPr/>
-        </p:nvSpPr>
+        </p:nvCxnSpPr>
         <p:spPr>
           <a:xfrm>
-            <a:off x="5995556" y="3760072"/>
-            <a:ext cx="2680238" cy="1477328"/>
+            <a:off x="10175367" y="3933825"/>
+            <a:ext cx="207264" cy="0"/>
           </a:xfrm>
-          <a:prstGeom prst="rect">
+          <a:prstGeom prst="straightConnector1">
             <a:avLst/>
           </a:prstGeom>
+          <a:ln>
+            <a:tailEnd type="triangle"/>
+          </a:ln>
         </p:spPr>
         <p:style>
           <a:lnRef idx="2">
             <a:schemeClr val="dk1"/>
           </a:lnRef>
-          <a:fillRef idx="1">
-            <a:schemeClr val="lt1"/>
+          <a:fillRef idx="0">
+            <a:schemeClr val="dk1"/>
           </a:fillRef>
-          <a:effectRef idx="0">
+          <a:effectRef idx="1">
             <a:schemeClr val="dk1"/>
           </a:effectRef>
           <a:fontRef idx="minor">
-            <a:schemeClr val="dk1"/>
+            <a:schemeClr val="tx1"/>
           </a:fontRef>
         </p:style>
-        <p:txBody>
-          <a:bodyPr wrap="square" rtlCol="0">
-            <a:spAutoFit/>
-          </a:bodyPr>
-          <a:lstStyle/>
-          <a:p>
-            <a:r>
-              <a:rPr lang="en-US" dirty="0">
-                <a:latin typeface="Times New Roman" panose="02020603050405020304" pitchFamily="18" charset="0"/>
-                <a:cs typeface="Times New Roman" panose="02020603050405020304" pitchFamily="18" charset="0"/>
-              </a:rPr>
-              <a:t>f  = 	g + h</a:t>
-            </a:r>
-          </a:p>
-          <a:p>
-            <a:r>
-              <a:rPr lang="en-US" dirty="0">
-                <a:latin typeface="Times New Roman" panose="02020603050405020304" pitchFamily="18" charset="0"/>
-                <a:cs typeface="Times New Roman" panose="02020603050405020304" pitchFamily="18" charset="0"/>
-              </a:rPr>
-              <a:t>g = 	cost until current 	node</a:t>
-            </a:r>
-          </a:p>
-          <a:p>
-            <a:r>
-              <a:rPr lang="en-US" dirty="0">
-                <a:latin typeface="Times New Roman" panose="02020603050405020304" pitchFamily="18" charset="0"/>
-                <a:cs typeface="Times New Roman" panose="02020603050405020304" pitchFamily="18" charset="0"/>
-              </a:rPr>
-              <a:t>h = 	heuristic cost until the 	End node</a:t>
-            </a:r>
-            <a:endParaRPr lang="el-GR" dirty="0">
-              <a:latin typeface="Times New Roman" panose="02020603050405020304" pitchFamily="18" charset="0"/>
-              <a:cs typeface="Times New Roman" panose="02020603050405020304" pitchFamily="18" charset="0"/>
-            </a:endParaRPr>
-          </a:p>
-        </p:txBody>
-      </p:sp>
+      </p:cxnSp>
       <p:cxnSp>
         <p:nvCxnSpPr>
-          <p:cNvPr id="22" name="Γραμμή σύνδεσης: Γωνιώδης 21">
+          <p:cNvPr id="2069" name="Γραμμή σύνδεσης: Γωνιώδης 2068">
             <a:extLst>
               <a:ext uri="{FF2B5EF4-FFF2-40B4-BE49-F238E27FC236}">
-                <a16:creationId xmlns:a16="http://schemas.microsoft.com/office/drawing/2014/main" id="{DBF5CB10-B988-8305-CAFE-C231C303BE1F}"/>
+                <a16:creationId xmlns:a16="http://schemas.microsoft.com/office/drawing/2014/main" id="{7A93ADE5-A13C-81AB-2407-4FE48F837E21}"/>
               </a:ext>
             </a:extLst>
           </p:cNvPr>
           <p:cNvCxnSpPr>
-            <a:stCxn id="13" idx="0"/>
-            <a:endCxn id="6" idx="0"/>
+            <a:stCxn id="2056" idx="2"/>
+            <a:endCxn id="1030" idx="2"/>
           </p:cNvCxnSpPr>
           <p:nvPr/>
         </p:nvCxnSpPr>
         <p:spPr>
-          <a:xfrm rot="16200000" flipV="1">
-            <a:off x="5338919" y="747316"/>
-            <a:ext cx="12700" cy="3993512"/>
+          <a:xfrm rot="5400000" flipH="1">
+            <a:off x="5611607" y="112919"/>
+            <a:ext cx="1364455" cy="10015919"/>
           </a:xfrm>
           <a:prstGeom prst="bentConnector3">
             <a:avLst>
-              <a:gd name="adj1" fmla="val 6754835"/>
+              <a:gd name="adj1" fmla="val -39584"/>
             </a:avLst>
           </a:prstGeom>
           <a:ln>
@@ -4717,10 +5956,10 @@
       </p:cxnSp>
       <p:pic>
         <p:nvPicPr>
-          <p:cNvPr id="24" name="Picture 3">
+          <p:cNvPr id="2071" name="Picture 10">
             <a:extLst>
               <a:ext uri="{FF2B5EF4-FFF2-40B4-BE49-F238E27FC236}">
-                <a16:creationId xmlns:a16="http://schemas.microsoft.com/office/drawing/2014/main" id="{456D1131-7B59-B6F9-5BF4-08BF4768D1AB}"/>
+                <a16:creationId xmlns:a16="http://schemas.microsoft.com/office/drawing/2014/main" id="{C3B6BC5F-6E98-3A41-45EF-617A3992C556}"/>
               </a:ext>
             </a:extLst>
           </p:cNvPr>
@@ -4730,7 +5969,7 @@
           <p:nvPr/>
         </p:nvPicPr>
         <p:blipFill>
-          <a:blip r:embed="rId8">
+          <a:blip r:embed="rId12">
             <a:extLst>
               <a:ext uri="{28A0092B-C50C-407E-A947-70E740481C1C}">
                 <a14:useLocalDpi xmlns:a14="http://schemas.microsoft.com/office/drawing/2010/main" val="0"/>
@@ -4744,8 +5983,8 @@
         </p:blipFill>
         <p:spPr bwMode="auto">
           <a:xfrm>
-            <a:off x="4611844" y="1405015"/>
-            <a:ext cx="1466850" cy="1000125"/>
+            <a:off x="5324665" y="6029011"/>
+            <a:ext cx="1571625" cy="619125"/>
           </a:xfrm>
           <a:prstGeom prst="rect">
             <a:avLst/>
@@ -4762,214 +6001,72 @@
           </a:extLst>
         </p:spPr>
       </p:pic>
-      <p:pic>
-        <p:nvPicPr>
-          <p:cNvPr id="25" name="Picture 7">
+      <p:sp>
+        <p:nvSpPr>
+          <p:cNvPr id="2072" name="TextBox 2071">
             <a:extLst>
               <a:ext uri="{FF2B5EF4-FFF2-40B4-BE49-F238E27FC236}">
-                <a16:creationId xmlns:a16="http://schemas.microsoft.com/office/drawing/2014/main" id="{A97915D2-FF55-67C2-69C0-48EF59816481}"/>
+                <a16:creationId xmlns:a16="http://schemas.microsoft.com/office/drawing/2014/main" id="{E0E14D87-5941-E685-0EF9-7CF82B8400F3}"/>
               </a:ext>
             </a:extLst>
           </p:cNvPr>
-          <p:cNvPicPr>
-            <a:picLocks noChangeAspect="1" noChangeArrowheads="1"/>
-          </p:cNvPicPr>
+          <p:cNvSpPr txBox="1"/>
           <p:nvPr/>
-        </p:nvPicPr>
-        <p:blipFill>
-          <a:blip r:embed="rId9">
-            <a:extLst>
-              <a:ext uri="{28A0092B-C50C-407E-A947-70E740481C1C}">
-                <a14:useLocalDpi xmlns:a14="http://schemas.microsoft.com/office/drawing/2010/main" val="0"/>
-              </a:ext>
-            </a:extLst>
-          </a:blip>
-          <a:srcRect/>
-          <a:stretch>
-            <a:fillRect/>
-          </a:stretch>
-        </p:blipFill>
-        <p:spPr bwMode="auto">
+        </p:nvSpPr>
+        <p:spPr>
           <a:xfrm>
-            <a:off x="8825225" y="2737722"/>
-            <a:ext cx="2362200" cy="1009650"/>
+            <a:off x="145142" y="2132749"/>
+            <a:ext cx="2852966" cy="923330"/>
           </a:xfrm>
           <a:prstGeom prst="rect">
             <a:avLst/>
           </a:prstGeom>
           <a:noFill/>
-          <a:extLst>
-            <a:ext uri="{909E8E84-426E-40DD-AFC4-6F175D3DCCD1}">
-              <a14:hiddenFill xmlns:a14="http://schemas.microsoft.com/office/drawing/2010/main">
-                <a:solidFill>
-                  <a:srgbClr val="FFFFFF"/>
-                </a:solidFill>
-              </a14:hiddenFill>
-            </a:ext>
-          </a:extLst>
         </p:spPr>
-      </p:pic>
-      <p:cxnSp>
-        <p:nvCxnSpPr>
-          <p:cNvPr id="28" name="Ευθύγραμμο βέλος σύνδεσης 27">
-            <a:extLst>
-              <a:ext uri="{FF2B5EF4-FFF2-40B4-BE49-F238E27FC236}">
-                <a16:creationId xmlns:a16="http://schemas.microsoft.com/office/drawing/2014/main" id="{C3E971AB-C4C2-560C-A7F2-46FA986C6A91}"/>
-              </a:ext>
-            </a:extLst>
-          </p:cNvPr>
-          <p:cNvCxnSpPr>
-            <a:stCxn id="13" idx="3"/>
-            <a:endCxn id="25" idx="1"/>
-          </p:cNvCxnSpPr>
-          <p:nvPr/>
-        </p:nvCxnSpPr>
-        <p:spPr>
-          <a:xfrm flipV="1">
-            <a:off x="8516775" y="3242547"/>
-            <a:ext cx="308450" cy="6350"/>
-          </a:xfrm>
-          <a:prstGeom prst="straightConnector1">
-            <a:avLst/>
-          </a:prstGeom>
-          <a:ln>
-            <a:tailEnd type="triangle"/>
-          </a:ln>
-        </p:spPr>
-        <p:style>
-          <a:lnRef idx="2">
-            <a:schemeClr val="dk1"/>
-          </a:lnRef>
-          <a:fillRef idx="0">
-            <a:schemeClr val="dk1"/>
-          </a:fillRef>
-          <a:effectRef idx="1">
-            <a:schemeClr val="dk1"/>
-          </a:effectRef>
-          <a:fontRef idx="minor">
-            <a:schemeClr val="tx1"/>
-          </a:fontRef>
-        </p:style>
-      </p:cxnSp>
-      <p:pic>
-        <p:nvPicPr>
-          <p:cNvPr id="30" name="Εικόνα 29" descr="Εικόνα που περιέχει διάγραμμα, γραμμή, στιγμιότυπο οθόνης, γράφημα&#10;&#10;Το περιεχόμενο που δημιουργείται από AI ενδέχεται να είναι εσφαλμένο.">
-            <a:extLst>
-              <a:ext uri="{FF2B5EF4-FFF2-40B4-BE49-F238E27FC236}">
-                <a16:creationId xmlns:a16="http://schemas.microsoft.com/office/drawing/2014/main" id="{C0CBD18D-048D-E763-D4B4-116D76CC0861}"/>
-              </a:ext>
-            </a:extLst>
-          </p:cNvPr>
-          <p:cNvPicPr>
-            <a:picLocks noChangeAspect="1"/>
-          </p:cNvPicPr>
-          <p:nvPr/>
-        </p:nvPicPr>
-        <p:blipFill>
-          <a:blip r:embed="rId10" cstate="print">
-            <a:extLst>
-              <a:ext uri="{28A0092B-C50C-407E-A947-70E740481C1C}">
-                <a14:useLocalDpi xmlns:a14="http://schemas.microsoft.com/office/drawing/2010/main" val="0"/>
-              </a:ext>
-            </a:extLst>
-          </a:blip>
-          <a:stretch>
-            <a:fillRect/>
-          </a:stretch>
-        </p:blipFill>
-        <p:spPr>
-          <a:xfrm>
-            <a:off x="562707" y="3764835"/>
-            <a:ext cx="3104277" cy="3104277"/>
-          </a:xfrm>
-          <a:prstGeom prst="rect">
-            <a:avLst/>
-          </a:prstGeom>
-        </p:spPr>
-      </p:pic>
-      <p:pic>
-        <p:nvPicPr>
-          <p:cNvPr id="31" name="Εικόνα 30">
-            <a:extLst>
-              <a:ext uri="{FF2B5EF4-FFF2-40B4-BE49-F238E27FC236}">
-                <a16:creationId xmlns:a16="http://schemas.microsoft.com/office/drawing/2014/main" id="{05D05523-45B3-7D99-321A-0A473D760D54}"/>
-              </a:ext>
-            </a:extLst>
-          </p:cNvPr>
-          <p:cNvPicPr>
-            <a:picLocks noChangeAspect="1"/>
-          </p:cNvPicPr>
-          <p:nvPr/>
-        </p:nvPicPr>
-        <p:blipFill>
-          <a:blip r:embed="rId11" cstate="print">
-            <a:extLst>
-              <a:ext uri="{28A0092B-C50C-407E-A947-70E740481C1C}">
-                <a14:useLocalDpi xmlns:a14="http://schemas.microsoft.com/office/drawing/2010/main" val="0"/>
-              </a:ext>
-            </a:extLst>
-          </a:blip>
-          <a:srcRect/>
-          <a:stretch/>
-        </p:blipFill>
-        <p:spPr>
-          <a:xfrm>
-            <a:off x="4580432" y="3764834"/>
-            <a:ext cx="3104277" cy="3104277"/>
-          </a:xfrm>
-          <a:prstGeom prst="rect">
-            <a:avLst/>
-          </a:prstGeom>
-        </p:spPr>
-      </p:pic>
-      <p:pic>
-        <p:nvPicPr>
-          <p:cNvPr id="1024" name="astar_path_x3.5">
-            <a:hlinkClick r:id="" action="ppaction://media"/>
-            <a:extLst>
-              <a:ext uri="{FF2B5EF4-FFF2-40B4-BE49-F238E27FC236}">
-                <a16:creationId xmlns:a16="http://schemas.microsoft.com/office/drawing/2014/main" id="{699D7DD8-CF3A-D7E6-3EB2-026E9B431505}"/>
-              </a:ext>
-            </a:extLst>
-          </p:cNvPr>
-          <p:cNvPicPr>
-            <a:picLocks noChangeAspect="1"/>
-          </p:cNvPicPr>
-          <p:nvPr>
-            <a:videoFile r:link="rId2"/>
-            <p:extLst>
-              <p:ext uri="{DAA4B4D4-6D71-4841-9C94-3DE7FCFB9230}">
-                <p14:media xmlns:p14="http://schemas.microsoft.com/office/powerpoint/2010/main" r:embed="rId1"/>
-              </p:ext>
-            </p:extLst>
-          </p:nvPr>
-        </p:nvPicPr>
-        <p:blipFill>
-          <a:blip r:embed="rId12"/>
-          <a:stretch>
-            <a:fillRect/>
-          </a:stretch>
-        </p:blipFill>
-        <p:spPr>
-          <a:xfrm>
-            <a:off x="8598157" y="3764835"/>
-            <a:ext cx="3104277" cy="3104277"/>
-          </a:xfrm>
-          <a:prstGeom prst="rect">
-            <a:avLst/>
-          </a:prstGeom>
-        </p:spPr>
-      </p:pic>
+        <p:txBody>
+          <a:bodyPr wrap="square" rtlCol="0">
+            <a:spAutoFit/>
+          </a:bodyPr>
+          <a:lstStyle/>
+          <a:p>
+            <a:r>
+              <a:rPr lang="en-US" dirty="0"/>
+              <a:t>k = </a:t>
+            </a:r>
+            <a:r>
+              <a:rPr lang="el-GR" dirty="0"/>
+              <a:t>διατηρεί σειρά προτεραιότητας στην </a:t>
+            </a:r>
+            <a:r>
+              <a:rPr lang="en-US" dirty="0"/>
+              <a:t>Open List</a:t>
+            </a:r>
+            <a:endParaRPr lang="el-GR" dirty="0"/>
+          </a:p>
+        </p:txBody>
+      </p:sp>
     </p:spTree>
     <p:extLst>
       <p:ext uri="{BB962C8B-B14F-4D97-AF65-F5344CB8AC3E}">
-        <p14:creationId xmlns:p14="http://schemas.microsoft.com/office/powerpoint/2010/main" val="1699144146"/>
+        <p14:creationId xmlns:p14="http://schemas.microsoft.com/office/powerpoint/2010/main" val="866222187"/>
       </p:ext>
     </p:extLst>
   </p:cSld>
   <p:clrMapOvr>
     <a:overrideClrMapping bg1="lt1" tx1="dk1" bg2="lt2" tx2="dk2" accent1="accent1" accent2="accent2" accent3="accent3" accent4="accent4" accent5="accent5" accent6="accent6" hlink="hlink" folHlink="folHlink"/>
   </p:clrMapOvr>
+  <mc:AlternateContent xmlns:mc="http://schemas.openxmlformats.org/markup-compatibility/2006" xmlns:p159="http://schemas.microsoft.com/office/powerpoint/2015/09/main">
+    <mc:Choice Requires="p159">
+      <p:transition xmlns:p14="http://schemas.microsoft.com/office/powerpoint/2010/main" spd="slow" p14:dur="2000">
+        <p159:morph option="byObject"/>
+      </p:transition>
+    </mc:Choice>
+    <mc:Fallback xmlns="">
+      <p:transition spd="slow">
+        <p:fade/>
+      </p:transition>
+    </mc:Fallback>
+  </mc:AlternateContent>
   <p:timing>
     <p:tnLst>
       <p:par>
@@ -4991,7 +6088,7 @@
                             </p:stCondLst>
                             <p:childTnLst>
                               <p:par>
-                                <p:cTn id="5" presetID="22" presetClass="entr" presetSubtype="8" fill="hold" nodeType="clickEffect">
+                                <p:cTn id="5" presetID="22" presetClass="entr" presetSubtype="4" fill="hold" nodeType="clickEffect">
                                   <p:stCondLst>
                                     <p:cond delay="0"/>
                                   </p:stCondLst>
@@ -5004,7 +6101,7 @@
                                           </p:stCondLst>
                                         </p:cTn>
                                         <p:tgtEl>
-                                          <p:spTgt spid="9"/>
+                                          <p:spTgt spid="8"/>
                                         </p:tgtEl>
                                         <p:attrNameLst>
                                           <p:attrName>style.visibility</p:attrName>
@@ -5014,11 +6111,11 @@
                                         <p:strVal val="visible"/>
                                       </p:to>
                                     </p:set>
-                                    <p:animEffect transition="in" filter="wipe(left)">
+                                    <p:animEffect transition="in" filter="wipe(down)">
                                       <p:cBhvr>
                                         <p:cTn id="7" dur="500"/>
                                         <p:tgtEl>
-                                          <p:spTgt spid="9"/>
+                                          <p:spTgt spid="8"/>
                                         </p:tgtEl>
                                       </p:cBhvr>
                                     </p:animEffect>
@@ -5048,7 +6145,7 @@
                                           </p:stCondLst>
                                         </p:cTn>
                                         <p:tgtEl>
-                                          <p:spTgt spid="6"/>
+                                          <p:spTgt spid="2049"/>
                                         </p:tgtEl>
                                         <p:attrNameLst>
                                           <p:attrName>style.visibility</p:attrName>
@@ -5062,7 +6159,7 @@
                                       <p:cBhvr>
                                         <p:cTn id="11" dur="500"/>
                                         <p:tgtEl>
-                                          <p:spTgt spid="6"/>
+                                          <p:spTgt spid="2049"/>
                                         </p:tgtEl>
                                       </p:cBhvr>
                                     </p:animEffect>
@@ -5101,7 +6198,7 @@
                                           </p:stCondLst>
                                         </p:cTn>
                                         <p:tgtEl>
-                                          <p:spTgt spid="11"/>
+                                          <p:spTgt spid="3"/>
                                         </p:tgtEl>
                                         <p:attrNameLst>
                                           <p:attrName>style.visibility</p:attrName>
@@ -5115,7 +6212,7 @@
                                       <p:cBhvr>
                                         <p:cTn id="16" dur="500"/>
                                         <p:tgtEl>
-                                          <p:spTgt spid="11"/>
+                                          <p:spTgt spid="3"/>
                                         </p:tgtEl>
                                       </p:cBhvr>
                                     </p:animEffect>
@@ -5145,7 +6242,7 @@
                                           </p:stCondLst>
                                         </p:cTn>
                                         <p:tgtEl>
-                                          <p:spTgt spid="7"/>
+                                          <p:spTgt spid="2050"/>
                                         </p:tgtEl>
                                         <p:attrNameLst>
                                           <p:attrName>style.visibility</p:attrName>
@@ -5159,242 +6256,28 @@
                                       <p:cBhvr>
                                         <p:cTn id="20" dur="500"/>
                                         <p:tgtEl>
-                                          <p:spTgt spid="7"/>
+                                          <p:spTgt spid="2050"/>
                                         </p:tgtEl>
                                       </p:cBhvr>
                                     </p:animEffect>
                                   </p:childTnLst>
                                 </p:cTn>
                               </p:par>
-                            </p:childTnLst>
-                          </p:cTn>
-                        </p:par>
-                      </p:childTnLst>
-                    </p:cTn>
-                  </p:par>
-                  <p:par>
-                    <p:cTn id="21" fill="hold">
-                      <p:stCondLst>
-                        <p:cond delay="indefinite"/>
-                      </p:stCondLst>
-                      <p:childTnLst>
-                        <p:par>
-                          <p:cTn id="22" fill="hold">
-                            <p:stCondLst>
-                              <p:cond delay="0"/>
-                            </p:stCondLst>
-                            <p:childTnLst>
                               <p:par>
-                                <p:cTn id="23" presetID="42" presetClass="entr" presetSubtype="0" fill="hold" nodeType="clickEffect">
+                                <p:cTn id="21" presetID="2" presetClass="entr" presetSubtype="8" fill="hold" grpId="0" nodeType="withEffect">
                                   <p:stCondLst>
                                     <p:cond delay="0"/>
                                   </p:stCondLst>
                                   <p:childTnLst>
                                     <p:set>
                                       <p:cBhvr>
-                                        <p:cTn id="24" dur="1" fill="hold">
+                                        <p:cTn id="22" dur="1" fill="hold">
                                           <p:stCondLst>
                                             <p:cond delay="0"/>
                                           </p:stCondLst>
                                         </p:cTn>
                                         <p:tgtEl>
-                                          <p:spTgt spid="30"/>
-                                        </p:tgtEl>
-                                        <p:attrNameLst>
-                                          <p:attrName>style.visibility</p:attrName>
-                                        </p:attrNameLst>
-                                      </p:cBhvr>
-                                      <p:to>
-                                        <p:strVal val="visible"/>
-                                      </p:to>
-                                    </p:set>
-                                    <p:animEffect transition="in" filter="fade">
-                                      <p:cBhvr>
-                                        <p:cTn id="25" dur="1000"/>
-                                        <p:tgtEl>
-                                          <p:spTgt spid="30"/>
-                                        </p:tgtEl>
-                                      </p:cBhvr>
-                                    </p:animEffect>
-                                    <p:anim calcmode="lin" valueType="num">
-                                      <p:cBhvr>
-                                        <p:cTn id="26" dur="1000" fill="hold"/>
-                                        <p:tgtEl>
-                                          <p:spTgt spid="30"/>
-                                        </p:tgtEl>
-                                        <p:attrNameLst>
-                                          <p:attrName>ppt_x</p:attrName>
-                                        </p:attrNameLst>
-                                      </p:cBhvr>
-                                      <p:tavLst>
-                                        <p:tav tm="0">
-                                          <p:val>
-                                            <p:strVal val="#ppt_x"/>
-                                          </p:val>
-                                        </p:tav>
-                                        <p:tav tm="100000">
-                                          <p:val>
-                                            <p:strVal val="#ppt_x"/>
-                                          </p:val>
-                                        </p:tav>
-                                      </p:tavLst>
-                                    </p:anim>
-                                    <p:anim calcmode="lin" valueType="num">
-                                      <p:cBhvr>
-                                        <p:cTn id="27" dur="1000" fill="hold"/>
-                                        <p:tgtEl>
-                                          <p:spTgt spid="30"/>
-                                        </p:tgtEl>
-                                        <p:attrNameLst>
-                                          <p:attrName>ppt_y</p:attrName>
-                                        </p:attrNameLst>
-                                      </p:cBhvr>
-                                      <p:tavLst>
-                                        <p:tav tm="0">
-                                          <p:val>
-                                            <p:strVal val="#ppt_y+.1"/>
-                                          </p:val>
-                                        </p:tav>
-                                        <p:tav tm="100000">
-                                          <p:val>
-                                            <p:strVal val="#ppt_y"/>
-                                          </p:val>
-                                        </p:tav>
-                                      </p:tavLst>
-                                    </p:anim>
-                                  </p:childTnLst>
-                                </p:cTn>
-                              </p:par>
-                            </p:childTnLst>
-                          </p:cTn>
-                        </p:par>
-                      </p:childTnLst>
-                    </p:cTn>
-                  </p:par>
-                  <p:par>
-                    <p:cTn id="28" fill="hold">
-                      <p:stCondLst>
-                        <p:cond delay="indefinite"/>
-                      </p:stCondLst>
-                      <p:childTnLst>
-                        <p:par>
-                          <p:cTn id="29" fill="hold">
-                            <p:stCondLst>
-                              <p:cond delay="0"/>
-                            </p:stCondLst>
-                            <p:childTnLst>
-                              <p:par>
-                                <p:cTn id="30" presetID="22" presetClass="entr" presetSubtype="8" fill="hold" nodeType="clickEffect">
-                                  <p:stCondLst>
-                                    <p:cond delay="0"/>
-                                  </p:stCondLst>
-                                  <p:childTnLst>
-                                    <p:set>
-                                      <p:cBhvr>
-                                        <p:cTn id="31" dur="1" fill="hold">
-                                          <p:stCondLst>
-                                            <p:cond delay="0"/>
-                                          </p:stCondLst>
-                                        </p:cTn>
-                                        <p:tgtEl>
-                                          <p:spTgt spid="16"/>
-                                        </p:tgtEl>
-                                        <p:attrNameLst>
-                                          <p:attrName>style.visibility</p:attrName>
-                                        </p:attrNameLst>
-                                      </p:cBhvr>
-                                      <p:to>
-                                        <p:strVal val="visible"/>
-                                      </p:to>
-                                    </p:set>
-                                    <p:animEffect transition="in" filter="wipe(left)">
-                                      <p:cBhvr>
-                                        <p:cTn id="32" dur="500"/>
-                                        <p:tgtEl>
-                                          <p:spTgt spid="16"/>
-                                        </p:tgtEl>
-                                      </p:cBhvr>
-                                    </p:animEffect>
-                                  </p:childTnLst>
-                                </p:cTn>
-                              </p:par>
-                            </p:childTnLst>
-                          </p:cTn>
-                        </p:par>
-                        <p:par>
-                          <p:cTn id="33" fill="hold">
-                            <p:stCondLst>
-                              <p:cond delay="500"/>
-                            </p:stCondLst>
-                            <p:childTnLst>
-                              <p:par>
-                                <p:cTn id="34" presetID="22" presetClass="entr" presetSubtype="8" fill="hold" nodeType="afterEffect">
-                                  <p:stCondLst>
-                                    <p:cond delay="0"/>
-                                  </p:stCondLst>
-                                  <p:childTnLst>
-                                    <p:set>
-                                      <p:cBhvr>
-                                        <p:cTn id="35" dur="1" fill="hold">
-                                          <p:stCondLst>
-                                            <p:cond delay="0"/>
-                                          </p:stCondLst>
-                                        </p:cTn>
-                                        <p:tgtEl>
-                                          <p:spTgt spid="13"/>
-                                        </p:tgtEl>
-                                        <p:attrNameLst>
-                                          <p:attrName>style.visibility</p:attrName>
-                                        </p:attrNameLst>
-                                      </p:cBhvr>
-                                      <p:to>
-                                        <p:strVal val="visible"/>
-                                      </p:to>
-                                    </p:set>
-                                    <p:animEffect transition="in" filter="wipe(left)">
-                                      <p:cBhvr>
-                                        <p:cTn id="36" dur="500"/>
-                                        <p:tgtEl>
-                                          <p:spTgt spid="13"/>
-                                        </p:tgtEl>
-                                      </p:cBhvr>
-                                    </p:animEffect>
-                                  </p:childTnLst>
-                                </p:cTn>
-                              </p:par>
-                            </p:childTnLst>
-                          </p:cTn>
-                        </p:par>
-                      </p:childTnLst>
-                    </p:cTn>
-                  </p:par>
-                  <p:par>
-                    <p:cTn id="37" fill="hold">
-                      <p:stCondLst>
-                        <p:cond delay="indefinite"/>
-                      </p:stCondLst>
-                      <p:childTnLst>
-                        <p:par>
-                          <p:cTn id="38" fill="hold">
-                            <p:stCondLst>
-                              <p:cond delay="0"/>
-                            </p:stCondLst>
-                            <p:childTnLst>
-                              <p:par>
-                                <p:cTn id="39" presetID="2" presetClass="entr" presetSubtype="4" fill="hold" grpId="0" nodeType="clickEffect">
-                                  <p:stCondLst>
-                                    <p:cond delay="0"/>
-                                  </p:stCondLst>
-                                  <p:childTnLst>
-                                    <p:set>
-                                      <p:cBhvr>
-                                        <p:cTn id="40" dur="1" fill="hold">
-                                          <p:stCondLst>
-                                            <p:cond delay="0"/>
-                                          </p:stCondLst>
-                                        </p:cTn>
-                                        <p:tgtEl>
-                                          <p:spTgt spid="20"/>
+                                          <p:spTgt spid="2072"/>
                                         </p:tgtEl>
                                         <p:attrNameLst>
                                           <p:attrName>style.visibility</p:attrName>
@@ -5406,9 +6289,9 @@
                                     </p:set>
                                     <p:anim calcmode="lin" valueType="num">
                                       <p:cBhvr additive="base">
-                                        <p:cTn id="41" dur="500" fill="hold"/>
-                                        <p:tgtEl>
-                                          <p:spTgt spid="20"/>
+                                        <p:cTn id="23" dur="500" fill="hold"/>
+                                        <p:tgtEl>
+                                          <p:spTgt spid="2072"/>
                                         </p:tgtEl>
                                         <p:attrNameLst>
                                           <p:attrName>ppt_x</p:attrName>
@@ -5417,7 +6300,7 @@
                                       <p:tavLst>
                                         <p:tav tm="0">
                                           <p:val>
-                                            <p:strVal val="#ppt_x"/>
+                                            <p:strVal val="0-#ppt_w/2"/>
                                           </p:val>
                                         </p:tav>
                                         <p:tav tm="100000">
@@ -5429,467 +6312,9 @@
                                     </p:anim>
                                     <p:anim calcmode="lin" valueType="num">
                                       <p:cBhvr additive="base">
-                                        <p:cTn id="42" dur="500" fill="hold"/>
-                                        <p:tgtEl>
-                                          <p:spTgt spid="20"/>
-                                        </p:tgtEl>
-                                        <p:attrNameLst>
-                                          <p:attrName>ppt_y</p:attrName>
-                                        </p:attrNameLst>
-                                      </p:cBhvr>
-                                      <p:tavLst>
-                                        <p:tav tm="0">
-                                          <p:val>
-                                            <p:strVal val="1+#ppt_h/2"/>
-                                          </p:val>
-                                        </p:tav>
-                                        <p:tav tm="100000">
-                                          <p:val>
-                                            <p:strVal val="#ppt_y"/>
-                                          </p:val>
-                                        </p:tav>
-                                      </p:tavLst>
-                                    </p:anim>
-                                  </p:childTnLst>
-                                </p:cTn>
-                              </p:par>
-                            </p:childTnLst>
-                          </p:cTn>
-                        </p:par>
-                      </p:childTnLst>
-                    </p:cTn>
-                  </p:par>
-                  <p:par>
-                    <p:cTn id="43" fill="hold">
-                      <p:stCondLst>
-                        <p:cond delay="indefinite"/>
-                      </p:stCondLst>
-                      <p:childTnLst>
-                        <p:par>
-                          <p:cTn id="44" fill="hold">
-                            <p:stCondLst>
-                              <p:cond delay="0"/>
-                            </p:stCondLst>
-                            <p:childTnLst>
-                              <p:par>
-                                <p:cTn id="45" presetID="2" presetClass="exit" presetSubtype="4" fill="hold" grpId="1" nodeType="clickEffect">
-                                  <p:stCondLst>
-                                    <p:cond delay="0"/>
-                                  </p:stCondLst>
-                                  <p:childTnLst>
-                                    <p:anim calcmode="lin" valueType="num">
-                                      <p:cBhvr additive="base">
-                                        <p:cTn id="46" dur="500"/>
-                                        <p:tgtEl>
-                                          <p:spTgt spid="20"/>
-                                        </p:tgtEl>
-                                        <p:attrNameLst>
-                                          <p:attrName>ppt_x</p:attrName>
-                                        </p:attrNameLst>
-                                      </p:cBhvr>
-                                      <p:tavLst>
-                                        <p:tav tm="0">
-                                          <p:val>
-                                            <p:strVal val="ppt_x"/>
-                                          </p:val>
-                                        </p:tav>
-                                        <p:tav tm="100000">
-                                          <p:val>
-                                            <p:strVal val="ppt_x"/>
-                                          </p:val>
-                                        </p:tav>
-                                      </p:tavLst>
-                                    </p:anim>
-                                    <p:anim calcmode="lin" valueType="num">
-                                      <p:cBhvr additive="base">
-                                        <p:cTn id="47" dur="500"/>
-                                        <p:tgtEl>
-                                          <p:spTgt spid="20"/>
-                                        </p:tgtEl>
-                                        <p:attrNameLst>
-                                          <p:attrName>ppt_y</p:attrName>
-                                        </p:attrNameLst>
-                                      </p:cBhvr>
-                                      <p:tavLst>
-                                        <p:tav tm="0">
-                                          <p:val>
-                                            <p:strVal val="ppt_y"/>
-                                          </p:val>
-                                        </p:tav>
-                                        <p:tav tm="100000">
-                                          <p:val>
-                                            <p:strVal val="1+ppt_h/2"/>
-                                          </p:val>
-                                        </p:tav>
-                                      </p:tavLst>
-                                    </p:anim>
-                                    <p:set>
-                                      <p:cBhvr>
-                                        <p:cTn id="48" dur="1" fill="hold">
-                                          <p:stCondLst>
-                                            <p:cond delay="499"/>
-                                          </p:stCondLst>
-                                        </p:cTn>
-                                        <p:tgtEl>
-                                          <p:spTgt spid="20"/>
-                                        </p:tgtEl>
-                                        <p:attrNameLst>
-                                          <p:attrName>style.visibility</p:attrName>
-                                        </p:attrNameLst>
-                                      </p:cBhvr>
-                                      <p:to>
-                                        <p:strVal val="hidden"/>
-                                      </p:to>
-                                    </p:set>
-                                  </p:childTnLst>
-                                </p:cTn>
-                              </p:par>
-                            </p:childTnLst>
-                          </p:cTn>
-                        </p:par>
-                      </p:childTnLst>
-                    </p:cTn>
-                  </p:par>
-                  <p:par>
-                    <p:cTn id="49" fill="hold">
-                      <p:stCondLst>
-                        <p:cond delay="indefinite"/>
-                      </p:stCondLst>
-                      <p:childTnLst>
-                        <p:par>
-                          <p:cTn id="50" fill="hold">
-                            <p:stCondLst>
-                              <p:cond delay="0"/>
-                            </p:stCondLst>
-                            <p:childTnLst>
-                              <p:par>
-                                <p:cTn id="51" presetID="2" presetClass="entr" presetSubtype="4" fill="hold" nodeType="clickEffect">
-                                  <p:stCondLst>
-                                    <p:cond delay="0"/>
-                                  </p:stCondLst>
-                                  <p:childTnLst>
-                                    <p:set>
-                                      <p:cBhvr>
-                                        <p:cTn id="52" dur="1" fill="hold">
-                                          <p:stCondLst>
-                                            <p:cond delay="0"/>
-                                          </p:stCondLst>
-                                        </p:cTn>
-                                        <p:tgtEl>
-                                          <p:spTgt spid="31"/>
-                                        </p:tgtEl>
-                                        <p:attrNameLst>
-                                          <p:attrName>style.visibility</p:attrName>
-                                        </p:attrNameLst>
-                                      </p:cBhvr>
-                                      <p:to>
-                                        <p:strVal val="visible"/>
-                                      </p:to>
-                                    </p:set>
-                                    <p:anim calcmode="lin" valueType="num">
-                                      <p:cBhvr additive="base">
-                                        <p:cTn id="53" dur="500" fill="hold"/>
-                                        <p:tgtEl>
-                                          <p:spTgt spid="31"/>
-                                        </p:tgtEl>
-                                        <p:attrNameLst>
-                                          <p:attrName>ppt_x</p:attrName>
-                                        </p:attrNameLst>
-                                      </p:cBhvr>
-                                      <p:tavLst>
-                                        <p:tav tm="0">
-                                          <p:val>
-                                            <p:strVal val="#ppt_x"/>
-                                          </p:val>
-                                        </p:tav>
-                                        <p:tav tm="100000">
-                                          <p:val>
-                                            <p:strVal val="#ppt_x"/>
-                                          </p:val>
-                                        </p:tav>
-                                      </p:tavLst>
-                                    </p:anim>
-                                    <p:anim calcmode="lin" valueType="num">
-                                      <p:cBhvr additive="base">
-                                        <p:cTn id="54" dur="500" fill="hold"/>
-                                        <p:tgtEl>
-                                          <p:spTgt spid="31"/>
-                                        </p:tgtEl>
-                                        <p:attrNameLst>
-                                          <p:attrName>ppt_y</p:attrName>
-                                        </p:attrNameLst>
-                                      </p:cBhvr>
-                                      <p:tavLst>
-                                        <p:tav tm="0">
-                                          <p:val>
-                                            <p:strVal val="1+#ppt_h/2"/>
-                                          </p:val>
-                                        </p:tav>
-                                        <p:tav tm="100000">
-                                          <p:val>
-                                            <p:strVal val="#ppt_y"/>
-                                          </p:val>
-                                        </p:tav>
-                                      </p:tavLst>
-                                    </p:anim>
-                                  </p:childTnLst>
-                                </p:cTn>
-                              </p:par>
-                            </p:childTnLst>
-                          </p:cTn>
-                        </p:par>
-                      </p:childTnLst>
-                    </p:cTn>
-                  </p:par>
-                  <p:par>
-                    <p:cTn id="55" fill="hold">
-                      <p:stCondLst>
-                        <p:cond delay="indefinite"/>
-                      </p:stCondLst>
-                      <p:childTnLst>
-                        <p:par>
-                          <p:cTn id="56" fill="hold">
-                            <p:stCondLst>
-                              <p:cond delay="0"/>
-                            </p:stCondLst>
-                            <p:childTnLst>
-                              <p:par>
-                                <p:cTn id="57" presetID="22" presetClass="entr" presetSubtype="2" fill="hold" nodeType="clickEffect">
-                                  <p:stCondLst>
-                                    <p:cond delay="0"/>
-                                  </p:stCondLst>
-                                  <p:childTnLst>
-                                    <p:set>
-                                      <p:cBhvr>
-                                        <p:cTn id="58" dur="1" fill="hold">
-                                          <p:stCondLst>
-                                            <p:cond delay="0"/>
-                                          </p:stCondLst>
-                                        </p:cTn>
-                                        <p:tgtEl>
-                                          <p:spTgt spid="22"/>
-                                        </p:tgtEl>
-                                        <p:attrNameLst>
-                                          <p:attrName>style.visibility</p:attrName>
-                                        </p:attrNameLst>
-                                      </p:cBhvr>
-                                      <p:to>
-                                        <p:strVal val="visible"/>
-                                      </p:to>
-                                    </p:set>
-                                    <p:animEffect transition="in" filter="wipe(right)">
-                                      <p:cBhvr>
-                                        <p:cTn id="59" dur="500"/>
-                                        <p:tgtEl>
-                                          <p:spTgt spid="22"/>
-                                        </p:tgtEl>
-                                      </p:cBhvr>
-                                    </p:animEffect>
-                                  </p:childTnLst>
-                                </p:cTn>
-                              </p:par>
-                              <p:par>
-                                <p:cTn id="60" presetID="22" presetClass="entr" presetSubtype="2" fill="hold" nodeType="withEffect">
-                                  <p:stCondLst>
-                                    <p:cond delay="0"/>
-                                  </p:stCondLst>
-                                  <p:childTnLst>
-                                    <p:set>
-                                      <p:cBhvr>
-                                        <p:cTn id="61" dur="1" fill="hold">
-                                          <p:stCondLst>
-                                            <p:cond delay="0"/>
-                                          </p:stCondLst>
-                                        </p:cTn>
-                                        <p:tgtEl>
-                                          <p:spTgt spid="24"/>
-                                        </p:tgtEl>
-                                        <p:attrNameLst>
-                                          <p:attrName>style.visibility</p:attrName>
-                                        </p:attrNameLst>
-                                      </p:cBhvr>
-                                      <p:to>
-                                        <p:strVal val="visible"/>
-                                      </p:to>
-                                    </p:set>
-                                    <p:animEffect transition="in" filter="wipe(right)">
-                                      <p:cBhvr>
-                                        <p:cTn id="62" dur="500"/>
-                                        <p:tgtEl>
-                                          <p:spTgt spid="24"/>
-                                        </p:tgtEl>
-                                      </p:cBhvr>
-                                    </p:animEffect>
-                                  </p:childTnLst>
-                                </p:cTn>
-                              </p:par>
-                            </p:childTnLst>
-                          </p:cTn>
-                        </p:par>
-                      </p:childTnLst>
-                    </p:cTn>
-                  </p:par>
-                  <p:par>
-                    <p:cTn id="63" fill="hold">
-                      <p:stCondLst>
-                        <p:cond delay="indefinite"/>
-                      </p:stCondLst>
-                      <p:childTnLst>
-                        <p:par>
-                          <p:cTn id="64" fill="hold">
-                            <p:stCondLst>
-                              <p:cond delay="0"/>
-                            </p:stCondLst>
-                            <p:childTnLst>
-                              <p:par>
-                                <p:cTn id="65" presetID="22" presetClass="entr" presetSubtype="8" fill="hold" nodeType="clickEffect">
-                                  <p:stCondLst>
-                                    <p:cond delay="0"/>
-                                  </p:stCondLst>
-                                  <p:childTnLst>
-                                    <p:set>
-                                      <p:cBhvr>
-                                        <p:cTn id="66" dur="1" fill="hold">
-                                          <p:stCondLst>
-                                            <p:cond delay="0"/>
-                                          </p:stCondLst>
-                                        </p:cTn>
-                                        <p:tgtEl>
-                                          <p:spTgt spid="28"/>
-                                        </p:tgtEl>
-                                        <p:attrNameLst>
-                                          <p:attrName>style.visibility</p:attrName>
-                                        </p:attrNameLst>
-                                      </p:cBhvr>
-                                      <p:to>
-                                        <p:strVal val="visible"/>
-                                      </p:to>
-                                    </p:set>
-                                    <p:animEffect transition="in" filter="wipe(left)">
-                                      <p:cBhvr>
-                                        <p:cTn id="67" dur="500"/>
-                                        <p:tgtEl>
-                                          <p:spTgt spid="28"/>
-                                        </p:tgtEl>
-                                      </p:cBhvr>
-                                    </p:animEffect>
-                                  </p:childTnLst>
-                                </p:cTn>
-                              </p:par>
-                            </p:childTnLst>
-                          </p:cTn>
-                        </p:par>
-                        <p:par>
-                          <p:cTn id="68" fill="hold">
-                            <p:stCondLst>
-                              <p:cond delay="500"/>
-                            </p:stCondLst>
-                            <p:childTnLst>
-                              <p:par>
-                                <p:cTn id="69" presetID="22" presetClass="entr" presetSubtype="8" fill="hold" nodeType="afterEffect">
-                                  <p:stCondLst>
-                                    <p:cond delay="0"/>
-                                  </p:stCondLst>
-                                  <p:childTnLst>
-                                    <p:set>
-                                      <p:cBhvr>
-                                        <p:cTn id="70" dur="1" fill="hold">
-                                          <p:stCondLst>
-                                            <p:cond delay="0"/>
-                                          </p:stCondLst>
-                                        </p:cTn>
-                                        <p:tgtEl>
-                                          <p:spTgt spid="25"/>
-                                        </p:tgtEl>
-                                        <p:attrNameLst>
-                                          <p:attrName>style.visibility</p:attrName>
-                                        </p:attrNameLst>
-                                      </p:cBhvr>
-                                      <p:to>
-                                        <p:strVal val="visible"/>
-                                      </p:to>
-                                    </p:set>
-                                    <p:animEffect transition="in" filter="wipe(left)">
-                                      <p:cBhvr>
-                                        <p:cTn id="71" dur="500"/>
-                                        <p:tgtEl>
-                                          <p:spTgt spid="25"/>
-                                        </p:tgtEl>
-                                      </p:cBhvr>
-                                    </p:animEffect>
-                                  </p:childTnLst>
-                                </p:cTn>
-                              </p:par>
-                            </p:childTnLst>
-                          </p:cTn>
-                        </p:par>
-                      </p:childTnLst>
-                    </p:cTn>
-                  </p:par>
-                  <p:par>
-                    <p:cTn id="72" fill="hold">
-                      <p:stCondLst>
-                        <p:cond delay="indefinite"/>
-                      </p:stCondLst>
-                      <p:childTnLst>
-                        <p:par>
-                          <p:cTn id="73" fill="hold">
-                            <p:stCondLst>
-                              <p:cond delay="0"/>
-                            </p:stCondLst>
-                            <p:childTnLst>
-                              <p:par>
-                                <p:cTn id="74" presetID="2" presetClass="entr" presetSubtype="2" fill="hold" nodeType="clickEffect">
-                                  <p:stCondLst>
-                                    <p:cond delay="0"/>
-                                  </p:stCondLst>
-                                  <p:childTnLst>
-                                    <p:set>
-                                      <p:cBhvr>
-                                        <p:cTn id="75" dur="1" fill="hold">
-                                          <p:stCondLst>
-                                            <p:cond delay="0"/>
-                                          </p:stCondLst>
-                                        </p:cTn>
-                                        <p:tgtEl>
-                                          <p:spTgt spid="1024"/>
-                                        </p:tgtEl>
-                                        <p:attrNameLst>
-                                          <p:attrName>style.visibility</p:attrName>
-                                        </p:attrNameLst>
-                                      </p:cBhvr>
-                                      <p:to>
-                                        <p:strVal val="visible"/>
-                                      </p:to>
-                                    </p:set>
-                                    <p:anim calcmode="lin" valueType="num">
-                                      <p:cBhvr additive="base">
-                                        <p:cTn id="76" dur="500" fill="hold"/>
-                                        <p:tgtEl>
-                                          <p:spTgt spid="1024"/>
-                                        </p:tgtEl>
-                                        <p:attrNameLst>
-                                          <p:attrName>ppt_x</p:attrName>
-                                        </p:attrNameLst>
-                                      </p:cBhvr>
-                                      <p:tavLst>
-                                        <p:tav tm="0">
-                                          <p:val>
-                                            <p:strVal val="1+#ppt_w/2"/>
-                                          </p:val>
-                                        </p:tav>
-                                        <p:tav tm="100000">
-                                          <p:val>
-                                            <p:strVal val="#ppt_x"/>
-                                          </p:val>
-                                        </p:tav>
-                                      </p:tavLst>
-                                    </p:anim>
-                                    <p:anim calcmode="lin" valueType="num">
-                                      <p:cBhvr additive="base">
-                                        <p:cTn id="77" dur="500" fill="hold"/>
-                                        <p:tgtEl>
-                                          <p:spTgt spid="1024"/>
+                                        <p:cTn id="24" dur="500" fill="hold"/>
+                                        <p:tgtEl>
+                                          <p:spTgt spid="2072"/>
                                         </p:tgtEl>
                                         <p:attrNameLst>
                                           <p:attrName>ppt_y</p:attrName>
@@ -5918,31 +6343,806 @@
                     </p:cTn>
                   </p:par>
                   <p:par>
-                    <p:cTn id="78" fill="hold">
+                    <p:cTn id="25" fill="hold">
                       <p:stCondLst>
                         <p:cond delay="indefinite"/>
                       </p:stCondLst>
                       <p:childTnLst>
                         <p:par>
-                          <p:cTn id="79" fill="hold">
+                          <p:cTn id="26" fill="hold">
                             <p:stCondLst>
                               <p:cond delay="0"/>
                             </p:stCondLst>
                             <p:childTnLst>
                               <p:par>
-                                <p:cTn id="80" presetID="1" presetClass="mediacall" presetSubtype="0" fill="hold" nodeType="clickEffect">
+                                <p:cTn id="27" presetID="22" presetClass="entr" presetSubtype="1" fill="hold" nodeType="clickEffect">
                                   <p:stCondLst>
                                     <p:cond delay="0"/>
                                   </p:stCondLst>
                                   <p:childTnLst>
-                                    <p:cmd type="call" cmd="playFrom(0.0)">
-                                      <p:cBhvr>
-                                        <p:cTn id="81" dur="18267" fill="hold"/>
-                                        <p:tgtEl>
-                                          <p:spTgt spid="1024"/>
-                                        </p:tgtEl>
-                                      </p:cBhvr>
-                                    </p:cmd>
+                                    <p:set>
+                                      <p:cBhvr>
+                                        <p:cTn id="28" dur="1" fill="hold">
+                                          <p:stCondLst>
+                                            <p:cond delay="0"/>
+                                          </p:stCondLst>
+                                        </p:cTn>
+                                        <p:tgtEl>
+                                          <p:spTgt spid="10"/>
+                                        </p:tgtEl>
+                                        <p:attrNameLst>
+                                          <p:attrName>style.visibility</p:attrName>
+                                        </p:attrNameLst>
+                                      </p:cBhvr>
+                                      <p:to>
+                                        <p:strVal val="visible"/>
+                                      </p:to>
+                                    </p:set>
+                                    <p:animEffect transition="in" filter="wipe(up)">
+                                      <p:cBhvr>
+                                        <p:cTn id="29" dur="500"/>
+                                        <p:tgtEl>
+                                          <p:spTgt spid="10"/>
+                                        </p:tgtEl>
+                                      </p:cBhvr>
+                                    </p:animEffect>
+                                  </p:childTnLst>
+                                </p:cTn>
+                              </p:par>
+                            </p:childTnLst>
+                          </p:cTn>
+                        </p:par>
+                        <p:par>
+                          <p:cTn id="30" fill="hold">
+                            <p:stCondLst>
+                              <p:cond delay="500"/>
+                            </p:stCondLst>
+                            <p:childTnLst>
+                              <p:par>
+                                <p:cTn id="31" presetID="22" presetClass="entr" presetSubtype="8" fill="hold" nodeType="afterEffect">
+                                  <p:stCondLst>
+                                    <p:cond delay="0"/>
+                                  </p:stCondLst>
+                                  <p:childTnLst>
+                                    <p:set>
+                                      <p:cBhvr>
+                                        <p:cTn id="32" dur="1" fill="hold">
+                                          <p:stCondLst>
+                                            <p:cond delay="0"/>
+                                          </p:stCondLst>
+                                        </p:cTn>
+                                        <p:tgtEl>
+                                          <p:spTgt spid="2051"/>
+                                        </p:tgtEl>
+                                        <p:attrNameLst>
+                                          <p:attrName>style.visibility</p:attrName>
+                                        </p:attrNameLst>
+                                      </p:cBhvr>
+                                      <p:to>
+                                        <p:strVal val="visible"/>
+                                      </p:to>
+                                    </p:set>
+                                    <p:animEffect transition="in" filter="wipe(left)">
+                                      <p:cBhvr>
+                                        <p:cTn id="33" dur="500"/>
+                                        <p:tgtEl>
+                                          <p:spTgt spid="2051"/>
+                                        </p:tgtEl>
+                                      </p:cBhvr>
+                                    </p:animEffect>
+                                  </p:childTnLst>
+                                </p:cTn>
+                              </p:par>
+                            </p:childTnLst>
+                          </p:cTn>
+                        </p:par>
+                      </p:childTnLst>
+                    </p:cTn>
+                  </p:par>
+                  <p:par>
+                    <p:cTn id="34" fill="hold">
+                      <p:stCondLst>
+                        <p:cond delay="indefinite"/>
+                      </p:stCondLst>
+                      <p:childTnLst>
+                        <p:par>
+                          <p:cTn id="35" fill="hold">
+                            <p:stCondLst>
+                              <p:cond delay="0"/>
+                            </p:stCondLst>
+                            <p:childTnLst>
+                              <p:par>
+                                <p:cTn id="36" presetID="22" presetClass="entr" presetSubtype="8" fill="hold" nodeType="clickEffect">
+                                  <p:stCondLst>
+                                    <p:cond delay="0"/>
+                                  </p:stCondLst>
+                                  <p:childTnLst>
+                                    <p:set>
+                                      <p:cBhvr>
+                                        <p:cTn id="37" dur="1" fill="hold">
+                                          <p:stCondLst>
+                                            <p:cond delay="0"/>
+                                          </p:stCondLst>
+                                        </p:cTn>
+                                        <p:tgtEl>
+                                          <p:spTgt spid="6"/>
+                                        </p:tgtEl>
+                                        <p:attrNameLst>
+                                          <p:attrName>style.visibility</p:attrName>
+                                        </p:attrNameLst>
+                                      </p:cBhvr>
+                                      <p:to>
+                                        <p:strVal val="visible"/>
+                                      </p:to>
+                                    </p:set>
+                                    <p:animEffect transition="in" filter="wipe(left)">
+                                      <p:cBhvr>
+                                        <p:cTn id="38" dur="500"/>
+                                        <p:tgtEl>
+                                          <p:spTgt spid="6"/>
+                                        </p:tgtEl>
+                                      </p:cBhvr>
+                                    </p:animEffect>
+                                  </p:childTnLst>
+                                </p:cTn>
+                              </p:par>
+                              <p:par>
+                                <p:cTn id="39" presetID="22" presetClass="entr" presetSubtype="8" fill="hold" nodeType="withEffect">
+                                  <p:stCondLst>
+                                    <p:cond delay="0"/>
+                                  </p:stCondLst>
+                                  <p:childTnLst>
+                                    <p:set>
+                                      <p:cBhvr>
+                                        <p:cTn id="40" dur="1" fill="hold">
+                                          <p:stCondLst>
+                                            <p:cond delay="0"/>
+                                          </p:stCondLst>
+                                        </p:cTn>
+                                        <p:tgtEl>
+                                          <p:spTgt spid="12"/>
+                                        </p:tgtEl>
+                                        <p:attrNameLst>
+                                          <p:attrName>style.visibility</p:attrName>
+                                        </p:attrNameLst>
+                                      </p:cBhvr>
+                                      <p:to>
+                                        <p:strVal val="visible"/>
+                                      </p:to>
+                                    </p:set>
+                                    <p:animEffect transition="in" filter="wipe(left)">
+                                      <p:cBhvr>
+                                        <p:cTn id="41" dur="500"/>
+                                        <p:tgtEl>
+                                          <p:spTgt spid="12"/>
+                                        </p:tgtEl>
+                                      </p:cBhvr>
+                                    </p:animEffect>
+                                  </p:childTnLst>
+                                </p:cTn>
+                              </p:par>
+                              <p:par>
+                                <p:cTn id="42" presetID="22" presetClass="entr" presetSubtype="8" fill="hold" nodeType="withEffect">
+                                  <p:stCondLst>
+                                    <p:cond delay="0"/>
+                                  </p:stCondLst>
+                                  <p:childTnLst>
+                                    <p:set>
+                                      <p:cBhvr>
+                                        <p:cTn id="43" dur="1" fill="hold">
+                                          <p:stCondLst>
+                                            <p:cond delay="0"/>
+                                          </p:stCondLst>
+                                        </p:cTn>
+                                        <p:tgtEl>
+                                          <p:spTgt spid="14"/>
+                                        </p:tgtEl>
+                                        <p:attrNameLst>
+                                          <p:attrName>style.visibility</p:attrName>
+                                        </p:attrNameLst>
+                                      </p:cBhvr>
+                                      <p:to>
+                                        <p:strVal val="visible"/>
+                                      </p:to>
+                                    </p:set>
+                                    <p:animEffect transition="in" filter="wipe(left)">
+                                      <p:cBhvr>
+                                        <p:cTn id="44" dur="500"/>
+                                        <p:tgtEl>
+                                          <p:spTgt spid="14"/>
+                                        </p:tgtEl>
+                                      </p:cBhvr>
+                                    </p:animEffect>
+                                  </p:childTnLst>
+                                </p:cTn>
+                              </p:par>
+                            </p:childTnLst>
+                          </p:cTn>
+                        </p:par>
+                        <p:par>
+                          <p:cTn id="45" fill="hold">
+                            <p:stCondLst>
+                              <p:cond delay="500"/>
+                            </p:stCondLst>
+                            <p:childTnLst>
+                              <p:par>
+                                <p:cTn id="46" presetID="22" presetClass="entr" presetSubtype="8" fill="hold" nodeType="afterEffect">
+                                  <p:stCondLst>
+                                    <p:cond delay="0"/>
+                                  </p:stCondLst>
+                                  <p:childTnLst>
+                                    <p:set>
+                                      <p:cBhvr>
+                                        <p:cTn id="47" dur="1" fill="hold">
+                                          <p:stCondLst>
+                                            <p:cond delay="0"/>
+                                          </p:stCondLst>
+                                        </p:cTn>
+                                        <p:tgtEl>
+                                          <p:spTgt spid="2052"/>
+                                        </p:tgtEl>
+                                        <p:attrNameLst>
+                                          <p:attrName>style.visibility</p:attrName>
+                                        </p:attrNameLst>
+                                      </p:cBhvr>
+                                      <p:to>
+                                        <p:strVal val="visible"/>
+                                      </p:to>
+                                    </p:set>
+                                    <p:animEffect transition="in" filter="wipe(left)">
+                                      <p:cBhvr>
+                                        <p:cTn id="48" dur="500"/>
+                                        <p:tgtEl>
+                                          <p:spTgt spid="2052"/>
+                                        </p:tgtEl>
+                                      </p:cBhvr>
+                                    </p:animEffect>
+                                  </p:childTnLst>
+                                </p:cTn>
+                              </p:par>
+                            </p:childTnLst>
+                          </p:cTn>
+                        </p:par>
+                      </p:childTnLst>
+                    </p:cTn>
+                  </p:par>
+                  <p:par>
+                    <p:cTn id="49" fill="hold">
+                      <p:stCondLst>
+                        <p:cond delay="indefinite"/>
+                      </p:stCondLst>
+                      <p:childTnLst>
+                        <p:par>
+                          <p:cTn id="50" fill="hold">
+                            <p:stCondLst>
+                              <p:cond delay="0"/>
+                            </p:stCondLst>
+                            <p:childTnLst>
+                              <p:par>
+                                <p:cTn id="51" presetID="22" presetClass="entr" presetSubtype="8" fill="hold" nodeType="clickEffect">
+                                  <p:stCondLst>
+                                    <p:cond delay="0"/>
+                                  </p:stCondLst>
+                                  <p:childTnLst>
+                                    <p:set>
+                                      <p:cBhvr>
+                                        <p:cTn id="52" dur="1" fill="hold">
+                                          <p:stCondLst>
+                                            <p:cond delay="0"/>
+                                          </p:stCondLst>
+                                        </p:cTn>
+                                        <p:tgtEl>
+                                          <p:spTgt spid="20"/>
+                                        </p:tgtEl>
+                                        <p:attrNameLst>
+                                          <p:attrName>style.visibility</p:attrName>
+                                        </p:attrNameLst>
+                                      </p:cBhvr>
+                                      <p:to>
+                                        <p:strVal val="visible"/>
+                                      </p:to>
+                                    </p:set>
+                                    <p:animEffect transition="in" filter="wipe(left)">
+                                      <p:cBhvr>
+                                        <p:cTn id="53" dur="500"/>
+                                        <p:tgtEl>
+                                          <p:spTgt spid="20"/>
+                                        </p:tgtEl>
+                                      </p:cBhvr>
+                                    </p:animEffect>
+                                  </p:childTnLst>
+                                </p:cTn>
+                              </p:par>
+                            </p:childTnLst>
+                          </p:cTn>
+                        </p:par>
+                        <p:par>
+                          <p:cTn id="54" fill="hold">
+                            <p:stCondLst>
+                              <p:cond delay="500"/>
+                            </p:stCondLst>
+                            <p:childTnLst>
+                              <p:par>
+                                <p:cTn id="55" presetID="22" presetClass="entr" presetSubtype="8" fill="hold" nodeType="afterEffect">
+                                  <p:stCondLst>
+                                    <p:cond delay="0"/>
+                                  </p:stCondLst>
+                                  <p:childTnLst>
+                                    <p:set>
+                                      <p:cBhvr>
+                                        <p:cTn id="56" dur="1" fill="hold">
+                                          <p:stCondLst>
+                                            <p:cond delay="0"/>
+                                          </p:stCondLst>
+                                        </p:cTn>
+                                        <p:tgtEl>
+                                          <p:spTgt spid="2053"/>
+                                        </p:tgtEl>
+                                        <p:attrNameLst>
+                                          <p:attrName>style.visibility</p:attrName>
+                                        </p:attrNameLst>
+                                      </p:cBhvr>
+                                      <p:to>
+                                        <p:strVal val="visible"/>
+                                      </p:to>
+                                    </p:set>
+                                    <p:animEffect transition="in" filter="wipe(left)">
+                                      <p:cBhvr>
+                                        <p:cTn id="57" dur="500"/>
+                                        <p:tgtEl>
+                                          <p:spTgt spid="2053"/>
+                                        </p:tgtEl>
+                                      </p:cBhvr>
+                                    </p:animEffect>
+                                  </p:childTnLst>
+                                </p:cTn>
+                              </p:par>
+                            </p:childTnLst>
+                          </p:cTn>
+                        </p:par>
+                      </p:childTnLst>
+                    </p:cTn>
+                  </p:par>
+                  <p:par>
+                    <p:cTn id="58" fill="hold">
+                      <p:stCondLst>
+                        <p:cond delay="indefinite"/>
+                      </p:stCondLst>
+                      <p:childTnLst>
+                        <p:par>
+                          <p:cTn id="59" fill="hold">
+                            <p:stCondLst>
+                              <p:cond delay="0"/>
+                            </p:stCondLst>
+                            <p:childTnLst>
+                              <p:par>
+                                <p:cTn id="60" presetID="22" presetClass="entr" presetSubtype="4" fill="hold" nodeType="clickEffect">
+                                  <p:stCondLst>
+                                    <p:cond delay="0"/>
+                                  </p:stCondLst>
+                                  <p:childTnLst>
+                                    <p:set>
+                                      <p:cBhvr>
+                                        <p:cTn id="61" dur="1" fill="hold">
+                                          <p:stCondLst>
+                                            <p:cond delay="0"/>
+                                          </p:stCondLst>
+                                        </p:cTn>
+                                        <p:tgtEl>
+                                          <p:spTgt spid="16"/>
+                                        </p:tgtEl>
+                                        <p:attrNameLst>
+                                          <p:attrName>style.visibility</p:attrName>
+                                        </p:attrNameLst>
+                                      </p:cBhvr>
+                                      <p:to>
+                                        <p:strVal val="visible"/>
+                                      </p:to>
+                                    </p:set>
+                                    <p:animEffect transition="in" filter="wipe(down)">
+                                      <p:cBhvr>
+                                        <p:cTn id="62" dur="500"/>
+                                        <p:tgtEl>
+                                          <p:spTgt spid="16"/>
+                                        </p:tgtEl>
+                                      </p:cBhvr>
+                                    </p:animEffect>
+                                  </p:childTnLst>
+                                </p:cTn>
+                              </p:par>
+                            </p:childTnLst>
+                          </p:cTn>
+                        </p:par>
+                        <p:par>
+                          <p:cTn id="63" fill="hold">
+                            <p:stCondLst>
+                              <p:cond delay="500"/>
+                            </p:stCondLst>
+                            <p:childTnLst>
+                              <p:par>
+                                <p:cTn id="64" presetID="22" presetClass="entr" presetSubtype="8" fill="hold" nodeType="afterEffect">
+                                  <p:stCondLst>
+                                    <p:cond delay="0"/>
+                                  </p:stCondLst>
+                                  <p:childTnLst>
+                                    <p:set>
+                                      <p:cBhvr>
+                                        <p:cTn id="65" dur="1" fill="hold">
+                                          <p:stCondLst>
+                                            <p:cond delay="0"/>
+                                          </p:stCondLst>
+                                        </p:cTn>
+                                        <p:tgtEl>
+                                          <p:spTgt spid="2054"/>
+                                        </p:tgtEl>
+                                        <p:attrNameLst>
+                                          <p:attrName>style.visibility</p:attrName>
+                                        </p:attrNameLst>
+                                      </p:cBhvr>
+                                      <p:to>
+                                        <p:strVal val="visible"/>
+                                      </p:to>
+                                    </p:set>
+                                    <p:animEffect transition="in" filter="wipe(left)">
+                                      <p:cBhvr>
+                                        <p:cTn id="66" dur="500"/>
+                                        <p:tgtEl>
+                                          <p:spTgt spid="2054"/>
+                                        </p:tgtEl>
+                                      </p:cBhvr>
+                                    </p:animEffect>
+                                  </p:childTnLst>
+                                </p:cTn>
+                              </p:par>
+                            </p:childTnLst>
+                          </p:cTn>
+                        </p:par>
+                      </p:childTnLst>
+                    </p:cTn>
+                  </p:par>
+                  <p:par>
+                    <p:cTn id="67" fill="hold">
+                      <p:stCondLst>
+                        <p:cond delay="indefinite"/>
+                      </p:stCondLst>
+                      <p:childTnLst>
+                        <p:par>
+                          <p:cTn id="68" fill="hold">
+                            <p:stCondLst>
+                              <p:cond delay="0"/>
+                            </p:stCondLst>
+                            <p:childTnLst>
+                              <p:par>
+                                <p:cTn id="69" presetID="22" presetClass="entr" presetSubtype="8" fill="hold" nodeType="clickEffect">
+                                  <p:stCondLst>
+                                    <p:cond delay="0"/>
+                                  </p:stCondLst>
+                                  <p:childTnLst>
+                                    <p:set>
+                                      <p:cBhvr>
+                                        <p:cTn id="70" dur="1" fill="hold">
+                                          <p:stCondLst>
+                                            <p:cond delay="0"/>
+                                          </p:stCondLst>
+                                        </p:cTn>
+                                        <p:tgtEl>
+                                          <p:spTgt spid="22"/>
+                                        </p:tgtEl>
+                                        <p:attrNameLst>
+                                          <p:attrName>style.visibility</p:attrName>
+                                        </p:attrNameLst>
+                                      </p:cBhvr>
+                                      <p:to>
+                                        <p:strVal val="visible"/>
+                                      </p:to>
+                                    </p:set>
+                                    <p:animEffect transition="in" filter="wipe(left)">
+                                      <p:cBhvr>
+                                        <p:cTn id="71" dur="500"/>
+                                        <p:tgtEl>
+                                          <p:spTgt spid="22"/>
+                                        </p:tgtEl>
+                                      </p:cBhvr>
+                                    </p:animEffect>
+                                  </p:childTnLst>
+                                </p:cTn>
+                              </p:par>
+                            </p:childTnLst>
+                          </p:cTn>
+                        </p:par>
+                        <p:par>
+                          <p:cTn id="72" fill="hold">
+                            <p:stCondLst>
+                              <p:cond delay="500"/>
+                            </p:stCondLst>
+                            <p:childTnLst>
+                              <p:par>
+                                <p:cTn id="73" presetID="22" presetClass="entr" presetSubtype="8" fill="hold" nodeType="afterEffect">
+                                  <p:stCondLst>
+                                    <p:cond delay="0"/>
+                                  </p:stCondLst>
+                                  <p:childTnLst>
+                                    <p:set>
+                                      <p:cBhvr>
+                                        <p:cTn id="74" dur="1" fill="hold">
+                                          <p:stCondLst>
+                                            <p:cond delay="0"/>
+                                          </p:stCondLst>
+                                        </p:cTn>
+                                        <p:tgtEl>
+                                          <p:spTgt spid="2055"/>
+                                        </p:tgtEl>
+                                        <p:attrNameLst>
+                                          <p:attrName>style.visibility</p:attrName>
+                                        </p:attrNameLst>
+                                      </p:cBhvr>
+                                      <p:to>
+                                        <p:strVal val="visible"/>
+                                      </p:to>
+                                    </p:set>
+                                    <p:animEffect transition="in" filter="wipe(left)">
+                                      <p:cBhvr>
+                                        <p:cTn id="75" dur="500"/>
+                                        <p:tgtEl>
+                                          <p:spTgt spid="2055"/>
+                                        </p:tgtEl>
+                                      </p:cBhvr>
+                                    </p:animEffect>
+                                  </p:childTnLst>
+                                </p:cTn>
+                              </p:par>
+                            </p:childTnLst>
+                          </p:cTn>
+                        </p:par>
+                      </p:childTnLst>
+                    </p:cTn>
+                  </p:par>
+                  <p:par>
+                    <p:cTn id="76" fill="hold">
+                      <p:stCondLst>
+                        <p:cond delay="indefinite"/>
+                      </p:stCondLst>
+                      <p:childTnLst>
+                        <p:par>
+                          <p:cTn id="77" fill="hold">
+                            <p:stCondLst>
+                              <p:cond delay="0"/>
+                            </p:stCondLst>
+                            <p:childTnLst>
+                              <p:par>
+                                <p:cTn id="78" presetID="22" presetClass="entr" presetSubtype="1" fill="hold" nodeType="clickEffect">
+                                  <p:stCondLst>
+                                    <p:cond delay="0"/>
+                                  </p:stCondLst>
+                                  <p:childTnLst>
+                                    <p:set>
+                                      <p:cBhvr>
+                                        <p:cTn id="79" dur="1" fill="hold">
+                                          <p:stCondLst>
+                                            <p:cond delay="0"/>
+                                          </p:stCondLst>
+                                        </p:cTn>
+                                        <p:tgtEl>
+                                          <p:spTgt spid="18"/>
+                                        </p:tgtEl>
+                                        <p:attrNameLst>
+                                          <p:attrName>style.visibility</p:attrName>
+                                        </p:attrNameLst>
+                                      </p:cBhvr>
+                                      <p:to>
+                                        <p:strVal val="visible"/>
+                                      </p:to>
+                                    </p:set>
+                                    <p:animEffect transition="in" filter="wipe(up)">
+                                      <p:cBhvr>
+                                        <p:cTn id="80" dur="500"/>
+                                        <p:tgtEl>
+                                          <p:spTgt spid="18"/>
+                                        </p:tgtEl>
+                                      </p:cBhvr>
+                                    </p:animEffect>
+                                  </p:childTnLst>
+                                </p:cTn>
+                              </p:par>
+                            </p:childTnLst>
+                          </p:cTn>
+                        </p:par>
+                        <p:par>
+                          <p:cTn id="81" fill="hold">
+                            <p:stCondLst>
+                              <p:cond delay="500"/>
+                            </p:stCondLst>
+                            <p:childTnLst>
+                              <p:par>
+                                <p:cTn id="82" presetID="22" presetClass="entr" presetSubtype="8" fill="hold" nodeType="afterEffect">
+                                  <p:stCondLst>
+                                    <p:cond delay="0"/>
+                                  </p:stCondLst>
+                                  <p:childTnLst>
+                                    <p:set>
+                                      <p:cBhvr>
+                                        <p:cTn id="83" dur="1" fill="hold">
+                                          <p:stCondLst>
+                                            <p:cond delay="0"/>
+                                          </p:stCondLst>
+                                        </p:cTn>
+                                        <p:tgtEl>
+                                          <p:spTgt spid="2056"/>
+                                        </p:tgtEl>
+                                        <p:attrNameLst>
+                                          <p:attrName>style.visibility</p:attrName>
+                                        </p:attrNameLst>
+                                      </p:cBhvr>
+                                      <p:to>
+                                        <p:strVal val="visible"/>
+                                      </p:to>
+                                    </p:set>
+                                    <p:animEffect transition="in" filter="wipe(left)">
+                                      <p:cBhvr>
+                                        <p:cTn id="84" dur="500"/>
+                                        <p:tgtEl>
+                                          <p:spTgt spid="2056"/>
+                                        </p:tgtEl>
+                                      </p:cBhvr>
+                                    </p:animEffect>
+                                  </p:childTnLst>
+                                </p:cTn>
+                              </p:par>
+                            </p:childTnLst>
+                          </p:cTn>
+                        </p:par>
+                      </p:childTnLst>
+                    </p:cTn>
+                  </p:par>
+                  <p:par>
+                    <p:cTn id="85" fill="hold">
+                      <p:stCondLst>
+                        <p:cond delay="indefinite"/>
+                      </p:stCondLst>
+                      <p:childTnLst>
+                        <p:par>
+                          <p:cTn id="86" fill="hold">
+                            <p:stCondLst>
+                              <p:cond delay="0"/>
+                            </p:stCondLst>
+                            <p:childTnLst>
+                              <p:par>
+                                <p:cTn id="87" presetID="22" presetClass="entr" presetSubtype="2" fill="hold" nodeType="clickEffect">
+                                  <p:stCondLst>
+                                    <p:cond delay="0"/>
+                                  </p:stCondLst>
+                                  <p:childTnLst>
+                                    <p:set>
+                                      <p:cBhvr>
+                                        <p:cTn id="88" dur="1" fill="hold">
+                                          <p:stCondLst>
+                                            <p:cond delay="0"/>
+                                          </p:stCondLst>
+                                        </p:cTn>
+                                        <p:tgtEl>
+                                          <p:spTgt spid="2063"/>
+                                        </p:tgtEl>
+                                        <p:attrNameLst>
+                                          <p:attrName>style.visibility</p:attrName>
+                                        </p:attrNameLst>
+                                      </p:cBhvr>
+                                      <p:to>
+                                        <p:strVal val="visible"/>
+                                      </p:to>
+                                    </p:set>
+                                    <p:animEffect transition="in" filter="wipe(right)">
+                                      <p:cBhvr>
+                                        <p:cTn id="89" dur="500"/>
+                                        <p:tgtEl>
+                                          <p:spTgt spid="2063"/>
+                                        </p:tgtEl>
+                                      </p:cBhvr>
+                                    </p:animEffect>
+                                  </p:childTnLst>
+                                </p:cTn>
+                              </p:par>
+                              <p:par>
+                                <p:cTn id="90" presetID="22" presetClass="entr" presetSubtype="2" fill="hold" nodeType="withEffect">
+                                  <p:stCondLst>
+                                    <p:cond delay="0"/>
+                                  </p:stCondLst>
+                                  <p:childTnLst>
+                                    <p:set>
+                                      <p:cBhvr>
+                                        <p:cTn id="91" dur="1" fill="hold">
+                                          <p:stCondLst>
+                                            <p:cond delay="0"/>
+                                          </p:stCondLst>
+                                        </p:cTn>
+                                        <p:tgtEl>
+                                          <p:spTgt spid="2066"/>
+                                        </p:tgtEl>
+                                        <p:attrNameLst>
+                                          <p:attrName>style.visibility</p:attrName>
+                                        </p:attrNameLst>
+                                      </p:cBhvr>
+                                      <p:to>
+                                        <p:strVal val="visible"/>
+                                      </p:to>
+                                    </p:set>
+                                    <p:animEffect transition="in" filter="wipe(right)">
+                                      <p:cBhvr>
+                                        <p:cTn id="92" dur="500"/>
+                                        <p:tgtEl>
+                                          <p:spTgt spid="2066"/>
+                                        </p:tgtEl>
+                                      </p:cBhvr>
+                                    </p:animEffect>
+                                  </p:childTnLst>
+                                </p:cTn>
+                              </p:par>
+                              <p:par>
+                                <p:cTn id="93" presetID="22" presetClass="entr" presetSubtype="2" fill="hold" nodeType="withEffect">
+                                  <p:stCondLst>
+                                    <p:cond delay="0"/>
+                                  </p:stCondLst>
+                                  <p:childTnLst>
+                                    <p:set>
+                                      <p:cBhvr>
+                                        <p:cTn id="94" dur="1" fill="hold">
+                                          <p:stCondLst>
+                                            <p:cond delay="0"/>
+                                          </p:stCondLst>
+                                        </p:cTn>
+                                        <p:tgtEl>
+                                          <p:spTgt spid="2069"/>
+                                        </p:tgtEl>
+                                        <p:attrNameLst>
+                                          <p:attrName>style.visibility</p:attrName>
+                                        </p:attrNameLst>
+                                      </p:cBhvr>
+                                      <p:to>
+                                        <p:strVal val="visible"/>
+                                      </p:to>
+                                    </p:set>
+                                    <p:animEffect transition="in" filter="wipe(right)">
+                                      <p:cBhvr>
+                                        <p:cTn id="95" dur="500"/>
+                                        <p:tgtEl>
+                                          <p:spTgt spid="2069"/>
+                                        </p:tgtEl>
+                                      </p:cBhvr>
+                                    </p:animEffect>
+                                  </p:childTnLst>
+                                </p:cTn>
+                              </p:par>
+                              <p:par>
+                                <p:cTn id="96" presetID="22" presetClass="entr" presetSubtype="2" fill="hold" nodeType="withEffect">
+                                  <p:stCondLst>
+                                    <p:cond delay="0"/>
+                                  </p:stCondLst>
+                                  <p:childTnLst>
+                                    <p:set>
+                                      <p:cBhvr>
+                                        <p:cTn id="97" dur="1" fill="hold">
+                                          <p:stCondLst>
+                                            <p:cond delay="0"/>
+                                          </p:stCondLst>
+                                        </p:cTn>
+                                        <p:tgtEl>
+                                          <p:spTgt spid="2071"/>
+                                        </p:tgtEl>
+                                        <p:attrNameLst>
+                                          <p:attrName>style.visibility</p:attrName>
+                                        </p:attrNameLst>
+                                      </p:cBhvr>
+                                      <p:to>
+                                        <p:strVal val="visible"/>
+                                      </p:to>
+                                    </p:set>
+                                    <p:animEffect transition="in" filter="wipe(right)">
+                                      <p:cBhvr>
+                                        <p:cTn id="98" dur="500"/>
+                                        <p:tgtEl>
+                                          <p:spTgt spid="2071"/>
+                                        </p:tgtEl>
+                                      </p:cBhvr>
+                                    </p:animEffect>
                                   </p:childTnLst>
                                 </p:cTn>
                               </p:par>
@@ -5969,31 +7169,18 @@
                 </p:cond>
               </p:nextCondLst>
             </p:seq>
-            <p:video>
-              <p:cMediaNode vol="80000">
-                <p:cTn id="82" fill="hold" display="0">
-                  <p:stCondLst>
-                    <p:cond delay="indefinite"/>
-                  </p:stCondLst>
-                </p:cTn>
-                <p:tgtEl>
-                  <p:spTgt spid="1024"/>
-                </p:tgtEl>
-              </p:cMediaNode>
-            </p:video>
           </p:childTnLst>
         </p:cTn>
       </p:par>
     </p:tnLst>
     <p:bldLst>
-      <p:bldP spid="20" grpId="0" animBg="1"/>
-      <p:bldP spid="20" grpId="1" animBg="1"/>
+      <p:bldP spid="2072" grpId="0"/>
     </p:bldLst>
   </p:timing>
 </p:sld>
 </file>
 
-<file path=ppt/slides/slide10.xml><?xml version="1.0" encoding="utf-8"?>
+<file path=ppt/slides/slide11.xml><?xml version="1.0" encoding="utf-8"?>
 <p:sld xmlns:a="http://schemas.openxmlformats.org/drawingml/2006/main" xmlns:r="http://schemas.openxmlformats.org/officeDocument/2006/relationships" xmlns:p="http://schemas.openxmlformats.org/presentationml/2006/main" show="0">
   <p:cSld>
     <p:spTree>
@@ -7668,7 +8855,7 @@
 </p:sld>
 </file>
 
-<file path=ppt/slides/slide11.xml><?xml version="1.0" encoding="utf-8"?>
+<file path=ppt/slides/slide12.xml><?xml version="1.0" encoding="utf-8"?>
 <p:sld xmlns:a="http://schemas.openxmlformats.org/drawingml/2006/main" xmlns:r="http://schemas.openxmlformats.org/officeDocument/2006/relationships" xmlns:p="http://schemas.openxmlformats.org/presentationml/2006/main" show="0">
   <p:cSld>
     <p:bg>
@@ -7937,7 +9124,7 @@
 </p:sld>
 </file>
 
-<file path=ppt/slides/slide12.xml><?xml version="1.0" encoding="utf-8"?>
+<file path=ppt/slides/slide13.xml><?xml version="1.0" encoding="utf-8"?>
 <p:sld xmlns:a="http://schemas.openxmlformats.org/drawingml/2006/main" xmlns:r="http://schemas.openxmlformats.org/officeDocument/2006/relationships" xmlns:p="http://schemas.openxmlformats.org/presentationml/2006/main" show="0">
   <p:cSld>
     <p:bg>
@@ -10044,7 +11231,7 @@
 </p:sld>
 </file>
 
-<file path=ppt/slides/slide13.xml><?xml version="1.0" encoding="utf-8"?>
+<file path=ppt/slides/slide14.xml><?xml version="1.0" encoding="utf-8"?>
 <p:sld xmlns:a="http://schemas.openxmlformats.org/drawingml/2006/main" xmlns:r="http://schemas.openxmlformats.org/officeDocument/2006/relationships" xmlns:p="http://schemas.openxmlformats.org/presentationml/2006/main" show="0">
   <p:cSld>
     <p:bg>
@@ -10325,7 +11512,7 @@
 </p:sld>
 </file>
 
-<file path=ppt/slides/slide14.xml><?xml version="1.0" encoding="utf-8"?>
+<file path=ppt/slides/slide15.xml><?xml version="1.0" encoding="utf-8"?>
 <p:sld xmlns:a="http://schemas.openxmlformats.org/drawingml/2006/main" xmlns:r="http://schemas.openxmlformats.org/officeDocument/2006/relationships" xmlns:p="http://schemas.openxmlformats.org/presentationml/2006/main" show="0">
   <p:cSld>
     <p:bg>
@@ -12377,7 +13564,7 @@
 </p:sld>
 </file>
 
-<file path=ppt/slides/slide15.xml><?xml version="1.0" encoding="utf-8"?>
+<file path=ppt/slides/slide16.xml><?xml version="1.0" encoding="utf-8"?>
 <p:sld xmlns:a="http://schemas.openxmlformats.org/drawingml/2006/main" xmlns:r="http://schemas.openxmlformats.org/officeDocument/2006/relationships" xmlns:p="http://schemas.openxmlformats.org/presentationml/2006/main" show="0">
   <p:cSld>
     <p:bg>
@@ -13806,7 +14993,7 @@
 </p:sld>
 </file>
 
-<file path=ppt/slides/slide16.xml><?xml version="1.0" encoding="utf-8"?>
+<file path=ppt/slides/slide17.xml><?xml version="1.0" encoding="utf-8"?>
 <p:sld xmlns:a="http://schemas.openxmlformats.org/drawingml/2006/main" xmlns:r="http://schemas.openxmlformats.org/officeDocument/2006/relationships" xmlns:p="http://schemas.openxmlformats.org/presentationml/2006/main" show="0">
   <p:cSld>
     <p:bg>
@@ -16515,7 +17702,7 @@
 </p:sld>
 </file>
 
-<file path=ppt/slides/slide17.xml><?xml version="1.0" encoding="utf-8"?>
+<file path=ppt/slides/slide18.xml><?xml version="1.0" encoding="utf-8"?>
 <p:sld xmlns:a="http://schemas.openxmlformats.org/drawingml/2006/main" xmlns:r="http://schemas.openxmlformats.org/officeDocument/2006/relationships" xmlns:p="http://schemas.openxmlformats.org/presentationml/2006/main" show="0">
   <p:cSld>
     <p:bg>
@@ -17298,7 +18485,7 @@
 </p:sld>
 </file>
 
-<file path=ppt/slides/slide18.xml><?xml version="1.0" encoding="utf-8"?>
+<file path=ppt/slides/slide19.xml><?xml version="1.0" encoding="utf-8"?>
 <p:sld xmlns:a="http://schemas.openxmlformats.org/drawingml/2006/main" xmlns:r="http://schemas.openxmlformats.org/officeDocument/2006/relationships" xmlns:p="http://schemas.openxmlformats.org/presentationml/2006/main" show="0">
   <p:cSld>
     <p:spTree>
@@ -18800,6 +19987,1774 @@
 </file>
 
 <file path=ppt/slides/slide2.xml><?xml version="1.0" encoding="utf-8"?>
+<p:sld xmlns:a="http://schemas.openxmlformats.org/drawingml/2006/main" xmlns:r="http://schemas.openxmlformats.org/officeDocument/2006/relationships" xmlns:p="http://schemas.openxmlformats.org/presentationml/2006/main">
+  <p:cSld>
+    <p:spTree>
+      <p:nvGrpSpPr>
+        <p:cNvPr id="1" name="">
+          <a:extLst>
+            <a:ext uri="{FF2B5EF4-FFF2-40B4-BE49-F238E27FC236}">
+              <a16:creationId xmlns:a16="http://schemas.microsoft.com/office/drawing/2014/main" id="{BC256C45-56C6-9AC9-DA7E-956F5C279D78}"/>
+            </a:ext>
+          </a:extLst>
+        </p:cNvPr>
+        <p:cNvGrpSpPr/>
+        <p:nvPr/>
+      </p:nvGrpSpPr>
+      <p:grpSpPr>
+        <a:xfrm>
+          <a:off x="0" y="0"/>
+          <a:ext cx="0" cy="0"/>
+          <a:chOff x="0" y="0"/>
+          <a:chExt cx="0" cy="0"/>
+        </a:xfrm>
+      </p:grpSpPr>
+      <p:sp>
+        <p:nvSpPr>
+          <p:cNvPr id="4" name="Τίτλος 3">
+            <a:extLst>
+              <a:ext uri="{FF2B5EF4-FFF2-40B4-BE49-F238E27FC236}">
+                <a16:creationId xmlns:a16="http://schemas.microsoft.com/office/drawing/2014/main" id="{522D5670-9E86-1570-64BD-01D9360D63ED}"/>
+              </a:ext>
+            </a:extLst>
+          </p:cNvPr>
+          <p:cNvSpPr>
+            <a:spLocks noGrp="1"/>
+          </p:cNvSpPr>
+          <p:nvPr>
+            <p:ph type="title"/>
+          </p:nvPr>
+        </p:nvSpPr>
+        <p:spPr/>
+        <p:txBody>
+          <a:bodyPr/>
+          <a:lstStyle/>
+          <a:p>
+            <a:pPr algn="ctr"/>
+            <a:r>
+              <a:rPr lang="en-US" dirty="0">
+                <a:latin typeface="Times New Roman" panose="02020603050405020304" pitchFamily="18" charset="0"/>
+                <a:cs typeface="Times New Roman" panose="02020603050405020304" pitchFamily="18" charset="0"/>
+              </a:rPr>
+              <a:t>A*</a:t>
+            </a:r>
+            <a:endParaRPr lang="el-GR" dirty="0">
+              <a:latin typeface="Times New Roman" panose="02020603050405020304" pitchFamily="18" charset="0"/>
+              <a:cs typeface="Times New Roman" panose="02020603050405020304" pitchFamily="18" charset="0"/>
+            </a:endParaRPr>
+          </a:p>
+        </p:txBody>
+      </p:sp>
+      <p:pic>
+        <p:nvPicPr>
+          <p:cNvPr id="1027" name="Picture 3">
+            <a:extLst>
+              <a:ext uri="{FF2B5EF4-FFF2-40B4-BE49-F238E27FC236}">
+                <a16:creationId xmlns:a16="http://schemas.microsoft.com/office/drawing/2014/main" id="{9BA57851-597C-8686-244D-362A24A74EAB}"/>
+              </a:ext>
+            </a:extLst>
+          </p:cNvPr>
+          <p:cNvPicPr>
+            <a:picLocks noChangeAspect="1" noChangeArrowheads="1"/>
+          </p:cNvPicPr>
+          <p:nvPr/>
+        </p:nvPicPr>
+        <p:blipFill>
+          <a:blip r:embed="rId4">
+            <a:extLst>
+              <a:ext uri="{28A0092B-C50C-407E-A947-70E740481C1C}">
+                <a14:useLocalDpi xmlns:a14="http://schemas.microsoft.com/office/drawing/2010/main" val="0"/>
+              </a:ext>
+            </a:extLst>
+          </a:blip>
+          <a:srcRect/>
+          <a:stretch>
+            <a:fillRect/>
+          </a:stretch>
+        </p:blipFill>
+        <p:spPr bwMode="auto">
+          <a:xfrm>
+            <a:off x="838200" y="2753597"/>
+            <a:ext cx="1466850" cy="1000125"/>
+          </a:xfrm>
+          <a:prstGeom prst="rect">
+            <a:avLst/>
+          </a:prstGeom>
+          <a:noFill/>
+          <a:extLst>
+            <a:ext uri="{909E8E84-426E-40DD-AFC4-6F175D3DCCD1}">
+              <a14:hiddenFill xmlns:a14="http://schemas.microsoft.com/office/drawing/2010/main">
+                <a:solidFill>
+                  <a:srgbClr val="FFFFFF"/>
+                </a:solidFill>
+              </a14:hiddenFill>
+            </a:ext>
+          </a:extLst>
+        </p:spPr>
+      </p:pic>
+      <p:pic>
+        <p:nvPicPr>
+          <p:cNvPr id="6" name="Picture 1">
+            <a:extLst>
+              <a:ext uri="{FF2B5EF4-FFF2-40B4-BE49-F238E27FC236}">
+                <a16:creationId xmlns:a16="http://schemas.microsoft.com/office/drawing/2014/main" id="{305B070F-7335-2336-A437-594B86DED329}"/>
+              </a:ext>
+            </a:extLst>
+          </p:cNvPr>
+          <p:cNvPicPr>
+            <a:picLocks noChangeAspect="1" noChangeArrowheads="1"/>
+          </p:cNvPicPr>
+          <p:nvPr/>
+        </p:nvPicPr>
+        <p:blipFill>
+          <a:blip r:embed="rId5">
+            <a:extLst>
+              <a:ext uri="{28A0092B-C50C-407E-A947-70E740481C1C}">
+                <a14:useLocalDpi xmlns:a14="http://schemas.microsoft.com/office/drawing/2010/main" val="0"/>
+              </a:ext>
+            </a:extLst>
+          </a:blip>
+          <a:srcRect/>
+          <a:stretch>
+            <a:fillRect/>
+          </a:stretch>
+        </p:blipFill>
+        <p:spPr bwMode="auto">
+          <a:xfrm>
+            <a:off x="2613500" y="2744072"/>
+            <a:ext cx="1457325" cy="1009650"/>
+          </a:xfrm>
+          <a:prstGeom prst="rect">
+            <a:avLst/>
+          </a:prstGeom>
+          <a:noFill/>
+          <a:extLst>
+            <a:ext uri="{909E8E84-426E-40DD-AFC4-6F175D3DCCD1}">
+              <a14:hiddenFill xmlns:a14="http://schemas.microsoft.com/office/drawing/2010/main">
+                <a:solidFill>
+                  <a:srgbClr val="FFFFFF"/>
+                </a:solidFill>
+              </a14:hiddenFill>
+            </a:ext>
+          </a:extLst>
+        </p:spPr>
+      </p:pic>
+      <p:pic>
+        <p:nvPicPr>
+          <p:cNvPr id="7" name="Picture 2">
+            <a:extLst>
+              <a:ext uri="{FF2B5EF4-FFF2-40B4-BE49-F238E27FC236}">
+                <a16:creationId xmlns:a16="http://schemas.microsoft.com/office/drawing/2014/main" id="{A21EB7BE-164A-96BE-2FBA-187F6221E7FD}"/>
+              </a:ext>
+            </a:extLst>
+          </p:cNvPr>
+          <p:cNvPicPr>
+            <a:picLocks noChangeAspect="1" noChangeArrowheads="1"/>
+          </p:cNvPicPr>
+          <p:nvPr/>
+        </p:nvPicPr>
+        <p:blipFill>
+          <a:blip r:embed="rId6">
+            <a:extLst>
+              <a:ext uri="{28A0092B-C50C-407E-A947-70E740481C1C}">
+                <a14:useLocalDpi xmlns:a14="http://schemas.microsoft.com/office/drawing/2010/main" val="0"/>
+              </a:ext>
+            </a:extLst>
+          </a:blip>
+          <a:srcRect/>
+          <a:stretch>
+            <a:fillRect/>
+          </a:stretch>
+        </p:blipFill>
+        <p:spPr bwMode="auto">
+          <a:xfrm>
+            <a:off x="4379275" y="2744072"/>
+            <a:ext cx="1466850" cy="1009650"/>
+          </a:xfrm>
+          <a:prstGeom prst="rect">
+            <a:avLst/>
+          </a:prstGeom>
+          <a:noFill/>
+          <a:extLst>
+            <a:ext uri="{909E8E84-426E-40DD-AFC4-6F175D3DCCD1}">
+              <a14:hiddenFill xmlns:a14="http://schemas.microsoft.com/office/drawing/2010/main">
+                <a:solidFill>
+                  <a:srgbClr val="FFFFFF"/>
+                </a:solidFill>
+              </a14:hiddenFill>
+            </a:ext>
+          </a:extLst>
+        </p:spPr>
+      </p:pic>
+      <p:cxnSp>
+        <p:nvCxnSpPr>
+          <p:cNvPr id="9" name="Ευθύγραμμο βέλος σύνδεσης 8">
+            <a:extLst>
+              <a:ext uri="{FF2B5EF4-FFF2-40B4-BE49-F238E27FC236}">
+                <a16:creationId xmlns:a16="http://schemas.microsoft.com/office/drawing/2014/main" id="{61136C36-1B27-8B4D-034F-942F83E4DC72}"/>
+              </a:ext>
+            </a:extLst>
+          </p:cNvPr>
+          <p:cNvCxnSpPr>
+            <a:stCxn id="1027" idx="3"/>
+            <a:endCxn id="6" idx="1"/>
+          </p:cNvCxnSpPr>
+          <p:nvPr/>
+        </p:nvCxnSpPr>
+        <p:spPr>
+          <a:xfrm flipV="1">
+            <a:off x="2305050" y="3248897"/>
+            <a:ext cx="308450" cy="4763"/>
+          </a:xfrm>
+          <a:prstGeom prst="straightConnector1">
+            <a:avLst/>
+          </a:prstGeom>
+          <a:ln>
+            <a:tailEnd type="triangle"/>
+          </a:ln>
+        </p:spPr>
+        <p:style>
+          <a:lnRef idx="2">
+            <a:schemeClr val="dk1"/>
+          </a:lnRef>
+          <a:fillRef idx="0">
+            <a:schemeClr val="dk1"/>
+          </a:fillRef>
+          <a:effectRef idx="1">
+            <a:schemeClr val="dk1"/>
+          </a:effectRef>
+          <a:fontRef idx="minor">
+            <a:schemeClr val="tx1"/>
+          </a:fontRef>
+        </p:style>
+      </p:cxnSp>
+      <p:cxnSp>
+        <p:nvCxnSpPr>
+          <p:cNvPr id="11" name="Ευθύγραμμο βέλος σύνδεσης 10">
+            <a:extLst>
+              <a:ext uri="{FF2B5EF4-FFF2-40B4-BE49-F238E27FC236}">
+                <a16:creationId xmlns:a16="http://schemas.microsoft.com/office/drawing/2014/main" id="{73C832A5-59F1-02C0-EC04-836C2FBCD4C1}"/>
+              </a:ext>
+            </a:extLst>
+          </p:cNvPr>
+          <p:cNvCxnSpPr>
+            <a:stCxn id="6" idx="3"/>
+            <a:endCxn id="7" idx="1"/>
+          </p:cNvCxnSpPr>
+          <p:nvPr/>
+        </p:nvCxnSpPr>
+        <p:spPr>
+          <a:xfrm>
+            <a:off x="4070825" y="3248897"/>
+            <a:ext cx="308450" cy="0"/>
+          </a:xfrm>
+          <a:prstGeom prst="straightConnector1">
+            <a:avLst/>
+          </a:prstGeom>
+          <a:ln>
+            <a:tailEnd type="triangle"/>
+          </a:ln>
+        </p:spPr>
+        <p:style>
+          <a:lnRef idx="2">
+            <a:schemeClr val="dk1"/>
+          </a:lnRef>
+          <a:fillRef idx="0">
+            <a:schemeClr val="dk1"/>
+          </a:fillRef>
+          <a:effectRef idx="1">
+            <a:schemeClr val="dk1"/>
+          </a:effectRef>
+          <a:fontRef idx="minor">
+            <a:schemeClr val="tx1"/>
+          </a:fontRef>
+        </p:style>
+      </p:cxnSp>
+      <p:pic>
+        <p:nvPicPr>
+          <p:cNvPr id="13" name="Picture 5">
+            <a:extLst>
+              <a:ext uri="{FF2B5EF4-FFF2-40B4-BE49-F238E27FC236}">
+                <a16:creationId xmlns:a16="http://schemas.microsoft.com/office/drawing/2014/main" id="{E53F5E9E-0479-B9A2-F193-B53516C55937}"/>
+              </a:ext>
+            </a:extLst>
+          </p:cNvPr>
+          <p:cNvPicPr>
+            <a:picLocks noChangeAspect="1" noChangeArrowheads="1"/>
+          </p:cNvPicPr>
+          <p:nvPr/>
+        </p:nvPicPr>
+        <p:blipFill>
+          <a:blip r:embed="rId7">
+            <a:extLst>
+              <a:ext uri="{28A0092B-C50C-407E-A947-70E740481C1C}">
+                <a14:useLocalDpi xmlns:a14="http://schemas.microsoft.com/office/drawing/2010/main" val="0"/>
+              </a:ext>
+            </a:extLst>
+          </a:blip>
+          <a:srcRect/>
+          <a:stretch>
+            <a:fillRect/>
+          </a:stretch>
+        </p:blipFill>
+        <p:spPr bwMode="auto">
+          <a:xfrm>
+            <a:off x="6154575" y="2744072"/>
+            <a:ext cx="2362200" cy="1009650"/>
+          </a:xfrm>
+          <a:prstGeom prst="rect">
+            <a:avLst/>
+          </a:prstGeom>
+          <a:noFill/>
+          <a:extLst>
+            <a:ext uri="{909E8E84-426E-40DD-AFC4-6F175D3DCCD1}">
+              <a14:hiddenFill xmlns:a14="http://schemas.microsoft.com/office/drawing/2010/main">
+                <a:solidFill>
+                  <a:srgbClr val="FFFFFF"/>
+                </a:solidFill>
+              </a14:hiddenFill>
+            </a:ext>
+          </a:extLst>
+        </p:spPr>
+      </p:pic>
+      <p:cxnSp>
+        <p:nvCxnSpPr>
+          <p:cNvPr id="16" name="Ευθύγραμμο βέλος σύνδεσης 15">
+            <a:extLst>
+              <a:ext uri="{FF2B5EF4-FFF2-40B4-BE49-F238E27FC236}">
+                <a16:creationId xmlns:a16="http://schemas.microsoft.com/office/drawing/2014/main" id="{7C434BCB-3B0D-6043-9267-89776270B706}"/>
+              </a:ext>
+            </a:extLst>
+          </p:cNvPr>
+          <p:cNvCxnSpPr>
+            <a:stCxn id="7" idx="3"/>
+            <a:endCxn id="13" idx="1"/>
+          </p:cNvCxnSpPr>
+          <p:nvPr/>
+        </p:nvCxnSpPr>
+        <p:spPr>
+          <a:xfrm>
+            <a:off x="5846125" y="3248897"/>
+            <a:ext cx="308450" cy="0"/>
+          </a:xfrm>
+          <a:prstGeom prst="straightConnector1">
+            <a:avLst/>
+          </a:prstGeom>
+          <a:ln>
+            <a:tailEnd type="triangle"/>
+          </a:ln>
+        </p:spPr>
+        <p:style>
+          <a:lnRef idx="2">
+            <a:schemeClr val="dk1"/>
+          </a:lnRef>
+          <a:fillRef idx="0">
+            <a:schemeClr val="dk1"/>
+          </a:fillRef>
+          <a:effectRef idx="1">
+            <a:schemeClr val="dk1"/>
+          </a:effectRef>
+          <a:fontRef idx="minor">
+            <a:schemeClr val="tx1"/>
+          </a:fontRef>
+        </p:style>
+      </p:cxnSp>
+      <p:sp>
+        <p:nvSpPr>
+          <p:cNvPr id="20" name="TextBox 19">
+            <a:extLst>
+              <a:ext uri="{FF2B5EF4-FFF2-40B4-BE49-F238E27FC236}">
+                <a16:creationId xmlns:a16="http://schemas.microsoft.com/office/drawing/2014/main" id="{613E3778-DCE4-9A56-C251-0E9B2D10C7F6}"/>
+              </a:ext>
+            </a:extLst>
+          </p:cNvPr>
+          <p:cNvSpPr txBox="1"/>
+          <p:nvPr/>
+        </p:nvSpPr>
+        <p:spPr>
+          <a:xfrm>
+            <a:off x="5995556" y="3760072"/>
+            <a:ext cx="2680238" cy="1477328"/>
+          </a:xfrm>
+          <a:prstGeom prst="rect">
+            <a:avLst/>
+          </a:prstGeom>
+        </p:spPr>
+        <p:style>
+          <a:lnRef idx="2">
+            <a:schemeClr val="dk1"/>
+          </a:lnRef>
+          <a:fillRef idx="1">
+            <a:schemeClr val="lt1"/>
+          </a:fillRef>
+          <a:effectRef idx="0">
+            <a:schemeClr val="dk1"/>
+          </a:effectRef>
+          <a:fontRef idx="minor">
+            <a:schemeClr val="dk1"/>
+          </a:fontRef>
+        </p:style>
+        <p:txBody>
+          <a:bodyPr wrap="square" rtlCol="0">
+            <a:spAutoFit/>
+          </a:bodyPr>
+          <a:lstStyle/>
+          <a:p>
+            <a:r>
+              <a:rPr lang="en-US" dirty="0">
+                <a:latin typeface="Times New Roman" panose="02020603050405020304" pitchFamily="18" charset="0"/>
+                <a:cs typeface="Times New Roman" panose="02020603050405020304" pitchFamily="18" charset="0"/>
+              </a:rPr>
+              <a:t>f  = 	g + h</a:t>
+            </a:r>
+          </a:p>
+          <a:p>
+            <a:r>
+              <a:rPr lang="en-US" dirty="0">
+                <a:latin typeface="Times New Roman" panose="02020603050405020304" pitchFamily="18" charset="0"/>
+                <a:cs typeface="Times New Roman" panose="02020603050405020304" pitchFamily="18" charset="0"/>
+              </a:rPr>
+              <a:t>g = 	cost until current 	node</a:t>
+            </a:r>
+          </a:p>
+          <a:p>
+            <a:r>
+              <a:rPr lang="en-US" dirty="0">
+                <a:latin typeface="Times New Roman" panose="02020603050405020304" pitchFamily="18" charset="0"/>
+                <a:cs typeface="Times New Roman" panose="02020603050405020304" pitchFamily="18" charset="0"/>
+              </a:rPr>
+              <a:t>h = 	heuristic cost until the 	End node</a:t>
+            </a:r>
+            <a:endParaRPr lang="el-GR" dirty="0">
+              <a:latin typeface="Times New Roman" panose="02020603050405020304" pitchFamily="18" charset="0"/>
+              <a:cs typeface="Times New Roman" panose="02020603050405020304" pitchFamily="18" charset="0"/>
+            </a:endParaRPr>
+          </a:p>
+        </p:txBody>
+      </p:sp>
+      <p:cxnSp>
+        <p:nvCxnSpPr>
+          <p:cNvPr id="22" name="Γραμμή σύνδεσης: Γωνιώδης 21">
+            <a:extLst>
+              <a:ext uri="{FF2B5EF4-FFF2-40B4-BE49-F238E27FC236}">
+                <a16:creationId xmlns:a16="http://schemas.microsoft.com/office/drawing/2014/main" id="{DBF5CB10-B988-8305-CAFE-C231C303BE1F}"/>
+              </a:ext>
+            </a:extLst>
+          </p:cNvPr>
+          <p:cNvCxnSpPr>
+            <a:stCxn id="13" idx="0"/>
+            <a:endCxn id="6" idx="0"/>
+          </p:cNvCxnSpPr>
+          <p:nvPr/>
+        </p:nvCxnSpPr>
+        <p:spPr>
+          <a:xfrm rot="16200000" flipV="1">
+            <a:off x="5338919" y="747316"/>
+            <a:ext cx="12700" cy="3993512"/>
+          </a:xfrm>
+          <a:prstGeom prst="bentConnector3">
+            <a:avLst>
+              <a:gd name="adj1" fmla="val 6754835"/>
+            </a:avLst>
+          </a:prstGeom>
+          <a:ln>
+            <a:tailEnd type="triangle"/>
+          </a:ln>
+        </p:spPr>
+        <p:style>
+          <a:lnRef idx="2">
+            <a:schemeClr val="dk1"/>
+          </a:lnRef>
+          <a:fillRef idx="0">
+            <a:schemeClr val="dk1"/>
+          </a:fillRef>
+          <a:effectRef idx="1">
+            <a:schemeClr val="dk1"/>
+          </a:effectRef>
+          <a:fontRef idx="minor">
+            <a:schemeClr val="tx1"/>
+          </a:fontRef>
+        </p:style>
+      </p:cxnSp>
+      <p:pic>
+        <p:nvPicPr>
+          <p:cNvPr id="24" name="Picture 3">
+            <a:extLst>
+              <a:ext uri="{FF2B5EF4-FFF2-40B4-BE49-F238E27FC236}">
+                <a16:creationId xmlns:a16="http://schemas.microsoft.com/office/drawing/2014/main" id="{456D1131-7B59-B6F9-5BF4-08BF4768D1AB}"/>
+              </a:ext>
+            </a:extLst>
+          </p:cNvPr>
+          <p:cNvPicPr>
+            <a:picLocks noChangeAspect="1" noChangeArrowheads="1"/>
+          </p:cNvPicPr>
+          <p:nvPr/>
+        </p:nvPicPr>
+        <p:blipFill>
+          <a:blip r:embed="rId8">
+            <a:extLst>
+              <a:ext uri="{28A0092B-C50C-407E-A947-70E740481C1C}">
+                <a14:useLocalDpi xmlns:a14="http://schemas.microsoft.com/office/drawing/2010/main" val="0"/>
+              </a:ext>
+            </a:extLst>
+          </a:blip>
+          <a:srcRect/>
+          <a:stretch>
+            <a:fillRect/>
+          </a:stretch>
+        </p:blipFill>
+        <p:spPr bwMode="auto">
+          <a:xfrm>
+            <a:off x="4611844" y="1405015"/>
+            <a:ext cx="1466850" cy="1000125"/>
+          </a:xfrm>
+          <a:prstGeom prst="rect">
+            <a:avLst/>
+          </a:prstGeom>
+          <a:noFill/>
+          <a:extLst>
+            <a:ext uri="{909E8E84-426E-40DD-AFC4-6F175D3DCCD1}">
+              <a14:hiddenFill xmlns:a14="http://schemas.microsoft.com/office/drawing/2010/main">
+                <a:solidFill>
+                  <a:srgbClr val="FFFFFF"/>
+                </a:solidFill>
+              </a14:hiddenFill>
+            </a:ext>
+          </a:extLst>
+        </p:spPr>
+      </p:pic>
+      <p:pic>
+        <p:nvPicPr>
+          <p:cNvPr id="25" name="Picture 7">
+            <a:extLst>
+              <a:ext uri="{FF2B5EF4-FFF2-40B4-BE49-F238E27FC236}">
+                <a16:creationId xmlns:a16="http://schemas.microsoft.com/office/drawing/2014/main" id="{A97915D2-FF55-67C2-69C0-48EF59816481}"/>
+              </a:ext>
+            </a:extLst>
+          </p:cNvPr>
+          <p:cNvPicPr>
+            <a:picLocks noChangeAspect="1" noChangeArrowheads="1"/>
+          </p:cNvPicPr>
+          <p:nvPr/>
+        </p:nvPicPr>
+        <p:blipFill>
+          <a:blip r:embed="rId9">
+            <a:extLst>
+              <a:ext uri="{28A0092B-C50C-407E-A947-70E740481C1C}">
+                <a14:useLocalDpi xmlns:a14="http://schemas.microsoft.com/office/drawing/2010/main" val="0"/>
+              </a:ext>
+            </a:extLst>
+          </a:blip>
+          <a:srcRect/>
+          <a:stretch>
+            <a:fillRect/>
+          </a:stretch>
+        </p:blipFill>
+        <p:spPr bwMode="auto">
+          <a:xfrm>
+            <a:off x="8825225" y="2737722"/>
+            <a:ext cx="2362200" cy="1009650"/>
+          </a:xfrm>
+          <a:prstGeom prst="rect">
+            <a:avLst/>
+          </a:prstGeom>
+          <a:noFill/>
+          <a:extLst>
+            <a:ext uri="{909E8E84-426E-40DD-AFC4-6F175D3DCCD1}">
+              <a14:hiddenFill xmlns:a14="http://schemas.microsoft.com/office/drawing/2010/main">
+                <a:solidFill>
+                  <a:srgbClr val="FFFFFF"/>
+                </a:solidFill>
+              </a14:hiddenFill>
+            </a:ext>
+          </a:extLst>
+        </p:spPr>
+      </p:pic>
+      <p:cxnSp>
+        <p:nvCxnSpPr>
+          <p:cNvPr id="28" name="Ευθύγραμμο βέλος σύνδεσης 27">
+            <a:extLst>
+              <a:ext uri="{FF2B5EF4-FFF2-40B4-BE49-F238E27FC236}">
+                <a16:creationId xmlns:a16="http://schemas.microsoft.com/office/drawing/2014/main" id="{C3E971AB-C4C2-560C-A7F2-46FA986C6A91}"/>
+              </a:ext>
+            </a:extLst>
+          </p:cNvPr>
+          <p:cNvCxnSpPr>
+            <a:stCxn id="13" idx="3"/>
+            <a:endCxn id="25" idx="1"/>
+          </p:cNvCxnSpPr>
+          <p:nvPr/>
+        </p:nvCxnSpPr>
+        <p:spPr>
+          <a:xfrm flipV="1">
+            <a:off x="8516775" y="3242547"/>
+            <a:ext cx="308450" cy="6350"/>
+          </a:xfrm>
+          <a:prstGeom prst="straightConnector1">
+            <a:avLst/>
+          </a:prstGeom>
+          <a:ln>
+            <a:tailEnd type="triangle"/>
+          </a:ln>
+        </p:spPr>
+        <p:style>
+          <a:lnRef idx="2">
+            <a:schemeClr val="dk1"/>
+          </a:lnRef>
+          <a:fillRef idx="0">
+            <a:schemeClr val="dk1"/>
+          </a:fillRef>
+          <a:effectRef idx="1">
+            <a:schemeClr val="dk1"/>
+          </a:effectRef>
+          <a:fontRef idx="minor">
+            <a:schemeClr val="tx1"/>
+          </a:fontRef>
+        </p:style>
+      </p:cxnSp>
+      <p:pic>
+        <p:nvPicPr>
+          <p:cNvPr id="30" name="Εικόνα 29" descr="Εικόνα που περιέχει διάγραμμα, γραμμή, στιγμιότυπο οθόνης, γράφημα&#10;&#10;Το περιεχόμενο που δημιουργείται από AI ενδέχεται να είναι εσφαλμένο.">
+            <a:extLst>
+              <a:ext uri="{FF2B5EF4-FFF2-40B4-BE49-F238E27FC236}">
+                <a16:creationId xmlns:a16="http://schemas.microsoft.com/office/drawing/2014/main" id="{C0CBD18D-048D-E763-D4B4-116D76CC0861}"/>
+              </a:ext>
+            </a:extLst>
+          </p:cNvPr>
+          <p:cNvPicPr>
+            <a:picLocks noChangeAspect="1"/>
+          </p:cNvPicPr>
+          <p:nvPr/>
+        </p:nvPicPr>
+        <p:blipFill>
+          <a:blip r:embed="rId10" cstate="print">
+            <a:extLst>
+              <a:ext uri="{28A0092B-C50C-407E-A947-70E740481C1C}">
+                <a14:useLocalDpi xmlns:a14="http://schemas.microsoft.com/office/drawing/2010/main" val="0"/>
+              </a:ext>
+            </a:extLst>
+          </a:blip>
+          <a:stretch>
+            <a:fillRect/>
+          </a:stretch>
+        </p:blipFill>
+        <p:spPr>
+          <a:xfrm>
+            <a:off x="562707" y="3764835"/>
+            <a:ext cx="3104277" cy="3104277"/>
+          </a:xfrm>
+          <a:prstGeom prst="rect">
+            <a:avLst/>
+          </a:prstGeom>
+        </p:spPr>
+      </p:pic>
+      <p:pic>
+        <p:nvPicPr>
+          <p:cNvPr id="31" name="Εικόνα 30">
+            <a:extLst>
+              <a:ext uri="{FF2B5EF4-FFF2-40B4-BE49-F238E27FC236}">
+                <a16:creationId xmlns:a16="http://schemas.microsoft.com/office/drawing/2014/main" id="{05D05523-45B3-7D99-321A-0A473D760D54}"/>
+              </a:ext>
+            </a:extLst>
+          </p:cNvPr>
+          <p:cNvPicPr>
+            <a:picLocks noChangeAspect="1"/>
+          </p:cNvPicPr>
+          <p:nvPr/>
+        </p:nvPicPr>
+        <p:blipFill>
+          <a:blip r:embed="rId11" cstate="print">
+            <a:extLst>
+              <a:ext uri="{28A0092B-C50C-407E-A947-70E740481C1C}">
+                <a14:useLocalDpi xmlns:a14="http://schemas.microsoft.com/office/drawing/2010/main" val="0"/>
+              </a:ext>
+            </a:extLst>
+          </a:blip>
+          <a:srcRect/>
+          <a:stretch/>
+        </p:blipFill>
+        <p:spPr>
+          <a:xfrm>
+            <a:off x="4580432" y="3764834"/>
+            <a:ext cx="3104277" cy="3104277"/>
+          </a:xfrm>
+          <a:prstGeom prst="rect">
+            <a:avLst/>
+          </a:prstGeom>
+        </p:spPr>
+      </p:pic>
+      <p:pic>
+        <p:nvPicPr>
+          <p:cNvPr id="1024" name="astar_path_x3.5">
+            <a:hlinkClick r:id="" action="ppaction://media"/>
+            <a:extLst>
+              <a:ext uri="{FF2B5EF4-FFF2-40B4-BE49-F238E27FC236}">
+                <a16:creationId xmlns:a16="http://schemas.microsoft.com/office/drawing/2014/main" id="{699D7DD8-CF3A-D7E6-3EB2-026E9B431505}"/>
+              </a:ext>
+            </a:extLst>
+          </p:cNvPr>
+          <p:cNvPicPr>
+            <a:picLocks noChangeAspect="1"/>
+          </p:cNvPicPr>
+          <p:nvPr>
+            <a:videoFile r:link="rId2"/>
+            <p:extLst>
+              <p:ext uri="{DAA4B4D4-6D71-4841-9C94-3DE7FCFB9230}">
+                <p14:media xmlns:p14="http://schemas.microsoft.com/office/powerpoint/2010/main" r:embed="rId1"/>
+              </p:ext>
+            </p:extLst>
+          </p:nvPr>
+        </p:nvPicPr>
+        <p:blipFill>
+          <a:blip r:embed="rId12"/>
+          <a:stretch>
+            <a:fillRect/>
+          </a:stretch>
+        </p:blipFill>
+        <p:spPr>
+          <a:xfrm>
+            <a:off x="8598157" y="3764835"/>
+            <a:ext cx="3104277" cy="3104277"/>
+          </a:xfrm>
+          <a:prstGeom prst="rect">
+            <a:avLst/>
+          </a:prstGeom>
+        </p:spPr>
+      </p:pic>
+    </p:spTree>
+    <p:extLst>
+      <p:ext uri="{BB962C8B-B14F-4D97-AF65-F5344CB8AC3E}">
+        <p14:creationId xmlns:p14="http://schemas.microsoft.com/office/powerpoint/2010/main" val="3215020682"/>
+      </p:ext>
+    </p:extLst>
+  </p:cSld>
+  <p:clrMapOvr>
+    <a:overrideClrMapping bg1="lt1" tx1="dk1" bg2="lt2" tx2="dk2" accent1="accent1" accent2="accent2" accent3="accent3" accent4="accent4" accent5="accent5" accent6="accent6" hlink="hlink" folHlink="folHlink"/>
+  </p:clrMapOvr>
+  <p:timing>
+    <p:tnLst>
+      <p:par>
+        <p:cTn id="1" dur="indefinite" restart="never" nodeType="tmRoot">
+          <p:childTnLst>
+            <p:seq concurrent="1" nextAc="seek">
+              <p:cTn id="2" dur="indefinite" nodeType="mainSeq">
+                <p:childTnLst>
+                  <p:par>
+                    <p:cTn id="3" fill="hold">
+                      <p:stCondLst>
+                        <p:cond delay="indefinite"/>
+                      </p:stCondLst>
+                      <p:childTnLst>
+                        <p:par>
+                          <p:cTn id="4" fill="hold">
+                            <p:stCondLst>
+                              <p:cond delay="0"/>
+                            </p:stCondLst>
+                            <p:childTnLst>
+                              <p:par>
+                                <p:cTn id="5" presetID="22" presetClass="entr" presetSubtype="8" fill="hold" nodeType="clickEffect">
+                                  <p:stCondLst>
+                                    <p:cond delay="0"/>
+                                  </p:stCondLst>
+                                  <p:childTnLst>
+                                    <p:set>
+                                      <p:cBhvr>
+                                        <p:cTn id="6" dur="1" fill="hold">
+                                          <p:stCondLst>
+                                            <p:cond delay="0"/>
+                                          </p:stCondLst>
+                                        </p:cTn>
+                                        <p:tgtEl>
+                                          <p:spTgt spid="9"/>
+                                        </p:tgtEl>
+                                        <p:attrNameLst>
+                                          <p:attrName>style.visibility</p:attrName>
+                                        </p:attrNameLst>
+                                      </p:cBhvr>
+                                      <p:to>
+                                        <p:strVal val="visible"/>
+                                      </p:to>
+                                    </p:set>
+                                    <p:animEffect transition="in" filter="wipe(left)">
+                                      <p:cBhvr>
+                                        <p:cTn id="7" dur="500"/>
+                                        <p:tgtEl>
+                                          <p:spTgt spid="9"/>
+                                        </p:tgtEl>
+                                      </p:cBhvr>
+                                    </p:animEffect>
+                                  </p:childTnLst>
+                                </p:cTn>
+                              </p:par>
+                            </p:childTnLst>
+                          </p:cTn>
+                        </p:par>
+                        <p:par>
+                          <p:cTn id="8" fill="hold">
+                            <p:stCondLst>
+                              <p:cond delay="500"/>
+                            </p:stCondLst>
+                            <p:childTnLst>
+                              <p:par>
+                                <p:cTn id="9" presetID="22" presetClass="entr" presetSubtype="8" fill="hold" nodeType="afterEffect">
+                                  <p:stCondLst>
+                                    <p:cond delay="0"/>
+                                  </p:stCondLst>
+                                  <p:childTnLst>
+                                    <p:set>
+                                      <p:cBhvr>
+                                        <p:cTn id="10" dur="1" fill="hold">
+                                          <p:stCondLst>
+                                            <p:cond delay="0"/>
+                                          </p:stCondLst>
+                                        </p:cTn>
+                                        <p:tgtEl>
+                                          <p:spTgt spid="6"/>
+                                        </p:tgtEl>
+                                        <p:attrNameLst>
+                                          <p:attrName>style.visibility</p:attrName>
+                                        </p:attrNameLst>
+                                      </p:cBhvr>
+                                      <p:to>
+                                        <p:strVal val="visible"/>
+                                      </p:to>
+                                    </p:set>
+                                    <p:animEffect transition="in" filter="wipe(left)">
+                                      <p:cBhvr>
+                                        <p:cTn id="11" dur="500"/>
+                                        <p:tgtEl>
+                                          <p:spTgt spid="6"/>
+                                        </p:tgtEl>
+                                      </p:cBhvr>
+                                    </p:animEffect>
+                                  </p:childTnLst>
+                                </p:cTn>
+                              </p:par>
+                            </p:childTnLst>
+                          </p:cTn>
+                        </p:par>
+                      </p:childTnLst>
+                    </p:cTn>
+                  </p:par>
+                  <p:par>
+                    <p:cTn id="12" fill="hold">
+                      <p:stCondLst>
+                        <p:cond delay="indefinite"/>
+                      </p:stCondLst>
+                      <p:childTnLst>
+                        <p:par>
+                          <p:cTn id="13" fill="hold">
+                            <p:stCondLst>
+                              <p:cond delay="0"/>
+                            </p:stCondLst>
+                            <p:childTnLst>
+                              <p:par>
+                                <p:cTn id="14" presetID="22" presetClass="entr" presetSubtype="8" fill="hold" nodeType="clickEffect">
+                                  <p:stCondLst>
+                                    <p:cond delay="0"/>
+                                  </p:stCondLst>
+                                  <p:childTnLst>
+                                    <p:set>
+                                      <p:cBhvr>
+                                        <p:cTn id="15" dur="1" fill="hold">
+                                          <p:stCondLst>
+                                            <p:cond delay="0"/>
+                                          </p:stCondLst>
+                                        </p:cTn>
+                                        <p:tgtEl>
+                                          <p:spTgt spid="11"/>
+                                        </p:tgtEl>
+                                        <p:attrNameLst>
+                                          <p:attrName>style.visibility</p:attrName>
+                                        </p:attrNameLst>
+                                      </p:cBhvr>
+                                      <p:to>
+                                        <p:strVal val="visible"/>
+                                      </p:to>
+                                    </p:set>
+                                    <p:animEffect transition="in" filter="wipe(left)">
+                                      <p:cBhvr>
+                                        <p:cTn id="16" dur="500"/>
+                                        <p:tgtEl>
+                                          <p:spTgt spid="11"/>
+                                        </p:tgtEl>
+                                      </p:cBhvr>
+                                    </p:animEffect>
+                                  </p:childTnLst>
+                                </p:cTn>
+                              </p:par>
+                            </p:childTnLst>
+                          </p:cTn>
+                        </p:par>
+                        <p:par>
+                          <p:cTn id="17" fill="hold">
+                            <p:stCondLst>
+                              <p:cond delay="500"/>
+                            </p:stCondLst>
+                            <p:childTnLst>
+                              <p:par>
+                                <p:cTn id="18" presetID="22" presetClass="entr" presetSubtype="8" fill="hold" nodeType="afterEffect">
+                                  <p:stCondLst>
+                                    <p:cond delay="0"/>
+                                  </p:stCondLst>
+                                  <p:childTnLst>
+                                    <p:set>
+                                      <p:cBhvr>
+                                        <p:cTn id="19" dur="1" fill="hold">
+                                          <p:stCondLst>
+                                            <p:cond delay="0"/>
+                                          </p:stCondLst>
+                                        </p:cTn>
+                                        <p:tgtEl>
+                                          <p:spTgt spid="7"/>
+                                        </p:tgtEl>
+                                        <p:attrNameLst>
+                                          <p:attrName>style.visibility</p:attrName>
+                                        </p:attrNameLst>
+                                      </p:cBhvr>
+                                      <p:to>
+                                        <p:strVal val="visible"/>
+                                      </p:to>
+                                    </p:set>
+                                    <p:animEffect transition="in" filter="wipe(left)">
+                                      <p:cBhvr>
+                                        <p:cTn id="20" dur="500"/>
+                                        <p:tgtEl>
+                                          <p:spTgt spid="7"/>
+                                        </p:tgtEl>
+                                      </p:cBhvr>
+                                    </p:animEffect>
+                                  </p:childTnLst>
+                                </p:cTn>
+                              </p:par>
+                            </p:childTnLst>
+                          </p:cTn>
+                        </p:par>
+                      </p:childTnLst>
+                    </p:cTn>
+                  </p:par>
+                  <p:par>
+                    <p:cTn id="21" fill="hold">
+                      <p:stCondLst>
+                        <p:cond delay="indefinite"/>
+                      </p:stCondLst>
+                      <p:childTnLst>
+                        <p:par>
+                          <p:cTn id="22" fill="hold">
+                            <p:stCondLst>
+                              <p:cond delay="0"/>
+                            </p:stCondLst>
+                            <p:childTnLst>
+                              <p:par>
+                                <p:cTn id="23" presetID="42" presetClass="entr" presetSubtype="0" fill="hold" nodeType="clickEffect">
+                                  <p:stCondLst>
+                                    <p:cond delay="0"/>
+                                  </p:stCondLst>
+                                  <p:childTnLst>
+                                    <p:set>
+                                      <p:cBhvr>
+                                        <p:cTn id="24" dur="1" fill="hold">
+                                          <p:stCondLst>
+                                            <p:cond delay="0"/>
+                                          </p:stCondLst>
+                                        </p:cTn>
+                                        <p:tgtEl>
+                                          <p:spTgt spid="30"/>
+                                        </p:tgtEl>
+                                        <p:attrNameLst>
+                                          <p:attrName>style.visibility</p:attrName>
+                                        </p:attrNameLst>
+                                      </p:cBhvr>
+                                      <p:to>
+                                        <p:strVal val="visible"/>
+                                      </p:to>
+                                    </p:set>
+                                    <p:animEffect transition="in" filter="fade">
+                                      <p:cBhvr>
+                                        <p:cTn id="25" dur="1000"/>
+                                        <p:tgtEl>
+                                          <p:spTgt spid="30"/>
+                                        </p:tgtEl>
+                                      </p:cBhvr>
+                                    </p:animEffect>
+                                    <p:anim calcmode="lin" valueType="num">
+                                      <p:cBhvr>
+                                        <p:cTn id="26" dur="1000" fill="hold"/>
+                                        <p:tgtEl>
+                                          <p:spTgt spid="30"/>
+                                        </p:tgtEl>
+                                        <p:attrNameLst>
+                                          <p:attrName>ppt_x</p:attrName>
+                                        </p:attrNameLst>
+                                      </p:cBhvr>
+                                      <p:tavLst>
+                                        <p:tav tm="0">
+                                          <p:val>
+                                            <p:strVal val="#ppt_x"/>
+                                          </p:val>
+                                        </p:tav>
+                                        <p:tav tm="100000">
+                                          <p:val>
+                                            <p:strVal val="#ppt_x"/>
+                                          </p:val>
+                                        </p:tav>
+                                      </p:tavLst>
+                                    </p:anim>
+                                    <p:anim calcmode="lin" valueType="num">
+                                      <p:cBhvr>
+                                        <p:cTn id="27" dur="1000" fill="hold"/>
+                                        <p:tgtEl>
+                                          <p:spTgt spid="30"/>
+                                        </p:tgtEl>
+                                        <p:attrNameLst>
+                                          <p:attrName>ppt_y</p:attrName>
+                                        </p:attrNameLst>
+                                      </p:cBhvr>
+                                      <p:tavLst>
+                                        <p:tav tm="0">
+                                          <p:val>
+                                            <p:strVal val="#ppt_y+.1"/>
+                                          </p:val>
+                                        </p:tav>
+                                        <p:tav tm="100000">
+                                          <p:val>
+                                            <p:strVal val="#ppt_y"/>
+                                          </p:val>
+                                        </p:tav>
+                                      </p:tavLst>
+                                    </p:anim>
+                                  </p:childTnLst>
+                                </p:cTn>
+                              </p:par>
+                            </p:childTnLst>
+                          </p:cTn>
+                        </p:par>
+                      </p:childTnLst>
+                    </p:cTn>
+                  </p:par>
+                  <p:par>
+                    <p:cTn id="28" fill="hold">
+                      <p:stCondLst>
+                        <p:cond delay="indefinite"/>
+                      </p:stCondLst>
+                      <p:childTnLst>
+                        <p:par>
+                          <p:cTn id="29" fill="hold">
+                            <p:stCondLst>
+                              <p:cond delay="0"/>
+                            </p:stCondLst>
+                            <p:childTnLst>
+                              <p:par>
+                                <p:cTn id="30" presetID="22" presetClass="entr" presetSubtype="8" fill="hold" nodeType="clickEffect">
+                                  <p:stCondLst>
+                                    <p:cond delay="0"/>
+                                  </p:stCondLst>
+                                  <p:childTnLst>
+                                    <p:set>
+                                      <p:cBhvr>
+                                        <p:cTn id="31" dur="1" fill="hold">
+                                          <p:stCondLst>
+                                            <p:cond delay="0"/>
+                                          </p:stCondLst>
+                                        </p:cTn>
+                                        <p:tgtEl>
+                                          <p:spTgt spid="16"/>
+                                        </p:tgtEl>
+                                        <p:attrNameLst>
+                                          <p:attrName>style.visibility</p:attrName>
+                                        </p:attrNameLst>
+                                      </p:cBhvr>
+                                      <p:to>
+                                        <p:strVal val="visible"/>
+                                      </p:to>
+                                    </p:set>
+                                    <p:animEffect transition="in" filter="wipe(left)">
+                                      <p:cBhvr>
+                                        <p:cTn id="32" dur="500"/>
+                                        <p:tgtEl>
+                                          <p:spTgt spid="16"/>
+                                        </p:tgtEl>
+                                      </p:cBhvr>
+                                    </p:animEffect>
+                                  </p:childTnLst>
+                                </p:cTn>
+                              </p:par>
+                            </p:childTnLst>
+                          </p:cTn>
+                        </p:par>
+                        <p:par>
+                          <p:cTn id="33" fill="hold">
+                            <p:stCondLst>
+                              <p:cond delay="500"/>
+                            </p:stCondLst>
+                            <p:childTnLst>
+                              <p:par>
+                                <p:cTn id="34" presetID="22" presetClass="entr" presetSubtype="8" fill="hold" nodeType="afterEffect">
+                                  <p:stCondLst>
+                                    <p:cond delay="0"/>
+                                  </p:stCondLst>
+                                  <p:childTnLst>
+                                    <p:set>
+                                      <p:cBhvr>
+                                        <p:cTn id="35" dur="1" fill="hold">
+                                          <p:stCondLst>
+                                            <p:cond delay="0"/>
+                                          </p:stCondLst>
+                                        </p:cTn>
+                                        <p:tgtEl>
+                                          <p:spTgt spid="13"/>
+                                        </p:tgtEl>
+                                        <p:attrNameLst>
+                                          <p:attrName>style.visibility</p:attrName>
+                                        </p:attrNameLst>
+                                      </p:cBhvr>
+                                      <p:to>
+                                        <p:strVal val="visible"/>
+                                      </p:to>
+                                    </p:set>
+                                    <p:animEffect transition="in" filter="wipe(left)">
+                                      <p:cBhvr>
+                                        <p:cTn id="36" dur="500"/>
+                                        <p:tgtEl>
+                                          <p:spTgt spid="13"/>
+                                        </p:tgtEl>
+                                      </p:cBhvr>
+                                    </p:animEffect>
+                                  </p:childTnLst>
+                                </p:cTn>
+                              </p:par>
+                            </p:childTnLst>
+                          </p:cTn>
+                        </p:par>
+                      </p:childTnLst>
+                    </p:cTn>
+                  </p:par>
+                  <p:par>
+                    <p:cTn id="37" fill="hold">
+                      <p:stCondLst>
+                        <p:cond delay="indefinite"/>
+                      </p:stCondLst>
+                      <p:childTnLst>
+                        <p:par>
+                          <p:cTn id="38" fill="hold">
+                            <p:stCondLst>
+                              <p:cond delay="0"/>
+                            </p:stCondLst>
+                            <p:childTnLst>
+                              <p:par>
+                                <p:cTn id="39" presetID="2" presetClass="entr" presetSubtype="4" fill="hold" grpId="0" nodeType="clickEffect">
+                                  <p:stCondLst>
+                                    <p:cond delay="0"/>
+                                  </p:stCondLst>
+                                  <p:childTnLst>
+                                    <p:set>
+                                      <p:cBhvr>
+                                        <p:cTn id="40" dur="1" fill="hold">
+                                          <p:stCondLst>
+                                            <p:cond delay="0"/>
+                                          </p:stCondLst>
+                                        </p:cTn>
+                                        <p:tgtEl>
+                                          <p:spTgt spid="20"/>
+                                        </p:tgtEl>
+                                        <p:attrNameLst>
+                                          <p:attrName>style.visibility</p:attrName>
+                                        </p:attrNameLst>
+                                      </p:cBhvr>
+                                      <p:to>
+                                        <p:strVal val="visible"/>
+                                      </p:to>
+                                    </p:set>
+                                    <p:anim calcmode="lin" valueType="num">
+                                      <p:cBhvr additive="base">
+                                        <p:cTn id="41" dur="500" fill="hold"/>
+                                        <p:tgtEl>
+                                          <p:spTgt spid="20"/>
+                                        </p:tgtEl>
+                                        <p:attrNameLst>
+                                          <p:attrName>ppt_x</p:attrName>
+                                        </p:attrNameLst>
+                                      </p:cBhvr>
+                                      <p:tavLst>
+                                        <p:tav tm="0">
+                                          <p:val>
+                                            <p:strVal val="#ppt_x"/>
+                                          </p:val>
+                                        </p:tav>
+                                        <p:tav tm="100000">
+                                          <p:val>
+                                            <p:strVal val="#ppt_x"/>
+                                          </p:val>
+                                        </p:tav>
+                                      </p:tavLst>
+                                    </p:anim>
+                                    <p:anim calcmode="lin" valueType="num">
+                                      <p:cBhvr additive="base">
+                                        <p:cTn id="42" dur="500" fill="hold"/>
+                                        <p:tgtEl>
+                                          <p:spTgt spid="20"/>
+                                        </p:tgtEl>
+                                        <p:attrNameLst>
+                                          <p:attrName>ppt_y</p:attrName>
+                                        </p:attrNameLst>
+                                      </p:cBhvr>
+                                      <p:tavLst>
+                                        <p:tav tm="0">
+                                          <p:val>
+                                            <p:strVal val="1+#ppt_h/2"/>
+                                          </p:val>
+                                        </p:tav>
+                                        <p:tav tm="100000">
+                                          <p:val>
+                                            <p:strVal val="#ppt_y"/>
+                                          </p:val>
+                                        </p:tav>
+                                      </p:tavLst>
+                                    </p:anim>
+                                  </p:childTnLst>
+                                </p:cTn>
+                              </p:par>
+                            </p:childTnLst>
+                          </p:cTn>
+                        </p:par>
+                      </p:childTnLst>
+                    </p:cTn>
+                  </p:par>
+                  <p:par>
+                    <p:cTn id="43" fill="hold">
+                      <p:stCondLst>
+                        <p:cond delay="indefinite"/>
+                      </p:stCondLst>
+                      <p:childTnLst>
+                        <p:par>
+                          <p:cTn id="44" fill="hold">
+                            <p:stCondLst>
+                              <p:cond delay="0"/>
+                            </p:stCondLst>
+                            <p:childTnLst>
+                              <p:par>
+                                <p:cTn id="45" presetID="2" presetClass="exit" presetSubtype="4" fill="hold" grpId="1" nodeType="clickEffect">
+                                  <p:stCondLst>
+                                    <p:cond delay="0"/>
+                                  </p:stCondLst>
+                                  <p:childTnLst>
+                                    <p:anim calcmode="lin" valueType="num">
+                                      <p:cBhvr additive="base">
+                                        <p:cTn id="46" dur="500"/>
+                                        <p:tgtEl>
+                                          <p:spTgt spid="20"/>
+                                        </p:tgtEl>
+                                        <p:attrNameLst>
+                                          <p:attrName>ppt_x</p:attrName>
+                                        </p:attrNameLst>
+                                      </p:cBhvr>
+                                      <p:tavLst>
+                                        <p:tav tm="0">
+                                          <p:val>
+                                            <p:strVal val="ppt_x"/>
+                                          </p:val>
+                                        </p:tav>
+                                        <p:tav tm="100000">
+                                          <p:val>
+                                            <p:strVal val="ppt_x"/>
+                                          </p:val>
+                                        </p:tav>
+                                      </p:tavLst>
+                                    </p:anim>
+                                    <p:anim calcmode="lin" valueType="num">
+                                      <p:cBhvr additive="base">
+                                        <p:cTn id="47" dur="500"/>
+                                        <p:tgtEl>
+                                          <p:spTgt spid="20"/>
+                                        </p:tgtEl>
+                                        <p:attrNameLst>
+                                          <p:attrName>ppt_y</p:attrName>
+                                        </p:attrNameLst>
+                                      </p:cBhvr>
+                                      <p:tavLst>
+                                        <p:tav tm="0">
+                                          <p:val>
+                                            <p:strVal val="ppt_y"/>
+                                          </p:val>
+                                        </p:tav>
+                                        <p:tav tm="100000">
+                                          <p:val>
+                                            <p:strVal val="1+ppt_h/2"/>
+                                          </p:val>
+                                        </p:tav>
+                                      </p:tavLst>
+                                    </p:anim>
+                                    <p:set>
+                                      <p:cBhvr>
+                                        <p:cTn id="48" dur="1" fill="hold">
+                                          <p:stCondLst>
+                                            <p:cond delay="499"/>
+                                          </p:stCondLst>
+                                        </p:cTn>
+                                        <p:tgtEl>
+                                          <p:spTgt spid="20"/>
+                                        </p:tgtEl>
+                                        <p:attrNameLst>
+                                          <p:attrName>style.visibility</p:attrName>
+                                        </p:attrNameLst>
+                                      </p:cBhvr>
+                                      <p:to>
+                                        <p:strVal val="hidden"/>
+                                      </p:to>
+                                    </p:set>
+                                  </p:childTnLst>
+                                </p:cTn>
+                              </p:par>
+                            </p:childTnLst>
+                          </p:cTn>
+                        </p:par>
+                      </p:childTnLst>
+                    </p:cTn>
+                  </p:par>
+                  <p:par>
+                    <p:cTn id="49" fill="hold">
+                      <p:stCondLst>
+                        <p:cond delay="indefinite"/>
+                      </p:stCondLst>
+                      <p:childTnLst>
+                        <p:par>
+                          <p:cTn id="50" fill="hold">
+                            <p:stCondLst>
+                              <p:cond delay="0"/>
+                            </p:stCondLst>
+                            <p:childTnLst>
+                              <p:par>
+                                <p:cTn id="51" presetID="2" presetClass="entr" presetSubtype="4" fill="hold" nodeType="clickEffect">
+                                  <p:stCondLst>
+                                    <p:cond delay="0"/>
+                                  </p:stCondLst>
+                                  <p:childTnLst>
+                                    <p:set>
+                                      <p:cBhvr>
+                                        <p:cTn id="52" dur="1" fill="hold">
+                                          <p:stCondLst>
+                                            <p:cond delay="0"/>
+                                          </p:stCondLst>
+                                        </p:cTn>
+                                        <p:tgtEl>
+                                          <p:spTgt spid="31"/>
+                                        </p:tgtEl>
+                                        <p:attrNameLst>
+                                          <p:attrName>style.visibility</p:attrName>
+                                        </p:attrNameLst>
+                                      </p:cBhvr>
+                                      <p:to>
+                                        <p:strVal val="visible"/>
+                                      </p:to>
+                                    </p:set>
+                                    <p:anim calcmode="lin" valueType="num">
+                                      <p:cBhvr additive="base">
+                                        <p:cTn id="53" dur="500" fill="hold"/>
+                                        <p:tgtEl>
+                                          <p:spTgt spid="31"/>
+                                        </p:tgtEl>
+                                        <p:attrNameLst>
+                                          <p:attrName>ppt_x</p:attrName>
+                                        </p:attrNameLst>
+                                      </p:cBhvr>
+                                      <p:tavLst>
+                                        <p:tav tm="0">
+                                          <p:val>
+                                            <p:strVal val="#ppt_x"/>
+                                          </p:val>
+                                        </p:tav>
+                                        <p:tav tm="100000">
+                                          <p:val>
+                                            <p:strVal val="#ppt_x"/>
+                                          </p:val>
+                                        </p:tav>
+                                      </p:tavLst>
+                                    </p:anim>
+                                    <p:anim calcmode="lin" valueType="num">
+                                      <p:cBhvr additive="base">
+                                        <p:cTn id="54" dur="500" fill="hold"/>
+                                        <p:tgtEl>
+                                          <p:spTgt spid="31"/>
+                                        </p:tgtEl>
+                                        <p:attrNameLst>
+                                          <p:attrName>ppt_y</p:attrName>
+                                        </p:attrNameLst>
+                                      </p:cBhvr>
+                                      <p:tavLst>
+                                        <p:tav tm="0">
+                                          <p:val>
+                                            <p:strVal val="1+#ppt_h/2"/>
+                                          </p:val>
+                                        </p:tav>
+                                        <p:tav tm="100000">
+                                          <p:val>
+                                            <p:strVal val="#ppt_y"/>
+                                          </p:val>
+                                        </p:tav>
+                                      </p:tavLst>
+                                    </p:anim>
+                                  </p:childTnLst>
+                                </p:cTn>
+                              </p:par>
+                            </p:childTnLst>
+                          </p:cTn>
+                        </p:par>
+                      </p:childTnLst>
+                    </p:cTn>
+                  </p:par>
+                  <p:par>
+                    <p:cTn id="55" fill="hold">
+                      <p:stCondLst>
+                        <p:cond delay="indefinite"/>
+                      </p:stCondLst>
+                      <p:childTnLst>
+                        <p:par>
+                          <p:cTn id="56" fill="hold">
+                            <p:stCondLst>
+                              <p:cond delay="0"/>
+                            </p:stCondLst>
+                            <p:childTnLst>
+                              <p:par>
+                                <p:cTn id="57" presetID="22" presetClass="entr" presetSubtype="2" fill="hold" nodeType="clickEffect">
+                                  <p:stCondLst>
+                                    <p:cond delay="0"/>
+                                  </p:stCondLst>
+                                  <p:childTnLst>
+                                    <p:set>
+                                      <p:cBhvr>
+                                        <p:cTn id="58" dur="1" fill="hold">
+                                          <p:stCondLst>
+                                            <p:cond delay="0"/>
+                                          </p:stCondLst>
+                                        </p:cTn>
+                                        <p:tgtEl>
+                                          <p:spTgt spid="22"/>
+                                        </p:tgtEl>
+                                        <p:attrNameLst>
+                                          <p:attrName>style.visibility</p:attrName>
+                                        </p:attrNameLst>
+                                      </p:cBhvr>
+                                      <p:to>
+                                        <p:strVal val="visible"/>
+                                      </p:to>
+                                    </p:set>
+                                    <p:animEffect transition="in" filter="wipe(right)">
+                                      <p:cBhvr>
+                                        <p:cTn id="59" dur="500"/>
+                                        <p:tgtEl>
+                                          <p:spTgt spid="22"/>
+                                        </p:tgtEl>
+                                      </p:cBhvr>
+                                    </p:animEffect>
+                                  </p:childTnLst>
+                                </p:cTn>
+                              </p:par>
+                              <p:par>
+                                <p:cTn id="60" presetID="22" presetClass="entr" presetSubtype="2" fill="hold" nodeType="withEffect">
+                                  <p:stCondLst>
+                                    <p:cond delay="0"/>
+                                  </p:stCondLst>
+                                  <p:childTnLst>
+                                    <p:set>
+                                      <p:cBhvr>
+                                        <p:cTn id="61" dur="1" fill="hold">
+                                          <p:stCondLst>
+                                            <p:cond delay="0"/>
+                                          </p:stCondLst>
+                                        </p:cTn>
+                                        <p:tgtEl>
+                                          <p:spTgt spid="24"/>
+                                        </p:tgtEl>
+                                        <p:attrNameLst>
+                                          <p:attrName>style.visibility</p:attrName>
+                                        </p:attrNameLst>
+                                      </p:cBhvr>
+                                      <p:to>
+                                        <p:strVal val="visible"/>
+                                      </p:to>
+                                    </p:set>
+                                    <p:animEffect transition="in" filter="wipe(right)">
+                                      <p:cBhvr>
+                                        <p:cTn id="62" dur="500"/>
+                                        <p:tgtEl>
+                                          <p:spTgt spid="24"/>
+                                        </p:tgtEl>
+                                      </p:cBhvr>
+                                    </p:animEffect>
+                                  </p:childTnLst>
+                                </p:cTn>
+                              </p:par>
+                            </p:childTnLst>
+                          </p:cTn>
+                        </p:par>
+                      </p:childTnLst>
+                    </p:cTn>
+                  </p:par>
+                  <p:par>
+                    <p:cTn id="63" fill="hold">
+                      <p:stCondLst>
+                        <p:cond delay="indefinite"/>
+                      </p:stCondLst>
+                      <p:childTnLst>
+                        <p:par>
+                          <p:cTn id="64" fill="hold">
+                            <p:stCondLst>
+                              <p:cond delay="0"/>
+                            </p:stCondLst>
+                            <p:childTnLst>
+                              <p:par>
+                                <p:cTn id="65" presetID="22" presetClass="entr" presetSubtype="8" fill="hold" nodeType="clickEffect">
+                                  <p:stCondLst>
+                                    <p:cond delay="0"/>
+                                  </p:stCondLst>
+                                  <p:childTnLst>
+                                    <p:set>
+                                      <p:cBhvr>
+                                        <p:cTn id="66" dur="1" fill="hold">
+                                          <p:stCondLst>
+                                            <p:cond delay="0"/>
+                                          </p:stCondLst>
+                                        </p:cTn>
+                                        <p:tgtEl>
+                                          <p:spTgt spid="28"/>
+                                        </p:tgtEl>
+                                        <p:attrNameLst>
+                                          <p:attrName>style.visibility</p:attrName>
+                                        </p:attrNameLst>
+                                      </p:cBhvr>
+                                      <p:to>
+                                        <p:strVal val="visible"/>
+                                      </p:to>
+                                    </p:set>
+                                    <p:animEffect transition="in" filter="wipe(left)">
+                                      <p:cBhvr>
+                                        <p:cTn id="67" dur="500"/>
+                                        <p:tgtEl>
+                                          <p:spTgt spid="28"/>
+                                        </p:tgtEl>
+                                      </p:cBhvr>
+                                    </p:animEffect>
+                                  </p:childTnLst>
+                                </p:cTn>
+                              </p:par>
+                            </p:childTnLst>
+                          </p:cTn>
+                        </p:par>
+                        <p:par>
+                          <p:cTn id="68" fill="hold">
+                            <p:stCondLst>
+                              <p:cond delay="500"/>
+                            </p:stCondLst>
+                            <p:childTnLst>
+                              <p:par>
+                                <p:cTn id="69" presetID="22" presetClass="entr" presetSubtype="8" fill="hold" nodeType="afterEffect">
+                                  <p:stCondLst>
+                                    <p:cond delay="0"/>
+                                  </p:stCondLst>
+                                  <p:childTnLst>
+                                    <p:set>
+                                      <p:cBhvr>
+                                        <p:cTn id="70" dur="1" fill="hold">
+                                          <p:stCondLst>
+                                            <p:cond delay="0"/>
+                                          </p:stCondLst>
+                                        </p:cTn>
+                                        <p:tgtEl>
+                                          <p:spTgt spid="25"/>
+                                        </p:tgtEl>
+                                        <p:attrNameLst>
+                                          <p:attrName>style.visibility</p:attrName>
+                                        </p:attrNameLst>
+                                      </p:cBhvr>
+                                      <p:to>
+                                        <p:strVal val="visible"/>
+                                      </p:to>
+                                    </p:set>
+                                    <p:animEffect transition="in" filter="wipe(left)">
+                                      <p:cBhvr>
+                                        <p:cTn id="71" dur="500"/>
+                                        <p:tgtEl>
+                                          <p:spTgt spid="25"/>
+                                        </p:tgtEl>
+                                      </p:cBhvr>
+                                    </p:animEffect>
+                                  </p:childTnLst>
+                                </p:cTn>
+                              </p:par>
+                            </p:childTnLst>
+                          </p:cTn>
+                        </p:par>
+                      </p:childTnLst>
+                    </p:cTn>
+                  </p:par>
+                  <p:par>
+                    <p:cTn id="72" fill="hold">
+                      <p:stCondLst>
+                        <p:cond delay="indefinite"/>
+                      </p:stCondLst>
+                      <p:childTnLst>
+                        <p:par>
+                          <p:cTn id="73" fill="hold">
+                            <p:stCondLst>
+                              <p:cond delay="0"/>
+                            </p:stCondLst>
+                            <p:childTnLst>
+                              <p:par>
+                                <p:cTn id="74" presetID="2" presetClass="entr" presetSubtype="2" fill="hold" nodeType="clickEffect">
+                                  <p:stCondLst>
+                                    <p:cond delay="0"/>
+                                  </p:stCondLst>
+                                  <p:childTnLst>
+                                    <p:set>
+                                      <p:cBhvr>
+                                        <p:cTn id="75" dur="1" fill="hold">
+                                          <p:stCondLst>
+                                            <p:cond delay="0"/>
+                                          </p:stCondLst>
+                                        </p:cTn>
+                                        <p:tgtEl>
+                                          <p:spTgt spid="1024"/>
+                                        </p:tgtEl>
+                                        <p:attrNameLst>
+                                          <p:attrName>style.visibility</p:attrName>
+                                        </p:attrNameLst>
+                                      </p:cBhvr>
+                                      <p:to>
+                                        <p:strVal val="visible"/>
+                                      </p:to>
+                                    </p:set>
+                                    <p:anim calcmode="lin" valueType="num">
+                                      <p:cBhvr additive="base">
+                                        <p:cTn id="76" dur="500" fill="hold"/>
+                                        <p:tgtEl>
+                                          <p:spTgt spid="1024"/>
+                                        </p:tgtEl>
+                                        <p:attrNameLst>
+                                          <p:attrName>ppt_x</p:attrName>
+                                        </p:attrNameLst>
+                                      </p:cBhvr>
+                                      <p:tavLst>
+                                        <p:tav tm="0">
+                                          <p:val>
+                                            <p:strVal val="1+#ppt_w/2"/>
+                                          </p:val>
+                                        </p:tav>
+                                        <p:tav tm="100000">
+                                          <p:val>
+                                            <p:strVal val="#ppt_x"/>
+                                          </p:val>
+                                        </p:tav>
+                                      </p:tavLst>
+                                    </p:anim>
+                                    <p:anim calcmode="lin" valueType="num">
+                                      <p:cBhvr additive="base">
+                                        <p:cTn id="77" dur="500" fill="hold"/>
+                                        <p:tgtEl>
+                                          <p:spTgt spid="1024"/>
+                                        </p:tgtEl>
+                                        <p:attrNameLst>
+                                          <p:attrName>ppt_y</p:attrName>
+                                        </p:attrNameLst>
+                                      </p:cBhvr>
+                                      <p:tavLst>
+                                        <p:tav tm="0">
+                                          <p:val>
+                                            <p:strVal val="#ppt_y"/>
+                                          </p:val>
+                                        </p:tav>
+                                        <p:tav tm="100000">
+                                          <p:val>
+                                            <p:strVal val="#ppt_y"/>
+                                          </p:val>
+                                        </p:tav>
+                                      </p:tavLst>
+                                    </p:anim>
+                                  </p:childTnLst>
+                                </p:cTn>
+                              </p:par>
+                            </p:childTnLst>
+                          </p:cTn>
+                        </p:par>
+                      </p:childTnLst>
+                    </p:cTn>
+                  </p:par>
+                  <p:par>
+                    <p:cTn id="78" fill="hold">
+                      <p:stCondLst>
+                        <p:cond delay="indefinite"/>
+                      </p:stCondLst>
+                      <p:childTnLst>
+                        <p:par>
+                          <p:cTn id="79" fill="hold">
+                            <p:stCondLst>
+                              <p:cond delay="0"/>
+                            </p:stCondLst>
+                            <p:childTnLst>
+                              <p:par>
+                                <p:cTn id="80" presetID="1" presetClass="mediacall" presetSubtype="0" fill="hold" nodeType="clickEffect">
+                                  <p:stCondLst>
+                                    <p:cond delay="0"/>
+                                  </p:stCondLst>
+                                  <p:childTnLst>
+                                    <p:cmd type="call" cmd="playFrom(0.0)">
+                                      <p:cBhvr>
+                                        <p:cTn id="81" dur="18267" fill="hold"/>
+                                        <p:tgtEl>
+                                          <p:spTgt spid="1024"/>
+                                        </p:tgtEl>
+                                      </p:cBhvr>
+                                    </p:cmd>
+                                  </p:childTnLst>
+                                </p:cTn>
+                              </p:par>
+                            </p:childTnLst>
+                          </p:cTn>
+                        </p:par>
+                      </p:childTnLst>
+                    </p:cTn>
+                  </p:par>
+                </p:childTnLst>
+              </p:cTn>
+              <p:prevCondLst>
+                <p:cond evt="onPrev" delay="0">
+                  <p:tgtEl>
+                    <p:sldTgt/>
+                  </p:tgtEl>
+                </p:cond>
+              </p:prevCondLst>
+              <p:nextCondLst>
+                <p:cond evt="onNext" delay="0">
+                  <p:tgtEl>
+                    <p:sldTgt/>
+                  </p:tgtEl>
+                </p:cond>
+              </p:nextCondLst>
+            </p:seq>
+            <p:video>
+              <p:cMediaNode vol="80000">
+                <p:cTn id="82" fill="hold" display="0">
+                  <p:stCondLst>
+                    <p:cond delay="indefinite"/>
+                  </p:stCondLst>
+                </p:cTn>
+                <p:tgtEl>
+                  <p:spTgt spid="1024"/>
+                </p:tgtEl>
+              </p:cMediaNode>
+            </p:video>
+          </p:childTnLst>
+        </p:cTn>
+      </p:par>
+    </p:tnLst>
+    <p:bldLst>
+      <p:bldP spid="20" grpId="0" animBg="1"/>
+      <p:bldP spid="20" grpId="1" animBg="1"/>
+    </p:bldLst>
+  </p:timing>
+</p:sld>
+</file>
+
+<file path=ppt/slides/slide3.xml><?xml version="1.0" encoding="utf-8"?>
 <p:sld xmlns:a="http://schemas.openxmlformats.org/drawingml/2006/main" xmlns:r="http://schemas.openxmlformats.org/officeDocument/2006/relationships" xmlns:p="http://schemas.openxmlformats.org/presentationml/2006/main" show="0">
   <p:cSld>
     <p:spTree>
@@ -21083,7 +24038,7 @@
 </p:sld>
 </file>
 
-<file path=ppt/slides/slide3.xml><?xml version="1.0" encoding="utf-8"?>
+<file path=ppt/slides/slide4.xml><?xml version="1.0" encoding="utf-8"?>
 <p:sld xmlns:a="http://schemas.openxmlformats.org/drawingml/2006/main" xmlns:r="http://schemas.openxmlformats.org/officeDocument/2006/relationships" xmlns:p="http://schemas.openxmlformats.org/presentationml/2006/main" show="0">
   <p:cSld>
     <p:spTree>
@@ -21606,7 +24561,7 @@
 </p:sld>
 </file>
 
-<file path=ppt/slides/slide4.xml><?xml version="1.0" encoding="utf-8"?>
+<file path=ppt/slides/slide5.xml><?xml version="1.0" encoding="utf-8"?>
 <p:sld xmlns:a="http://schemas.openxmlformats.org/drawingml/2006/main" xmlns:r="http://schemas.openxmlformats.org/officeDocument/2006/relationships" xmlns:p="http://schemas.openxmlformats.org/presentationml/2006/main" show="0">
   <p:cSld>
     <p:spTree>
@@ -23436,7 +26391,7 @@
 </p:sld>
 </file>
 
-<file path=ppt/slides/slide5.xml><?xml version="1.0" encoding="utf-8"?>
+<file path=ppt/slides/slide6.xml><?xml version="1.0" encoding="utf-8"?>
 <p:sld xmlns:a="http://schemas.openxmlformats.org/drawingml/2006/main" xmlns:r="http://schemas.openxmlformats.org/officeDocument/2006/relationships" xmlns:p="http://schemas.openxmlformats.org/presentationml/2006/main" show="0">
   <p:cSld>
     <p:spTree>
@@ -25133,7 +28088,7 @@
 </p:sld>
 </file>
 
-<file path=ppt/slides/slide6.xml><?xml version="1.0" encoding="utf-8"?>
+<file path=ppt/slides/slide7.xml><?xml version="1.0" encoding="utf-8"?>
 <p:sld xmlns:a="http://schemas.openxmlformats.org/drawingml/2006/main" xmlns:r="http://schemas.openxmlformats.org/officeDocument/2006/relationships" xmlns:p="http://schemas.openxmlformats.org/presentationml/2006/main">
   <p:cSld>
     <p:spTree>
@@ -26571,7 +29526,7 @@
 </p:sld>
 </file>
 
-<file path=ppt/slides/slide7.xml><?xml version="1.0" encoding="utf-8"?>
+<file path=ppt/slides/slide8.xml><?xml version="1.0" encoding="utf-8"?>
 <p:sld xmlns:a="http://schemas.openxmlformats.org/drawingml/2006/main" xmlns:r="http://schemas.openxmlformats.org/officeDocument/2006/relationships" xmlns:p="http://schemas.openxmlformats.org/presentationml/2006/main" show="0">
   <p:cSld>
     <p:spTree>
@@ -28029,7 +30984,7 @@
 </p:sld>
 </file>
 
-<file path=ppt/slides/slide8.xml><?xml version="1.0" encoding="utf-8"?>
+<file path=ppt/slides/slide9.xml><?xml version="1.0" encoding="utf-8"?>
 <p:sld xmlns:a="http://schemas.openxmlformats.org/drawingml/2006/main" xmlns:r="http://schemas.openxmlformats.org/officeDocument/2006/relationships" xmlns:p="http://schemas.openxmlformats.org/presentationml/2006/main" show="0">
   <p:cSld>
     <p:spTree>
@@ -28226,2266 +31181,6 @@
         </p:cTn>
       </p:par>
     </p:tnLst>
-  </p:timing>
-</p:sld>
-</file>
-
-<file path=ppt/slides/slide9.xml><?xml version="1.0" encoding="utf-8"?>
-<p:sld xmlns:a="http://schemas.openxmlformats.org/drawingml/2006/main" xmlns:r="http://schemas.openxmlformats.org/officeDocument/2006/relationships" xmlns:p="http://schemas.openxmlformats.org/presentationml/2006/main" show="0">
-  <p:cSld>
-    <p:spTree>
-      <p:nvGrpSpPr>
-        <p:cNvPr id="1" name="">
-          <a:extLst>
-            <a:ext uri="{FF2B5EF4-FFF2-40B4-BE49-F238E27FC236}">
-              <a16:creationId xmlns:a16="http://schemas.microsoft.com/office/drawing/2014/main" id="{94D3E3FF-4F5B-67E4-846A-1EE4CDA1AE3C}"/>
-            </a:ext>
-          </a:extLst>
-        </p:cNvPr>
-        <p:cNvGrpSpPr/>
-        <p:nvPr/>
-      </p:nvGrpSpPr>
-      <p:grpSpPr>
-        <a:xfrm>
-          <a:off x="0" y="0"/>
-          <a:ext cx="0" cy="0"/>
-          <a:chOff x="0" y="0"/>
-          <a:chExt cx="0" cy="0"/>
-        </a:xfrm>
-      </p:grpSpPr>
-      <p:cxnSp>
-        <p:nvCxnSpPr>
-          <p:cNvPr id="2066" name="Γραμμή σύνδεσης: Γωνιώδης 2065">
-            <a:extLst>
-              <a:ext uri="{FF2B5EF4-FFF2-40B4-BE49-F238E27FC236}">
-                <a16:creationId xmlns:a16="http://schemas.microsoft.com/office/drawing/2014/main" id="{AE985968-5AC5-1153-E81E-47DC68316DE5}"/>
-              </a:ext>
-            </a:extLst>
-          </p:cNvPr>
-          <p:cNvCxnSpPr>
-            <a:stCxn id="2055" idx="2"/>
-            <a:endCxn id="1030" idx="2"/>
-          </p:cNvCxnSpPr>
-          <p:nvPr/>
-        </p:nvCxnSpPr>
-        <p:spPr>
-          <a:xfrm rot="5400000">
-            <a:off x="6293835" y="-569309"/>
-            <a:ext cx="12700" cy="10015919"/>
-          </a:xfrm>
-          <a:prstGeom prst="bentConnector3">
-            <a:avLst>
-              <a:gd name="adj1" fmla="val 15092307"/>
-            </a:avLst>
-          </a:prstGeom>
-          <a:ln>
-            <a:tailEnd type="triangle"/>
-          </a:ln>
-        </p:spPr>
-        <p:style>
-          <a:lnRef idx="2">
-            <a:schemeClr val="dk1"/>
-          </a:lnRef>
-          <a:fillRef idx="0">
-            <a:schemeClr val="dk1"/>
-          </a:fillRef>
-          <a:effectRef idx="1">
-            <a:schemeClr val="dk1"/>
-          </a:effectRef>
-          <a:fontRef idx="minor">
-            <a:schemeClr val="tx1"/>
-          </a:fontRef>
-        </p:style>
-      </p:cxnSp>
-      <p:cxnSp>
-        <p:nvCxnSpPr>
-          <p:cNvPr id="2063" name="Γραμμή σύνδεσης: Γωνιώδης 2062">
-            <a:extLst>
-              <a:ext uri="{FF2B5EF4-FFF2-40B4-BE49-F238E27FC236}">
-                <a16:creationId xmlns:a16="http://schemas.microsoft.com/office/drawing/2014/main" id="{D517F966-54BB-C43F-7307-86728F91438D}"/>
-              </a:ext>
-            </a:extLst>
-          </p:cNvPr>
-          <p:cNvCxnSpPr>
-            <a:stCxn id="2054" idx="2"/>
-            <a:endCxn id="1030" idx="2"/>
-          </p:cNvCxnSpPr>
-          <p:nvPr/>
-        </p:nvCxnSpPr>
-        <p:spPr>
-          <a:xfrm rot="5400000">
-            <a:off x="5606845" y="-1256300"/>
-            <a:ext cx="1373981" cy="10015919"/>
-          </a:xfrm>
-          <a:prstGeom prst="bentConnector3">
-            <a:avLst>
-              <a:gd name="adj1" fmla="val 238770"/>
-            </a:avLst>
-          </a:prstGeom>
-          <a:ln>
-            <a:tailEnd type="triangle"/>
-          </a:ln>
-        </p:spPr>
-        <p:style>
-          <a:lnRef idx="2">
-            <a:schemeClr val="dk1"/>
-          </a:lnRef>
-          <a:fillRef idx="0">
-            <a:schemeClr val="dk1"/>
-          </a:fillRef>
-          <a:effectRef idx="1">
-            <a:schemeClr val="dk1"/>
-          </a:effectRef>
-          <a:fontRef idx="minor">
-            <a:schemeClr val="tx1"/>
-          </a:fontRef>
-        </p:style>
-      </p:cxnSp>
-      <p:sp>
-        <p:nvSpPr>
-          <p:cNvPr id="4" name="Τίτλος 3">
-            <a:extLst>
-              <a:ext uri="{FF2B5EF4-FFF2-40B4-BE49-F238E27FC236}">
-                <a16:creationId xmlns:a16="http://schemas.microsoft.com/office/drawing/2014/main" id="{840866C9-761C-1482-9E2B-76DF37C30F22}"/>
-              </a:ext>
-            </a:extLst>
-          </p:cNvPr>
-          <p:cNvSpPr>
-            <a:spLocks noGrp="1"/>
-          </p:cNvSpPr>
-          <p:nvPr>
-            <p:ph type="title"/>
-          </p:nvPr>
-        </p:nvSpPr>
-        <p:spPr/>
-        <p:txBody>
-          <a:bodyPr/>
-          <a:lstStyle/>
-          <a:p>
-            <a:pPr algn="ctr"/>
-            <a:r>
-              <a:rPr lang="en-US" dirty="0">
-                <a:latin typeface="Times New Roman" panose="02020603050405020304" pitchFamily="18" charset="0"/>
-                <a:cs typeface="Times New Roman" panose="02020603050405020304" pitchFamily="18" charset="0"/>
-              </a:rPr>
-              <a:t>D*lite</a:t>
-            </a:r>
-            <a:endParaRPr lang="el-GR" dirty="0">
-              <a:latin typeface="Times New Roman" panose="02020603050405020304" pitchFamily="18" charset="0"/>
-              <a:cs typeface="Times New Roman" panose="02020603050405020304" pitchFamily="18" charset="0"/>
-            </a:endParaRPr>
-          </a:p>
-        </p:txBody>
-      </p:sp>
-      <p:pic>
-        <p:nvPicPr>
-          <p:cNvPr id="1030" name="Picture 6">
-            <a:extLst>
-              <a:ext uri="{FF2B5EF4-FFF2-40B4-BE49-F238E27FC236}">
-                <a16:creationId xmlns:a16="http://schemas.microsoft.com/office/drawing/2014/main" id="{B54B8B7C-3A1E-1471-ED0C-1C599C04F210}"/>
-              </a:ext>
-            </a:extLst>
-          </p:cNvPr>
-          <p:cNvPicPr>
-            <a:picLocks noChangeAspect="1" noChangeArrowheads="1"/>
-          </p:cNvPicPr>
-          <p:nvPr/>
-        </p:nvPicPr>
-        <p:blipFill>
-          <a:blip r:embed="rId3">
-            <a:extLst>
-              <a:ext uri="{28A0092B-C50C-407E-A947-70E740481C1C}">
-                <a14:useLocalDpi xmlns:a14="http://schemas.microsoft.com/office/drawing/2010/main" val="0"/>
-              </a:ext>
-            </a:extLst>
-          </a:blip>
-          <a:srcRect/>
-          <a:stretch>
-            <a:fillRect/>
-          </a:stretch>
-        </p:blipFill>
-        <p:spPr bwMode="auto">
-          <a:xfrm>
-            <a:off x="0" y="3429000"/>
-            <a:ext cx="2571750" cy="1009650"/>
-          </a:xfrm>
-          <a:prstGeom prst="rect">
-            <a:avLst/>
-          </a:prstGeom>
-          <a:noFill/>
-          <a:extLst>
-            <a:ext uri="{909E8E84-426E-40DD-AFC4-6F175D3DCCD1}">
-              <a14:hiddenFill xmlns:a14="http://schemas.microsoft.com/office/drawing/2010/main">
-                <a:solidFill>
-                  <a:srgbClr val="FFFFFF"/>
-                </a:solidFill>
-              </a14:hiddenFill>
-            </a:ext>
-          </a:extLst>
-        </p:spPr>
-      </p:pic>
-      <p:pic>
-        <p:nvPicPr>
-          <p:cNvPr id="2049" name="Picture 1">
-            <a:extLst>
-              <a:ext uri="{FF2B5EF4-FFF2-40B4-BE49-F238E27FC236}">
-                <a16:creationId xmlns:a16="http://schemas.microsoft.com/office/drawing/2014/main" id="{45EED285-BCD6-1087-9865-DA756B1C1C69}"/>
-              </a:ext>
-            </a:extLst>
-          </p:cNvPr>
-          <p:cNvPicPr>
-            <a:picLocks noChangeAspect="1" noChangeArrowheads="1"/>
-          </p:cNvPicPr>
-          <p:nvPr/>
-        </p:nvPicPr>
-        <p:blipFill>
-          <a:blip r:embed="rId4">
-            <a:extLst>
-              <a:ext uri="{28A0092B-C50C-407E-A947-70E740481C1C}">
-                <a14:useLocalDpi xmlns:a14="http://schemas.microsoft.com/office/drawing/2010/main" val="0"/>
-              </a:ext>
-            </a:extLst>
-          </a:blip>
-          <a:srcRect/>
-          <a:stretch>
-            <a:fillRect/>
-          </a:stretch>
-        </p:blipFill>
-        <p:spPr bwMode="auto">
-          <a:xfrm>
-            <a:off x="2779014" y="2055019"/>
-            <a:ext cx="1838325" cy="1009650"/>
-          </a:xfrm>
-          <a:prstGeom prst="rect">
-            <a:avLst/>
-          </a:prstGeom>
-          <a:noFill/>
-          <a:extLst>
-            <a:ext uri="{909E8E84-426E-40DD-AFC4-6F175D3DCCD1}">
-              <a14:hiddenFill xmlns:a14="http://schemas.microsoft.com/office/drawing/2010/main">
-                <a:solidFill>
-                  <a:srgbClr val="FFFFFF"/>
-                </a:solidFill>
-              </a14:hiddenFill>
-            </a:ext>
-          </a:extLst>
-        </p:spPr>
-      </p:pic>
-      <p:pic>
-        <p:nvPicPr>
-          <p:cNvPr id="2050" name="Picture 2">
-            <a:extLst>
-              <a:ext uri="{FF2B5EF4-FFF2-40B4-BE49-F238E27FC236}">
-                <a16:creationId xmlns:a16="http://schemas.microsoft.com/office/drawing/2014/main" id="{E6CBFEAF-317D-0E43-ECEC-8270EC6C4675}"/>
-              </a:ext>
-            </a:extLst>
-          </p:cNvPr>
-          <p:cNvPicPr>
-            <a:picLocks noChangeAspect="1" noChangeArrowheads="1"/>
-          </p:cNvPicPr>
-          <p:nvPr/>
-        </p:nvPicPr>
-        <p:blipFill>
-          <a:blip r:embed="rId5">
-            <a:extLst>
-              <a:ext uri="{28A0092B-C50C-407E-A947-70E740481C1C}">
-                <a14:useLocalDpi xmlns:a14="http://schemas.microsoft.com/office/drawing/2010/main" val="0"/>
-              </a:ext>
-            </a:extLst>
-          </a:blip>
-          <a:srcRect/>
-          <a:stretch>
-            <a:fillRect/>
-          </a:stretch>
-        </p:blipFill>
-        <p:spPr bwMode="auto">
-          <a:xfrm>
-            <a:off x="2779014" y="3429000"/>
-            <a:ext cx="1838325" cy="1009650"/>
-          </a:xfrm>
-          <a:prstGeom prst="rect">
-            <a:avLst/>
-          </a:prstGeom>
-          <a:noFill/>
-          <a:extLst>
-            <a:ext uri="{909E8E84-426E-40DD-AFC4-6F175D3DCCD1}">
-              <a14:hiddenFill xmlns:a14="http://schemas.microsoft.com/office/drawing/2010/main">
-                <a:solidFill>
-                  <a:srgbClr val="FFFFFF"/>
-                </a:solidFill>
-              </a14:hiddenFill>
-            </a:ext>
-          </a:extLst>
-        </p:spPr>
-      </p:pic>
-      <p:pic>
-        <p:nvPicPr>
-          <p:cNvPr id="2051" name="Picture 3">
-            <a:extLst>
-              <a:ext uri="{FF2B5EF4-FFF2-40B4-BE49-F238E27FC236}">
-                <a16:creationId xmlns:a16="http://schemas.microsoft.com/office/drawing/2014/main" id="{1F232C58-5233-F6A2-BFE9-F27223E09676}"/>
-              </a:ext>
-            </a:extLst>
-          </p:cNvPr>
-          <p:cNvPicPr>
-            <a:picLocks noChangeAspect="1" noChangeArrowheads="1"/>
-          </p:cNvPicPr>
-          <p:nvPr/>
-        </p:nvPicPr>
-        <p:blipFill>
-          <a:blip r:embed="rId6">
-            <a:extLst>
-              <a:ext uri="{28A0092B-C50C-407E-A947-70E740481C1C}">
-                <a14:useLocalDpi xmlns:a14="http://schemas.microsoft.com/office/drawing/2010/main" val="0"/>
-              </a:ext>
-            </a:extLst>
-          </a:blip>
-          <a:srcRect/>
-          <a:stretch>
-            <a:fillRect/>
-          </a:stretch>
-        </p:blipFill>
-        <p:spPr bwMode="auto">
-          <a:xfrm>
-            <a:off x="2779014" y="4802981"/>
-            <a:ext cx="1838325" cy="1000125"/>
-          </a:xfrm>
-          <a:prstGeom prst="rect">
-            <a:avLst/>
-          </a:prstGeom>
-          <a:noFill/>
-          <a:extLst>
-            <a:ext uri="{909E8E84-426E-40DD-AFC4-6F175D3DCCD1}">
-              <a14:hiddenFill xmlns:a14="http://schemas.microsoft.com/office/drawing/2010/main">
-                <a:solidFill>
-                  <a:srgbClr val="FFFFFF"/>
-                </a:solidFill>
-              </a14:hiddenFill>
-            </a:ext>
-          </a:extLst>
-        </p:spPr>
-      </p:pic>
-      <p:pic>
-        <p:nvPicPr>
-          <p:cNvPr id="2052" name="Picture 4">
-            <a:extLst>
-              <a:ext uri="{FF2B5EF4-FFF2-40B4-BE49-F238E27FC236}">
-                <a16:creationId xmlns:a16="http://schemas.microsoft.com/office/drawing/2014/main" id="{59B9D7A2-3D0D-F024-2543-08E20D207916}"/>
-              </a:ext>
-            </a:extLst>
-          </p:cNvPr>
-          <p:cNvPicPr>
-            <a:picLocks noChangeAspect="1" noChangeArrowheads="1"/>
-          </p:cNvPicPr>
-          <p:nvPr/>
-        </p:nvPicPr>
-        <p:blipFill>
-          <a:blip r:embed="rId7">
-            <a:extLst>
-              <a:ext uri="{28A0092B-C50C-407E-A947-70E740481C1C}">
-                <a14:useLocalDpi xmlns:a14="http://schemas.microsoft.com/office/drawing/2010/main" val="0"/>
-              </a:ext>
-            </a:extLst>
-          </a:blip>
-          <a:srcRect/>
-          <a:stretch>
-            <a:fillRect/>
-          </a:stretch>
-        </p:blipFill>
-        <p:spPr bwMode="auto">
-          <a:xfrm>
-            <a:off x="4824603" y="3429000"/>
-            <a:ext cx="2571750" cy="1009650"/>
-          </a:xfrm>
-          <a:prstGeom prst="rect">
-            <a:avLst/>
-          </a:prstGeom>
-          <a:noFill/>
-          <a:extLst>
-            <a:ext uri="{909E8E84-426E-40DD-AFC4-6F175D3DCCD1}">
-              <a14:hiddenFill xmlns:a14="http://schemas.microsoft.com/office/drawing/2010/main">
-                <a:solidFill>
-                  <a:srgbClr val="FFFFFF"/>
-                </a:solidFill>
-              </a14:hiddenFill>
-            </a:ext>
-          </a:extLst>
-        </p:spPr>
-      </p:pic>
-      <p:pic>
-        <p:nvPicPr>
-          <p:cNvPr id="2053" name="Picture 5">
-            <a:extLst>
-              <a:ext uri="{FF2B5EF4-FFF2-40B4-BE49-F238E27FC236}">
-                <a16:creationId xmlns:a16="http://schemas.microsoft.com/office/drawing/2014/main" id="{16A15E44-1E77-3F0A-9C37-9EDC384A6A5F}"/>
-              </a:ext>
-            </a:extLst>
-          </p:cNvPr>
-          <p:cNvPicPr>
-            <a:picLocks noChangeAspect="1" noChangeArrowheads="1"/>
-          </p:cNvPicPr>
-          <p:nvPr/>
-        </p:nvPicPr>
-        <p:blipFill>
-          <a:blip r:embed="rId8">
-            <a:extLst>
-              <a:ext uri="{28A0092B-C50C-407E-A947-70E740481C1C}">
-                <a14:useLocalDpi xmlns:a14="http://schemas.microsoft.com/office/drawing/2010/main" val="0"/>
-              </a:ext>
-            </a:extLst>
-          </a:blip>
-          <a:srcRect/>
-          <a:stretch>
-            <a:fillRect/>
-          </a:stretch>
-        </p:blipFill>
-        <p:spPr bwMode="auto">
-          <a:xfrm>
-            <a:off x="7603617" y="3429000"/>
-            <a:ext cx="2571750" cy="1009650"/>
-          </a:xfrm>
-          <a:prstGeom prst="rect">
-            <a:avLst/>
-          </a:prstGeom>
-          <a:noFill/>
-          <a:extLst>
-            <a:ext uri="{909E8E84-426E-40DD-AFC4-6F175D3DCCD1}">
-              <a14:hiddenFill xmlns:a14="http://schemas.microsoft.com/office/drawing/2010/main">
-                <a:solidFill>
-                  <a:srgbClr val="FFFFFF"/>
-                </a:solidFill>
-              </a14:hiddenFill>
-            </a:ext>
-          </a:extLst>
-        </p:spPr>
-      </p:pic>
-      <p:pic>
-        <p:nvPicPr>
-          <p:cNvPr id="2054" name="Picture 6">
-            <a:extLst>
-              <a:ext uri="{FF2B5EF4-FFF2-40B4-BE49-F238E27FC236}">
-                <a16:creationId xmlns:a16="http://schemas.microsoft.com/office/drawing/2014/main" id="{F6D63CF7-FBEC-429F-7AD8-6755E133E1C3}"/>
-              </a:ext>
-            </a:extLst>
-          </p:cNvPr>
-          <p:cNvPicPr>
-            <a:picLocks noChangeAspect="1" noChangeArrowheads="1"/>
-          </p:cNvPicPr>
-          <p:nvPr/>
-        </p:nvPicPr>
-        <p:blipFill>
-          <a:blip r:embed="rId9">
-            <a:extLst>
-              <a:ext uri="{28A0092B-C50C-407E-A947-70E740481C1C}">
-                <a14:useLocalDpi xmlns:a14="http://schemas.microsoft.com/office/drawing/2010/main" val="0"/>
-              </a:ext>
-            </a:extLst>
-          </a:blip>
-          <a:srcRect/>
-          <a:stretch>
-            <a:fillRect/>
-          </a:stretch>
-        </p:blipFill>
-        <p:spPr bwMode="auto">
-          <a:xfrm>
-            <a:off x="10382631" y="2055019"/>
-            <a:ext cx="1838325" cy="1009650"/>
-          </a:xfrm>
-          <a:prstGeom prst="rect">
-            <a:avLst/>
-          </a:prstGeom>
-          <a:noFill/>
-          <a:extLst>
-            <a:ext uri="{909E8E84-426E-40DD-AFC4-6F175D3DCCD1}">
-              <a14:hiddenFill xmlns:a14="http://schemas.microsoft.com/office/drawing/2010/main">
-                <a:solidFill>
-                  <a:srgbClr val="FFFFFF"/>
-                </a:solidFill>
-              </a14:hiddenFill>
-            </a:ext>
-          </a:extLst>
-        </p:spPr>
-      </p:pic>
-      <p:pic>
-        <p:nvPicPr>
-          <p:cNvPr id="2055" name="Picture 7">
-            <a:extLst>
-              <a:ext uri="{FF2B5EF4-FFF2-40B4-BE49-F238E27FC236}">
-                <a16:creationId xmlns:a16="http://schemas.microsoft.com/office/drawing/2014/main" id="{D5CA14E5-007F-B525-A4EE-476E96A0AC51}"/>
-              </a:ext>
-            </a:extLst>
-          </p:cNvPr>
-          <p:cNvPicPr>
-            <a:picLocks noChangeAspect="1" noChangeArrowheads="1"/>
-          </p:cNvPicPr>
-          <p:nvPr/>
-        </p:nvPicPr>
-        <p:blipFill>
-          <a:blip r:embed="rId10">
-            <a:extLst>
-              <a:ext uri="{28A0092B-C50C-407E-A947-70E740481C1C}">
-                <a14:useLocalDpi xmlns:a14="http://schemas.microsoft.com/office/drawing/2010/main" val="0"/>
-              </a:ext>
-            </a:extLst>
-          </a:blip>
-          <a:srcRect/>
-          <a:stretch>
-            <a:fillRect/>
-          </a:stretch>
-        </p:blipFill>
-        <p:spPr bwMode="auto">
-          <a:xfrm>
-            <a:off x="10382631" y="3429000"/>
-            <a:ext cx="1838325" cy="1009650"/>
-          </a:xfrm>
-          <a:prstGeom prst="rect">
-            <a:avLst/>
-          </a:prstGeom>
-          <a:noFill/>
-          <a:extLst>
-            <a:ext uri="{909E8E84-426E-40DD-AFC4-6F175D3DCCD1}">
-              <a14:hiddenFill xmlns:a14="http://schemas.microsoft.com/office/drawing/2010/main">
-                <a:solidFill>
-                  <a:srgbClr val="FFFFFF"/>
-                </a:solidFill>
-              </a14:hiddenFill>
-            </a:ext>
-          </a:extLst>
-        </p:spPr>
-      </p:pic>
-      <p:pic>
-        <p:nvPicPr>
-          <p:cNvPr id="2056" name="Picture 8">
-            <a:extLst>
-              <a:ext uri="{FF2B5EF4-FFF2-40B4-BE49-F238E27FC236}">
-                <a16:creationId xmlns:a16="http://schemas.microsoft.com/office/drawing/2014/main" id="{31EDC4D7-532C-798D-062D-1E72DE8B7562}"/>
-              </a:ext>
-            </a:extLst>
-          </p:cNvPr>
-          <p:cNvPicPr>
-            <a:picLocks noChangeAspect="1" noChangeArrowheads="1"/>
-          </p:cNvPicPr>
-          <p:nvPr/>
-        </p:nvPicPr>
-        <p:blipFill>
-          <a:blip r:embed="rId11">
-            <a:extLst>
-              <a:ext uri="{28A0092B-C50C-407E-A947-70E740481C1C}">
-                <a14:useLocalDpi xmlns:a14="http://schemas.microsoft.com/office/drawing/2010/main" val="0"/>
-              </a:ext>
-            </a:extLst>
-          </a:blip>
-          <a:srcRect/>
-          <a:stretch>
-            <a:fillRect/>
-          </a:stretch>
-        </p:blipFill>
-        <p:spPr bwMode="auto">
-          <a:xfrm>
-            <a:off x="10382631" y="4802980"/>
-            <a:ext cx="1838325" cy="1000125"/>
-          </a:xfrm>
-          <a:prstGeom prst="rect">
-            <a:avLst/>
-          </a:prstGeom>
-          <a:noFill/>
-          <a:extLst>
-            <a:ext uri="{909E8E84-426E-40DD-AFC4-6F175D3DCCD1}">
-              <a14:hiddenFill xmlns:a14="http://schemas.microsoft.com/office/drawing/2010/main">
-                <a:solidFill>
-                  <a:srgbClr val="FFFFFF"/>
-                </a:solidFill>
-              </a14:hiddenFill>
-            </a:ext>
-          </a:extLst>
-        </p:spPr>
-      </p:pic>
-      <p:cxnSp>
-        <p:nvCxnSpPr>
-          <p:cNvPr id="3" name="Ευθύγραμμο βέλος σύνδεσης 2">
-            <a:extLst>
-              <a:ext uri="{FF2B5EF4-FFF2-40B4-BE49-F238E27FC236}">
-                <a16:creationId xmlns:a16="http://schemas.microsoft.com/office/drawing/2014/main" id="{7021A8AF-1D8B-093E-C76C-910C481F9E4F}"/>
-              </a:ext>
-            </a:extLst>
-          </p:cNvPr>
-          <p:cNvCxnSpPr>
-            <a:stCxn id="1030" idx="3"/>
-            <a:endCxn id="2050" idx="1"/>
-          </p:cNvCxnSpPr>
-          <p:nvPr/>
-        </p:nvCxnSpPr>
-        <p:spPr>
-          <a:xfrm>
-            <a:off x="2571750" y="3933825"/>
-            <a:ext cx="207264" cy="0"/>
-          </a:xfrm>
-          <a:prstGeom prst="straightConnector1">
-            <a:avLst/>
-          </a:prstGeom>
-          <a:ln>
-            <a:tailEnd type="triangle"/>
-          </a:ln>
-        </p:spPr>
-        <p:style>
-          <a:lnRef idx="2">
-            <a:schemeClr val="dk1"/>
-          </a:lnRef>
-          <a:fillRef idx="0">
-            <a:schemeClr val="dk1"/>
-          </a:fillRef>
-          <a:effectRef idx="1">
-            <a:schemeClr val="dk1"/>
-          </a:effectRef>
-          <a:fontRef idx="minor">
-            <a:schemeClr val="tx1"/>
-          </a:fontRef>
-        </p:style>
-      </p:cxnSp>
-      <p:cxnSp>
-        <p:nvCxnSpPr>
-          <p:cNvPr id="6" name="Ευθύγραμμο βέλος σύνδεσης 5">
-            <a:extLst>
-              <a:ext uri="{FF2B5EF4-FFF2-40B4-BE49-F238E27FC236}">
-                <a16:creationId xmlns:a16="http://schemas.microsoft.com/office/drawing/2014/main" id="{CB93CD08-E73F-E540-183C-A245DA1D044B}"/>
-              </a:ext>
-            </a:extLst>
-          </p:cNvPr>
-          <p:cNvCxnSpPr>
-            <a:stCxn id="2050" idx="3"/>
-            <a:endCxn id="2052" idx="1"/>
-          </p:cNvCxnSpPr>
-          <p:nvPr/>
-        </p:nvCxnSpPr>
-        <p:spPr>
-          <a:xfrm>
-            <a:off x="4617339" y="3933825"/>
-            <a:ext cx="207264" cy="0"/>
-          </a:xfrm>
-          <a:prstGeom prst="straightConnector1">
-            <a:avLst/>
-          </a:prstGeom>
-          <a:ln>
-            <a:tailEnd type="triangle"/>
-          </a:ln>
-        </p:spPr>
-        <p:style>
-          <a:lnRef idx="2">
-            <a:schemeClr val="dk1"/>
-          </a:lnRef>
-          <a:fillRef idx="0">
-            <a:schemeClr val="dk1"/>
-          </a:fillRef>
-          <a:effectRef idx="1">
-            <a:schemeClr val="dk1"/>
-          </a:effectRef>
-          <a:fontRef idx="minor">
-            <a:schemeClr val="tx1"/>
-          </a:fontRef>
-        </p:style>
-      </p:cxnSp>
-      <p:cxnSp>
-        <p:nvCxnSpPr>
-          <p:cNvPr id="8" name="Γραμμή σύνδεσης: Γωνιώδης 7">
-            <a:extLst>
-              <a:ext uri="{FF2B5EF4-FFF2-40B4-BE49-F238E27FC236}">
-                <a16:creationId xmlns:a16="http://schemas.microsoft.com/office/drawing/2014/main" id="{66DD1AA3-8130-4AE6-7313-249FFAE6C6E4}"/>
-              </a:ext>
-            </a:extLst>
-          </p:cNvPr>
-          <p:cNvCxnSpPr>
-            <a:stCxn id="1030" idx="3"/>
-            <a:endCxn id="2049" idx="1"/>
-          </p:cNvCxnSpPr>
-          <p:nvPr/>
-        </p:nvCxnSpPr>
-        <p:spPr>
-          <a:xfrm flipV="1">
-            <a:off x="2571750" y="2559844"/>
-            <a:ext cx="207264" cy="1373981"/>
-          </a:xfrm>
-          <a:prstGeom prst="bentConnector3">
-            <a:avLst/>
-          </a:prstGeom>
-          <a:ln>
-            <a:tailEnd type="triangle"/>
-          </a:ln>
-        </p:spPr>
-        <p:style>
-          <a:lnRef idx="2">
-            <a:schemeClr val="dk1"/>
-          </a:lnRef>
-          <a:fillRef idx="0">
-            <a:schemeClr val="dk1"/>
-          </a:fillRef>
-          <a:effectRef idx="1">
-            <a:schemeClr val="dk1"/>
-          </a:effectRef>
-          <a:fontRef idx="minor">
-            <a:schemeClr val="tx1"/>
-          </a:fontRef>
-        </p:style>
-      </p:cxnSp>
-      <p:cxnSp>
-        <p:nvCxnSpPr>
-          <p:cNvPr id="10" name="Γραμμή σύνδεσης: Γωνιώδης 9">
-            <a:extLst>
-              <a:ext uri="{FF2B5EF4-FFF2-40B4-BE49-F238E27FC236}">
-                <a16:creationId xmlns:a16="http://schemas.microsoft.com/office/drawing/2014/main" id="{6FFBD32C-617E-3EE7-D461-75B67A809B3E}"/>
-              </a:ext>
-            </a:extLst>
-          </p:cNvPr>
-          <p:cNvCxnSpPr>
-            <a:stCxn id="1030" idx="3"/>
-            <a:endCxn id="2051" idx="1"/>
-          </p:cNvCxnSpPr>
-          <p:nvPr/>
-        </p:nvCxnSpPr>
-        <p:spPr>
-          <a:xfrm>
-            <a:off x="2571750" y="3933825"/>
-            <a:ext cx="207264" cy="1369219"/>
-          </a:xfrm>
-          <a:prstGeom prst="bentConnector3">
-            <a:avLst/>
-          </a:prstGeom>
-          <a:ln>
-            <a:tailEnd type="triangle"/>
-          </a:ln>
-        </p:spPr>
-        <p:style>
-          <a:lnRef idx="2">
-            <a:schemeClr val="dk1"/>
-          </a:lnRef>
-          <a:fillRef idx="0">
-            <a:schemeClr val="dk1"/>
-          </a:fillRef>
-          <a:effectRef idx="1">
-            <a:schemeClr val="dk1"/>
-          </a:effectRef>
-          <a:fontRef idx="minor">
-            <a:schemeClr val="tx1"/>
-          </a:fontRef>
-        </p:style>
-      </p:cxnSp>
-      <p:cxnSp>
-        <p:nvCxnSpPr>
-          <p:cNvPr id="12" name="Γραμμή σύνδεσης: Γωνιώδης 11">
-            <a:extLst>
-              <a:ext uri="{FF2B5EF4-FFF2-40B4-BE49-F238E27FC236}">
-                <a16:creationId xmlns:a16="http://schemas.microsoft.com/office/drawing/2014/main" id="{1033292C-7B73-87C8-0AB4-7A7219E885D4}"/>
-              </a:ext>
-            </a:extLst>
-          </p:cNvPr>
-          <p:cNvCxnSpPr>
-            <a:stCxn id="2049" idx="3"/>
-            <a:endCxn id="2052" idx="1"/>
-          </p:cNvCxnSpPr>
-          <p:nvPr/>
-        </p:nvCxnSpPr>
-        <p:spPr>
-          <a:xfrm>
-            <a:off x="4617339" y="2559844"/>
-            <a:ext cx="207264" cy="1373981"/>
-          </a:xfrm>
-          <a:prstGeom prst="bentConnector3">
-            <a:avLst/>
-          </a:prstGeom>
-          <a:ln>
-            <a:tailEnd type="triangle"/>
-          </a:ln>
-        </p:spPr>
-        <p:style>
-          <a:lnRef idx="2">
-            <a:schemeClr val="dk1"/>
-          </a:lnRef>
-          <a:fillRef idx="0">
-            <a:schemeClr val="dk1"/>
-          </a:fillRef>
-          <a:effectRef idx="1">
-            <a:schemeClr val="dk1"/>
-          </a:effectRef>
-          <a:fontRef idx="minor">
-            <a:schemeClr val="tx1"/>
-          </a:fontRef>
-        </p:style>
-      </p:cxnSp>
-      <p:cxnSp>
-        <p:nvCxnSpPr>
-          <p:cNvPr id="14" name="Γραμμή σύνδεσης: Γωνιώδης 13">
-            <a:extLst>
-              <a:ext uri="{FF2B5EF4-FFF2-40B4-BE49-F238E27FC236}">
-                <a16:creationId xmlns:a16="http://schemas.microsoft.com/office/drawing/2014/main" id="{0424CA0A-C8E2-6B55-E764-BC2EE23F8A89}"/>
-              </a:ext>
-            </a:extLst>
-          </p:cNvPr>
-          <p:cNvCxnSpPr>
-            <a:stCxn id="2051" idx="3"/>
-            <a:endCxn id="2052" idx="1"/>
-          </p:cNvCxnSpPr>
-          <p:nvPr/>
-        </p:nvCxnSpPr>
-        <p:spPr>
-          <a:xfrm flipV="1">
-            <a:off x="4617339" y="3933825"/>
-            <a:ext cx="207264" cy="1369219"/>
-          </a:xfrm>
-          <a:prstGeom prst="bentConnector3">
-            <a:avLst/>
-          </a:prstGeom>
-          <a:ln>
-            <a:tailEnd type="triangle"/>
-          </a:ln>
-        </p:spPr>
-        <p:style>
-          <a:lnRef idx="2">
-            <a:schemeClr val="dk1"/>
-          </a:lnRef>
-          <a:fillRef idx="0">
-            <a:schemeClr val="dk1"/>
-          </a:fillRef>
-          <a:effectRef idx="1">
-            <a:schemeClr val="dk1"/>
-          </a:effectRef>
-          <a:fontRef idx="minor">
-            <a:schemeClr val="tx1"/>
-          </a:fontRef>
-        </p:style>
-      </p:cxnSp>
-      <p:cxnSp>
-        <p:nvCxnSpPr>
-          <p:cNvPr id="16" name="Γραμμή σύνδεσης: Γωνιώδης 15">
-            <a:extLst>
-              <a:ext uri="{FF2B5EF4-FFF2-40B4-BE49-F238E27FC236}">
-                <a16:creationId xmlns:a16="http://schemas.microsoft.com/office/drawing/2014/main" id="{3CCA2A54-BD6D-7C04-A5E7-97A958EB08A2}"/>
-              </a:ext>
-            </a:extLst>
-          </p:cNvPr>
-          <p:cNvCxnSpPr>
-            <a:stCxn id="2053" idx="3"/>
-            <a:endCxn id="2054" idx="1"/>
-          </p:cNvCxnSpPr>
-          <p:nvPr/>
-        </p:nvCxnSpPr>
-        <p:spPr>
-          <a:xfrm flipV="1">
-            <a:off x="10175367" y="2559844"/>
-            <a:ext cx="207264" cy="1373981"/>
-          </a:xfrm>
-          <a:prstGeom prst="bentConnector3">
-            <a:avLst/>
-          </a:prstGeom>
-          <a:ln>
-            <a:tailEnd type="triangle"/>
-          </a:ln>
-        </p:spPr>
-        <p:style>
-          <a:lnRef idx="2">
-            <a:schemeClr val="dk1"/>
-          </a:lnRef>
-          <a:fillRef idx="0">
-            <a:schemeClr val="dk1"/>
-          </a:fillRef>
-          <a:effectRef idx="1">
-            <a:schemeClr val="dk1"/>
-          </a:effectRef>
-          <a:fontRef idx="minor">
-            <a:schemeClr val="tx1"/>
-          </a:fontRef>
-        </p:style>
-      </p:cxnSp>
-      <p:cxnSp>
-        <p:nvCxnSpPr>
-          <p:cNvPr id="18" name="Γραμμή σύνδεσης: Γωνιώδης 17">
-            <a:extLst>
-              <a:ext uri="{FF2B5EF4-FFF2-40B4-BE49-F238E27FC236}">
-                <a16:creationId xmlns:a16="http://schemas.microsoft.com/office/drawing/2014/main" id="{47D998F1-6460-3EC9-4AA1-4033F488038A}"/>
-              </a:ext>
-            </a:extLst>
-          </p:cNvPr>
-          <p:cNvCxnSpPr>
-            <a:stCxn id="2053" idx="3"/>
-            <a:endCxn id="2056" idx="1"/>
-          </p:cNvCxnSpPr>
-          <p:nvPr/>
-        </p:nvCxnSpPr>
-        <p:spPr>
-          <a:xfrm>
-            <a:off x="10175367" y="3933825"/>
-            <a:ext cx="207264" cy="1369218"/>
-          </a:xfrm>
-          <a:prstGeom prst="bentConnector3">
-            <a:avLst/>
-          </a:prstGeom>
-          <a:ln>
-            <a:tailEnd type="triangle"/>
-          </a:ln>
-        </p:spPr>
-        <p:style>
-          <a:lnRef idx="2">
-            <a:schemeClr val="dk1"/>
-          </a:lnRef>
-          <a:fillRef idx="0">
-            <a:schemeClr val="dk1"/>
-          </a:fillRef>
-          <a:effectRef idx="1">
-            <a:schemeClr val="dk1"/>
-          </a:effectRef>
-          <a:fontRef idx="minor">
-            <a:schemeClr val="tx1"/>
-          </a:fontRef>
-        </p:style>
-      </p:cxnSp>
-      <p:cxnSp>
-        <p:nvCxnSpPr>
-          <p:cNvPr id="20" name="Ευθύγραμμο βέλος σύνδεσης 19">
-            <a:extLst>
-              <a:ext uri="{FF2B5EF4-FFF2-40B4-BE49-F238E27FC236}">
-                <a16:creationId xmlns:a16="http://schemas.microsoft.com/office/drawing/2014/main" id="{C6AB5AD4-6E52-5143-641A-6FB8F6DFEE66}"/>
-              </a:ext>
-            </a:extLst>
-          </p:cNvPr>
-          <p:cNvCxnSpPr>
-            <a:stCxn id="2052" idx="3"/>
-            <a:endCxn id="2053" idx="1"/>
-          </p:cNvCxnSpPr>
-          <p:nvPr/>
-        </p:nvCxnSpPr>
-        <p:spPr>
-          <a:xfrm>
-            <a:off x="7396353" y="3933825"/>
-            <a:ext cx="207264" cy="0"/>
-          </a:xfrm>
-          <a:prstGeom prst="straightConnector1">
-            <a:avLst/>
-          </a:prstGeom>
-          <a:ln>
-            <a:tailEnd type="triangle"/>
-          </a:ln>
-        </p:spPr>
-        <p:style>
-          <a:lnRef idx="2">
-            <a:schemeClr val="dk1"/>
-          </a:lnRef>
-          <a:fillRef idx="0">
-            <a:schemeClr val="dk1"/>
-          </a:fillRef>
-          <a:effectRef idx="1">
-            <a:schemeClr val="dk1"/>
-          </a:effectRef>
-          <a:fontRef idx="minor">
-            <a:schemeClr val="tx1"/>
-          </a:fontRef>
-        </p:style>
-      </p:cxnSp>
-      <p:cxnSp>
-        <p:nvCxnSpPr>
-          <p:cNvPr id="22" name="Ευθύγραμμο βέλος σύνδεσης 21">
-            <a:extLst>
-              <a:ext uri="{FF2B5EF4-FFF2-40B4-BE49-F238E27FC236}">
-                <a16:creationId xmlns:a16="http://schemas.microsoft.com/office/drawing/2014/main" id="{3C241CA0-D38B-981F-E04C-378C67AB0FEB}"/>
-              </a:ext>
-            </a:extLst>
-          </p:cNvPr>
-          <p:cNvCxnSpPr>
-            <a:stCxn id="2053" idx="3"/>
-            <a:endCxn id="2055" idx="1"/>
-          </p:cNvCxnSpPr>
-          <p:nvPr/>
-        </p:nvCxnSpPr>
-        <p:spPr>
-          <a:xfrm>
-            <a:off x="10175367" y="3933825"/>
-            <a:ext cx="207264" cy="0"/>
-          </a:xfrm>
-          <a:prstGeom prst="straightConnector1">
-            <a:avLst/>
-          </a:prstGeom>
-          <a:ln>
-            <a:tailEnd type="triangle"/>
-          </a:ln>
-        </p:spPr>
-        <p:style>
-          <a:lnRef idx="2">
-            <a:schemeClr val="dk1"/>
-          </a:lnRef>
-          <a:fillRef idx="0">
-            <a:schemeClr val="dk1"/>
-          </a:fillRef>
-          <a:effectRef idx="1">
-            <a:schemeClr val="dk1"/>
-          </a:effectRef>
-          <a:fontRef idx="minor">
-            <a:schemeClr val="tx1"/>
-          </a:fontRef>
-        </p:style>
-      </p:cxnSp>
-      <p:cxnSp>
-        <p:nvCxnSpPr>
-          <p:cNvPr id="2069" name="Γραμμή σύνδεσης: Γωνιώδης 2068">
-            <a:extLst>
-              <a:ext uri="{FF2B5EF4-FFF2-40B4-BE49-F238E27FC236}">
-                <a16:creationId xmlns:a16="http://schemas.microsoft.com/office/drawing/2014/main" id="{7A93ADE5-A13C-81AB-2407-4FE48F837E21}"/>
-              </a:ext>
-            </a:extLst>
-          </p:cNvPr>
-          <p:cNvCxnSpPr>
-            <a:stCxn id="2056" idx="2"/>
-            <a:endCxn id="1030" idx="2"/>
-          </p:cNvCxnSpPr>
-          <p:nvPr/>
-        </p:nvCxnSpPr>
-        <p:spPr>
-          <a:xfrm rot="5400000" flipH="1">
-            <a:off x="5611607" y="112919"/>
-            <a:ext cx="1364455" cy="10015919"/>
-          </a:xfrm>
-          <a:prstGeom prst="bentConnector3">
-            <a:avLst>
-              <a:gd name="adj1" fmla="val -39584"/>
-            </a:avLst>
-          </a:prstGeom>
-          <a:ln>
-            <a:tailEnd type="triangle"/>
-          </a:ln>
-        </p:spPr>
-        <p:style>
-          <a:lnRef idx="2">
-            <a:schemeClr val="dk1"/>
-          </a:lnRef>
-          <a:fillRef idx="0">
-            <a:schemeClr val="dk1"/>
-          </a:fillRef>
-          <a:effectRef idx="1">
-            <a:schemeClr val="dk1"/>
-          </a:effectRef>
-          <a:fontRef idx="minor">
-            <a:schemeClr val="tx1"/>
-          </a:fontRef>
-        </p:style>
-      </p:cxnSp>
-      <p:pic>
-        <p:nvPicPr>
-          <p:cNvPr id="2071" name="Picture 10">
-            <a:extLst>
-              <a:ext uri="{FF2B5EF4-FFF2-40B4-BE49-F238E27FC236}">
-                <a16:creationId xmlns:a16="http://schemas.microsoft.com/office/drawing/2014/main" id="{C3B6BC5F-6E98-3A41-45EF-617A3992C556}"/>
-              </a:ext>
-            </a:extLst>
-          </p:cNvPr>
-          <p:cNvPicPr>
-            <a:picLocks noChangeAspect="1" noChangeArrowheads="1"/>
-          </p:cNvPicPr>
-          <p:nvPr/>
-        </p:nvPicPr>
-        <p:blipFill>
-          <a:blip r:embed="rId12">
-            <a:extLst>
-              <a:ext uri="{28A0092B-C50C-407E-A947-70E740481C1C}">
-                <a14:useLocalDpi xmlns:a14="http://schemas.microsoft.com/office/drawing/2010/main" val="0"/>
-              </a:ext>
-            </a:extLst>
-          </a:blip>
-          <a:srcRect/>
-          <a:stretch>
-            <a:fillRect/>
-          </a:stretch>
-        </p:blipFill>
-        <p:spPr bwMode="auto">
-          <a:xfrm>
-            <a:off x="5324665" y="6029011"/>
-            <a:ext cx="1571625" cy="619125"/>
-          </a:xfrm>
-          <a:prstGeom prst="rect">
-            <a:avLst/>
-          </a:prstGeom>
-          <a:noFill/>
-          <a:extLst>
-            <a:ext uri="{909E8E84-426E-40DD-AFC4-6F175D3DCCD1}">
-              <a14:hiddenFill xmlns:a14="http://schemas.microsoft.com/office/drawing/2010/main">
-                <a:solidFill>
-                  <a:srgbClr val="FFFFFF"/>
-                </a:solidFill>
-              </a14:hiddenFill>
-            </a:ext>
-          </a:extLst>
-        </p:spPr>
-      </p:pic>
-      <p:sp>
-        <p:nvSpPr>
-          <p:cNvPr id="2072" name="TextBox 2071">
-            <a:extLst>
-              <a:ext uri="{FF2B5EF4-FFF2-40B4-BE49-F238E27FC236}">
-                <a16:creationId xmlns:a16="http://schemas.microsoft.com/office/drawing/2014/main" id="{E0E14D87-5941-E685-0EF9-7CF82B8400F3}"/>
-              </a:ext>
-            </a:extLst>
-          </p:cNvPr>
-          <p:cNvSpPr txBox="1"/>
-          <p:nvPr/>
-        </p:nvSpPr>
-        <p:spPr>
-          <a:xfrm>
-            <a:off x="145142" y="2132749"/>
-            <a:ext cx="2852966" cy="923330"/>
-          </a:xfrm>
-          <a:prstGeom prst="rect">
-            <a:avLst/>
-          </a:prstGeom>
-          <a:noFill/>
-        </p:spPr>
-        <p:txBody>
-          <a:bodyPr wrap="square" rtlCol="0">
-            <a:spAutoFit/>
-          </a:bodyPr>
-          <a:lstStyle/>
-          <a:p>
-            <a:r>
-              <a:rPr lang="en-US" dirty="0"/>
-              <a:t>k = </a:t>
-            </a:r>
-            <a:r>
-              <a:rPr lang="el-GR" dirty="0"/>
-              <a:t>διατηρεί σειρά προτεραιότητας στην </a:t>
-            </a:r>
-            <a:r>
-              <a:rPr lang="en-US" dirty="0"/>
-              <a:t>Open List</a:t>
-            </a:r>
-            <a:endParaRPr lang="el-GR" dirty="0"/>
-          </a:p>
-        </p:txBody>
-      </p:sp>
-    </p:spTree>
-    <p:extLst>
-      <p:ext uri="{BB962C8B-B14F-4D97-AF65-F5344CB8AC3E}">
-        <p14:creationId xmlns:p14="http://schemas.microsoft.com/office/powerpoint/2010/main" val="866222187"/>
-      </p:ext>
-    </p:extLst>
-  </p:cSld>
-  <p:clrMapOvr>
-    <a:overrideClrMapping bg1="lt1" tx1="dk1" bg2="lt2" tx2="dk2" accent1="accent1" accent2="accent2" accent3="accent3" accent4="accent4" accent5="accent5" accent6="accent6" hlink="hlink" folHlink="folHlink"/>
-  </p:clrMapOvr>
-  <mc:AlternateContent xmlns:mc="http://schemas.openxmlformats.org/markup-compatibility/2006" xmlns:p159="http://schemas.microsoft.com/office/powerpoint/2015/09/main">
-    <mc:Choice Requires="p159">
-      <p:transition xmlns:p14="http://schemas.microsoft.com/office/powerpoint/2010/main" spd="slow" p14:dur="2000">
-        <p159:morph option="byObject"/>
-      </p:transition>
-    </mc:Choice>
-    <mc:Fallback xmlns="">
-      <p:transition spd="slow">
-        <p:fade/>
-      </p:transition>
-    </mc:Fallback>
-  </mc:AlternateContent>
-  <p:timing>
-    <p:tnLst>
-      <p:par>
-        <p:cTn id="1" dur="indefinite" restart="never" nodeType="tmRoot">
-          <p:childTnLst>
-            <p:seq concurrent="1" nextAc="seek">
-              <p:cTn id="2" dur="indefinite" nodeType="mainSeq">
-                <p:childTnLst>
-                  <p:par>
-                    <p:cTn id="3" fill="hold">
-                      <p:stCondLst>
-                        <p:cond delay="indefinite"/>
-                      </p:stCondLst>
-                      <p:childTnLst>
-                        <p:par>
-                          <p:cTn id="4" fill="hold">
-                            <p:stCondLst>
-                              <p:cond delay="0"/>
-                            </p:stCondLst>
-                            <p:childTnLst>
-                              <p:par>
-                                <p:cTn id="5" presetID="22" presetClass="entr" presetSubtype="4" fill="hold" nodeType="clickEffect">
-                                  <p:stCondLst>
-                                    <p:cond delay="0"/>
-                                  </p:stCondLst>
-                                  <p:childTnLst>
-                                    <p:set>
-                                      <p:cBhvr>
-                                        <p:cTn id="6" dur="1" fill="hold">
-                                          <p:stCondLst>
-                                            <p:cond delay="0"/>
-                                          </p:stCondLst>
-                                        </p:cTn>
-                                        <p:tgtEl>
-                                          <p:spTgt spid="8"/>
-                                        </p:tgtEl>
-                                        <p:attrNameLst>
-                                          <p:attrName>style.visibility</p:attrName>
-                                        </p:attrNameLst>
-                                      </p:cBhvr>
-                                      <p:to>
-                                        <p:strVal val="visible"/>
-                                      </p:to>
-                                    </p:set>
-                                    <p:animEffect transition="in" filter="wipe(down)">
-                                      <p:cBhvr>
-                                        <p:cTn id="7" dur="500"/>
-                                        <p:tgtEl>
-                                          <p:spTgt spid="8"/>
-                                        </p:tgtEl>
-                                      </p:cBhvr>
-                                    </p:animEffect>
-                                  </p:childTnLst>
-                                </p:cTn>
-                              </p:par>
-                            </p:childTnLst>
-                          </p:cTn>
-                        </p:par>
-                        <p:par>
-                          <p:cTn id="8" fill="hold">
-                            <p:stCondLst>
-                              <p:cond delay="500"/>
-                            </p:stCondLst>
-                            <p:childTnLst>
-                              <p:par>
-                                <p:cTn id="9" presetID="22" presetClass="entr" presetSubtype="8" fill="hold" nodeType="afterEffect">
-                                  <p:stCondLst>
-                                    <p:cond delay="0"/>
-                                  </p:stCondLst>
-                                  <p:childTnLst>
-                                    <p:set>
-                                      <p:cBhvr>
-                                        <p:cTn id="10" dur="1" fill="hold">
-                                          <p:stCondLst>
-                                            <p:cond delay="0"/>
-                                          </p:stCondLst>
-                                        </p:cTn>
-                                        <p:tgtEl>
-                                          <p:spTgt spid="2049"/>
-                                        </p:tgtEl>
-                                        <p:attrNameLst>
-                                          <p:attrName>style.visibility</p:attrName>
-                                        </p:attrNameLst>
-                                      </p:cBhvr>
-                                      <p:to>
-                                        <p:strVal val="visible"/>
-                                      </p:to>
-                                    </p:set>
-                                    <p:animEffect transition="in" filter="wipe(left)">
-                                      <p:cBhvr>
-                                        <p:cTn id="11" dur="500"/>
-                                        <p:tgtEl>
-                                          <p:spTgt spid="2049"/>
-                                        </p:tgtEl>
-                                      </p:cBhvr>
-                                    </p:animEffect>
-                                  </p:childTnLst>
-                                </p:cTn>
-                              </p:par>
-                            </p:childTnLst>
-                          </p:cTn>
-                        </p:par>
-                      </p:childTnLst>
-                    </p:cTn>
-                  </p:par>
-                  <p:par>
-                    <p:cTn id="12" fill="hold">
-                      <p:stCondLst>
-                        <p:cond delay="indefinite"/>
-                      </p:stCondLst>
-                      <p:childTnLst>
-                        <p:par>
-                          <p:cTn id="13" fill="hold">
-                            <p:stCondLst>
-                              <p:cond delay="0"/>
-                            </p:stCondLst>
-                            <p:childTnLst>
-                              <p:par>
-                                <p:cTn id="14" presetID="22" presetClass="entr" presetSubtype="8" fill="hold" nodeType="clickEffect">
-                                  <p:stCondLst>
-                                    <p:cond delay="0"/>
-                                  </p:stCondLst>
-                                  <p:childTnLst>
-                                    <p:set>
-                                      <p:cBhvr>
-                                        <p:cTn id="15" dur="1" fill="hold">
-                                          <p:stCondLst>
-                                            <p:cond delay="0"/>
-                                          </p:stCondLst>
-                                        </p:cTn>
-                                        <p:tgtEl>
-                                          <p:spTgt spid="3"/>
-                                        </p:tgtEl>
-                                        <p:attrNameLst>
-                                          <p:attrName>style.visibility</p:attrName>
-                                        </p:attrNameLst>
-                                      </p:cBhvr>
-                                      <p:to>
-                                        <p:strVal val="visible"/>
-                                      </p:to>
-                                    </p:set>
-                                    <p:animEffect transition="in" filter="wipe(left)">
-                                      <p:cBhvr>
-                                        <p:cTn id="16" dur="500"/>
-                                        <p:tgtEl>
-                                          <p:spTgt spid="3"/>
-                                        </p:tgtEl>
-                                      </p:cBhvr>
-                                    </p:animEffect>
-                                  </p:childTnLst>
-                                </p:cTn>
-                              </p:par>
-                            </p:childTnLst>
-                          </p:cTn>
-                        </p:par>
-                        <p:par>
-                          <p:cTn id="17" fill="hold">
-                            <p:stCondLst>
-                              <p:cond delay="500"/>
-                            </p:stCondLst>
-                            <p:childTnLst>
-                              <p:par>
-                                <p:cTn id="18" presetID="22" presetClass="entr" presetSubtype="8" fill="hold" nodeType="afterEffect">
-                                  <p:stCondLst>
-                                    <p:cond delay="0"/>
-                                  </p:stCondLst>
-                                  <p:childTnLst>
-                                    <p:set>
-                                      <p:cBhvr>
-                                        <p:cTn id="19" dur="1" fill="hold">
-                                          <p:stCondLst>
-                                            <p:cond delay="0"/>
-                                          </p:stCondLst>
-                                        </p:cTn>
-                                        <p:tgtEl>
-                                          <p:spTgt spid="2050"/>
-                                        </p:tgtEl>
-                                        <p:attrNameLst>
-                                          <p:attrName>style.visibility</p:attrName>
-                                        </p:attrNameLst>
-                                      </p:cBhvr>
-                                      <p:to>
-                                        <p:strVal val="visible"/>
-                                      </p:to>
-                                    </p:set>
-                                    <p:animEffect transition="in" filter="wipe(left)">
-                                      <p:cBhvr>
-                                        <p:cTn id="20" dur="500"/>
-                                        <p:tgtEl>
-                                          <p:spTgt spid="2050"/>
-                                        </p:tgtEl>
-                                      </p:cBhvr>
-                                    </p:animEffect>
-                                  </p:childTnLst>
-                                </p:cTn>
-                              </p:par>
-                              <p:par>
-                                <p:cTn id="21" presetID="2" presetClass="entr" presetSubtype="8" fill="hold" grpId="0" nodeType="withEffect">
-                                  <p:stCondLst>
-                                    <p:cond delay="0"/>
-                                  </p:stCondLst>
-                                  <p:childTnLst>
-                                    <p:set>
-                                      <p:cBhvr>
-                                        <p:cTn id="22" dur="1" fill="hold">
-                                          <p:stCondLst>
-                                            <p:cond delay="0"/>
-                                          </p:stCondLst>
-                                        </p:cTn>
-                                        <p:tgtEl>
-                                          <p:spTgt spid="2072"/>
-                                        </p:tgtEl>
-                                        <p:attrNameLst>
-                                          <p:attrName>style.visibility</p:attrName>
-                                        </p:attrNameLst>
-                                      </p:cBhvr>
-                                      <p:to>
-                                        <p:strVal val="visible"/>
-                                      </p:to>
-                                    </p:set>
-                                    <p:anim calcmode="lin" valueType="num">
-                                      <p:cBhvr additive="base">
-                                        <p:cTn id="23" dur="500" fill="hold"/>
-                                        <p:tgtEl>
-                                          <p:spTgt spid="2072"/>
-                                        </p:tgtEl>
-                                        <p:attrNameLst>
-                                          <p:attrName>ppt_x</p:attrName>
-                                        </p:attrNameLst>
-                                      </p:cBhvr>
-                                      <p:tavLst>
-                                        <p:tav tm="0">
-                                          <p:val>
-                                            <p:strVal val="0-#ppt_w/2"/>
-                                          </p:val>
-                                        </p:tav>
-                                        <p:tav tm="100000">
-                                          <p:val>
-                                            <p:strVal val="#ppt_x"/>
-                                          </p:val>
-                                        </p:tav>
-                                      </p:tavLst>
-                                    </p:anim>
-                                    <p:anim calcmode="lin" valueType="num">
-                                      <p:cBhvr additive="base">
-                                        <p:cTn id="24" dur="500" fill="hold"/>
-                                        <p:tgtEl>
-                                          <p:spTgt spid="2072"/>
-                                        </p:tgtEl>
-                                        <p:attrNameLst>
-                                          <p:attrName>ppt_y</p:attrName>
-                                        </p:attrNameLst>
-                                      </p:cBhvr>
-                                      <p:tavLst>
-                                        <p:tav tm="0">
-                                          <p:val>
-                                            <p:strVal val="#ppt_y"/>
-                                          </p:val>
-                                        </p:tav>
-                                        <p:tav tm="100000">
-                                          <p:val>
-                                            <p:strVal val="#ppt_y"/>
-                                          </p:val>
-                                        </p:tav>
-                                      </p:tavLst>
-                                    </p:anim>
-                                  </p:childTnLst>
-                                </p:cTn>
-                              </p:par>
-                            </p:childTnLst>
-                          </p:cTn>
-                        </p:par>
-                      </p:childTnLst>
-                    </p:cTn>
-                  </p:par>
-                  <p:par>
-                    <p:cTn id="25" fill="hold">
-                      <p:stCondLst>
-                        <p:cond delay="indefinite"/>
-                      </p:stCondLst>
-                      <p:childTnLst>
-                        <p:par>
-                          <p:cTn id="26" fill="hold">
-                            <p:stCondLst>
-                              <p:cond delay="0"/>
-                            </p:stCondLst>
-                            <p:childTnLst>
-                              <p:par>
-                                <p:cTn id="27" presetID="22" presetClass="entr" presetSubtype="1" fill="hold" nodeType="clickEffect">
-                                  <p:stCondLst>
-                                    <p:cond delay="0"/>
-                                  </p:stCondLst>
-                                  <p:childTnLst>
-                                    <p:set>
-                                      <p:cBhvr>
-                                        <p:cTn id="28" dur="1" fill="hold">
-                                          <p:stCondLst>
-                                            <p:cond delay="0"/>
-                                          </p:stCondLst>
-                                        </p:cTn>
-                                        <p:tgtEl>
-                                          <p:spTgt spid="10"/>
-                                        </p:tgtEl>
-                                        <p:attrNameLst>
-                                          <p:attrName>style.visibility</p:attrName>
-                                        </p:attrNameLst>
-                                      </p:cBhvr>
-                                      <p:to>
-                                        <p:strVal val="visible"/>
-                                      </p:to>
-                                    </p:set>
-                                    <p:animEffect transition="in" filter="wipe(up)">
-                                      <p:cBhvr>
-                                        <p:cTn id="29" dur="500"/>
-                                        <p:tgtEl>
-                                          <p:spTgt spid="10"/>
-                                        </p:tgtEl>
-                                      </p:cBhvr>
-                                    </p:animEffect>
-                                  </p:childTnLst>
-                                </p:cTn>
-                              </p:par>
-                            </p:childTnLst>
-                          </p:cTn>
-                        </p:par>
-                        <p:par>
-                          <p:cTn id="30" fill="hold">
-                            <p:stCondLst>
-                              <p:cond delay="500"/>
-                            </p:stCondLst>
-                            <p:childTnLst>
-                              <p:par>
-                                <p:cTn id="31" presetID="22" presetClass="entr" presetSubtype="8" fill="hold" nodeType="afterEffect">
-                                  <p:stCondLst>
-                                    <p:cond delay="0"/>
-                                  </p:stCondLst>
-                                  <p:childTnLst>
-                                    <p:set>
-                                      <p:cBhvr>
-                                        <p:cTn id="32" dur="1" fill="hold">
-                                          <p:stCondLst>
-                                            <p:cond delay="0"/>
-                                          </p:stCondLst>
-                                        </p:cTn>
-                                        <p:tgtEl>
-                                          <p:spTgt spid="2051"/>
-                                        </p:tgtEl>
-                                        <p:attrNameLst>
-                                          <p:attrName>style.visibility</p:attrName>
-                                        </p:attrNameLst>
-                                      </p:cBhvr>
-                                      <p:to>
-                                        <p:strVal val="visible"/>
-                                      </p:to>
-                                    </p:set>
-                                    <p:animEffect transition="in" filter="wipe(left)">
-                                      <p:cBhvr>
-                                        <p:cTn id="33" dur="500"/>
-                                        <p:tgtEl>
-                                          <p:spTgt spid="2051"/>
-                                        </p:tgtEl>
-                                      </p:cBhvr>
-                                    </p:animEffect>
-                                  </p:childTnLst>
-                                </p:cTn>
-                              </p:par>
-                            </p:childTnLst>
-                          </p:cTn>
-                        </p:par>
-                      </p:childTnLst>
-                    </p:cTn>
-                  </p:par>
-                  <p:par>
-                    <p:cTn id="34" fill="hold">
-                      <p:stCondLst>
-                        <p:cond delay="indefinite"/>
-                      </p:stCondLst>
-                      <p:childTnLst>
-                        <p:par>
-                          <p:cTn id="35" fill="hold">
-                            <p:stCondLst>
-                              <p:cond delay="0"/>
-                            </p:stCondLst>
-                            <p:childTnLst>
-                              <p:par>
-                                <p:cTn id="36" presetID="22" presetClass="entr" presetSubtype="8" fill="hold" nodeType="clickEffect">
-                                  <p:stCondLst>
-                                    <p:cond delay="0"/>
-                                  </p:stCondLst>
-                                  <p:childTnLst>
-                                    <p:set>
-                                      <p:cBhvr>
-                                        <p:cTn id="37" dur="1" fill="hold">
-                                          <p:stCondLst>
-                                            <p:cond delay="0"/>
-                                          </p:stCondLst>
-                                        </p:cTn>
-                                        <p:tgtEl>
-                                          <p:spTgt spid="6"/>
-                                        </p:tgtEl>
-                                        <p:attrNameLst>
-                                          <p:attrName>style.visibility</p:attrName>
-                                        </p:attrNameLst>
-                                      </p:cBhvr>
-                                      <p:to>
-                                        <p:strVal val="visible"/>
-                                      </p:to>
-                                    </p:set>
-                                    <p:animEffect transition="in" filter="wipe(left)">
-                                      <p:cBhvr>
-                                        <p:cTn id="38" dur="500"/>
-                                        <p:tgtEl>
-                                          <p:spTgt spid="6"/>
-                                        </p:tgtEl>
-                                      </p:cBhvr>
-                                    </p:animEffect>
-                                  </p:childTnLst>
-                                </p:cTn>
-                              </p:par>
-                              <p:par>
-                                <p:cTn id="39" presetID="22" presetClass="entr" presetSubtype="8" fill="hold" nodeType="withEffect">
-                                  <p:stCondLst>
-                                    <p:cond delay="0"/>
-                                  </p:stCondLst>
-                                  <p:childTnLst>
-                                    <p:set>
-                                      <p:cBhvr>
-                                        <p:cTn id="40" dur="1" fill="hold">
-                                          <p:stCondLst>
-                                            <p:cond delay="0"/>
-                                          </p:stCondLst>
-                                        </p:cTn>
-                                        <p:tgtEl>
-                                          <p:spTgt spid="12"/>
-                                        </p:tgtEl>
-                                        <p:attrNameLst>
-                                          <p:attrName>style.visibility</p:attrName>
-                                        </p:attrNameLst>
-                                      </p:cBhvr>
-                                      <p:to>
-                                        <p:strVal val="visible"/>
-                                      </p:to>
-                                    </p:set>
-                                    <p:animEffect transition="in" filter="wipe(left)">
-                                      <p:cBhvr>
-                                        <p:cTn id="41" dur="500"/>
-                                        <p:tgtEl>
-                                          <p:spTgt spid="12"/>
-                                        </p:tgtEl>
-                                      </p:cBhvr>
-                                    </p:animEffect>
-                                  </p:childTnLst>
-                                </p:cTn>
-                              </p:par>
-                              <p:par>
-                                <p:cTn id="42" presetID="22" presetClass="entr" presetSubtype="8" fill="hold" nodeType="withEffect">
-                                  <p:stCondLst>
-                                    <p:cond delay="0"/>
-                                  </p:stCondLst>
-                                  <p:childTnLst>
-                                    <p:set>
-                                      <p:cBhvr>
-                                        <p:cTn id="43" dur="1" fill="hold">
-                                          <p:stCondLst>
-                                            <p:cond delay="0"/>
-                                          </p:stCondLst>
-                                        </p:cTn>
-                                        <p:tgtEl>
-                                          <p:spTgt spid="14"/>
-                                        </p:tgtEl>
-                                        <p:attrNameLst>
-                                          <p:attrName>style.visibility</p:attrName>
-                                        </p:attrNameLst>
-                                      </p:cBhvr>
-                                      <p:to>
-                                        <p:strVal val="visible"/>
-                                      </p:to>
-                                    </p:set>
-                                    <p:animEffect transition="in" filter="wipe(left)">
-                                      <p:cBhvr>
-                                        <p:cTn id="44" dur="500"/>
-                                        <p:tgtEl>
-                                          <p:spTgt spid="14"/>
-                                        </p:tgtEl>
-                                      </p:cBhvr>
-                                    </p:animEffect>
-                                  </p:childTnLst>
-                                </p:cTn>
-                              </p:par>
-                            </p:childTnLst>
-                          </p:cTn>
-                        </p:par>
-                        <p:par>
-                          <p:cTn id="45" fill="hold">
-                            <p:stCondLst>
-                              <p:cond delay="500"/>
-                            </p:stCondLst>
-                            <p:childTnLst>
-                              <p:par>
-                                <p:cTn id="46" presetID="22" presetClass="entr" presetSubtype="8" fill="hold" nodeType="afterEffect">
-                                  <p:stCondLst>
-                                    <p:cond delay="0"/>
-                                  </p:stCondLst>
-                                  <p:childTnLst>
-                                    <p:set>
-                                      <p:cBhvr>
-                                        <p:cTn id="47" dur="1" fill="hold">
-                                          <p:stCondLst>
-                                            <p:cond delay="0"/>
-                                          </p:stCondLst>
-                                        </p:cTn>
-                                        <p:tgtEl>
-                                          <p:spTgt spid="2052"/>
-                                        </p:tgtEl>
-                                        <p:attrNameLst>
-                                          <p:attrName>style.visibility</p:attrName>
-                                        </p:attrNameLst>
-                                      </p:cBhvr>
-                                      <p:to>
-                                        <p:strVal val="visible"/>
-                                      </p:to>
-                                    </p:set>
-                                    <p:animEffect transition="in" filter="wipe(left)">
-                                      <p:cBhvr>
-                                        <p:cTn id="48" dur="500"/>
-                                        <p:tgtEl>
-                                          <p:spTgt spid="2052"/>
-                                        </p:tgtEl>
-                                      </p:cBhvr>
-                                    </p:animEffect>
-                                  </p:childTnLst>
-                                </p:cTn>
-                              </p:par>
-                            </p:childTnLst>
-                          </p:cTn>
-                        </p:par>
-                      </p:childTnLst>
-                    </p:cTn>
-                  </p:par>
-                  <p:par>
-                    <p:cTn id="49" fill="hold">
-                      <p:stCondLst>
-                        <p:cond delay="indefinite"/>
-                      </p:stCondLst>
-                      <p:childTnLst>
-                        <p:par>
-                          <p:cTn id="50" fill="hold">
-                            <p:stCondLst>
-                              <p:cond delay="0"/>
-                            </p:stCondLst>
-                            <p:childTnLst>
-                              <p:par>
-                                <p:cTn id="51" presetID="22" presetClass="entr" presetSubtype="8" fill="hold" nodeType="clickEffect">
-                                  <p:stCondLst>
-                                    <p:cond delay="0"/>
-                                  </p:stCondLst>
-                                  <p:childTnLst>
-                                    <p:set>
-                                      <p:cBhvr>
-                                        <p:cTn id="52" dur="1" fill="hold">
-                                          <p:stCondLst>
-                                            <p:cond delay="0"/>
-                                          </p:stCondLst>
-                                        </p:cTn>
-                                        <p:tgtEl>
-                                          <p:spTgt spid="20"/>
-                                        </p:tgtEl>
-                                        <p:attrNameLst>
-                                          <p:attrName>style.visibility</p:attrName>
-                                        </p:attrNameLst>
-                                      </p:cBhvr>
-                                      <p:to>
-                                        <p:strVal val="visible"/>
-                                      </p:to>
-                                    </p:set>
-                                    <p:animEffect transition="in" filter="wipe(left)">
-                                      <p:cBhvr>
-                                        <p:cTn id="53" dur="500"/>
-                                        <p:tgtEl>
-                                          <p:spTgt spid="20"/>
-                                        </p:tgtEl>
-                                      </p:cBhvr>
-                                    </p:animEffect>
-                                  </p:childTnLst>
-                                </p:cTn>
-                              </p:par>
-                            </p:childTnLst>
-                          </p:cTn>
-                        </p:par>
-                        <p:par>
-                          <p:cTn id="54" fill="hold">
-                            <p:stCondLst>
-                              <p:cond delay="500"/>
-                            </p:stCondLst>
-                            <p:childTnLst>
-                              <p:par>
-                                <p:cTn id="55" presetID="22" presetClass="entr" presetSubtype="8" fill="hold" nodeType="afterEffect">
-                                  <p:stCondLst>
-                                    <p:cond delay="0"/>
-                                  </p:stCondLst>
-                                  <p:childTnLst>
-                                    <p:set>
-                                      <p:cBhvr>
-                                        <p:cTn id="56" dur="1" fill="hold">
-                                          <p:stCondLst>
-                                            <p:cond delay="0"/>
-                                          </p:stCondLst>
-                                        </p:cTn>
-                                        <p:tgtEl>
-                                          <p:spTgt spid="2053"/>
-                                        </p:tgtEl>
-                                        <p:attrNameLst>
-                                          <p:attrName>style.visibility</p:attrName>
-                                        </p:attrNameLst>
-                                      </p:cBhvr>
-                                      <p:to>
-                                        <p:strVal val="visible"/>
-                                      </p:to>
-                                    </p:set>
-                                    <p:animEffect transition="in" filter="wipe(left)">
-                                      <p:cBhvr>
-                                        <p:cTn id="57" dur="500"/>
-                                        <p:tgtEl>
-                                          <p:spTgt spid="2053"/>
-                                        </p:tgtEl>
-                                      </p:cBhvr>
-                                    </p:animEffect>
-                                  </p:childTnLst>
-                                </p:cTn>
-                              </p:par>
-                            </p:childTnLst>
-                          </p:cTn>
-                        </p:par>
-                      </p:childTnLst>
-                    </p:cTn>
-                  </p:par>
-                  <p:par>
-                    <p:cTn id="58" fill="hold">
-                      <p:stCondLst>
-                        <p:cond delay="indefinite"/>
-                      </p:stCondLst>
-                      <p:childTnLst>
-                        <p:par>
-                          <p:cTn id="59" fill="hold">
-                            <p:stCondLst>
-                              <p:cond delay="0"/>
-                            </p:stCondLst>
-                            <p:childTnLst>
-                              <p:par>
-                                <p:cTn id="60" presetID="22" presetClass="entr" presetSubtype="4" fill="hold" nodeType="clickEffect">
-                                  <p:stCondLst>
-                                    <p:cond delay="0"/>
-                                  </p:stCondLst>
-                                  <p:childTnLst>
-                                    <p:set>
-                                      <p:cBhvr>
-                                        <p:cTn id="61" dur="1" fill="hold">
-                                          <p:stCondLst>
-                                            <p:cond delay="0"/>
-                                          </p:stCondLst>
-                                        </p:cTn>
-                                        <p:tgtEl>
-                                          <p:spTgt spid="16"/>
-                                        </p:tgtEl>
-                                        <p:attrNameLst>
-                                          <p:attrName>style.visibility</p:attrName>
-                                        </p:attrNameLst>
-                                      </p:cBhvr>
-                                      <p:to>
-                                        <p:strVal val="visible"/>
-                                      </p:to>
-                                    </p:set>
-                                    <p:animEffect transition="in" filter="wipe(down)">
-                                      <p:cBhvr>
-                                        <p:cTn id="62" dur="500"/>
-                                        <p:tgtEl>
-                                          <p:spTgt spid="16"/>
-                                        </p:tgtEl>
-                                      </p:cBhvr>
-                                    </p:animEffect>
-                                  </p:childTnLst>
-                                </p:cTn>
-                              </p:par>
-                            </p:childTnLst>
-                          </p:cTn>
-                        </p:par>
-                        <p:par>
-                          <p:cTn id="63" fill="hold">
-                            <p:stCondLst>
-                              <p:cond delay="500"/>
-                            </p:stCondLst>
-                            <p:childTnLst>
-                              <p:par>
-                                <p:cTn id="64" presetID="22" presetClass="entr" presetSubtype="8" fill="hold" nodeType="afterEffect">
-                                  <p:stCondLst>
-                                    <p:cond delay="0"/>
-                                  </p:stCondLst>
-                                  <p:childTnLst>
-                                    <p:set>
-                                      <p:cBhvr>
-                                        <p:cTn id="65" dur="1" fill="hold">
-                                          <p:stCondLst>
-                                            <p:cond delay="0"/>
-                                          </p:stCondLst>
-                                        </p:cTn>
-                                        <p:tgtEl>
-                                          <p:spTgt spid="2054"/>
-                                        </p:tgtEl>
-                                        <p:attrNameLst>
-                                          <p:attrName>style.visibility</p:attrName>
-                                        </p:attrNameLst>
-                                      </p:cBhvr>
-                                      <p:to>
-                                        <p:strVal val="visible"/>
-                                      </p:to>
-                                    </p:set>
-                                    <p:animEffect transition="in" filter="wipe(left)">
-                                      <p:cBhvr>
-                                        <p:cTn id="66" dur="500"/>
-                                        <p:tgtEl>
-                                          <p:spTgt spid="2054"/>
-                                        </p:tgtEl>
-                                      </p:cBhvr>
-                                    </p:animEffect>
-                                  </p:childTnLst>
-                                </p:cTn>
-                              </p:par>
-                            </p:childTnLst>
-                          </p:cTn>
-                        </p:par>
-                      </p:childTnLst>
-                    </p:cTn>
-                  </p:par>
-                  <p:par>
-                    <p:cTn id="67" fill="hold">
-                      <p:stCondLst>
-                        <p:cond delay="indefinite"/>
-                      </p:stCondLst>
-                      <p:childTnLst>
-                        <p:par>
-                          <p:cTn id="68" fill="hold">
-                            <p:stCondLst>
-                              <p:cond delay="0"/>
-                            </p:stCondLst>
-                            <p:childTnLst>
-                              <p:par>
-                                <p:cTn id="69" presetID="22" presetClass="entr" presetSubtype="8" fill="hold" nodeType="clickEffect">
-                                  <p:stCondLst>
-                                    <p:cond delay="0"/>
-                                  </p:stCondLst>
-                                  <p:childTnLst>
-                                    <p:set>
-                                      <p:cBhvr>
-                                        <p:cTn id="70" dur="1" fill="hold">
-                                          <p:stCondLst>
-                                            <p:cond delay="0"/>
-                                          </p:stCondLst>
-                                        </p:cTn>
-                                        <p:tgtEl>
-                                          <p:spTgt spid="22"/>
-                                        </p:tgtEl>
-                                        <p:attrNameLst>
-                                          <p:attrName>style.visibility</p:attrName>
-                                        </p:attrNameLst>
-                                      </p:cBhvr>
-                                      <p:to>
-                                        <p:strVal val="visible"/>
-                                      </p:to>
-                                    </p:set>
-                                    <p:animEffect transition="in" filter="wipe(left)">
-                                      <p:cBhvr>
-                                        <p:cTn id="71" dur="500"/>
-                                        <p:tgtEl>
-                                          <p:spTgt spid="22"/>
-                                        </p:tgtEl>
-                                      </p:cBhvr>
-                                    </p:animEffect>
-                                  </p:childTnLst>
-                                </p:cTn>
-                              </p:par>
-                            </p:childTnLst>
-                          </p:cTn>
-                        </p:par>
-                        <p:par>
-                          <p:cTn id="72" fill="hold">
-                            <p:stCondLst>
-                              <p:cond delay="500"/>
-                            </p:stCondLst>
-                            <p:childTnLst>
-                              <p:par>
-                                <p:cTn id="73" presetID="22" presetClass="entr" presetSubtype="8" fill="hold" nodeType="afterEffect">
-                                  <p:stCondLst>
-                                    <p:cond delay="0"/>
-                                  </p:stCondLst>
-                                  <p:childTnLst>
-                                    <p:set>
-                                      <p:cBhvr>
-                                        <p:cTn id="74" dur="1" fill="hold">
-                                          <p:stCondLst>
-                                            <p:cond delay="0"/>
-                                          </p:stCondLst>
-                                        </p:cTn>
-                                        <p:tgtEl>
-                                          <p:spTgt spid="2055"/>
-                                        </p:tgtEl>
-                                        <p:attrNameLst>
-                                          <p:attrName>style.visibility</p:attrName>
-                                        </p:attrNameLst>
-                                      </p:cBhvr>
-                                      <p:to>
-                                        <p:strVal val="visible"/>
-                                      </p:to>
-                                    </p:set>
-                                    <p:animEffect transition="in" filter="wipe(left)">
-                                      <p:cBhvr>
-                                        <p:cTn id="75" dur="500"/>
-                                        <p:tgtEl>
-                                          <p:spTgt spid="2055"/>
-                                        </p:tgtEl>
-                                      </p:cBhvr>
-                                    </p:animEffect>
-                                  </p:childTnLst>
-                                </p:cTn>
-                              </p:par>
-                            </p:childTnLst>
-                          </p:cTn>
-                        </p:par>
-                      </p:childTnLst>
-                    </p:cTn>
-                  </p:par>
-                  <p:par>
-                    <p:cTn id="76" fill="hold">
-                      <p:stCondLst>
-                        <p:cond delay="indefinite"/>
-                      </p:stCondLst>
-                      <p:childTnLst>
-                        <p:par>
-                          <p:cTn id="77" fill="hold">
-                            <p:stCondLst>
-                              <p:cond delay="0"/>
-                            </p:stCondLst>
-                            <p:childTnLst>
-                              <p:par>
-                                <p:cTn id="78" presetID="22" presetClass="entr" presetSubtype="1" fill="hold" nodeType="clickEffect">
-                                  <p:stCondLst>
-                                    <p:cond delay="0"/>
-                                  </p:stCondLst>
-                                  <p:childTnLst>
-                                    <p:set>
-                                      <p:cBhvr>
-                                        <p:cTn id="79" dur="1" fill="hold">
-                                          <p:stCondLst>
-                                            <p:cond delay="0"/>
-                                          </p:stCondLst>
-                                        </p:cTn>
-                                        <p:tgtEl>
-                                          <p:spTgt spid="18"/>
-                                        </p:tgtEl>
-                                        <p:attrNameLst>
-                                          <p:attrName>style.visibility</p:attrName>
-                                        </p:attrNameLst>
-                                      </p:cBhvr>
-                                      <p:to>
-                                        <p:strVal val="visible"/>
-                                      </p:to>
-                                    </p:set>
-                                    <p:animEffect transition="in" filter="wipe(up)">
-                                      <p:cBhvr>
-                                        <p:cTn id="80" dur="500"/>
-                                        <p:tgtEl>
-                                          <p:spTgt spid="18"/>
-                                        </p:tgtEl>
-                                      </p:cBhvr>
-                                    </p:animEffect>
-                                  </p:childTnLst>
-                                </p:cTn>
-                              </p:par>
-                            </p:childTnLst>
-                          </p:cTn>
-                        </p:par>
-                        <p:par>
-                          <p:cTn id="81" fill="hold">
-                            <p:stCondLst>
-                              <p:cond delay="500"/>
-                            </p:stCondLst>
-                            <p:childTnLst>
-                              <p:par>
-                                <p:cTn id="82" presetID="22" presetClass="entr" presetSubtype="8" fill="hold" nodeType="afterEffect">
-                                  <p:stCondLst>
-                                    <p:cond delay="0"/>
-                                  </p:stCondLst>
-                                  <p:childTnLst>
-                                    <p:set>
-                                      <p:cBhvr>
-                                        <p:cTn id="83" dur="1" fill="hold">
-                                          <p:stCondLst>
-                                            <p:cond delay="0"/>
-                                          </p:stCondLst>
-                                        </p:cTn>
-                                        <p:tgtEl>
-                                          <p:spTgt spid="2056"/>
-                                        </p:tgtEl>
-                                        <p:attrNameLst>
-                                          <p:attrName>style.visibility</p:attrName>
-                                        </p:attrNameLst>
-                                      </p:cBhvr>
-                                      <p:to>
-                                        <p:strVal val="visible"/>
-                                      </p:to>
-                                    </p:set>
-                                    <p:animEffect transition="in" filter="wipe(left)">
-                                      <p:cBhvr>
-                                        <p:cTn id="84" dur="500"/>
-                                        <p:tgtEl>
-                                          <p:spTgt spid="2056"/>
-                                        </p:tgtEl>
-                                      </p:cBhvr>
-                                    </p:animEffect>
-                                  </p:childTnLst>
-                                </p:cTn>
-                              </p:par>
-                            </p:childTnLst>
-                          </p:cTn>
-                        </p:par>
-                      </p:childTnLst>
-                    </p:cTn>
-                  </p:par>
-                  <p:par>
-                    <p:cTn id="85" fill="hold">
-                      <p:stCondLst>
-                        <p:cond delay="indefinite"/>
-                      </p:stCondLst>
-                      <p:childTnLst>
-                        <p:par>
-                          <p:cTn id="86" fill="hold">
-                            <p:stCondLst>
-                              <p:cond delay="0"/>
-                            </p:stCondLst>
-                            <p:childTnLst>
-                              <p:par>
-                                <p:cTn id="87" presetID="22" presetClass="entr" presetSubtype="2" fill="hold" nodeType="clickEffect">
-                                  <p:stCondLst>
-                                    <p:cond delay="0"/>
-                                  </p:stCondLst>
-                                  <p:childTnLst>
-                                    <p:set>
-                                      <p:cBhvr>
-                                        <p:cTn id="88" dur="1" fill="hold">
-                                          <p:stCondLst>
-                                            <p:cond delay="0"/>
-                                          </p:stCondLst>
-                                        </p:cTn>
-                                        <p:tgtEl>
-                                          <p:spTgt spid="2063"/>
-                                        </p:tgtEl>
-                                        <p:attrNameLst>
-                                          <p:attrName>style.visibility</p:attrName>
-                                        </p:attrNameLst>
-                                      </p:cBhvr>
-                                      <p:to>
-                                        <p:strVal val="visible"/>
-                                      </p:to>
-                                    </p:set>
-                                    <p:animEffect transition="in" filter="wipe(right)">
-                                      <p:cBhvr>
-                                        <p:cTn id="89" dur="500"/>
-                                        <p:tgtEl>
-                                          <p:spTgt spid="2063"/>
-                                        </p:tgtEl>
-                                      </p:cBhvr>
-                                    </p:animEffect>
-                                  </p:childTnLst>
-                                </p:cTn>
-                              </p:par>
-                              <p:par>
-                                <p:cTn id="90" presetID="22" presetClass="entr" presetSubtype="2" fill="hold" nodeType="withEffect">
-                                  <p:stCondLst>
-                                    <p:cond delay="0"/>
-                                  </p:stCondLst>
-                                  <p:childTnLst>
-                                    <p:set>
-                                      <p:cBhvr>
-                                        <p:cTn id="91" dur="1" fill="hold">
-                                          <p:stCondLst>
-                                            <p:cond delay="0"/>
-                                          </p:stCondLst>
-                                        </p:cTn>
-                                        <p:tgtEl>
-                                          <p:spTgt spid="2066"/>
-                                        </p:tgtEl>
-                                        <p:attrNameLst>
-                                          <p:attrName>style.visibility</p:attrName>
-                                        </p:attrNameLst>
-                                      </p:cBhvr>
-                                      <p:to>
-                                        <p:strVal val="visible"/>
-                                      </p:to>
-                                    </p:set>
-                                    <p:animEffect transition="in" filter="wipe(right)">
-                                      <p:cBhvr>
-                                        <p:cTn id="92" dur="500"/>
-                                        <p:tgtEl>
-                                          <p:spTgt spid="2066"/>
-                                        </p:tgtEl>
-                                      </p:cBhvr>
-                                    </p:animEffect>
-                                  </p:childTnLst>
-                                </p:cTn>
-                              </p:par>
-                              <p:par>
-                                <p:cTn id="93" presetID="22" presetClass="entr" presetSubtype="2" fill="hold" nodeType="withEffect">
-                                  <p:stCondLst>
-                                    <p:cond delay="0"/>
-                                  </p:stCondLst>
-                                  <p:childTnLst>
-                                    <p:set>
-                                      <p:cBhvr>
-                                        <p:cTn id="94" dur="1" fill="hold">
-                                          <p:stCondLst>
-                                            <p:cond delay="0"/>
-                                          </p:stCondLst>
-                                        </p:cTn>
-                                        <p:tgtEl>
-                                          <p:spTgt spid="2069"/>
-                                        </p:tgtEl>
-                                        <p:attrNameLst>
-                                          <p:attrName>style.visibility</p:attrName>
-                                        </p:attrNameLst>
-                                      </p:cBhvr>
-                                      <p:to>
-                                        <p:strVal val="visible"/>
-                                      </p:to>
-                                    </p:set>
-                                    <p:animEffect transition="in" filter="wipe(right)">
-                                      <p:cBhvr>
-                                        <p:cTn id="95" dur="500"/>
-                                        <p:tgtEl>
-                                          <p:spTgt spid="2069"/>
-                                        </p:tgtEl>
-                                      </p:cBhvr>
-                                    </p:animEffect>
-                                  </p:childTnLst>
-                                </p:cTn>
-                              </p:par>
-                              <p:par>
-                                <p:cTn id="96" presetID="22" presetClass="entr" presetSubtype="2" fill="hold" nodeType="withEffect">
-                                  <p:stCondLst>
-                                    <p:cond delay="0"/>
-                                  </p:stCondLst>
-                                  <p:childTnLst>
-                                    <p:set>
-                                      <p:cBhvr>
-                                        <p:cTn id="97" dur="1" fill="hold">
-                                          <p:stCondLst>
-                                            <p:cond delay="0"/>
-                                          </p:stCondLst>
-                                        </p:cTn>
-                                        <p:tgtEl>
-                                          <p:spTgt spid="2071"/>
-                                        </p:tgtEl>
-                                        <p:attrNameLst>
-                                          <p:attrName>style.visibility</p:attrName>
-                                        </p:attrNameLst>
-                                      </p:cBhvr>
-                                      <p:to>
-                                        <p:strVal val="visible"/>
-                                      </p:to>
-                                    </p:set>
-                                    <p:animEffect transition="in" filter="wipe(right)">
-                                      <p:cBhvr>
-                                        <p:cTn id="98" dur="500"/>
-                                        <p:tgtEl>
-                                          <p:spTgt spid="2071"/>
-                                        </p:tgtEl>
-                                      </p:cBhvr>
-                                    </p:animEffect>
-                                  </p:childTnLst>
-                                </p:cTn>
-                              </p:par>
-                            </p:childTnLst>
-                          </p:cTn>
-                        </p:par>
-                      </p:childTnLst>
-                    </p:cTn>
-                  </p:par>
-                </p:childTnLst>
-              </p:cTn>
-              <p:prevCondLst>
-                <p:cond evt="onPrev" delay="0">
-                  <p:tgtEl>
-                    <p:sldTgt/>
-                  </p:tgtEl>
-                </p:cond>
-              </p:prevCondLst>
-              <p:nextCondLst>
-                <p:cond evt="onNext" delay="0">
-                  <p:tgtEl>
-                    <p:sldTgt/>
-                  </p:tgtEl>
-                </p:cond>
-              </p:nextCondLst>
-            </p:seq>
-          </p:childTnLst>
-        </p:cTn>
-      </p:par>
-    </p:tnLst>
-    <p:bldLst>
-      <p:bldP spid="2072" grpId="0"/>
-    </p:bldLst>
   </p:timing>
 </p:sld>
 </file>
@@ -31118,4 +31813,319 @@
     </a:ext>
   </a:extLst>
 </a:theme>
+</file>
+
+<file path=ppt/theme/theme3.xml><?xml version="1.0" encoding="utf-8"?>
+<a:theme xmlns:a="http://schemas.openxmlformats.org/drawingml/2006/main" name="Θέμα του Office">
+  <a:themeElements>
+    <a:clrScheme name="Office">
+      <a:dk1>
+        <a:sysClr val="windowText" lastClr="000000"/>
+      </a:dk1>
+      <a:lt1>
+        <a:sysClr val="window" lastClr="FFFFFF"/>
+      </a:lt1>
+      <a:dk2>
+        <a:srgbClr val="0E2841"/>
+      </a:dk2>
+      <a:lt2>
+        <a:srgbClr val="E8E8E8"/>
+      </a:lt2>
+      <a:accent1>
+        <a:srgbClr val="156082"/>
+      </a:accent1>
+      <a:accent2>
+        <a:srgbClr val="E97132"/>
+      </a:accent2>
+      <a:accent3>
+        <a:srgbClr val="196B24"/>
+      </a:accent3>
+      <a:accent4>
+        <a:srgbClr val="0F9ED5"/>
+      </a:accent4>
+      <a:accent5>
+        <a:srgbClr val="A02B93"/>
+      </a:accent5>
+      <a:accent6>
+        <a:srgbClr val="4EA72E"/>
+      </a:accent6>
+      <a:hlink>
+        <a:srgbClr val="467886"/>
+      </a:hlink>
+      <a:folHlink>
+        <a:srgbClr val="96607D"/>
+      </a:folHlink>
+    </a:clrScheme>
+    <a:fontScheme name="Office">
+      <a:majorFont>
+        <a:latin typeface="Aptos Display" panose="02110004020202020204"/>
+        <a:ea typeface=""/>
+        <a:cs typeface=""/>
+        <a:font script="Jpan" typeface="游ゴシック Light"/>
+        <a:font script="Hang" typeface="맑은 고딕"/>
+        <a:font script="Hans" typeface="等线 Light"/>
+        <a:font script="Hant" typeface="新細明體"/>
+        <a:font script="Arab" typeface="Times New Roman"/>
+        <a:font script="Hebr" typeface="Times New Roman"/>
+        <a:font script="Thai" typeface="Angsana New"/>
+        <a:font script="Ethi" typeface="Nyala"/>
+        <a:font script="Beng" typeface="Vrinda"/>
+        <a:font script="Gujr" typeface="Shruti"/>
+        <a:font script="Khmr" typeface="MoolBoran"/>
+        <a:font script="Knda" typeface="Tunga"/>
+        <a:font script="Guru" typeface="Raavi"/>
+        <a:font script="Cans" typeface="Euphemia"/>
+        <a:font script="Cher" typeface="Plantagenet Cherokee"/>
+        <a:font script="Yiii" typeface="Microsoft Yi Baiti"/>
+        <a:font script="Tibt" typeface="Microsoft Himalaya"/>
+        <a:font script="Thaa" typeface="MV Boli"/>
+        <a:font script="Deva" typeface="Mangal"/>
+        <a:font script="Telu" typeface="Gautami"/>
+        <a:font script="Taml" typeface="Latha"/>
+        <a:font script="Syrc" typeface="Estrangelo Edessa"/>
+        <a:font script="Orya" typeface="Kalinga"/>
+        <a:font script="Mlym" typeface="Kartika"/>
+        <a:font script="Laoo" typeface="DokChampa"/>
+        <a:font script="Sinh" typeface="Iskoola Pota"/>
+        <a:font script="Mong" typeface="Mongolian Baiti"/>
+        <a:font script="Viet" typeface="Times New Roman"/>
+        <a:font script="Uigh" typeface="Microsoft Uighur"/>
+        <a:font script="Geor" typeface="Sylfaen"/>
+        <a:font script="Armn" typeface="Arial"/>
+        <a:font script="Bugi" typeface="Leelawadee UI"/>
+        <a:font script="Bopo" typeface="Microsoft JhengHei"/>
+        <a:font script="Java" typeface="Javanese Text"/>
+        <a:font script="Lisu" typeface="Segoe UI"/>
+        <a:font script="Mymr" typeface="Myanmar Text"/>
+        <a:font script="Nkoo" typeface="Ebrima"/>
+        <a:font script="Olck" typeface="Nirmala UI"/>
+        <a:font script="Osma" typeface="Ebrima"/>
+        <a:font script="Phag" typeface="Phagspa"/>
+        <a:font script="Syrn" typeface="Estrangelo Edessa"/>
+        <a:font script="Syrj" typeface="Estrangelo Edessa"/>
+        <a:font script="Syre" typeface="Estrangelo Edessa"/>
+        <a:font script="Sora" typeface="Nirmala UI"/>
+        <a:font script="Tale" typeface="Microsoft Tai Le"/>
+        <a:font script="Talu" typeface="Microsoft New Tai Lue"/>
+        <a:font script="Tfng" typeface="Ebrima"/>
+      </a:majorFont>
+      <a:minorFont>
+        <a:latin typeface="Aptos" panose="02110004020202020204"/>
+        <a:ea typeface=""/>
+        <a:cs typeface=""/>
+        <a:font script="Jpan" typeface="游ゴシック"/>
+        <a:font script="Hang" typeface="맑은 고딕"/>
+        <a:font script="Hans" typeface="等线"/>
+        <a:font script="Hant" typeface="新細明體"/>
+        <a:font script="Arab" typeface="Arial"/>
+        <a:font script="Hebr" typeface="Arial"/>
+        <a:font script="Thai" typeface="Cordia New"/>
+        <a:font script="Ethi" typeface="Nyala"/>
+        <a:font script="Beng" typeface="Vrinda"/>
+        <a:font script="Gujr" typeface="Shruti"/>
+        <a:font script="Khmr" typeface="DaunPenh"/>
+        <a:font script="Knda" typeface="Tunga"/>
+        <a:font script="Guru" typeface="Raavi"/>
+        <a:font script="Cans" typeface="Euphemia"/>
+        <a:font script="Cher" typeface="Plantagenet Cherokee"/>
+        <a:font script="Yiii" typeface="Microsoft Yi Baiti"/>
+        <a:font script="Tibt" typeface="Microsoft Himalaya"/>
+        <a:font script="Thaa" typeface="MV Boli"/>
+        <a:font script="Deva" typeface="Mangal"/>
+        <a:font script="Telu" typeface="Gautami"/>
+        <a:font script="Taml" typeface="Latha"/>
+        <a:font script="Syrc" typeface="Estrangelo Edessa"/>
+        <a:font script="Orya" typeface="Kalinga"/>
+        <a:font script="Mlym" typeface="Kartika"/>
+        <a:font script="Laoo" typeface="DokChampa"/>
+        <a:font script="Sinh" typeface="Iskoola Pota"/>
+        <a:font script="Mong" typeface="Mongolian Baiti"/>
+        <a:font script="Viet" typeface="Arial"/>
+        <a:font script="Uigh" typeface="Microsoft Uighur"/>
+        <a:font script="Geor" typeface="Sylfaen"/>
+        <a:font script="Armn" typeface="Arial"/>
+        <a:font script="Bugi" typeface="Leelawadee UI"/>
+        <a:font script="Bopo" typeface="Microsoft JhengHei"/>
+        <a:font script="Java" typeface="Javanese Text"/>
+        <a:font script="Lisu" typeface="Segoe UI"/>
+        <a:font script="Mymr" typeface="Myanmar Text"/>
+        <a:font script="Nkoo" typeface="Ebrima"/>
+        <a:font script="Olck" typeface="Nirmala UI"/>
+        <a:font script="Osma" typeface="Ebrima"/>
+        <a:font script="Phag" typeface="Phagspa"/>
+        <a:font script="Syrn" typeface="Estrangelo Edessa"/>
+        <a:font script="Syrj" typeface="Estrangelo Edessa"/>
+        <a:font script="Syre" typeface="Estrangelo Edessa"/>
+        <a:font script="Sora" typeface="Nirmala UI"/>
+        <a:font script="Tale" typeface="Microsoft Tai Le"/>
+        <a:font script="Talu" typeface="Microsoft New Tai Lue"/>
+        <a:font script="Tfng" typeface="Ebrima"/>
+      </a:minorFont>
+    </a:fontScheme>
+    <a:fmtScheme name="Office">
+      <a:fillStyleLst>
+        <a:solidFill>
+          <a:schemeClr val="phClr"/>
+        </a:solidFill>
+        <a:gradFill rotWithShape="1">
+          <a:gsLst>
+            <a:gs pos="0">
+              <a:schemeClr val="phClr">
+                <a:lumMod val="110000"/>
+                <a:satMod val="105000"/>
+                <a:tint val="67000"/>
+              </a:schemeClr>
+            </a:gs>
+            <a:gs pos="50000">
+              <a:schemeClr val="phClr">
+                <a:lumMod val="105000"/>
+                <a:satMod val="103000"/>
+                <a:tint val="73000"/>
+              </a:schemeClr>
+            </a:gs>
+            <a:gs pos="100000">
+              <a:schemeClr val="phClr">
+                <a:lumMod val="105000"/>
+                <a:satMod val="109000"/>
+                <a:tint val="81000"/>
+              </a:schemeClr>
+            </a:gs>
+          </a:gsLst>
+          <a:lin ang="5400000" scaled="0"/>
+        </a:gradFill>
+        <a:gradFill rotWithShape="1">
+          <a:gsLst>
+            <a:gs pos="0">
+              <a:schemeClr val="phClr">
+                <a:satMod val="103000"/>
+                <a:lumMod val="102000"/>
+                <a:tint val="94000"/>
+              </a:schemeClr>
+            </a:gs>
+            <a:gs pos="50000">
+              <a:schemeClr val="phClr">
+                <a:satMod val="110000"/>
+                <a:lumMod val="100000"/>
+                <a:shade val="100000"/>
+              </a:schemeClr>
+            </a:gs>
+            <a:gs pos="100000">
+              <a:schemeClr val="phClr">
+                <a:lumMod val="99000"/>
+                <a:satMod val="120000"/>
+                <a:shade val="78000"/>
+              </a:schemeClr>
+            </a:gs>
+          </a:gsLst>
+          <a:lin ang="5400000" scaled="0"/>
+        </a:gradFill>
+      </a:fillStyleLst>
+      <a:lnStyleLst>
+        <a:ln w="12700" cap="flat" cmpd="sng" algn="ctr">
+          <a:solidFill>
+            <a:schemeClr val="phClr"/>
+          </a:solidFill>
+          <a:prstDash val="solid"/>
+          <a:miter lim="800000"/>
+        </a:ln>
+        <a:ln w="19050" cap="flat" cmpd="sng" algn="ctr">
+          <a:solidFill>
+            <a:schemeClr val="phClr"/>
+          </a:solidFill>
+          <a:prstDash val="solid"/>
+          <a:miter lim="800000"/>
+        </a:ln>
+        <a:ln w="25400" cap="flat" cmpd="sng" algn="ctr">
+          <a:solidFill>
+            <a:schemeClr val="phClr"/>
+          </a:solidFill>
+          <a:prstDash val="solid"/>
+          <a:miter lim="800000"/>
+        </a:ln>
+      </a:lnStyleLst>
+      <a:effectStyleLst>
+        <a:effectStyle>
+          <a:effectLst/>
+        </a:effectStyle>
+        <a:effectStyle>
+          <a:effectLst/>
+        </a:effectStyle>
+        <a:effectStyle>
+          <a:effectLst>
+            <a:outerShdw blurRad="57150" dist="19050" dir="5400000" algn="ctr" rotWithShape="0">
+              <a:srgbClr val="000000">
+                <a:alpha val="63000"/>
+              </a:srgbClr>
+            </a:outerShdw>
+          </a:effectLst>
+        </a:effectStyle>
+      </a:effectStyleLst>
+      <a:bgFillStyleLst>
+        <a:solidFill>
+          <a:schemeClr val="phClr"/>
+        </a:solidFill>
+        <a:solidFill>
+          <a:schemeClr val="phClr">
+            <a:tint val="95000"/>
+            <a:satMod val="170000"/>
+          </a:schemeClr>
+        </a:solidFill>
+        <a:gradFill rotWithShape="1">
+          <a:gsLst>
+            <a:gs pos="0">
+              <a:schemeClr val="phClr">
+                <a:tint val="93000"/>
+                <a:satMod val="150000"/>
+                <a:shade val="98000"/>
+                <a:lumMod val="102000"/>
+              </a:schemeClr>
+            </a:gs>
+            <a:gs pos="50000">
+              <a:schemeClr val="phClr">
+                <a:tint val="98000"/>
+                <a:satMod val="130000"/>
+                <a:shade val="90000"/>
+                <a:lumMod val="103000"/>
+              </a:schemeClr>
+            </a:gs>
+            <a:gs pos="100000">
+              <a:schemeClr val="phClr">
+                <a:shade val="63000"/>
+                <a:satMod val="120000"/>
+              </a:schemeClr>
+            </a:gs>
+          </a:gsLst>
+          <a:lin ang="5400000" scaled="0"/>
+        </a:gradFill>
+      </a:bgFillStyleLst>
+    </a:fmtScheme>
+  </a:themeElements>
+  <a:objectDefaults>
+    <a:lnDef>
+      <a:spPr/>
+      <a:bodyPr/>
+      <a:lstStyle/>
+      <a:style>
+        <a:lnRef idx="2">
+          <a:schemeClr val="accent1"/>
+        </a:lnRef>
+        <a:fillRef idx="0">
+          <a:schemeClr val="accent1"/>
+        </a:fillRef>
+        <a:effectRef idx="1">
+          <a:schemeClr val="accent1"/>
+        </a:effectRef>
+        <a:fontRef idx="minor">
+          <a:schemeClr val="tx1"/>
+        </a:fontRef>
+      </a:style>
+    </a:lnDef>
+  </a:objectDefaults>
+  <a:extraClrSchemeLst/>
+  <a:extLst>
+    <a:ext uri="{05A4C25C-085E-4340-85A3-A5531E510DB2}">
+      <thm15:themeFamily xmlns:thm15="http://schemas.microsoft.com/office/thememl/2012/main" name="Office Theme" id="{2E142A2C-CD16-42D6-873A-C26D2A0506FA}" vid="{1BDDFF52-6CD6-40A5-AB3C-68EB2F1E4D0A}"/>
+    </a:ext>
+  </a:extLst>
+</a:theme>
 </file>
--- a/Thesis/AStar, DStarLite.pptx
+++ b/Thesis/AStar, DStarLite.pptx
@@ -230,7 +230,7 @@
           <a:p>
             <a:fld id="{C551B517-3CE4-4CE7-9043-1AE91C128FB2}" type="datetimeFigureOut">
               <a:rPr lang="el-GR" smtClean="0"/>
-              <a:t>16/4/2026</a:t>
+              <a:t>17/4/2026</a:t>
             </a:fld>
             <a:endParaRPr lang="el-GR"/>
           </a:p>
